--- a/lectures/02-SolidState.pptx
+++ b/lectures/02-SolidState.pptx
@@ -5,7 +5,7 @@
     <p:sldMasterId id="2147483648" r:id="rId1"/>
   </p:sldMasterIdLst>
   <p:notesMasterIdLst>
-    <p:notesMasterId r:id="rId31"/>
+    <p:notesMasterId r:id="rId32"/>
   </p:notesMasterIdLst>
   <p:sldIdLst>
     <p:sldId id="256" r:id="rId2"/>
@@ -13,7 +13,7 @@
     <p:sldId id="335" r:id="rId4"/>
     <p:sldId id="383" r:id="rId5"/>
     <p:sldId id="336" r:id="rId6"/>
-    <p:sldId id="337" r:id="rId7"/>
+    <p:sldId id="397" r:id="rId7"/>
     <p:sldId id="365" r:id="rId8"/>
     <p:sldId id="338" r:id="rId9"/>
     <p:sldId id="339" r:id="rId10"/>
@@ -35,8 +35,9 @@
     <p:sldId id="396" r:id="rId26"/>
     <p:sldId id="356" r:id="rId27"/>
     <p:sldId id="349" r:id="rId28"/>
-    <p:sldId id="352" r:id="rId29"/>
-    <p:sldId id="285" r:id="rId30"/>
+    <p:sldId id="398" r:id="rId29"/>
+    <p:sldId id="352" r:id="rId30"/>
+    <p:sldId id="285" r:id="rId31"/>
   </p:sldIdLst>
   <p:sldSz cx="12192000" cy="6858000"/>
   <p:notesSz cx="6858000" cy="9144000"/>
@@ -228,7 +229,7 @@
           <a:p>
             <a:fld id="{1C74C8C0-0C1E-D447-A6DA-5BF9E732D1EF}" type="datetimeFigureOut">
               <a:rPr lang="en-US" smtClean="0"/>
-              <a:t>1/7/26</a:t>
+              <a:t>3/21/26</a:t>
             </a:fld>
             <a:endParaRPr lang="en-US"/>
           </a:p>
@@ -1125,15 +1126,7 @@
           <a:p>
             <a:r>
               <a:rPr lang="en-US" dirty="0"/>
-              <a:t>A CMOS Not gate - it has a PMOS transistor at the top connected between VDD and the common OUT line.  It has an NMOS transistor at the bottom </a:t>
-            </a:r>
-            <a:r>
-              <a:rPr lang="en-US" dirty="0" err="1"/>
-              <a:t>conneced</a:t>
-            </a:r>
-            <a:r>
-              <a:rPr lang="en-US" dirty="0"/>
-              <a:t> between the common OUT line and the ground.  The Input (A) is connected to the gate input of both transistors.</a:t>
+              <a:t>A CMOS Not gate - it has a PMOS transistor at the top connected between VDD and the common OUT line.  It has an NMOS transistor at the bottom connected between the common OUT line and the ground.  The Input (A) is connected to the gate input of both transistors.</a:t>
             </a:r>
           </a:p>
         </p:txBody>
@@ -1750,7 +1743,28 @@
           <a:bodyPr/>
           <a:lstStyle/>
           <a:p>
+            <a:r>
+              <a:rPr lang="en-US" dirty="0"/>
+              <a:t>A telephone pole with 30 glass insulators for 30 wires.  Photo by Dr. Chuck. </a:t>
+            </a:r>
+          </a:p>
+          <a:p>
             <a:endParaRPr lang="en-US" dirty="0"/>
+          </a:p>
+          <a:p>
+            <a:r>
+              <a:rPr lang="en-US" dirty="0"/>
+              <a:t>A close up of a vacuum tube.</a:t>
+            </a:r>
+          </a:p>
+          <a:p>
+            <a:endParaRPr lang="en-US" dirty="0"/>
+          </a:p>
+          <a:p>
+            <a:r>
+              <a:rPr lang="en-US" dirty="0"/>
+              <a:t>This is a simple diagram of a vacuum tube with an Anode, Cathode, and Grid with some simple wave forms showing a small input signal and larger amplified signal.</a:t>
+            </a:r>
           </a:p>
         </p:txBody>
       </p:sp>
@@ -1834,7 +1848,24 @@
           <a:bodyPr/>
           <a:lstStyle/>
           <a:p>
-            <a:endParaRPr lang="en-US" dirty="0"/>
+            <a:r>
+              <a:rPr lang="en-US" dirty="0"/>
+              <a:t>This is an image of the specification sheet of the Raytheon 6CG8A Vacuum Tube from https://</a:t>
+            </a:r>
+            <a:r>
+              <a:rPr lang="en-US" dirty="0" err="1"/>
+              <a:t>frank.pocnet.net</a:t>
+            </a:r>
+            <a:r>
+              <a:rPr lang="en-US" dirty="0"/>
+              <a:t>/sheets/127/6/6CG8A.pdf</a:t>
+            </a:r>
+          </a:p>
+          <a:p>
+            <a:r>
+              <a:rPr lang="en-US" dirty="0"/>
+              <a:t>It shows the first [page of the specification with the dimensions of the tube (2.188 inches tall) and the number of pins (8).  The content of the text is not particularly relevant - it is more fun as a historical document.</a:t>
+            </a:r>
           </a:p>
         </p:txBody>
       </p:sp>
@@ -2005,7 +2036,19 @@
           <a:bodyPr/>
           <a:lstStyle/>
           <a:p>
+            <a:r>
+              <a:rPr lang="en-US" dirty="0"/>
+              <a:t>The first transistor ever made, built by John Bardeen, William Shockley and Walter H. Brattain of Bell Labs in 1947. Original exhibited in Bell Laboratories.</a:t>
+            </a:r>
+          </a:p>
+          <a:p>
             <a:endParaRPr lang="en-US" dirty="0"/>
+          </a:p>
+          <a:p>
+            <a:r>
+              <a:rPr lang="en-US" dirty="0"/>
+              <a:t>A few early manufactured transistors.  Each transistor has three inputs.</a:t>
+            </a:r>
           </a:p>
         </p:txBody>
       </p:sp>
@@ -2026,7 +2069,7 @@
           <a:p>
             <a:fld id="{9F4414A0-4E43-B244-BF62-FDB8F38845D2}" type="slidenum">
               <a:rPr lang="en-US" smtClean="0"/>
-              <a:t>6</a:t>
+              <a:t>8</a:t>
             </a:fld>
             <a:endParaRPr lang="en-US"/>
           </a:p>
@@ -2035,7 +2078,7 @@
     </p:spTree>
     <p:extLst>
       <p:ext uri="{BB962C8B-B14F-4D97-AF65-F5344CB8AC3E}">
-        <p14:creationId xmlns:p14="http://schemas.microsoft.com/office/powerpoint/2010/main" val="127928591"/>
+        <p14:creationId xmlns:p14="http://schemas.microsoft.com/office/powerpoint/2010/main" val="3462307512"/>
       </p:ext>
     </p:extLst>
   </p:cSld>
@@ -2499,7 +2542,7 @@
           <a:p>
             <a:fld id="{D5D8E255-8371-B349-B2F5-F8C6C9FF431B}" type="datetimeFigureOut">
               <a:rPr lang="en-US" smtClean="0"/>
-              <a:t>1/7/26</a:t>
+              <a:t>3/21/26</a:t>
             </a:fld>
             <a:endParaRPr lang="en-US"/>
           </a:p>
@@ -2697,7 +2740,7 @@
           <a:p>
             <a:fld id="{D5D8E255-8371-B349-B2F5-F8C6C9FF431B}" type="datetimeFigureOut">
               <a:rPr lang="en-US" smtClean="0"/>
-              <a:t>1/7/26</a:t>
+              <a:t>3/21/26</a:t>
             </a:fld>
             <a:endParaRPr lang="en-US"/>
           </a:p>
@@ -2905,7 +2948,7 @@
           <a:p>
             <a:fld id="{D5D8E255-8371-B349-B2F5-F8C6C9FF431B}" type="datetimeFigureOut">
               <a:rPr lang="en-US" smtClean="0"/>
-              <a:t>1/7/26</a:t>
+              <a:t>3/21/26</a:t>
             </a:fld>
             <a:endParaRPr lang="en-US"/>
           </a:p>
@@ -3103,7 +3146,7 @@
           <a:p>
             <a:fld id="{D5D8E255-8371-B349-B2F5-F8C6C9FF431B}" type="datetimeFigureOut">
               <a:rPr lang="en-US" smtClean="0"/>
-              <a:t>1/7/26</a:t>
+              <a:t>3/21/26</a:t>
             </a:fld>
             <a:endParaRPr lang="en-US"/>
           </a:p>
@@ -3378,7 +3421,7 @@
           <a:p>
             <a:fld id="{D5D8E255-8371-B349-B2F5-F8C6C9FF431B}" type="datetimeFigureOut">
               <a:rPr lang="en-US" smtClean="0"/>
-              <a:t>1/7/26</a:t>
+              <a:t>3/21/26</a:t>
             </a:fld>
             <a:endParaRPr lang="en-US"/>
           </a:p>
@@ -3643,7 +3686,7 @@
           <a:p>
             <a:fld id="{D5D8E255-8371-B349-B2F5-F8C6C9FF431B}" type="datetimeFigureOut">
               <a:rPr lang="en-US" smtClean="0"/>
-              <a:t>1/7/26</a:t>
+              <a:t>3/21/26</a:t>
             </a:fld>
             <a:endParaRPr lang="en-US"/>
           </a:p>
@@ -4055,7 +4098,7 @@
           <a:p>
             <a:fld id="{D5D8E255-8371-B349-B2F5-F8C6C9FF431B}" type="datetimeFigureOut">
               <a:rPr lang="en-US" smtClean="0"/>
-              <a:t>1/7/26</a:t>
+              <a:t>3/21/26</a:t>
             </a:fld>
             <a:endParaRPr lang="en-US"/>
           </a:p>
@@ -4196,7 +4239,7 @@
           <a:p>
             <a:fld id="{D5D8E255-8371-B349-B2F5-F8C6C9FF431B}" type="datetimeFigureOut">
               <a:rPr lang="en-US" smtClean="0"/>
-              <a:t>1/7/26</a:t>
+              <a:t>3/21/26</a:t>
             </a:fld>
             <a:endParaRPr lang="en-US"/>
           </a:p>
@@ -4309,7 +4352,7 @@
           <a:p>
             <a:fld id="{D5D8E255-8371-B349-B2F5-F8C6C9FF431B}" type="datetimeFigureOut">
               <a:rPr lang="en-US" smtClean="0"/>
-              <a:t>1/7/26</a:t>
+              <a:t>3/21/26</a:t>
             </a:fld>
             <a:endParaRPr lang="en-US"/>
           </a:p>
@@ -4620,7 +4663,7 @@
           <a:p>
             <a:fld id="{D5D8E255-8371-B349-B2F5-F8C6C9FF431B}" type="datetimeFigureOut">
               <a:rPr lang="en-US" smtClean="0"/>
-              <a:t>1/7/26</a:t>
+              <a:t>3/21/26</a:t>
             </a:fld>
             <a:endParaRPr lang="en-US"/>
           </a:p>
@@ -4908,7 +4951,7 @@
           <a:p>
             <a:fld id="{D5D8E255-8371-B349-B2F5-F8C6C9FF431B}" type="datetimeFigureOut">
               <a:rPr lang="en-US" smtClean="0"/>
-              <a:t>1/7/26</a:t>
+              <a:t>3/21/26</a:t>
             </a:fld>
             <a:endParaRPr lang="en-US"/>
           </a:p>
@@ -5149,7 +5192,7 @@
           <a:p>
             <a:fld id="{D5D8E255-8371-B349-B2F5-F8C6C9FF431B}" type="datetimeFigureOut">
               <a:rPr lang="en-US" smtClean="0"/>
-              <a:t>1/7/26</a:t>
+              <a:t>3/21/26</a:t>
             </a:fld>
             <a:endParaRPr lang="en-US"/>
           </a:p>
@@ -6219,6 +6262,42 @@
       </p:sp>
       <p:pic>
         <p:nvPicPr>
+          <p:cNvPr id="9" name="Picture 8" descr="Ebay photo of a Sony TR-826 vintage AM radio.">
+            <a:extLst>
+              <a:ext uri="{FF2B5EF4-FFF2-40B4-BE49-F238E27FC236}">
+                <a16:creationId xmlns:a16="http://schemas.microsoft.com/office/drawing/2014/main" id="{E3D135A3-0DD2-EEBE-F441-2DBBE7C34393}"/>
+              </a:ext>
+            </a:extLst>
+          </p:cNvPr>
+          <p:cNvPicPr>
+            <a:picLocks noChangeAspect="1"/>
+          </p:cNvPicPr>
+          <p:nvPr/>
+        </p:nvPicPr>
+        <p:blipFill>
+          <a:blip r:embed="rId3" cstate="print">
+            <a:extLst>
+              <a:ext uri="{28A0092B-C50C-407E-A947-70E740481C1C}">
+                <a14:useLocalDpi xmlns:a14="http://schemas.microsoft.com/office/drawing/2010/main"/>
+              </a:ext>
+            </a:extLst>
+          </a:blip>
+          <a:stretch>
+            <a:fillRect/>
+          </a:stretch>
+        </p:blipFill>
+        <p:spPr>
+          <a:xfrm>
+            <a:off x="6311153" y="1410982"/>
+            <a:ext cx="2310606" cy="2310606"/>
+          </a:xfrm>
+          <a:prstGeom prst="rect">
+            <a:avLst/>
+          </a:prstGeom>
+        </p:spPr>
+      </p:pic>
+      <p:pic>
+        <p:nvPicPr>
           <p:cNvPr id="5" name="Picture 4" descr="Pocket transistor radio, late 1960s to 1970s, with 7 germanium transistors, that received long wave and medium wave (AM broadcast) bands. View with back open, showing parts. Powered by 2 button cells supplying 3V (removed).">
             <a:extLst>
               <a:ext uri="{FF2B5EF4-FFF2-40B4-BE49-F238E27FC236}">
@@ -6232,7 +6311,7 @@
           <p:nvPr/>
         </p:nvPicPr>
         <p:blipFill>
-          <a:blip r:embed="rId3" cstate="print">
+          <a:blip r:embed="rId4" cstate="print">
             <a:extLst>
               <a:ext uri="{28A0092B-C50C-407E-A947-70E740481C1C}">
                 <a14:useLocalDpi xmlns:a14="http://schemas.microsoft.com/office/drawing/2010/main"/>
@@ -6302,42 +6381,6 @@
           </a:p>
         </p:txBody>
       </p:sp>
-      <p:pic>
-        <p:nvPicPr>
-          <p:cNvPr id="9" name="Picture 8" descr="Ebay photo of a Sony TR-826 vintage AM radio.">
-            <a:extLst>
-              <a:ext uri="{FF2B5EF4-FFF2-40B4-BE49-F238E27FC236}">
-                <a16:creationId xmlns:a16="http://schemas.microsoft.com/office/drawing/2014/main" id="{E3D135A3-0DD2-EEBE-F441-2DBBE7C34393}"/>
-              </a:ext>
-            </a:extLst>
-          </p:cNvPr>
-          <p:cNvPicPr>
-            <a:picLocks noChangeAspect="1"/>
-          </p:cNvPicPr>
-          <p:nvPr/>
-        </p:nvPicPr>
-        <p:blipFill>
-          <a:blip r:embed="rId4" cstate="print">
-            <a:extLst>
-              <a:ext uri="{28A0092B-C50C-407E-A947-70E740481C1C}">
-                <a14:useLocalDpi xmlns:a14="http://schemas.microsoft.com/office/drawing/2010/main"/>
-              </a:ext>
-            </a:extLst>
-          </a:blip>
-          <a:stretch>
-            <a:fillRect/>
-          </a:stretch>
-        </p:blipFill>
-        <p:spPr>
-          <a:xfrm>
-            <a:off x="6311153" y="1410982"/>
-            <a:ext cx="2310606" cy="2310606"/>
-          </a:xfrm>
-          <a:prstGeom prst="rect">
-            <a:avLst/>
-          </a:prstGeom>
-        </p:spPr>
-      </p:pic>
     </p:spTree>
     <p:extLst>
       <p:ext uri="{BB962C8B-B14F-4D97-AF65-F5344CB8AC3E}">
@@ -8606,10 +8649,10 @@
       </p:sp>
       <p:grpSp>
         <p:nvGrpSpPr>
-          <p:cNvPr id="27" name="Group 26" descr="A schematic for an NMOS style transistor.">
+          <p:cNvPr id="25" name="Group 24">
             <a:extLst>
               <a:ext uri="{FF2B5EF4-FFF2-40B4-BE49-F238E27FC236}">
-                <a16:creationId xmlns:a16="http://schemas.microsoft.com/office/drawing/2014/main" id="{EC62109B-808E-8EEF-31C3-70F410C10C23}"/>
+                <a16:creationId xmlns:a16="http://schemas.microsoft.com/office/drawing/2014/main" id="{A90CFB1C-DDCC-E0BB-AC5E-B72C9C603E9F}"/>
               </a:ext>
             </a:extLst>
           </p:cNvPr>
@@ -8618,18 +8661,94 @@
         </p:nvGrpSpPr>
         <p:grpSpPr>
           <a:xfrm>
-            <a:off x="10681821" y="4329844"/>
-            <a:ext cx="893028" cy="996054"/>
-            <a:chOff x="9033468" y="2344020"/>
-            <a:chExt cx="2502035" cy="2790688"/>
+            <a:off x="6096000" y="1729459"/>
+            <a:ext cx="4329090" cy="3724763"/>
+            <a:chOff x="6096000" y="1729459"/>
+            <a:chExt cx="4329090" cy="3724763"/>
           </a:xfrm>
         </p:grpSpPr>
+        <p:sp>
+          <p:nvSpPr>
+            <p:cNvPr id="17" name="TextBox 16">
+              <a:extLst>
+                <a:ext uri="{FF2B5EF4-FFF2-40B4-BE49-F238E27FC236}">
+                  <a16:creationId xmlns:a16="http://schemas.microsoft.com/office/drawing/2014/main" id="{84891ADE-C669-85A7-9D0F-84EBC64C5CCA}"/>
+                </a:ext>
+              </a:extLst>
+            </p:cNvPr>
+            <p:cNvSpPr txBox="1"/>
+            <p:nvPr/>
+          </p:nvSpPr>
+          <p:spPr>
+            <a:xfrm rot="16200000">
+              <a:off x="5474195" y="3335416"/>
+              <a:ext cx="1612942" cy="369332"/>
+            </a:xfrm>
+            <a:prstGeom prst="rect">
+              <a:avLst/>
+            </a:prstGeom>
+            <a:noFill/>
+          </p:spPr>
+          <p:txBody>
+            <a:bodyPr wrap="none" rtlCol="0">
+              <a:spAutoFit/>
+            </a:bodyPr>
+            <a:lstStyle/>
+            <a:p>
+              <a:r>
+                <a:rPr lang="en-US" dirty="0"/>
+                <a:t>Output Voltage</a:t>
+              </a:r>
+            </a:p>
+          </p:txBody>
+        </p:sp>
         <p:cxnSp>
           <p:nvCxnSpPr>
-            <p:cNvPr id="29" name="Straight Connector 28">
+            <p:cNvPr id="5" name="Straight Connector 4">
               <a:extLst>
                 <a:ext uri="{FF2B5EF4-FFF2-40B4-BE49-F238E27FC236}">
-                  <a16:creationId xmlns:a16="http://schemas.microsoft.com/office/drawing/2014/main" id="{9AD92EFC-11A5-D9F7-101C-C0EC6B47FA37}"/>
+                  <a16:creationId xmlns:a16="http://schemas.microsoft.com/office/drawing/2014/main" id="{1F35751B-31DB-0C98-7137-868B5A677D70}"/>
+                </a:ext>
+              </a:extLst>
+            </p:cNvPr>
+            <p:cNvCxnSpPr/>
+            <p:nvPr/>
+          </p:nvCxnSpPr>
+          <p:spPr>
+            <a:xfrm>
+              <a:off x="6766560" y="2075688"/>
+              <a:ext cx="0" cy="2916936"/>
+            </a:xfrm>
+            <a:prstGeom prst="line">
+              <a:avLst/>
+            </a:prstGeom>
+            <a:ln w="38100">
+              <a:solidFill>
+                <a:schemeClr val="tx1"/>
+              </a:solidFill>
+            </a:ln>
+          </p:spPr>
+          <p:style>
+            <a:lnRef idx="1">
+              <a:schemeClr val="accent1"/>
+            </a:lnRef>
+            <a:fillRef idx="0">
+              <a:schemeClr val="accent1"/>
+            </a:fillRef>
+            <a:effectRef idx="0">
+              <a:schemeClr val="accent1"/>
+            </a:effectRef>
+            <a:fontRef idx="minor">
+              <a:schemeClr val="tx1"/>
+            </a:fontRef>
+          </p:style>
+        </p:cxnSp>
+        <p:cxnSp>
+          <p:nvCxnSpPr>
+            <p:cNvPr id="6" name="Straight Connector 5">
+              <a:extLst>
+                <a:ext uri="{FF2B5EF4-FFF2-40B4-BE49-F238E27FC236}">
+                  <a16:creationId xmlns:a16="http://schemas.microsoft.com/office/drawing/2014/main" id="{E4F53A0F-DBCF-9E64-1C7C-EA3721B510B9}"/>
                 </a:ext>
               </a:extLst>
             </p:cNvPr>
@@ -8640,15 +8759,15 @@
           </p:nvCxnSpPr>
           <p:spPr>
             <a:xfrm>
-              <a:off x="10771041" y="2344020"/>
-              <a:ext cx="0" cy="1096223"/>
+              <a:off x="6766560" y="4992624"/>
+              <a:ext cx="3639282" cy="0"/>
             </a:xfrm>
             <a:prstGeom prst="line">
               <a:avLst/>
             </a:prstGeom>
-            <a:ln w="38100" cap="rnd">
+            <a:ln w="38100">
               <a:solidFill>
-                <a:srgbClr val="FF0000"/>
+                <a:schemeClr val="tx1"/>
               </a:solidFill>
             </a:ln>
           </p:spPr>
@@ -8669,10 +8788,45 @@
         </p:cxnSp>
         <p:sp>
           <p:nvSpPr>
-            <p:cNvPr id="30" name="Oval 29">
+            <p:cNvPr id="16" name="TextBox 15">
               <a:extLst>
                 <a:ext uri="{FF2B5EF4-FFF2-40B4-BE49-F238E27FC236}">
-                  <a16:creationId xmlns:a16="http://schemas.microsoft.com/office/drawing/2014/main" id="{56770A77-81BB-9035-AC9C-AF6011A1E7E5}"/>
+                  <a16:creationId xmlns:a16="http://schemas.microsoft.com/office/drawing/2014/main" id="{55FBDBEB-5182-3024-BDC9-C15779C0AE1D}"/>
+                </a:ext>
+              </a:extLst>
+            </p:cNvPr>
+            <p:cNvSpPr txBox="1"/>
+            <p:nvPr/>
+          </p:nvSpPr>
+          <p:spPr>
+            <a:xfrm>
+              <a:off x="8121293" y="5084890"/>
+              <a:ext cx="1441420" cy="369332"/>
+            </a:xfrm>
+            <a:prstGeom prst="rect">
+              <a:avLst/>
+            </a:prstGeom>
+            <a:noFill/>
+          </p:spPr>
+          <p:txBody>
+            <a:bodyPr wrap="none" rtlCol="0">
+              <a:spAutoFit/>
+            </a:bodyPr>
+            <a:lstStyle/>
+            <a:p>
+              <a:r>
+                <a:rPr lang="en-US" dirty="0"/>
+                <a:t>Input Voltage</a:t>
+              </a:r>
+            </a:p>
+          </p:txBody>
+        </p:sp>
+        <p:sp>
+          <p:nvSpPr>
+            <p:cNvPr id="15" name="Right Brace 14">
+              <a:extLst>
+                <a:ext uri="{FF2B5EF4-FFF2-40B4-BE49-F238E27FC236}">
+                  <a16:creationId xmlns:a16="http://schemas.microsoft.com/office/drawing/2014/main" id="{5C3F479B-6198-5209-53A0-C6E2BFB53B24}"/>
                 </a:ext>
               </a:extLst>
             </p:cNvPr>
@@ -8680,15 +8834,232 @@
             <p:nvPr/>
           </p:nvSpPr>
           <p:spPr>
+            <a:xfrm rot="16200000">
+              <a:off x="8011211" y="1945303"/>
+              <a:ext cx="137160" cy="484632"/>
+            </a:xfrm>
+            <a:prstGeom prst="rightBrace">
+              <a:avLst/>
+            </a:prstGeom>
+            <a:ln w="28575">
+              <a:solidFill>
+                <a:srgbClr val="FF0000"/>
+              </a:solidFill>
+            </a:ln>
+          </p:spPr>
+          <p:style>
+            <a:lnRef idx="1">
+              <a:schemeClr val="accent1"/>
+            </a:lnRef>
+            <a:fillRef idx="0">
+              <a:schemeClr val="accent1"/>
+            </a:fillRef>
+            <a:effectRef idx="0">
+              <a:schemeClr val="accent1"/>
+            </a:effectRef>
+            <a:fontRef idx="minor">
+              <a:schemeClr val="tx1"/>
+            </a:fontRef>
+          </p:style>
+          <p:txBody>
+            <a:bodyPr rtlCol="0" anchor="ctr"/>
+            <a:lstStyle/>
+            <a:p>
+              <a:pPr algn="ctr"/>
+              <a:endParaRPr lang="en-US"/>
+            </a:p>
+          </p:txBody>
+        </p:sp>
+        <p:sp>
+          <p:nvSpPr>
+            <p:cNvPr id="20" name="Right Brace 19">
+              <a:extLst>
+                <a:ext uri="{FF2B5EF4-FFF2-40B4-BE49-F238E27FC236}">
+                  <a16:creationId xmlns:a16="http://schemas.microsoft.com/office/drawing/2014/main" id="{9A038CF7-7C39-E67A-4AE5-4C3AD086BEA1}"/>
+                </a:ext>
+              </a:extLst>
+            </p:cNvPr>
+            <p:cNvSpPr/>
+            <p:nvPr/>
+          </p:nvSpPr>
+          <p:spPr>
+            <a:xfrm rot="16200000">
+              <a:off x="9132712" y="1951459"/>
+              <a:ext cx="137160" cy="484632"/>
+            </a:xfrm>
+            <a:prstGeom prst="rightBrace">
+              <a:avLst/>
+            </a:prstGeom>
+            <a:ln w="28575">
+              <a:solidFill>
+                <a:schemeClr val="accent1"/>
+              </a:solidFill>
+            </a:ln>
+          </p:spPr>
+          <p:style>
+            <a:lnRef idx="1">
+              <a:schemeClr val="accent1"/>
+            </a:lnRef>
+            <a:fillRef idx="0">
+              <a:schemeClr val="accent1"/>
+            </a:fillRef>
+            <a:effectRef idx="0">
+              <a:schemeClr val="accent1"/>
+            </a:effectRef>
+            <a:fontRef idx="minor">
+              <a:schemeClr val="tx1"/>
+            </a:fontRef>
+          </p:style>
+          <p:txBody>
+            <a:bodyPr rtlCol="0" anchor="ctr"/>
+            <a:lstStyle/>
+            <a:p>
+              <a:pPr algn="ctr"/>
+              <a:endParaRPr lang="en-US">
+                <a:solidFill>
+                  <a:srgbClr val="0070C0"/>
+                </a:solidFill>
+              </a:endParaRPr>
+            </a:p>
+          </p:txBody>
+        </p:sp>
+        <p:sp>
+          <p:nvSpPr>
+            <p:cNvPr id="22" name="TextBox 21">
+              <a:extLst>
+                <a:ext uri="{FF2B5EF4-FFF2-40B4-BE49-F238E27FC236}">
+                  <a16:creationId xmlns:a16="http://schemas.microsoft.com/office/drawing/2014/main" id="{C1388982-4F01-2DC3-BCEB-2F19CF36656D}"/>
+                </a:ext>
+              </a:extLst>
+            </p:cNvPr>
+            <p:cNvSpPr txBox="1"/>
+            <p:nvPr/>
+          </p:nvSpPr>
+          <p:spPr>
             <a:xfrm>
-              <a:off x="9384607" y="2714725"/>
-              <a:ext cx="2150896" cy="2219913"/>
+              <a:off x="8144206" y="1729459"/>
+              <a:ext cx="1106585" cy="369332"/>
             </a:xfrm>
-            <a:prstGeom prst="ellipse">
+            <a:prstGeom prst="rect">
               <a:avLst/>
             </a:prstGeom>
             <a:noFill/>
-            <a:ln w="38100">
+          </p:spPr>
+          <p:txBody>
+            <a:bodyPr wrap="none" rtlCol="0">
+              <a:spAutoFit/>
+            </a:bodyPr>
+            <a:lstStyle/>
+            <a:p>
+              <a:r>
+                <a:rPr lang="en-US" dirty="0"/>
+                <a:t>Transition</a:t>
+              </a:r>
+            </a:p>
+          </p:txBody>
+        </p:sp>
+        <p:sp>
+          <p:nvSpPr>
+            <p:cNvPr id="23" name="Freeform 22">
+              <a:extLst>
+                <a:ext uri="{FF2B5EF4-FFF2-40B4-BE49-F238E27FC236}">
+                  <a16:creationId xmlns:a16="http://schemas.microsoft.com/office/drawing/2014/main" id="{C7996590-DE54-CDA1-2425-B7FACD79461E}"/>
+                </a:ext>
+              </a:extLst>
+            </p:cNvPr>
+            <p:cNvSpPr/>
+            <p:nvPr/>
+          </p:nvSpPr>
+          <p:spPr>
+            <a:xfrm flipV="1">
+              <a:off x="6876287" y="2395134"/>
+              <a:ext cx="3520411" cy="2472407"/>
+            </a:xfrm>
+            <a:custGeom>
+              <a:avLst/>
+              <a:gdLst>
+                <a:gd name="connsiteX0" fmla="*/ 0 w 3136392"/>
+                <a:gd name="connsiteY0" fmla="*/ 2311176 h 2480509"/>
+                <a:gd name="connsiteX1" fmla="*/ 1463040 w 3136392"/>
+                <a:gd name="connsiteY1" fmla="*/ 2274600 h 2480509"/>
+                <a:gd name="connsiteX2" fmla="*/ 1801368 w 3136392"/>
+                <a:gd name="connsiteY2" fmla="*/ 262920 h 2480509"/>
+                <a:gd name="connsiteX3" fmla="*/ 3136392 w 3136392"/>
+                <a:gd name="connsiteY3" fmla="*/ 6888 h 2480509"/>
+                <a:gd name="connsiteX0" fmla="*/ 0 w 3136392"/>
+                <a:gd name="connsiteY0" fmla="*/ 2311176 h 2377760"/>
+                <a:gd name="connsiteX1" fmla="*/ 1472184 w 3136392"/>
+                <a:gd name="connsiteY1" fmla="*/ 2009424 h 2377760"/>
+                <a:gd name="connsiteX2" fmla="*/ 1801368 w 3136392"/>
+                <a:gd name="connsiteY2" fmla="*/ 262920 h 2377760"/>
+                <a:gd name="connsiteX3" fmla="*/ 3136392 w 3136392"/>
+                <a:gd name="connsiteY3" fmla="*/ 6888 h 2377760"/>
+                <a:gd name="connsiteX0" fmla="*/ 0 w 3136392"/>
+                <a:gd name="connsiteY0" fmla="*/ 2430048 h 2480048"/>
+                <a:gd name="connsiteX1" fmla="*/ 1472184 w 3136392"/>
+                <a:gd name="connsiteY1" fmla="*/ 2009424 h 2480048"/>
+                <a:gd name="connsiteX2" fmla="*/ 1801368 w 3136392"/>
+                <a:gd name="connsiteY2" fmla="*/ 262920 h 2480048"/>
+                <a:gd name="connsiteX3" fmla="*/ 3136392 w 3136392"/>
+                <a:gd name="connsiteY3" fmla="*/ 6888 h 2480048"/>
+                <a:gd name="connsiteX0" fmla="*/ 0 w 3136392"/>
+                <a:gd name="connsiteY0" fmla="*/ 2430048 h 2475723"/>
+                <a:gd name="connsiteX1" fmla="*/ 999685 w 3136392"/>
+                <a:gd name="connsiteY1" fmla="*/ 1972848 h 2475723"/>
+                <a:gd name="connsiteX2" fmla="*/ 1801368 w 3136392"/>
+                <a:gd name="connsiteY2" fmla="*/ 262920 h 2475723"/>
+                <a:gd name="connsiteX3" fmla="*/ 3136392 w 3136392"/>
+                <a:gd name="connsiteY3" fmla="*/ 6888 h 2475723"/>
+                <a:gd name="connsiteX0" fmla="*/ 0 w 3136392"/>
+                <a:gd name="connsiteY0" fmla="*/ 2426886 h 2472408"/>
+                <a:gd name="connsiteX1" fmla="*/ 999685 w 3136392"/>
+                <a:gd name="connsiteY1" fmla="*/ 1969686 h 2472408"/>
+                <a:gd name="connsiteX2" fmla="*/ 1296283 w 3136392"/>
+                <a:gd name="connsiteY2" fmla="*/ 268902 h 2472408"/>
+                <a:gd name="connsiteX3" fmla="*/ 3136392 w 3136392"/>
+                <a:gd name="connsiteY3" fmla="*/ 3726 h 2472408"/>
+              </a:gdLst>
+              <a:ahLst/>
+              <a:cxnLst>
+                <a:cxn ang="0">
+                  <a:pos x="connsiteX0" y="connsiteY0"/>
+                </a:cxn>
+                <a:cxn ang="0">
+                  <a:pos x="connsiteX1" y="connsiteY1"/>
+                </a:cxn>
+                <a:cxn ang="0">
+                  <a:pos x="connsiteX2" y="connsiteY2"/>
+                </a:cxn>
+                <a:cxn ang="0">
+                  <a:pos x="connsiteX3" y="connsiteY3"/>
+                </a:cxn>
+              </a:cxnLst>
+              <a:rect l="l" t="t" r="r" b="b"/>
+              <a:pathLst>
+                <a:path w="3136392" h="2472408">
+                  <a:moveTo>
+                    <a:pt x="0" y="2426886"/>
+                  </a:moveTo>
+                  <a:cubicBezTo>
+                    <a:pt x="581406" y="2579286"/>
+                    <a:pt x="783638" y="2329350"/>
+                    <a:pt x="999685" y="1969686"/>
+                  </a:cubicBezTo>
+                  <a:cubicBezTo>
+                    <a:pt x="1215732" y="1610022"/>
+                    <a:pt x="1017391" y="646854"/>
+                    <a:pt x="1296283" y="268902"/>
+                  </a:cubicBezTo>
+                  <a:cubicBezTo>
+                    <a:pt x="1575175" y="-109050"/>
+                    <a:pt x="2889504" y="31158"/>
+                    <a:pt x="3136392" y="3726"/>
+                  </a:cubicBezTo>
+                </a:path>
+              </a:pathLst>
+            </a:custGeom>
+            <a:noFill/>
+            <a:ln w="28575">
               <a:solidFill>
                 <a:srgbClr val="FF0000"/>
               </a:solidFill>
@@ -8719,265 +9090,174 @@
             </a:p>
           </p:txBody>
         </p:sp>
-        <p:cxnSp>
-          <p:nvCxnSpPr>
-            <p:cNvPr id="32" name="Straight Connector 31">
+        <p:sp>
+          <p:nvSpPr>
+            <p:cNvPr id="24" name="Freeform 23">
               <a:extLst>
                 <a:ext uri="{FF2B5EF4-FFF2-40B4-BE49-F238E27FC236}">
-                  <a16:creationId xmlns:a16="http://schemas.microsoft.com/office/drawing/2014/main" id="{B4C5B3AE-4B94-CBB8-02A6-4130F2E27E18}"/>
+                  <a16:creationId xmlns:a16="http://schemas.microsoft.com/office/drawing/2014/main" id="{430CD0D6-56CC-4020-5E24-36FF68CED59D}"/>
                 </a:ext>
               </a:extLst>
             </p:cNvPr>
-            <p:cNvCxnSpPr>
-              <a:cxnSpLocks/>
-            </p:cNvCxnSpPr>
+            <p:cNvSpPr/>
             <p:nvPr/>
-          </p:nvCxnSpPr>
+          </p:nvSpPr>
           <p:spPr>
-            <a:xfrm>
-              <a:off x="10238440" y="3151157"/>
-              <a:ext cx="0" cy="1460863"/>
+            <a:xfrm flipH="1" flipV="1">
+              <a:off x="6904679" y="2319716"/>
+              <a:ext cx="3520411" cy="2472407"/>
             </a:xfrm>
-            <a:prstGeom prst="line">
+            <a:custGeom>
               <a:avLst/>
-            </a:prstGeom>
-            <a:ln w="38100">
+              <a:gdLst>
+                <a:gd name="connsiteX0" fmla="*/ 0 w 3136392"/>
+                <a:gd name="connsiteY0" fmla="*/ 2311176 h 2480509"/>
+                <a:gd name="connsiteX1" fmla="*/ 1463040 w 3136392"/>
+                <a:gd name="connsiteY1" fmla="*/ 2274600 h 2480509"/>
+                <a:gd name="connsiteX2" fmla="*/ 1801368 w 3136392"/>
+                <a:gd name="connsiteY2" fmla="*/ 262920 h 2480509"/>
+                <a:gd name="connsiteX3" fmla="*/ 3136392 w 3136392"/>
+                <a:gd name="connsiteY3" fmla="*/ 6888 h 2480509"/>
+                <a:gd name="connsiteX0" fmla="*/ 0 w 3136392"/>
+                <a:gd name="connsiteY0" fmla="*/ 2311176 h 2377760"/>
+                <a:gd name="connsiteX1" fmla="*/ 1472184 w 3136392"/>
+                <a:gd name="connsiteY1" fmla="*/ 2009424 h 2377760"/>
+                <a:gd name="connsiteX2" fmla="*/ 1801368 w 3136392"/>
+                <a:gd name="connsiteY2" fmla="*/ 262920 h 2377760"/>
+                <a:gd name="connsiteX3" fmla="*/ 3136392 w 3136392"/>
+                <a:gd name="connsiteY3" fmla="*/ 6888 h 2377760"/>
+                <a:gd name="connsiteX0" fmla="*/ 0 w 3136392"/>
+                <a:gd name="connsiteY0" fmla="*/ 2430048 h 2480048"/>
+                <a:gd name="connsiteX1" fmla="*/ 1472184 w 3136392"/>
+                <a:gd name="connsiteY1" fmla="*/ 2009424 h 2480048"/>
+                <a:gd name="connsiteX2" fmla="*/ 1801368 w 3136392"/>
+                <a:gd name="connsiteY2" fmla="*/ 262920 h 2480048"/>
+                <a:gd name="connsiteX3" fmla="*/ 3136392 w 3136392"/>
+                <a:gd name="connsiteY3" fmla="*/ 6888 h 2480048"/>
+                <a:gd name="connsiteX0" fmla="*/ 0 w 3136392"/>
+                <a:gd name="connsiteY0" fmla="*/ 2430048 h 2475723"/>
+                <a:gd name="connsiteX1" fmla="*/ 999685 w 3136392"/>
+                <a:gd name="connsiteY1" fmla="*/ 1972848 h 2475723"/>
+                <a:gd name="connsiteX2" fmla="*/ 1801368 w 3136392"/>
+                <a:gd name="connsiteY2" fmla="*/ 262920 h 2475723"/>
+                <a:gd name="connsiteX3" fmla="*/ 3136392 w 3136392"/>
+                <a:gd name="connsiteY3" fmla="*/ 6888 h 2475723"/>
+                <a:gd name="connsiteX0" fmla="*/ 0 w 3136392"/>
+                <a:gd name="connsiteY0" fmla="*/ 2426886 h 2472408"/>
+                <a:gd name="connsiteX1" fmla="*/ 999685 w 3136392"/>
+                <a:gd name="connsiteY1" fmla="*/ 1969686 h 2472408"/>
+                <a:gd name="connsiteX2" fmla="*/ 1296283 w 3136392"/>
+                <a:gd name="connsiteY2" fmla="*/ 268902 h 2472408"/>
+                <a:gd name="connsiteX3" fmla="*/ 3136392 w 3136392"/>
+                <a:gd name="connsiteY3" fmla="*/ 3726 h 2472408"/>
+              </a:gdLst>
+              <a:ahLst/>
+              <a:cxnLst>
+                <a:cxn ang="0">
+                  <a:pos x="connsiteX0" y="connsiteY0"/>
+                </a:cxn>
+                <a:cxn ang="0">
+                  <a:pos x="connsiteX1" y="connsiteY1"/>
+                </a:cxn>
+                <a:cxn ang="0">
+                  <a:pos x="connsiteX2" y="connsiteY2"/>
+                </a:cxn>
+                <a:cxn ang="0">
+                  <a:pos x="connsiteX3" y="connsiteY3"/>
+                </a:cxn>
+              </a:cxnLst>
+              <a:rect l="l" t="t" r="r" b="b"/>
+              <a:pathLst>
+                <a:path w="3136392" h="2472408">
+                  <a:moveTo>
+                    <a:pt x="0" y="2426886"/>
+                  </a:moveTo>
+                  <a:cubicBezTo>
+                    <a:pt x="581406" y="2579286"/>
+                    <a:pt x="783638" y="2329350"/>
+                    <a:pt x="999685" y="1969686"/>
+                  </a:cubicBezTo>
+                  <a:cubicBezTo>
+                    <a:pt x="1215732" y="1610022"/>
+                    <a:pt x="1017391" y="646854"/>
+                    <a:pt x="1296283" y="268902"/>
+                  </a:cubicBezTo>
+                  <a:cubicBezTo>
+                    <a:pt x="1575175" y="-109050"/>
+                    <a:pt x="2889504" y="31158"/>
+                    <a:pt x="3136392" y="3726"/>
+                  </a:cubicBezTo>
+                </a:path>
+              </a:pathLst>
+            </a:custGeom>
+            <a:noFill/>
+            <a:ln w="28575">
               <a:solidFill>
-                <a:srgbClr val="FF0000"/>
+                <a:srgbClr val="0070C0"/>
               </a:solidFill>
             </a:ln>
           </p:spPr>
           <p:style>
-            <a:lnRef idx="1">
-              <a:schemeClr val="accent1"/>
+            <a:lnRef idx="2">
+              <a:schemeClr val="accent1">
+                <a:shade val="15000"/>
+              </a:schemeClr>
             </a:lnRef>
-            <a:fillRef idx="0">
+            <a:fillRef idx="1">
               <a:schemeClr val="accent1"/>
             </a:fillRef>
             <a:effectRef idx="0">
               <a:schemeClr val="accent1"/>
             </a:effectRef>
             <a:fontRef idx="minor">
-              <a:schemeClr val="tx1"/>
+              <a:schemeClr val="lt1"/>
             </a:fontRef>
           </p:style>
-        </p:cxnSp>
-        <p:cxnSp>
-          <p:nvCxnSpPr>
-            <p:cNvPr id="33" name="Straight Connector 32">
-              <a:extLst>
-                <a:ext uri="{FF2B5EF4-FFF2-40B4-BE49-F238E27FC236}">
-                  <a16:creationId xmlns:a16="http://schemas.microsoft.com/office/drawing/2014/main" id="{24667415-FEE8-5DAF-4F4F-30DFD435A49C}"/>
-                </a:ext>
-              </a:extLst>
-            </p:cNvPr>
-            <p:cNvCxnSpPr>
-              <a:cxnSpLocks/>
-            </p:cNvCxnSpPr>
-            <p:nvPr/>
-          </p:nvCxnSpPr>
-          <p:spPr>
-            <a:xfrm flipH="1" flipV="1">
-              <a:off x="10238440" y="3440243"/>
-              <a:ext cx="532601" cy="4004"/>
-            </a:xfrm>
-            <a:prstGeom prst="line">
-              <a:avLst/>
-            </a:prstGeom>
-            <a:ln w="38100">
-              <a:solidFill>
-                <a:srgbClr val="FF0000"/>
-              </a:solidFill>
-            </a:ln>
-          </p:spPr>
-          <p:style>
-            <a:lnRef idx="1">
-              <a:schemeClr val="accent1"/>
-            </a:lnRef>
-            <a:fillRef idx="0">
-              <a:schemeClr val="accent1"/>
-            </a:fillRef>
-            <a:effectRef idx="0">
-              <a:schemeClr val="accent1"/>
-            </a:effectRef>
-            <a:fontRef idx="minor">
-              <a:schemeClr val="tx1"/>
-            </a:fontRef>
-          </p:style>
-        </p:cxnSp>
-        <p:cxnSp>
-          <p:nvCxnSpPr>
-            <p:cNvPr id="34" name="Straight Connector 33">
-              <a:extLst>
-                <a:ext uri="{FF2B5EF4-FFF2-40B4-BE49-F238E27FC236}">
-                  <a16:creationId xmlns:a16="http://schemas.microsoft.com/office/drawing/2014/main" id="{B0E37415-0945-936C-48D2-DC1A3FF4C776}"/>
-                </a:ext>
-              </a:extLst>
-            </p:cNvPr>
-            <p:cNvCxnSpPr>
-              <a:cxnSpLocks/>
-            </p:cNvCxnSpPr>
-            <p:nvPr/>
-          </p:nvCxnSpPr>
-          <p:spPr>
-            <a:xfrm flipV="1">
-              <a:off x="10763924" y="4221078"/>
-              <a:ext cx="0" cy="913630"/>
-            </a:xfrm>
-            <a:prstGeom prst="line">
-              <a:avLst/>
-            </a:prstGeom>
-            <a:ln w="38100">
-              <a:solidFill>
-                <a:srgbClr val="FF0000"/>
-              </a:solidFill>
-            </a:ln>
-          </p:spPr>
-          <p:style>
-            <a:lnRef idx="1">
-              <a:schemeClr val="accent1"/>
-            </a:lnRef>
-            <a:fillRef idx="0">
-              <a:schemeClr val="accent1"/>
-            </a:fillRef>
-            <a:effectRef idx="0">
-              <a:schemeClr val="accent1"/>
-            </a:effectRef>
-            <a:fontRef idx="minor">
-              <a:schemeClr val="tx1"/>
-            </a:fontRef>
-          </p:style>
-        </p:cxnSp>
-        <p:cxnSp>
-          <p:nvCxnSpPr>
-            <p:cNvPr id="39" name="Straight Connector 38">
-              <a:extLst>
-                <a:ext uri="{FF2B5EF4-FFF2-40B4-BE49-F238E27FC236}">
-                  <a16:creationId xmlns:a16="http://schemas.microsoft.com/office/drawing/2014/main" id="{932B5146-012F-4367-5E10-6F57FB527668}"/>
-                </a:ext>
-              </a:extLst>
-            </p:cNvPr>
-            <p:cNvCxnSpPr>
-              <a:cxnSpLocks/>
-            </p:cNvCxnSpPr>
-            <p:nvPr/>
-          </p:nvCxnSpPr>
-          <p:spPr>
-            <a:xfrm flipH="1">
-              <a:off x="9033468" y="3824681"/>
-              <a:ext cx="1045871" cy="0"/>
-            </a:xfrm>
-            <a:prstGeom prst="line">
-              <a:avLst/>
-            </a:prstGeom>
-            <a:ln w="38100" cap="rnd">
-              <a:solidFill>
-                <a:srgbClr val="FF0000"/>
-              </a:solidFill>
-            </a:ln>
-          </p:spPr>
-          <p:style>
-            <a:lnRef idx="1">
-              <a:schemeClr val="accent1"/>
-            </a:lnRef>
-            <a:fillRef idx="0">
-              <a:schemeClr val="accent1"/>
-            </a:fillRef>
-            <a:effectRef idx="0">
-              <a:schemeClr val="accent1"/>
-            </a:effectRef>
-            <a:fontRef idx="minor">
-              <a:schemeClr val="tx1"/>
-            </a:fontRef>
-          </p:style>
-        </p:cxnSp>
-        <p:cxnSp>
-          <p:nvCxnSpPr>
-            <p:cNvPr id="40" name="Straight Connector 39">
-              <a:extLst>
-                <a:ext uri="{FF2B5EF4-FFF2-40B4-BE49-F238E27FC236}">
-                  <a16:creationId xmlns:a16="http://schemas.microsoft.com/office/drawing/2014/main" id="{127BCA8B-44B9-8700-96A5-F2545649863A}"/>
-                </a:ext>
-              </a:extLst>
-            </p:cNvPr>
-            <p:cNvCxnSpPr>
-              <a:cxnSpLocks/>
-            </p:cNvCxnSpPr>
-            <p:nvPr/>
-          </p:nvCxnSpPr>
-          <p:spPr>
-            <a:xfrm>
-              <a:off x="10079339" y="3429000"/>
-              <a:ext cx="0" cy="792078"/>
-            </a:xfrm>
-            <a:prstGeom prst="line">
-              <a:avLst/>
-            </a:prstGeom>
-            <a:ln w="38100">
-              <a:solidFill>
-                <a:srgbClr val="FF0000"/>
-              </a:solidFill>
-            </a:ln>
-          </p:spPr>
-          <p:style>
-            <a:lnRef idx="1">
-              <a:schemeClr val="accent1"/>
-            </a:lnRef>
-            <a:fillRef idx="0">
-              <a:schemeClr val="accent1"/>
-            </a:fillRef>
-            <a:effectRef idx="0">
-              <a:schemeClr val="accent1"/>
-            </a:effectRef>
-            <a:fontRef idx="minor">
-              <a:schemeClr val="tx1"/>
-            </a:fontRef>
-          </p:style>
-        </p:cxnSp>
-        <p:cxnSp>
-          <p:nvCxnSpPr>
-            <p:cNvPr id="41" name="Straight Connector 40">
-              <a:extLst>
-                <a:ext uri="{FF2B5EF4-FFF2-40B4-BE49-F238E27FC236}">
-                  <a16:creationId xmlns:a16="http://schemas.microsoft.com/office/drawing/2014/main" id="{E4E08964-59CD-48CC-3CC9-9D8A2A3BD9B3}"/>
-                </a:ext>
-              </a:extLst>
-            </p:cNvPr>
-            <p:cNvCxnSpPr>
-              <a:cxnSpLocks/>
-            </p:cNvCxnSpPr>
-            <p:nvPr/>
-          </p:nvCxnSpPr>
-          <p:spPr>
-            <a:xfrm flipH="1" flipV="1">
-              <a:off x="10238440" y="4221380"/>
-              <a:ext cx="532601" cy="4004"/>
-            </a:xfrm>
-            <a:prstGeom prst="line">
-              <a:avLst/>
-            </a:prstGeom>
-            <a:ln w="38100">
-              <a:solidFill>
-                <a:srgbClr val="FF0000"/>
-              </a:solidFill>
-            </a:ln>
-          </p:spPr>
-          <p:style>
-            <a:lnRef idx="1">
-              <a:schemeClr val="accent1"/>
-            </a:lnRef>
-            <a:fillRef idx="0">
-              <a:schemeClr val="accent1"/>
-            </a:fillRef>
-            <a:effectRef idx="0">
-              <a:schemeClr val="accent1"/>
-            </a:effectRef>
-            <a:fontRef idx="minor">
-              <a:schemeClr val="tx1"/>
-            </a:fontRef>
-          </p:style>
-        </p:cxnSp>
+          <p:txBody>
+            <a:bodyPr rtlCol="0" anchor="ctr"/>
+            <a:lstStyle/>
+            <a:p>
+              <a:pPr algn="ctr"/>
+              <a:endParaRPr lang="en-US" dirty="0"/>
+            </a:p>
+          </p:txBody>
+        </p:sp>
       </p:grpSp>
+      <p:sp>
+        <p:nvSpPr>
+          <p:cNvPr id="56" name="TextBox 55">
+            <a:extLst>
+              <a:ext uri="{FF2B5EF4-FFF2-40B4-BE49-F238E27FC236}">
+                <a16:creationId xmlns:a16="http://schemas.microsoft.com/office/drawing/2014/main" id="{E1ADAA98-0F88-DC43-F62C-39A7BCBEB926}"/>
+              </a:ext>
+            </a:extLst>
+          </p:cNvPr>
+          <p:cNvSpPr txBox="1"/>
+          <p:nvPr/>
+        </p:nvSpPr>
+        <p:spPr>
+          <a:xfrm>
+            <a:off x="10517182" y="1660852"/>
+            <a:ext cx="758541" cy="369332"/>
+          </a:xfrm>
+          <a:prstGeom prst="rect">
+            <a:avLst/>
+          </a:prstGeom>
+          <a:noFill/>
+        </p:spPr>
+        <p:txBody>
+          <a:bodyPr wrap="none" rtlCol="0">
+            <a:spAutoFit/>
+          </a:bodyPr>
+          <a:lstStyle/>
+          <a:p>
+            <a:r>
+              <a:rPr lang="en-US" dirty="0"/>
+              <a:t>PMOS</a:t>
+            </a:r>
+          </a:p>
+        </p:txBody>
+      </p:sp>
       <p:grpSp>
         <p:nvGrpSpPr>
           <p:cNvPr id="42" name="Group 41" descr="A shematic for a PMOS style transistor.">
@@ -9440,91 +9720,12 @@
           </a:p>
         </p:txBody>
       </p:sp>
-      <p:sp>
-        <p:nvSpPr>
-          <p:cNvPr id="56" name="TextBox 55">
+      <p:grpSp>
+        <p:nvGrpSpPr>
+          <p:cNvPr id="27" name="Group 26" descr="A schematic for an NMOS style transistor.">
             <a:extLst>
               <a:ext uri="{FF2B5EF4-FFF2-40B4-BE49-F238E27FC236}">
-                <a16:creationId xmlns:a16="http://schemas.microsoft.com/office/drawing/2014/main" id="{E1ADAA98-0F88-DC43-F62C-39A7BCBEB926}"/>
-              </a:ext>
-            </a:extLst>
-          </p:cNvPr>
-          <p:cNvSpPr txBox="1"/>
-          <p:nvPr/>
-        </p:nvSpPr>
-        <p:spPr>
-          <a:xfrm>
-            <a:off x="10517182" y="1660852"/>
-            <a:ext cx="758541" cy="369332"/>
-          </a:xfrm>
-          <a:prstGeom prst="rect">
-            <a:avLst/>
-          </a:prstGeom>
-          <a:noFill/>
-        </p:spPr>
-        <p:txBody>
-          <a:bodyPr wrap="none" rtlCol="0">
-            <a:spAutoFit/>
-          </a:bodyPr>
-          <a:lstStyle/>
-          <a:p>
-            <a:r>
-              <a:rPr lang="en-US" dirty="0"/>
-              <a:t>PMOS</a:t>
-            </a:r>
-          </a:p>
-        </p:txBody>
-      </p:sp>
-      <p:sp>
-        <p:nvSpPr>
-          <p:cNvPr id="21" name="TextBox 20">
-            <a:extLst>
-              <a:ext uri="{FF2B5EF4-FFF2-40B4-BE49-F238E27FC236}">
-                <a16:creationId xmlns:a16="http://schemas.microsoft.com/office/drawing/2014/main" id="{5B1D1733-ACA4-F44A-D371-C8FDA84A7A0E}"/>
-              </a:ext>
-            </a:extLst>
-          </p:cNvPr>
-          <p:cNvSpPr txBox="1"/>
-          <p:nvPr/>
-        </p:nvSpPr>
-        <p:spPr>
-          <a:xfrm>
-            <a:off x="5157216" y="5646214"/>
-            <a:ext cx="4175841" cy="369332"/>
-          </a:xfrm>
-          <a:prstGeom prst="rect">
-            <a:avLst/>
-          </a:prstGeom>
-          <a:noFill/>
-        </p:spPr>
-        <p:txBody>
-          <a:bodyPr wrap="square">
-            <a:spAutoFit/>
-          </a:bodyPr>
-          <a:lstStyle/>
-          <a:p>
-            <a:pPr algn="ctr"/>
-            <a:r>
-              <a:rPr lang="en-US" dirty="0"/>
-              <a:t>https://</a:t>
-            </a:r>
-            <a:r>
-              <a:rPr lang="en-US" dirty="0" err="1"/>
-              <a:t>en.wikipedia.org</a:t>
-            </a:r>
-            <a:r>
-              <a:rPr lang="en-US" dirty="0"/>
-              <a:t>/wiki/MOSFET</a:t>
-            </a:r>
-          </a:p>
-        </p:txBody>
-      </p:sp>
-      <p:grpSp>
-        <p:nvGrpSpPr>
-          <p:cNvPr id="25" name="Group 24">
-            <a:extLst>
-              <a:ext uri="{FF2B5EF4-FFF2-40B4-BE49-F238E27FC236}">
-                <a16:creationId xmlns:a16="http://schemas.microsoft.com/office/drawing/2014/main" id="{A90CFB1C-DDCC-E0BB-AC5E-B72C9C603E9F}"/>
+                <a16:creationId xmlns:a16="http://schemas.microsoft.com/office/drawing/2014/main" id="{EC62109B-808E-8EEF-31C3-70F410C10C23}"/>
               </a:ext>
             </a:extLst>
           </p:cNvPr>
@@ -9533,94 +9734,18 @@
         </p:nvGrpSpPr>
         <p:grpSpPr>
           <a:xfrm>
-            <a:off x="6096000" y="1729459"/>
-            <a:ext cx="4329090" cy="3724763"/>
-            <a:chOff x="6096000" y="1729459"/>
-            <a:chExt cx="4329090" cy="3724763"/>
+            <a:off x="10681821" y="4329844"/>
+            <a:ext cx="893028" cy="996054"/>
+            <a:chOff x="9033468" y="2344020"/>
+            <a:chExt cx="2502035" cy="2790688"/>
           </a:xfrm>
         </p:grpSpPr>
-        <p:sp>
-          <p:nvSpPr>
-            <p:cNvPr id="17" name="TextBox 16">
+        <p:cxnSp>
+          <p:nvCxnSpPr>
+            <p:cNvPr id="29" name="Straight Connector 28">
               <a:extLst>
                 <a:ext uri="{FF2B5EF4-FFF2-40B4-BE49-F238E27FC236}">
-                  <a16:creationId xmlns:a16="http://schemas.microsoft.com/office/drawing/2014/main" id="{84891ADE-C669-85A7-9D0F-84EBC64C5CCA}"/>
-                </a:ext>
-              </a:extLst>
-            </p:cNvPr>
-            <p:cNvSpPr txBox="1"/>
-            <p:nvPr/>
-          </p:nvSpPr>
-          <p:spPr>
-            <a:xfrm rot="16200000">
-              <a:off x="5474195" y="3335416"/>
-              <a:ext cx="1612942" cy="369332"/>
-            </a:xfrm>
-            <a:prstGeom prst="rect">
-              <a:avLst/>
-            </a:prstGeom>
-            <a:noFill/>
-          </p:spPr>
-          <p:txBody>
-            <a:bodyPr wrap="none" rtlCol="0">
-              <a:spAutoFit/>
-            </a:bodyPr>
-            <a:lstStyle/>
-            <a:p>
-              <a:r>
-                <a:rPr lang="en-US" dirty="0"/>
-                <a:t>Output Voltage</a:t>
-              </a:r>
-            </a:p>
-          </p:txBody>
-        </p:sp>
-        <p:cxnSp>
-          <p:nvCxnSpPr>
-            <p:cNvPr id="5" name="Straight Connector 4">
-              <a:extLst>
-                <a:ext uri="{FF2B5EF4-FFF2-40B4-BE49-F238E27FC236}">
-                  <a16:creationId xmlns:a16="http://schemas.microsoft.com/office/drawing/2014/main" id="{1F35751B-31DB-0C98-7137-868B5A677D70}"/>
-                </a:ext>
-              </a:extLst>
-            </p:cNvPr>
-            <p:cNvCxnSpPr/>
-            <p:nvPr/>
-          </p:nvCxnSpPr>
-          <p:spPr>
-            <a:xfrm>
-              <a:off x="6766560" y="2075688"/>
-              <a:ext cx="0" cy="2916936"/>
-            </a:xfrm>
-            <a:prstGeom prst="line">
-              <a:avLst/>
-            </a:prstGeom>
-            <a:ln w="38100">
-              <a:solidFill>
-                <a:schemeClr val="tx1"/>
-              </a:solidFill>
-            </a:ln>
-          </p:spPr>
-          <p:style>
-            <a:lnRef idx="1">
-              <a:schemeClr val="accent1"/>
-            </a:lnRef>
-            <a:fillRef idx="0">
-              <a:schemeClr val="accent1"/>
-            </a:fillRef>
-            <a:effectRef idx="0">
-              <a:schemeClr val="accent1"/>
-            </a:effectRef>
-            <a:fontRef idx="minor">
-              <a:schemeClr val="tx1"/>
-            </a:fontRef>
-          </p:style>
-        </p:cxnSp>
-        <p:cxnSp>
-          <p:nvCxnSpPr>
-            <p:cNvPr id="6" name="Straight Connector 5">
-              <a:extLst>
-                <a:ext uri="{FF2B5EF4-FFF2-40B4-BE49-F238E27FC236}">
-                  <a16:creationId xmlns:a16="http://schemas.microsoft.com/office/drawing/2014/main" id="{E4F53A0F-DBCF-9E64-1C7C-EA3721B510B9}"/>
+                  <a16:creationId xmlns:a16="http://schemas.microsoft.com/office/drawing/2014/main" id="{9AD92EFC-11A5-D9F7-101C-C0EC6B47FA37}"/>
                 </a:ext>
               </a:extLst>
             </p:cNvPr>
@@ -9631,15 +9756,15 @@
           </p:nvCxnSpPr>
           <p:spPr>
             <a:xfrm>
-              <a:off x="6766560" y="4992624"/>
-              <a:ext cx="3639282" cy="0"/>
+              <a:off x="10771041" y="2344020"/>
+              <a:ext cx="0" cy="1096223"/>
             </a:xfrm>
             <a:prstGeom prst="line">
               <a:avLst/>
             </a:prstGeom>
-            <a:ln w="38100">
+            <a:ln w="38100" cap="rnd">
               <a:solidFill>
-                <a:schemeClr val="tx1"/>
+                <a:srgbClr val="FF0000"/>
               </a:solidFill>
             </a:ln>
           </p:spPr>
@@ -9660,45 +9785,10 @@
         </p:cxnSp>
         <p:sp>
           <p:nvSpPr>
-            <p:cNvPr id="16" name="TextBox 15">
+            <p:cNvPr id="30" name="Oval 29">
               <a:extLst>
                 <a:ext uri="{FF2B5EF4-FFF2-40B4-BE49-F238E27FC236}">
-                  <a16:creationId xmlns:a16="http://schemas.microsoft.com/office/drawing/2014/main" id="{55FBDBEB-5182-3024-BDC9-C15779C0AE1D}"/>
-                </a:ext>
-              </a:extLst>
-            </p:cNvPr>
-            <p:cNvSpPr txBox="1"/>
-            <p:nvPr/>
-          </p:nvSpPr>
-          <p:spPr>
-            <a:xfrm>
-              <a:off x="8121293" y="5084890"/>
-              <a:ext cx="1441420" cy="369332"/>
-            </a:xfrm>
-            <a:prstGeom prst="rect">
-              <a:avLst/>
-            </a:prstGeom>
-            <a:noFill/>
-          </p:spPr>
-          <p:txBody>
-            <a:bodyPr wrap="none" rtlCol="0">
-              <a:spAutoFit/>
-            </a:bodyPr>
-            <a:lstStyle/>
-            <a:p>
-              <a:r>
-                <a:rPr lang="en-US" dirty="0"/>
-                <a:t>Input Voltage</a:t>
-              </a:r>
-            </a:p>
-          </p:txBody>
-        </p:sp>
-        <p:sp>
-          <p:nvSpPr>
-            <p:cNvPr id="15" name="Right Brace 14">
-              <a:extLst>
-                <a:ext uri="{FF2B5EF4-FFF2-40B4-BE49-F238E27FC236}">
-                  <a16:creationId xmlns:a16="http://schemas.microsoft.com/office/drawing/2014/main" id="{5C3F479B-6198-5209-53A0-C6E2BFB53B24}"/>
+                  <a16:creationId xmlns:a16="http://schemas.microsoft.com/office/drawing/2014/main" id="{56770A77-81BB-9035-AC9C-AF6011A1E7E5}"/>
                 </a:ext>
               </a:extLst>
             </p:cNvPr>
@@ -9706,232 +9796,15 @@
             <p:nvPr/>
           </p:nvSpPr>
           <p:spPr>
-            <a:xfrm rot="16200000">
-              <a:off x="8011211" y="1945303"/>
-              <a:ext cx="137160" cy="484632"/>
+            <a:xfrm>
+              <a:off x="9384607" y="2714725"/>
+              <a:ext cx="2150896" cy="2219913"/>
             </a:xfrm>
-            <a:prstGeom prst="rightBrace">
-              <a:avLst/>
-            </a:prstGeom>
-            <a:ln w="28575">
-              <a:solidFill>
-                <a:srgbClr val="FF0000"/>
-              </a:solidFill>
-            </a:ln>
-          </p:spPr>
-          <p:style>
-            <a:lnRef idx="1">
-              <a:schemeClr val="accent1"/>
-            </a:lnRef>
-            <a:fillRef idx="0">
-              <a:schemeClr val="accent1"/>
-            </a:fillRef>
-            <a:effectRef idx="0">
-              <a:schemeClr val="accent1"/>
-            </a:effectRef>
-            <a:fontRef idx="minor">
-              <a:schemeClr val="tx1"/>
-            </a:fontRef>
-          </p:style>
-          <p:txBody>
-            <a:bodyPr rtlCol="0" anchor="ctr"/>
-            <a:lstStyle/>
-            <a:p>
-              <a:pPr algn="ctr"/>
-              <a:endParaRPr lang="en-US"/>
-            </a:p>
-          </p:txBody>
-        </p:sp>
-        <p:sp>
-          <p:nvSpPr>
-            <p:cNvPr id="20" name="Right Brace 19">
-              <a:extLst>
-                <a:ext uri="{FF2B5EF4-FFF2-40B4-BE49-F238E27FC236}">
-                  <a16:creationId xmlns:a16="http://schemas.microsoft.com/office/drawing/2014/main" id="{9A038CF7-7C39-E67A-4AE5-4C3AD086BEA1}"/>
-                </a:ext>
-              </a:extLst>
-            </p:cNvPr>
-            <p:cNvSpPr/>
-            <p:nvPr/>
-          </p:nvSpPr>
-          <p:spPr>
-            <a:xfrm rot="16200000">
-              <a:off x="9132712" y="1951459"/>
-              <a:ext cx="137160" cy="484632"/>
-            </a:xfrm>
-            <a:prstGeom prst="rightBrace">
-              <a:avLst/>
-            </a:prstGeom>
-            <a:ln w="28575">
-              <a:solidFill>
-                <a:schemeClr val="accent1"/>
-              </a:solidFill>
-            </a:ln>
-          </p:spPr>
-          <p:style>
-            <a:lnRef idx="1">
-              <a:schemeClr val="accent1"/>
-            </a:lnRef>
-            <a:fillRef idx="0">
-              <a:schemeClr val="accent1"/>
-            </a:fillRef>
-            <a:effectRef idx="0">
-              <a:schemeClr val="accent1"/>
-            </a:effectRef>
-            <a:fontRef idx="minor">
-              <a:schemeClr val="tx1"/>
-            </a:fontRef>
-          </p:style>
-          <p:txBody>
-            <a:bodyPr rtlCol="0" anchor="ctr"/>
-            <a:lstStyle/>
-            <a:p>
-              <a:pPr algn="ctr"/>
-              <a:endParaRPr lang="en-US">
-                <a:solidFill>
-                  <a:srgbClr val="0070C0"/>
-                </a:solidFill>
-              </a:endParaRPr>
-            </a:p>
-          </p:txBody>
-        </p:sp>
-        <p:sp>
-          <p:nvSpPr>
-            <p:cNvPr id="22" name="TextBox 21">
-              <a:extLst>
-                <a:ext uri="{FF2B5EF4-FFF2-40B4-BE49-F238E27FC236}">
-                  <a16:creationId xmlns:a16="http://schemas.microsoft.com/office/drawing/2014/main" id="{C1388982-4F01-2DC3-BCEB-2F19CF36656D}"/>
-                </a:ext>
-              </a:extLst>
-            </p:cNvPr>
-            <p:cNvSpPr txBox="1"/>
-            <p:nvPr/>
-          </p:nvSpPr>
-          <p:spPr>
-            <a:xfrm>
-              <a:off x="8144206" y="1729459"/>
-              <a:ext cx="1106585" cy="369332"/>
-            </a:xfrm>
-            <a:prstGeom prst="rect">
+            <a:prstGeom prst="ellipse">
               <a:avLst/>
             </a:prstGeom>
             <a:noFill/>
-          </p:spPr>
-          <p:txBody>
-            <a:bodyPr wrap="none" rtlCol="0">
-              <a:spAutoFit/>
-            </a:bodyPr>
-            <a:lstStyle/>
-            <a:p>
-              <a:r>
-                <a:rPr lang="en-US" dirty="0"/>
-                <a:t>Transition</a:t>
-              </a:r>
-            </a:p>
-          </p:txBody>
-        </p:sp>
-        <p:sp>
-          <p:nvSpPr>
-            <p:cNvPr id="23" name="Freeform 22">
-              <a:extLst>
-                <a:ext uri="{FF2B5EF4-FFF2-40B4-BE49-F238E27FC236}">
-                  <a16:creationId xmlns:a16="http://schemas.microsoft.com/office/drawing/2014/main" id="{C7996590-DE54-CDA1-2425-B7FACD79461E}"/>
-                </a:ext>
-              </a:extLst>
-            </p:cNvPr>
-            <p:cNvSpPr/>
-            <p:nvPr/>
-          </p:nvSpPr>
-          <p:spPr>
-            <a:xfrm flipV="1">
-              <a:off x="6876287" y="2395134"/>
-              <a:ext cx="3520411" cy="2472407"/>
-            </a:xfrm>
-            <a:custGeom>
-              <a:avLst/>
-              <a:gdLst>
-                <a:gd name="connsiteX0" fmla="*/ 0 w 3136392"/>
-                <a:gd name="connsiteY0" fmla="*/ 2311176 h 2480509"/>
-                <a:gd name="connsiteX1" fmla="*/ 1463040 w 3136392"/>
-                <a:gd name="connsiteY1" fmla="*/ 2274600 h 2480509"/>
-                <a:gd name="connsiteX2" fmla="*/ 1801368 w 3136392"/>
-                <a:gd name="connsiteY2" fmla="*/ 262920 h 2480509"/>
-                <a:gd name="connsiteX3" fmla="*/ 3136392 w 3136392"/>
-                <a:gd name="connsiteY3" fmla="*/ 6888 h 2480509"/>
-                <a:gd name="connsiteX0" fmla="*/ 0 w 3136392"/>
-                <a:gd name="connsiteY0" fmla="*/ 2311176 h 2377760"/>
-                <a:gd name="connsiteX1" fmla="*/ 1472184 w 3136392"/>
-                <a:gd name="connsiteY1" fmla="*/ 2009424 h 2377760"/>
-                <a:gd name="connsiteX2" fmla="*/ 1801368 w 3136392"/>
-                <a:gd name="connsiteY2" fmla="*/ 262920 h 2377760"/>
-                <a:gd name="connsiteX3" fmla="*/ 3136392 w 3136392"/>
-                <a:gd name="connsiteY3" fmla="*/ 6888 h 2377760"/>
-                <a:gd name="connsiteX0" fmla="*/ 0 w 3136392"/>
-                <a:gd name="connsiteY0" fmla="*/ 2430048 h 2480048"/>
-                <a:gd name="connsiteX1" fmla="*/ 1472184 w 3136392"/>
-                <a:gd name="connsiteY1" fmla="*/ 2009424 h 2480048"/>
-                <a:gd name="connsiteX2" fmla="*/ 1801368 w 3136392"/>
-                <a:gd name="connsiteY2" fmla="*/ 262920 h 2480048"/>
-                <a:gd name="connsiteX3" fmla="*/ 3136392 w 3136392"/>
-                <a:gd name="connsiteY3" fmla="*/ 6888 h 2480048"/>
-                <a:gd name="connsiteX0" fmla="*/ 0 w 3136392"/>
-                <a:gd name="connsiteY0" fmla="*/ 2430048 h 2475723"/>
-                <a:gd name="connsiteX1" fmla="*/ 999685 w 3136392"/>
-                <a:gd name="connsiteY1" fmla="*/ 1972848 h 2475723"/>
-                <a:gd name="connsiteX2" fmla="*/ 1801368 w 3136392"/>
-                <a:gd name="connsiteY2" fmla="*/ 262920 h 2475723"/>
-                <a:gd name="connsiteX3" fmla="*/ 3136392 w 3136392"/>
-                <a:gd name="connsiteY3" fmla="*/ 6888 h 2475723"/>
-                <a:gd name="connsiteX0" fmla="*/ 0 w 3136392"/>
-                <a:gd name="connsiteY0" fmla="*/ 2426886 h 2472408"/>
-                <a:gd name="connsiteX1" fmla="*/ 999685 w 3136392"/>
-                <a:gd name="connsiteY1" fmla="*/ 1969686 h 2472408"/>
-                <a:gd name="connsiteX2" fmla="*/ 1296283 w 3136392"/>
-                <a:gd name="connsiteY2" fmla="*/ 268902 h 2472408"/>
-                <a:gd name="connsiteX3" fmla="*/ 3136392 w 3136392"/>
-                <a:gd name="connsiteY3" fmla="*/ 3726 h 2472408"/>
-              </a:gdLst>
-              <a:ahLst/>
-              <a:cxnLst>
-                <a:cxn ang="0">
-                  <a:pos x="connsiteX0" y="connsiteY0"/>
-                </a:cxn>
-                <a:cxn ang="0">
-                  <a:pos x="connsiteX1" y="connsiteY1"/>
-                </a:cxn>
-                <a:cxn ang="0">
-                  <a:pos x="connsiteX2" y="connsiteY2"/>
-                </a:cxn>
-                <a:cxn ang="0">
-                  <a:pos x="connsiteX3" y="connsiteY3"/>
-                </a:cxn>
-              </a:cxnLst>
-              <a:rect l="l" t="t" r="r" b="b"/>
-              <a:pathLst>
-                <a:path w="3136392" h="2472408">
-                  <a:moveTo>
-                    <a:pt x="0" y="2426886"/>
-                  </a:moveTo>
-                  <a:cubicBezTo>
-                    <a:pt x="581406" y="2579286"/>
-                    <a:pt x="783638" y="2329350"/>
-                    <a:pt x="999685" y="1969686"/>
-                  </a:cubicBezTo>
-                  <a:cubicBezTo>
-                    <a:pt x="1215732" y="1610022"/>
-                    <a:pt x="1017391" y="646854"/>
-                    <a:pt x="1296283" y="268902"/>
-                  </a:cubicBezTo>
-                  <a:cubicBezTo>
-                    <a:pt x="1575175" y="-109050"/>
-                    <a:pt x="2889504" y="31158"/>
-                    <a:pt x="3136392" y="3726"/>
-                  </a:cubicBezTo>
-                </a:path>
-              </a:pathLst>
-            </a:custGeom>
-            <a:noFill/>
-            <a:ln w="28575">
+            <a:ln w="38100">
               <a:solidFill>
                 <a:srgbClr val="FF0000"/>
               </a:solidFill>
@@ -9962,139 +9835,309 @@
             </a:p>
           </p:txBody>
         </p:sp>
-        <p:sp>
-          <p:nvSpPr>
-            <p:cNvPr id="24" name="Freeform 23">
+        <p:cxnSp>
+          <p:nvCxnSpPr>
+            <p:cNvPr id="32" name="Straight Connector 31">
               <a:extLst>
                 <a:ext uri="{FF2B5EF4-FFF2-40B4-BE49-F238E27FC236}">
-                  <a16:creationId xmlns:a16="http://schemas.microsoft.com/office/drawing/2014/main" id="{430CD0D6-56CC-4020-5E24-36FF68CED59D}"/>
+                  <a16:creationId xmlns:a16="http://schemas.microsoft.com/office/drawing/2014/main" id="{B4C5B3AE-4B94-CBB8-02A6-4130F2E27E18}"/>
                 </a:ext>
               </a:extLst>
             </p:cNvPr>
-            <p:cNvSpPr/>
+            <p:cNvCxnSpPr>
+              <a:cxnSpLocks/>
+            </p:cNvCxnSpPr>
             <p:nvPr/>
-          </p:nvSpPr>
+          </p:nvCxnSpPr>
           <p:spPr>
-            <a:xfrm flipH="1" flipV="1">
-              <a:off x="6904679" y="2319716"/>
-              <a:ext cx="3520411" cy="2472407"/>
+            <a:xfrm>
+              <a:off x="10238440" y="3151157"/>
+              <a:ext cx="0" cy="1460863"/>
             </a:xfrm>
-            <a:custGeom>
+            <a:prstGeom prst="line">
               <a:avLst/>
-              <a:gdLst>
-                <a:gd name="connsiteX0" fmla="*/ 0 w 3136392"/>
-                <a:gd name="connsiteY0" fmla="*/ 2311176 h 2480509"/>
-                <a:gd name="connsiteX1" fmla="*/ 1463040 w 3136392"/>
-                <a:gd name="connsiteY1" fmla="*/ 2274600 h 2480509"/>
-                <a:gd name="connsiteX2" fmla="*/ 1801368 w 3136392"/>
-                <a:gd name="connsiteY2" fmla="*/ 262920 h 2480509"/>
-                <a:gd name="connsiteX3" fmla="*/ 3136392 w 3136392"/>
-                <a:gd name="connsiteY3" fmla="*/ 6888 h 2480509"/>
-                <a:gd name="connsiteX0" fmla="*/ 0 w 3136392"/>
-                <a:gd name="connsiteY0" fmla="*/ 2311176 h 2377760"/>
-                <a:gd name="connsiteX1" fmla="*/ 1472184 w 3136392"/>
-                <a:gd name="connsiteY1" fmla="*/ 2009424 h 2377760"/>
-                <a:gd name="connsiteX2" fmla="*/ 1801368 w 3136392"/>
-                <a:gd name="connsiteY2" fmla="*/ 262920 h 2377760"/>
-                <a:gd name="connsiteX3" fmla="*/ 3136392 w 3136392"/>
-                <a:gd name="connsiteY3" fmla="*/ 6888 h 2377760"/>
-                <a:gd name="connsiteX0" fmla="*/ 0 w 3136392"/>
-                <a:gd name="connsiteY0" fmla="*/ 2430048 h 2480048"/>
-                <a:gd name="connsiteX1" fmla="*/ 1472184 w 3136392"/>
-                <a:gd name="connsiteY1" fmla="*/ 2009424 h 2480048"/>
-                <a:gd name="connsiteX2" fmla="*/ 1801368 w 3136392"/>
-                <a:gd name="connsiteY2" fmla="*/ 262920 h 2480048"/>
-                <a:gd name="connsiteX3" fmla="*/ 3136392 w 3136392"/>
-                <a:gd name="connsiteY3" fmla="*/ 6888 h 2480048"/>
-                <a:gd name="connsiteX0" fmla="*/ 0 w 3136392"/>
-                <a:gd name="connsiteY0" fmla="*/ 2430048 h 2475723"/>
-                <a:gd name="connsiteX1" fmla="*/ 999685 w 3136392"/>
-                <a:gd name="connsiteY1" fmla="*/ 1972848 h 2475723"/>
-                <a:gd name="connsiteX2" fmla="*/ 1801368 w 3136392"/>
-                <a:gd name="connsiteY2" fmla="*/ 262920 h 2475723"/>
-                <a:gd name="connsiteX3" fmla="*/ 3136392 w 3136392"/>
-                <a:gd name="connsiteY3" fmla="*/ 6888 h 2475723"/>
-                <a:gd name="connsiteX0" fmla="*/ 0 w 3136392"/>
-                <a:gd name="connsiteY0" fmla="*/ 2426886 h 2472408"/>
-                <a:gd name="connsiteX1" fmla="*/ 999685 w 3136392"/>
-                <a:gd name="connsiteY1" fmla="*/ 1969686 h 2472408"/>
-                <a:gd name="connsiteX2" fmla="*/ 1296283 w 3136392"/>
-                <a:gd name="connsiteY2" fmla="*/ 268902 h 2472408"/>
-                <a:gd name="connsiteX3" fmla="*/ 3136392 w 3136392"/>
-                <a:gd name="connsiteY3" fmla="*/ 3726 h 2472408"/>
-              </a:gdLst>
-              <a:ahLst/>
-              <a:cxnLst>
-                <a:cxn ang="0">
-                  <a:pos x="connsiteX0" y="connsiteY0"/>
-                </a:cxn>
-                <a:cxn ang="0">
-                  <a:pos x="connsiteX1" y="connsiteY1"/>
-                </a:cxn>
-                <a:cxn ang="0">
-                  <a:pos x="connsiteX2" y="connsiteY2"/>
-                </a:cxn>
-                <a:cxn ang="0">
-                  <a:pos x="connsiteX3" y="connsiteY3"/>
-                </a:cxn>
-              </a:cxnLst>
-              <a:rect l="l" t="t" r="r" b="b"/>
-              <a:pathLst>
-                <a:path w="3136392" h="2472408">
-                  <a:moveTo>
-                    <a:pt x="0" y="2426886"/>
-                  </a:moveTo>
-                  <a:cubicBezTo>
-                    <a:pt x="581406" y="2579286"/>
-                    <a:pt x="783638" y="2329350"/>
-                    <a:pt x="999685" y="1969686"/>
-                  </a:cubicBezTo>
-                  <a:cubicBezTo>
-                    <a:pt x="1215732" y="1610022"/>
-                    <a:pt x="1017391" y="646854"/>
-                    <a:pt x="1296283" y="268902"/>
-                  </a:cubicBezTo>
-                  <a:cubicBezTo>
-                    <a:pt x="1575175" y="-109050"/>
-                    <a:pt x="2889504" y="31158"/>
-                    <a:pt x="3136392" y="3726"/>
-                  </a:cubicBezTo>
-                </a:path>
-              </a:pathLst>
-            </a:custGeom>
-            <a:noFill/>
-            <a:ln w="28575">
+            </a:prstGeom>
+            <a:ln w="38100">
               <a:solidFill>
-                <a:srgbClr val="0070C0"/>
+                <a:srgbClr val="FF0000"/>
               </a:solidFill>
             </a:ln>
           </p:spPr>
           <p:style>
-            <a:lnRef idx="2">
-              <a:schemeClr val="accent1">
-                <a:shade val="15000"/>
-              </a:schemeClr>
+            <a:lnRef idx="1">
+              <a:schemeClr val="accent1"/>
             </a:lnRef>
-            <a:fillRef idx="1">
+            <a:fillRef idx="0">
               <a:schemeClr val="accent1"/>
             </a:fillRef>
             <a:effectRef idx="0">
               <a:schemeClr val="accent1"/>
             </a:effectRef>
             <a:fontRef idx="minor">
-              <a:schemeClr val="lt1"/>
+              <a:schemeClr val="tx1"/>
             </a:fontRef>
           </p:style>
-          <p:txBody>
-            <a:bodyPr rtlCol="0" anchor="ctr"/>
-            <a:lstStyle/>
-            <a:p>
-              <a:pPr algn="ctr"/>
-              <a:endParaRPr lang="en-US" dirty="0"/>
-            </a:p>
-          </p:txBody>
-        </p:sp>
+        </p:cxnSp>
+        <p:cxnSp>
+          <p:nvCxnSpPr>
+            <p:cNvPr id="33" name="Straight Connector 32">
+              <a:extLst>
+                <a:ext uri="{FF2B5EF4-FFF2-40B4-BE49-F238E27FC236}">
+                  <a16:creationId xmlns:a16="http://schemas.microsoft.com/office/drawing/2014/main" id="{24667415-FEE8-5DAF-4F4F-30DFD435A49C}"/>
+                </a:ext>
+              </a:extLst>
+            </p:cNvPr>
+            <p:cNvCxnSpPr>
+              <a:cxnSpLocks/>
+            </p:cNvCxnSpPr>
+            <p:nvPr/>
+          </p:nvCxnSpPr>
+          <p:spPr>
+            <a:xfrm flipH="1" flipV="1">
+              <a:off x="10238440" y="3440243"/>
+              <a:ext cx="532601" cy="4004"/>
+            </a:xfrm>
+            <a:prstGeom prst="line">
+              <a:avLst/>
+            </a:prstGeom>
+            <a:ln w="38100">
+              <a:solidFill>
+                <a:srgbClr val="FF0000"/>
+              </a:solidFill>
+            </a:ln>
+          </p:spPr>
+          <p:style>
+            <a:lnRef idx="1">
+              <a:schemeClr val="accent1"/>
+            </a:lnRef>
+            <a:fillRef idx="0">
+              <a:schemeClr val="accent1"/>
+            </a:fillRef>
+            <a:effectRef idx="0">
+              <a:schemeClr val="accent1"/>
+            </a:effectRef>
+            <a:fontRef idx="minor">
+              <a:schemeClr val="tx1"/>
+            </a:fontRef>
+          </p:style>
+        </p:cxnSp>
+        <p:cxnSp>
+          <p:nvCxnSpPr>
+            <p:cNvPr id="34" name="Straight Connector 33">
+              <a:extLst>
+                <a:ext uri="{FF2B5EF4-FFF2-40B4-BE49-F238E27FC236}">
+                  <a16:creationId xmlns:a16="http://schemas.microsoft.com/office/drawing/2014/main" id="{B0E37415-0945-936C-48D2-DC1A3FF4C776}"/>
+                </a:ext>
+              </a:extLst>
+            </p:cNvPr>
+            <p:cNvCxnSpPr>
+              <a:cxnSpLocks/>
+            </p:cNvCxnSpPr>
+            <p:nvPr/>
+          </p:nvCxnSpPr>
+          <p:spPr>
+            <a:xfrm flipV="1">
+              <a:off x="10763924" y="4221078"/>
+              <a:ext cx="0" cy="913630"/>
+            </a:xfrm>
+            <a:prstGeom prst="line">
+              <a:avLst/>
+            </a:prstGeom>
+            <a:ln w="38100">
+              <a:solidFill>
+                <a:srgbClr val="FF0000"/>
+              </a:solidFill>
+            </a:ln>
+          </p:spPr>
+          <p:style>
+            <a:lnRef idx="1">
+              <a:schemeClr val="accent1"/>
+            </a:lnRef>
+            <a:fillRef idx="0">
+              <a:schemeClr val="accent1"/>
+            </a:fillRef>
+            <a:effectRef idx="0">
+              <a:schemeClr val="accent1"/>
+            </a:effectRef>
+            <a:fontRef idx="minor">
+              <a:schemeClr val="tx1"/>
+            </a:fontRef>
+          </p:style>
+        </p:cxnSp>
+        <p:cxnSp>
+          <p:nvCxnSpPr>
+            <p:cNvPr id="39" name="Straight Connector 38">
+              <a:extLst>
+                <a:ext uri="{FF2B5EF4-FFF2-40B4-BE49-F238E27FC236}">
+                  <a16:creationId xmlns:a16="http://schemas.microsoft.com/office/drawing/2014/main" id="{932B5146-012F-4367-5E10-6F57FB527668}"/>
+                </a:ext>
+              </a:extLst>
+            </p:cNvPr>
+            <p:cNvCxnSpPr>
+              <a:cxnSpLocks/>
+            </p:cNvCxnSpPr>
+            <p:nvPr/>
+          </p:nvCxnSpPr>
+          <p:spPr>
+            <a:xfrm flipH="1">
+              <a:off x="9033468" y="3824681"/>
+              <a:ext cx="1045871" cy="0"/>
+            </a:xfrm>
+            <a:prstGeom prst="line">
+              <a:avLst/>
+            </a:prstGeom>
+            <a:ln w="38100" cap="rnd">
+              <a:solidFill>
+                <a:srgbClr val="FF0000"/>
+              </a:solidFill>
+            </a:ln>
+          </p:spPr>
+          <p:style>
+            <a:lnRef idx="1">
+              <a:schemeClr val="accent1"/>
+            </a:lnRef>
+            <a:fillRef idx="0">
+              <a:schemeClr val="accent1"/>
+            </a:fillRef>
+            <a:effectRef idx="0">
+              <a:schemeClr val="accent1"/>
+            </a:effectRef>
+            <a:fontRef idx="minor">
+              <a:schemeClr val="tx1"/>
+            </a:fontRef>
+          </p:style>
+        </p:cxnSp>
+        <p:cxnSp>
+          <p:nvCxnSpPr>
+            <p:cNvPr id="40" name="Straight Connector 39">
+              <a:extLst>
+                <a:ext uri="{FF2B5EF4-FFF2-40B4-BE49-F238E27FC236}">
+                  <a16:creationId xmlns:a16="http://schemas.microsoft.com/office/drawing/2014/main" id="{127BCA8B-44B9-8700-96A5-F2545649863A}"/>
+                </a:ext>
+              </a:extLst>
+            </p:cNvPr>
+            <p:cNvCxnSpPr>
+              <a:cxnSpLocks/>
+            </p:cNvCxnSpPr>
+            <p:nvPr/>
+          </p:nvCxnSpPr>
+          <p:spPr>
+            <a:xfrm>
+              <a:off x="10079339" y="3429000"/>
+              <a:ext cx="0" cy="792078"/>
+            </a:xfrm>
+            <a:prstGeom prst="line">
+              <a:avLst/>
+            </a:prstGeom>
+            <a:ln w="38100">
+              <a:solidFill>
+                <a:srgbClr val="FF0000"/>
+              </a:solidFill>
+            </a:ln>
+          </p:spPr>
+          <p:style>
+            <a:lnRef idx="1">
+              <a:schemeClr val="accent1"/>
+            </a:lnRef>
+            <a:fillRef idx="0">
+              <a:schemeClr val="accent1"/>
+            </a:fillRef>
+            <a:effectRef idx="0">
+              <a:schemeClr val="accent1"/>
+            </a:effectRef>
+            <a:fontRef idx="minor">
+              <a:schemeClr val="tx1"/>
+            </a:fontRef>
+          </p:style>
+        </p:cxnSp>
+        <p:cxnSp>
+          <p:nvCxnSpPr>
+            <p:cNvPr id="41" name="Straight Connector 40">
+              <a:extLst>
+                <a:ext uri="{FF2B5EF4-FFF2-40B4-BE49-F238E27FC236}">
+                  <a16:creationId xmlns:a16="http://schemas.microsoft.com/office/drawing/2014/main" id="{E4E08964-59CD-48CC-3CC9-9D8A2A3BD9B3}"/>
+                </a:ext>
+              </a:extLst>
+            </p:cNvPr>
+            <p:cNvCxnSpPr>
+              <a:cxnSpLocks/>
+            </p:cNvCxnSpPr>
+            <p:nvPr/>
+          </p:nvCxnSpPr>
+          <p:spPr>
+            <a:xfrm flipH="1" flipV="1">
+              <a:off x="10238440" y="4221380"/>
+              <a:ext cx="532601" cy="4004"/>
+            </a:xfrm>
+            <a:prstGeom prst="line">
+              <a:avLst/>
+            </a:prstGeom>
+            <a:ln w="38100">
+              <a:solidFill>
+                <a:srgbClr val="FF0000"/>
+              </a:solidFill>
+            </a:ln>
+          </p:spPr>
+          <p:style>
+            <a:lnRef idx="1">
+              <a:schemeClr val="accent1"/>
+            </a:lnRef>
+            <a:fillRef idx="0">
+              <a:schemeClr val="accent1"/>
+            </a:fillRef>
+            <a:effectRef idx="0">
+              <a:schemeClr val="accent1"/>
+            </a:effectRef>
+            <a:fontRef idx="minor">
+              <a:schemeClr val="tx1"/>
+            </a:fontRef>
+          </p:style>
+        </p:cxnSp>
       </p:grpSp>
+      <p:sp>
+        <p:nvSpPr>
+          <p:cNvPr id="21" name="TextBox 20">
+            <a:extLst>
+              <a:ext uri="{FF2B5EF4-FFF2-40B4-BE49-F238E27FC236}">
+                <a16:creationId xmlns:a16="http://schemas.microsoft.com/office/drawing/2014/main" id="{5B1D1733-ACA4-F44A-D371-C8FDA84A7A0E}"/>
+              </a:ext>
+            </a:extLst>
+          </p:cNvPr>
+          <p:cNvSpPr txBox="1"/>
+          <p:nvPr/>
+        </p:nvSpPr>
+        <p:spPr>
+          <a:xfrm>
+            <a:off x="5157216" y="5646214"/>
+            <a:ext cx="4175841" cy="369332"/>
+          </a:xfrm>
+          <a:prstGeom prst="rect">
+            <a:avLst/>
+          </a:prstGeom>
+          <a:noFill/>
+        </p:spPr>
+        <p:txBody>
+          <a:bodyPr wrap="square">
+            <a:spAutoFit/>
+          </a:bodyPr>
+          <a:lstStyle/>
+          <a:p>
+            <a:pPr algn="ctr"/>
+            <a:r>
+              <a:rPr lang="en-US" dirty="0"/>
+              <a:t>https://</a:t>
+            </a:r>
+            <a:r>
+              <a:rPr lang="en-US" dirty="0" err="1"/>
+              <a:t>en.wikipedia.org</a:t>
+            </a:r>
+            <a:r>
+              <a:rPr lang="en-US" dirty="0"/>
+              <a:t>/wiki/MOSFET</a:t>
+            </a:r>
+          </a:p>
+        </p:txBody>
+      </p:sp>
     </p:spTree>
     <p:extLst>
       <p:ext uri="{BB962C8B-B14F-4D97-AF65-F5344CB8AC3E}">
@@ -11199,6 +11242,477 @@
       </p:pic>
       <p:grpSp>
         <p:nvGrpSpPr>
+          <p:cNvPr id="43" name="Group 42" descr="A diagram of a Not gate implemented with a single PMOS transistor and one resistor between the output and ground.  ">
+            <a:extLst>
+              <a:ext uri="{FF2B5EF4-FFF2-40B4-BE49-F238E27FC236}">
+                <a16:creationId xmlns:a16="http://schemas.microsoft.com/office/drawing/2014/main" id="{27C5DEA0-3FB9-B517-F098-DBD76E22ED1B}"/>
+              </a:ext>
+            </a:extLst>
+          </p:cNvPr>
+          <p:cNvGrpSpPr/>
+          <p:nvPr/>
+        </p:nvGrpSpPr>
+        <p:grpSpPr>
+          <a:xfrm>
+            <a:off x="1456814" y="2148052"/>
+            <a:ext cx="2811183" cy="3211026"/>
+            <a:chOff x="1456814" y="2148052"/>
+            <a:chExt cx="2811183" cy="3211026"/>
+          </a:xfrm>
+        </p:grpSpPr>
+        <p:pic>
+          <p:nvPicPr>
+            <p:cNvPr id="30" name="Picture 29" descr="A diagram of a NOT gate using a single PMOS transistor with a resistor between the output and ground.  There is an emoji suggesting that the resistor is getting very warm.">
+              <a:extLst>
+                <a:ext uri="{FF2B5EF4-FFF2-40B4-BE49-F238E27FC236}">
+                  <a16:creationId xmlns:a16="http://schemas.microsoft.com/office/drawing/2014/main" id="{1BF623EB-E2CD-684E-6E87-24759B02528C}"/>
+                </a:ext>
+              </a:extLst>
+            </p:cNvPr>
+            <p:cNvPicPr>
+              <a:picLocks noChangeAspect="1"/>
+            </p:cNvPicPr>
+            <p:nvPr/>
+          </p:nvPicPr>
+          <p:blipFill>
+            <a:blip r:embed="rId4"/>
+            <a:stretch>
+              <a:fillRect/>
+            </a:stretch>
+          </p:blipFill>
+          <p:spPr>
+            <a:xfrm>
+              <a:off x="1811928" y="2362200"/>
+              <a:ext cx="1761648" cy="2565400"/>
+            </a:xfrm>
+            <a:prstGeom prst="rect">
+              <a:avLst/>
+            </a:prstGeom>
+          </p:spPr>
+        </p:pic>
+        <p:sp>
+          <p:nvSpPr>
+            <p:cNvPr id="33" name="TextBox 32" descr="A diagram of a NOT gate using a single PMOS transistor with a resistor.  There is an emoji suggesting that the resistor is getting very warm.">
+              <a:extLst>
+                <a:ext uri="{FF2B5EF4-FFF2-40B4-BE49-F238E27FC236}">
+                  <a16:creationId xmlns:a16="http://schemas.microsoft.com/office/drawing/2014/main" id="{385BC9FB-2127-0899-9E13-E71A41C8A484}"/>
+                </a:ext>
+              </a:extLst>
+            </p:cNvPr>
+            <p:cNvSpPr txBox="1"/>
+            <p:nvPr/>
+          </p:nvSpPr>
+          <p:spPr>
+            <a:xfrm>
+              <a:off x="2694986" y="4774303"/>
+              <a:ext cx="499109" cy="584775"/>
+            </a:xfrm>
+            <a:prstGeom prst="rect">
+              <a:avLst/>
+            </a:prstGeom>
+            <a:noFill/>
+            <a:ln>
+              <a:noFill/>
+            </a:ln>
+          </p:spPr>
+          <p:txBody>
+            <a:bodyPr wrap="square" rtlCol="0">
+              <a:spAutoFit/>
+            </a:bodyPr>
+            <a:lstStyle/>
+            <a:p>
+              <a:r>
+                <a:rPr lang="en-US" sz="3200" dirty="0"/>
+                <a:t>⏚</a:t>
+              </a:r>
+            </a:p>
+          </p:txBody>
+        </p:sp>
+        <p:sp>
+          <p:nvSpPr>
+            <p:cNvPr id="34" name="TextBox 33" descr="A diagram of a NOT gate using a single PMOS transistor with a resistor.  There is an emoji suggesting that the resistor is getting very warm.">
+              <a:extLst>
+                <a:ext uri="{FF2B5EF4-FFF2-40B4-BE49-F238E27FC236}">
+                  <a16:creationId xmlns:a16="http://schemas.microsoft.com/office/drawing/2014/main" id="{836FDE38-5796-DCC8-C4D1-EB93DA131801}"/>
+                </a:ext>
+              </a:extLst>
+            </p:cNvPr>
+            <p:cNvSpPr txBox="1"/>
+            <p:nvPr/>
+          </p:nvSpPr>
+          <p:spPr>
+            <a:xfrm>
+              <a:off x="1456814" y="2823061"/>
+              <a:ext cx="402674" cy="523220"/>
+            </a:xfrm>
+            <a:prstGeom prst="rect">
+              <a:avLst/>
+            </a:prstGeom>
+            <a:solidFill>
+              <a:schemeClr val="bg1"/>
+            </a:solidFill>
+          </p:spPr>
+          <p:txBody>
+            <a:bodyPr wrap="none" rtlCol="0">
+              <a:spAutoFit/>
+            </a:bodyPr>
+            <a:lstStyle/>
+            <a:p>
+              <a:r>
+                <a:rPr lang="en-US" sz="2800" dirty="0"/>
+                <a:t>A</a:t>
+              </a:r>
+            </a:p>
+          </p:txBody>
+        </p:sp>
+        <p:sp>
+          <p:nvSpPr>
+            <p:cNvPr id="35" name="TextBox 34" descr="A diagram of a NOT gate using a single PMOS transistor with a resistor.  There is an emoji suggesting that the resistor is getting very warm.">
+              <a:extLst>
+                <a:ext uri="{FF2B5EF4-FFF2-40B4-BE49-F238E27FC236}">
+                  <a16:creationId xmlns:a16="http://schemas.microsoft.com/office/drawing/2014/main" id="{E5ECC3E6-0DAD-3D58-BC59-D35A288DB187}"/>
+                </a:ext>
+              </a:extLst>
+            </p:cNvPr>
+            <p:cNvSpPr txBox="1"/>
+            <p:nvPr/>
+          </p:nvSpPr>
+          <p:spPr>
+            <a:xfrm>
+              <a:off x="3573576" y="3429000"/>
+              <a:ext cx="694421" cy="523220"/>
+            </a:xfrm>
+            <a:prstGeom prst="rect">
+              <a:avLst/>
+            </a:prstGeom>
+            <a:solidFill>
+              <a:schemeClr val="bg1"/>
+            </a:solidFill>
+          </p:spPr>
+          <p:txBody>
+            <a:bodyPr wrap="none" rtlCol="0">
+              <a:spAutoFit/>
+            </a:bodyPr>
+            <a:lstStyle/>
+            <a:p>
+              <a:r>
+                <a:rPr lang="en-US" sz="2800" dirty="0"/>
+                <a:t>out</a:t>
+              </a:r>
+            </a:p>
+          </p:txBody>
+        </p:sp>
+        <p:sp>
+          <p:nvSpPr>
+            <p:cNvPr id="37" name="TextBox 36" descr="A diagram of a NOT gate using a single PMOS transistor with a resistor.  There is an emoji suggesting that the resistor is getting very warm.">
+              <a:extLst>
+                <a:ext uri="{FF2B5EF4-FFF2-40B4-BE49-F238E27FC236}">
+                  <a16:creationId xmlns:a16="http://schemas.microsoft.com/office/drawing/2014/main" id="{31D4F100-164A-923C-98B5-99A334C2E694}"/>
+                </a:ext>
+              </a:extLst>
+            </p:cNvPr>
+            <p:cNvSpPr txBox="1"/>
+            <p:nvPr/>
+          </p:nvSpPr>
+          <p:spPr>
+            <a:xfrm>
+              <a:off x="1477075" y="2148052"/>
+              <a:ext cx="764825" cy="523220"/>
+            </a:xfrm>
+            <a:prstGeom prst="rect">
+              <a:avLst/>
+            </a:prstGeom>
+            <a:solidFill>
+              <a:schemeClr val="bg1"/>
+            </a:solidFill>
+          </p:spPr>
+          <p:txBody>
+            <a:bodyPr wrap="none" rtlCol="0">
+              <a:spAutoFit/>
+            </a:bodyPr>
+            <a:lstStyle/>
+            <a:p>
+              <a:r>
+                <a:rPr lang="en-US" sz="2800" dirty="0" err="1"/>
+                <a:t>Vdd</a:t>
+              </a:r>
+              <a:endParaRPr lang="en-US" sz="2800" dirty="0"/>
+            </a:p>
+          </p:txBody>
+        </p:sp>
+      </p:grpSp>
+      <p:sp>
+        <p:nvSpPr>
+          <p:cNvPr id="36" name="TextBox 35">
+            <a:extLst>
+              <a:ext uri="{FF2B5EF4-FFF2-40B4-BE49-F238E27FC236}">
+                <a16:creationId xmlns:a16="http://schemas.microsoft.com/office/drawing/2014/main" id="{ED111901-C355-EFA8-EB2A-364A755803E3}"/>
+              </a:ext>
+            </a:extLst>
+          </p:cNvPr>
+          <p:cNvSpPr txBox="1"/>
+          <p:nvPr/>
+        </p:nvSpPr>
+        <p:spPr>
+          <a:xfrm>
+            <a:off x="1991278" y="5505866"/>
+            <a:ext cx="1402948" cy="369332"/>
+          </a:xfrm>
+          <a:prstGeom prst="rect">
+            <a:avLst/>
+          </a:prstGeom>
+          <a:noFill/>
+        </p:spPr>
+        <p:txBody>
+          <a:bodyPr wrap="none" rtlCol="0">
+            <a:spAutoFit/>
+          </a:bodyPr>
+          <a:lstStyle/>
+          <a:p>
+            <a:r>
+              <a:rPr lang="en-US" dirty="0"/>
+              <a:t>PMOS - 1972</a:t>
+            </a:r>
+          </a:p>
+        </p:txBody>
+      </p:sp>
+      <p:grpSp>
+        <p:nvGrpSpPr>
+          <p:cNvPr id="62" name="Group 61" descr="A diagram of a Not gate implemented with a single NMOS transistor and one resistor between the VDD and output.  ">
+            <a:extLst>
+              <a:ext uri="{FF2B5EF4-FFF2-40B4-BE49-F238E27FC236}">
+                <a16:creationId xmlns:a16="http://schemas.microsoft.com/office/drawing/2014/main" id="{7BD3DE12-C23B-D745-7B66-D6A7835B857F}"/>
+              </a:ext>
+            </a:extLst>
+          </p:cNvPr>
+          <p:cNvGrpSpPr/>
+          <p:nvPr/>
+        </p:nvGrpSpPr>
+        <p:grpSpPr>
+          <a:xfrm>
+            <a:off x="5023686" y="2100590"/>
+            <a:ext cx="2785743" cy="3284784"/>
+            <a:chOff x="5023686" y="2100590"/>
+            <a:chExt cx="2785743" cy="3284784"/>
+          </a:xfrm>
+        </p:grpSpPr>
+        <p:pic>
+          <p:nvPicPr>
+            <p:cNvPr id="6" name="Picture 5" descr="A diagram of a Not gate implemented with a single transistor using NMOS.  ">
+              <a:extLst>
+                <a:ext uri="{FF2B5EF4-FFF2-40B4-BE49-F238E27FC236}">
+                  <a16:creationId xmlns:a16="http://schemas.microsoft.com/office/drawing/2014/main" id="{E69AE0A8-8B4D-0A07-E439-880CA332D2FB}"/>
+                </a:ext>
+              </a:extLst>
+            </p:cNvPr>
+            <p:cNvPicPr>
+              <a:picLocks noChangeAspect="1"/>
+            </p:cNvPicPr>
+            <p:nvPr/>
+          </p:nvPicPr>
+          <p:blipFill>
+            <a:blip r:embed="rId5"/>
+            <a:srcRect t="8422" b="29088"/>
+            <a:stretch/>
+          </p:blipFill>
+          <p:spPr>
+            <a:xfrm>
+              <a:off x="5042485" y="2362200"/>
+              <a:ext cx="2411830" cy="2565400"/>
+            </a:xfrm>
+            <a:prstGeom prst="rect">
+              <a:avLst/>
+            </a:prstGeom>
+          </p:spPr>
+        </p:pic>
+        <p:sp>
+          <p:nvSpPr>
+            <p:cNvPr id="9" name="TextBox 8">
+              <a:extLst>
+                <a:ext uri="{FF2B5EF4-FFF2-40B4-BE49-F238E27FC236}">
+                  <a16:creationId xmlns:a16="http://schemas.microsoft.com/office/drawing/2014/main" id="{AA6ADF24-2710-7D89-9D32-92172F859856}"/>
+                </a:ext>
+              </a:extLst>
+            </p:cNvPr>
+            <p:cNvSpPr txBox="1"/>
+            <p:nvPr/>
+          </p:nvSpPr>
+          <p:spPr>
+            <a:xfrm>
+              <a:off x="5023686" y="4056515"/>
+              <a:ext cx="402674" cy="523220"/>
+            </a:xfrm>
+            <a:prstGeom prst="rect">
+              <a:avLst/>
+            </a:prstGeom>
+            <a:solidFill>
+              <a:schemeClr val="bg1"/>
+            </a:solidFill>
+          </p:spPr>
+          <p:txBody>
+            <a:bodyPr wrap="none" rtlCol="0">
+              <a:spAutoFit/>
+            </a:bodyPr>
+            <a:lstStyle/>
+            <a:p>
+              <a:r>
+                <a:rPr lang="en-US" sz="2800" dirty="0"/>
+                <a:t>A</a:t>
+              </a:r>
+            </a:p>
+          </p:txBody>
+        </p:sp>
+        <p:sp>
+          <p:nvSpPr>
+            <p:cNvPr id="10" name="TextBox 9">
+              <a:extLst>
+                <a:ext uri="{FF2B5EF4-FFF2-40B4-BE49-F238E27FC236}">
+                  <a16:creationId xmlns:a16="http://schemas.microsoft.com/office/drawing/2014/main" id="{0787FDF0-687D-E7EC-F5CA-1DCF2217E972}"/>
+                </a:ext>
+              </a:extLst>
+            </p:cNvPr>
+            <p:cNvSpPr txBox="1"/>
+            <p:nvPr/>
+          </p:nvSpPr>
+          <p:spPr>
+            <a:xfrm>
+              <a:off x="5043947" y="2100590"/>
+              <a:ext cx="764825" cy="523220"/>
+            </a:xfrm>
+            <a:prstGeom prst="rect">
+              <a:avLst/>
+            </a:prstGeom>
+            <a:solidFill>
+              <a:schemeClr val="bg1"/>
+            </a:solidFill>
+          </p:spPr>
+          <p:txBody>
+            <a:bodyPr wrap="none" rtlCol="0">
+              <a:spAutoFit/>
+            </a:bodyPr>
+            <a:lstStyle/>
+            <a:p>
+              <a:r>
+                <a:rPr lang="en-US" sz="2800" dirty="0" err="1"/>
+                <a:t>Vdd</a:t>
+              </a:r>
+              <a:endParaRPr lang="en-US" sz="2800" dirty="0"/>
+            </a:p>
+          </p:txBody>
+        </p:sp>
+        <p:sp>
+          <p:nvSpPr>
+            <p:cNvPr id="12" name="TextBox 11">
+              <a:extLst>
+                <a:ext uri="{FF2B5EF4-FFF2-40B4-BE49-F238E27FC236}">
+                  <a16:creationId xmlns:a16="http://schemas.microsoft.com/office/drawing/2014/main" id="{09C7CDD7-9288-835F-8CF4-0056E648D76F}"/>
+                </a:ext>
+              </a:extLst>
+            </p:cNvPr>
+            <p:cNvSpPr txBox="1"/>
+            <p:nvPr/>
+          </p:nvSpPr>
+          <p:spPr>
+            <a:xfrm>
+              <a:off x="7115008" y="3334460"/>
+              <a:ext cx="694421" cy="523220"/>
+            </a:xfrm>
+            <a:prstGeom prst="rect">
+              <a:avLst/>
+            </a:prstGeom>
+            <a:solidFill>
+              <a:schemeClr val="bg1"/>
+            </a:solidFill>
+          </p:spPr>
+          <p:txBody>
+            <a:bodyPr wrap="none" rtlCol="0">
+              <a:spAutoFit/>
+            </a:bodyPr>
+            <a:lstStyle/>
+            <a:p>
+              <a:r>
+                <a:rPr lang="en-US" sz="2800" dirty="0"/>
+                <a:t>out</a:t>
+              </a:r>
+            </a:p>
+          </p:txBody>
+        </p:sp>
+        <p:sp>
+          <p:nvSpPr>
+            <p:cNvPr id="16" name="TextBox 15">
+              <a:extLst>
+                <a:ext uri="{FF2B5EF4-FFF2-40B4-BE49-F238E27FC236}">
+                  <a16:creationId xmlns:a16="http://schemas.microsoft.com/office/drawing/2014/main" id="{4FCCB9EB-1B02-F242-8BB1-036360975E5D}"/>
+                </a:ext>
+              </a:extLst>
+            </p:cNvPr>
+            <p:cNvSpPr txBox="1"/>
+            <p:nvPr/>
+          </p:nvSpPr>
+          <p:spPr>
+            <a:xfrm>
+              <a:off x="6135214" y="4800599"/>
+              <a:ext cx="499109" cy="584775"/>
+            </a:xfrm>
+            <a:prstGeom prst="rect">
+              <a:avLst/>
+            </a:prstGeom>
+            <a:noFill/>
+            <a:ln>
+              <a:noFill/>
+            </a:ln>
+          </p:spPr>
+          <p:txBody>
+            <a:bodyPr wrap="square" rtlCol="0">
+              <a:spAutoFit/>
+            </a:bodyPr>
+            <a:lstStyle/>
+            <a:p>
+              <a:r>
+                <a:rPr lang="en-US" sz="3200" dirty="0"/>
+                <a:t>⏚</a:t>
+              </a:r>
+            </a:p>
+          </p:txBody>
+        </p:sp>
+      </p:grpSp>
+      <p:sp>
+        <p:nvSpPr>
+          <p:cNvPr id="20" name="TextBox 19">
+            <a:extLst>
+              <a:ext uri="{FF2B5EF4-FFF2-40B4-BE49-F238E27FC236}">
+                <a16:creationId xmlns:a16="http://schemas.microsoft.com/office/drawing/2014/main" id="{29357D55-FBB1-EA93-FAE0-B32BFB75B5CB}"/>
+              </a:ext>
+            </a:extLst>
+          </p:cNvPr>
+          <p:cNvSpPr txBox="1"/>
+          <p:nvPr/>
+        </p:nvSpPr>
+        <p:spPr>
+          <a:xfrm>
+            <a:off x="5537628" y="5481588"/>
+            <a:ext cx="1433406" cy="369332"/>
+          </a:xfrm>
+          <a:prstGeom prst="rect">
+            <a:avLst/>
+          </a:prstGeom>
+          <a:noFill/>
+        </p:spPr>
+        <p:txBody>
+          <a:bodyPr wrap="none" rtlCol="0">
+            <a:spAutoFit/>
+          </a:bodyPr>
+          <a:lstStyle/>
+          <a:p>
+            <a:r>
+              <a:rPr lang="en-US" dirty="0"/>
+              <a:t>NMOS - 1978</a:t>
+            </a:r>
+          </a:p>
+        </p:txBody>
+      </p:sp>
+      <p:grpSp>
+        <p:nvGrpSpPr>
           <p:cNvPr id="47" name="Group 46" descr="A diagram of a Not gate implemented with two transistors using CMOS.  The input is connected to the gate of PMOS and NMOS transistors. If the input is 0, the PMOS transistor opened and the NMOS transistor closed so VDD is connected to the output.   If the input is 1, the PMOS transistor closes and the NMOS transistor opens and ground is connected to the output.  ">
             <a:extLst>
               <a:ext uri="{FF2B5EF4-FFF2-40B4-BE49-F238E27FC236}">
@@ -11232,7 +11746,7 @@
             <p:nvPr/>
           </p:nvPicPr>
           <p:blipFill>
-            <a:blip r:embed="rId4" cstate="print">
+            <a:blip r:embed="rId6" cstate="print">
               <a:extLst>
                 <a:ext uri="{28A0092B-C50C-407E-A947-70E740481C1C}">
                   <a14:useLocalDpi xmlns:a14="http://schemas.microsoft.com/office/drawing/2010/main"/>
@@ -11402,41 +11916,6 @@
       </p:grpSp>
       <p:sp>
         <p:nvSpPr>
-          <p:cNvPr id="20" name="TextBox 19">
-            <a:extLst>
-              <a:ext uri="{FF2B5EF4-FFF2-40B4-BE49-F238E27FC236}">
-                <a16:creationId xmlns:a16="http://schemas.microsoft.com/office/drawing/2014/main" id="{29357D55-FBB1-EA93-FAE0-B32BFB75B5CB}"/>
-              </a:ext>
-            </a:extLst>
-          </p:cNvPr>
-          <p:cNvSpPr txBox="1"/>
-          <p:nvPr/>
-        </p:nvSpPr>
-        <p:spPr>
-          <a:xfrm>
-            <a:off x="5537628" y="5481588"/>
-            <a:ext cx="1433406" cy="369332"/>
-          </a:xfrm>
-          <a:prstGeom prst="rect">
-            <a:avLst/>
-          </a:prstGeom>
-          <a:noFill/>
-        </p:spPr>
-        <p:txBody>
-          <a:bodyPr wrap="none" rtlCol="0">
-            <a:spAutoFit/>
-          </a:bodyPr>
-          <a:lstStyle/>
-          <a:p>
-            <a:r>
-              <a:rPr lang="en-US" dirty="0"/>
-              <a:t>NMOS - 1978</a:t>
-            </a:r>
-          </a:p>
-        </p:txBody>
-      </p:sp>
-      <p:sp>
-        <p:nvSpPr>
           <p:cNvPr id="21" name="TextBox 20">
             <a:extLst>
               <a:ext uri="{FF2B5EF4-FFF2-40B4-BE49-F238E27FC236}">
@@ -11470,442 +11949,6 @@
           </a:p>
         </p:txBody>
       </p:sp>
-      <p:sp>
-        <p:nvSpPr>
-          <p:cNvPr id="36" name="TextBox 35">
-            <a:extLst>
-              <a:ext uri="{FF2B5EF4-FFF2-40B4-BE49-F238E27FC236}">
-                <a16:creationId xmlns:a16="http://schemas.microsoft.com/office/drawing/2014/main" id="{ED111901-C355-EFA8-EB2A-364A755803E3}"/>
-              </a:ext>
-            </a:extLst>
-          </p:cNvPr>
-          <p:cNvSpPr txBox="1"/>
-          <p:nvPr/>
-        </p:nvSpPr>
-        <p:spPr>
-          <a:xfrm>
-            <a:off x="1991278" y="5505866"/>
-            <a:ext cx="1402948" cy="369332"/>
-          </a:xfrm>
-          <a:prstGeom prst="rect">
-            <a:avLst/>
-          </a:prstGeom>
-          <a:noFill/>
-        </p:spPr>
-        <p:txBody>
-          <a:bodyPr wrap="none" rtlCol="0">
-            <a:spAutoFit/>
-          </a:bodyPr>
-          <a:lstStyle/>
-          <a:p>
-            <a:r>
-              <a:rPr lang="en-US" dirty="0"/>
-              <a:t>PMOS - 1972</a:t>
-            </a:r>
-          </a:p>
-        </p:txBody>
-      </p:sp>
-      <p:grpSp>
-        <p:nvGrpSpPr>
-          <p:cNvPr id="43" name="Group 42" descr="A diagram of a Not gate implemented with a single PMOS transistor and one resistor between the output and ground.  ">
-            <a:extLst>
-              <a:ext uri="{FF2B5EF4-FFF2-40B4-BE49-F238E27FC236}">
-                <a16:creationId xmlns:a16="http://schemas.microsoft.com/office/drawing/2014/main" id="{27C5DEA0-3FB9-B517-F098-DBD76E22ED1B}"/>
-              </a:ext>
-            </a:extLst>
-          </p:cNvPr>
-          <p:cNvGrpSpPr/>
-          <p:nvPr/>
-        </p:nvGrpSpPr>
-        <p:grpSpPr>
-          <a:xfrm>
-            <a:off x="1456814" y="2148052"/>
-            <a:ext cx="2811183" cy="3211026"/>
-            <a:chOff x="1456814" y="2148052"/>
-            <a:chExt cx="2811183" cy="3211026"/>
-          </a:xfrm>
-        </p:grpSpPr>
-        <p:pic>
-          <p:nvPicPr>
-            <p:cNvPr id="30" name="Picture 29" descr="A diagram of a NOT gate using a single PMOS transistor with a resistor between the output and ground.  There is an emoji suggesting that the resistor is getting very warm.">
-              <a:extLst>
-                <a:ext uri="{FF2B5EF4-FFF2-40B4-BE49-F238E27FC236}">
-                  <a16:creationId xmlns:a16="http://schemas.microsoft.com/office/drawing/2014/main" id="{1BF623EB-E2CD-684E-6E87-24759B02528C}"/>
-                </a:ext>
-              </a:extLst>
-            </p:cNvPr>
-            <p:cNvPicPr>
-              <a:picLocks noChangeAspect="1"/>
-            </p:cNvPicPr>
-            <p:nvPr/>
-          </p:nvPicPr>
-          <p:blipFill>
-            <a:blip r:embed="rId5"/>
-            <a:stretch>
-              <a:fillRect/>
-            </a:stretch>
-          </p:blipFill>
-          <p:spPr>
-            <a:xfrm>
-              <a:off x="1811928" y="2362200"/>
-              <a:ext cx="1761648" cy="2565400"/>
-            </a:xfrm>
-            <a:prstGeom prst="rect">
-              <a:avLst/>
-            </a:prstGeom>
-          </p:spPr>
-        </p:pic>
-        <p:sp>
-          <p:nvSpPr>
-            <p:cNvPr id="33" name="TextBox 32" descr="A diagram of a NOT gate using a single PMOS transistor with a resistor.  There is an emoji suggesting that the resistor is getting very warm.">
-              <a:extLst>
-                <a:ext uri="{FF2B5EF4-FFF2-40B4-BE49-F238E27FC236}">
-                  <a16:creationId xmlns:a16="http://schemas.microsoft.com/office/drawing/2014/main" id="{385BC9FB-2127-0899-9E13-E71A41C8A484}"/>
-                </a:ext>
-              </a:extLst>
-            </p:cNvPr>
-            <p:cNvSpPr txBox="1"/>
-            <p:nvPr/>
-          </p:nvSpPr>
-          <p:spPr>
-            <a:xfrm>
-              <a:off x="2694986" y="4774303"/>
-              <a:ext cx="499109" cy="584775"/>
-            </a:xfrm>
-            <a:prstGeom prst="rect">
-              <a:avLst/>
-            </a:prstGeom>
-            <a:noFill/>
-            <a:ln>
-              <a:noFill/>
-            </a:ln>
-          </p:spPr>
-          <p:txBody>
-            <a:bodyPr wrap="square" rtlCol="0">
-              <a:spAutoFit/>
-            </a:bodyPr>
-            <a:lstStyle/>
-            <a:p>
-              <a:r>
-                <a:rPr lang="en-US" sz="3200" dirty="0"/>
-                <a:t>⏚</a:t>
-              </a:r>
-            </a:p>
-          </p:txBody>
-        </p:sp>
-        <p:sp>
-          <p:nvSpPr>
-            <p:cNvPr id="34" name="TextBox 33" descr="A diagram of a NOT gate using a single PMOS transistor with a resistor.  There is an emoji suggesting that the resistor is getting very warm.">
-              <a:extLst>
-                <a:ext uri="{FF2B5EF4-FFF2-40B4-BE49-F238E27FC236}">
-                  <a16:creationId xmlns:a16="http://schemas.microsoft.com/office/drawing/2014/main" id="{836FDE38-5796-DCC8-C4D1-EB93DA131801}"/>
-                </a:ext>
-              </a:extLst>
-            </p:cNvPr>
-            <p:cNvSpPr txBox="1"/>
-            <p:nvPr/>
-          </p:nvSpPr>
-          <p:spPr>
-            <a:xfrm>
-              <a:off x="1456814" y="2823061"/>
-              <a:ext cx="402674" cy="523220"/>
-            </a:xfrm>
-            <a:prstGeom prst="rect">
-              <a:avLst/>
-            </a:prstGeom>
-            <a:solidFill>
-              <a:schemeClr val="bg1"/>
-            </a:solidFill>
-          </p:spPr>
-          <p:txBody>
-            <a:bodyPr wrap="none" rtlCol="0">
-              <a:spAutoFit/>
-            </a:bodyPr>
-            <a:lstStyle/>
-            <a:p>
-              <a:r>
-                <a:rPr lang="en-US" sz="2800" dirty="0"/>
-                <a:t>A</a:t>
-              </a:r>
-            </a:p>
-          </p:txBody>
-        </p:sp>
-        <p:sp>
-          <p:nvSpPr>
-            <p:cNvPr id="35" name="TextBox 34" descr="A diagram of a NOT gate using a single PMOS transistor with a resistor.  There is an emoji suggesting that the resistor is getting very warm.">
-              <a:extLst>
-                <a:ext uri="{FF2B5EF4-FFF2-40B4-BE49-F238E27FC236}">
-                  <a16:creationId xmlns:a16="http://schemas.microsoft.com/office/drawing/2014/main" id="{E5ECC3E6-0DAD-3D58-BC59-D35A288DB187}"/>
-                </a:ext>
-              </a:extLst>
-            </p:cNvPr>
-            <p:cNvSpPr txBox="1"/>
-            <p:nvPr/>
-          </p:nvSpPr>
-          <p:spPr>
-            <a:xfrm>
-              <a:off x="3573576" y="3429000"/>
-              <a:ext cx="694421" cy="523220"/>
-            </a:xfrm>
-            <a:prstGeom prst="rect">
-              <a:avLst/>
-            </a:prstGeom>
-            <a:solidFill>
-              <a:schemeClr val="bg1"/>
-            </a:solidFill>
-          </p:spPr>
-          <p:txBody>
-            <a:bodyPr wrap="none" rtlCol="0">
-              <a:spAutoFit/>
-            </a:bodyPr>
-            <a:lstStyle/>
-            <a:p>
-              <a:r>
-                <a:rPr lang="en-US" sz="2800" dirty="0"/>
-                <a:t>out</a:t>
-              </a:r>
-            </a:p>
-          </p:txBody>
-        </p:sp>
-        <p:sp>
-          <p:nvSpPr>
-            <p:cNvPr id="37" name="TextBox 36" descr="A diagram of a NOT gate using a single PMOS transistor with a resistor.  There is an emoji suggesting that the resistor is getting very warm.">
-              <a:extLst>
-                <a:ext uri="{FF2B5EF4-FFF2-40B4-BE49-F238E27FC236}">
-                  <a16:creationId xmlns:a16="http://schemas.microsoft.com/office/drawing/2014/main" id="{31D4F100-164A-923C-98B5-99A334C2E694}"/>
-                </a:ext>
-              </a:extLst>
-            </p:cNvPr>
-            <p:cNvSpPr txBox="1"/>
-            <p:nvPr/>
-          </p:nvSpPr>
-          <p:spPr>
-            <a:xfrm>
-              <a:off x="1477075" y="2148052"/>
-              <a:ext cx="764825" cy="523220"/>
-            </a:xfrm>
-            <a:prstGeom prst="rect">
-              <a:avLst/>
-            </a:prstGeom>
-            <a:solidFill>
-              <a:schemeClr val="bg1"/>
-            </a:solidFill>
-          </p:spPr>
-          <p:txBody>
-            <a:bodyPr wrap="none" rtlCol="0">
-              <a:spAutoFit/>
-            </a:bodyPr>
-            <a:lstStyle/>
-            <a:p>
-              <a:r>
-                <a:rPr lang="en-US" sz="2800" dirty="0" err="1"/>
-                <a:t>Vdd</a:t>
-              </a:r>
-              <a:endParaRPr lang="en-US" sz="2800" dirty="0"/>
-            </a:p>
-          </p:txBody>
-        </p:sp>
-      </p:grpSp>
-      <p:grpSp>
-        <p:nvGrpSpPr>
-          <p:cNvPr id="62" name="Group 61" descr="A diagram of a Not gate implemented with a single NMOS transistor and one resistor between the VDD and output.  ">
-            <a:extLst>
-              <a:ext uri="{FF2B5EF4-FFF2-40B4-BE49-F238E27FC236}">
-                <a16:creationId xmlns:a16="http://schemas.microsoft.com/office/drawing/2014/main" id="{7BD3DE12-C23B-D745-7B66-D6A7835B857F}"/>
-              </a:ext>
-            </a:extLst>
-          </p:cNvPr>
-          <p:cNvGrpSpPr/>
-          <p:nvPr/>
-        </p:nvGrpSpPr>
-        <p:grpSpPr>
-          <a:xfrm>
-            <a:off x="5023686" y="2100590"/>
-            <a:ext cx="2785743" cy="3284784"/>
-            <a:chOff x="5023686" y="2100590"/>
-            <a:chExt cx="2785743" cy="3284784"/>
-          </a:xfrm>
-        </p:grpSpPr>
-        <p:pic>
-          <p:nvPicPr>
-            <p:cNvPr id="6" name="Picture 5" descr="A diagram of a Not gate implemented with a single transistor using NMOS.  ">
-              <a:extLst>
-                <a:ext uri="{FF2B5EF4-FFF2-40B4-BE49-F238E27FC236}">
-                  <a16:creationId xmlns:a16="http://schemas.microsoft.com/office/drawing/2014/main" id="{E69AE0A8-8B4D-0A07-E439-880CA332D2FB}"/>
-                </a:ext>
-              </a:extLst>
-            </p:cNvPr>
-            <p:cNvPicPr>
-              <a:picLocks noChangeAspect="1"/>
-            </p:cNvPicPr>
-            <p:nvPr/>
-          </p:nvPicPr>
-          <p:blipFill>
-            <a:blip r:embed="rId6"/>
-            <a:srcRect t="8422" b="29088"/>
-            <a:stretch/>
-          </p:blipFill>
-          <p:spPr>
-            <a:xfrm>
-              <a:off x="5042485" y="2362200"/>
-              <a:ext cx="2411830" cy="2565400"/>
-            </a:xfrm>
-            <a:prstGeom prst="rect">
-              <a:avLst/>
-            </a:prstGeom>
-          </p:spPr>
-        </p:pic>
-        <p:sp>
-          <p:nvSpPr>
-            <p:cNvPr id="9" name="TextBox 8">
-              <a:extLst>
-                <a:ext uri="{FF2B5EF4-FFF2-40B4-BE49-F238E27FC236}">
-                  <a16:creationId xmlns:a16="http://schemas.microsoft.com/office/drawing/2014/main" id="{AA6ADF24-2710-7D89-9D32-92172F859856}"/>
-                </a:ext>
-              </a:extLst>
-            </p:cNvPr>
-            <p:cNvSpPr txBox="1"/>
-            <p:nvPr/>
-          </p:nvSpPr>
-          <p:spPr>
-            <a:xfrm>
-              <a:off x="5023686" y="4056515"/>
-              <a:ext cx="402674" cy="523220"/>
-            </a:xfrm>
-            <a:prstGeom prst="rect">
-              <a:avLst/>
-            </a:prstGeom>
-            <a:solidFill>
-              <a:schemeClr val="bg1"/>
-            </a:solidFill>
-          </p:spPr>
-          <p:txBody>
-            <a:bodyPr wrap="none" rtlCol="0">
-              <a:spAutoFit/>
-            </a:bodyPr>
-            <a:lstStyle/>
-            <a:p>
-              <a:r>
-                <a:rPr lang="en-US" sz="2800" dirty="0"/>
-                <a:t>A</a:t>
-              </a:r>
-            </a:p>
-          </p:txBody>
-        </p:sp>
-        <p:sp>
-          <p:nvSpPr>
-            <p:cNvPr id="10" name="TextBox 9">
-              <a:extLst>
-                <a:ext uri="{FF2B5EF4-FFF2-40B4-BE49-F238E27FC236}">
-                  <a16:creationId xmlns:a16="http://schemas.microsoft.com/office/drawing/2014/main" id="{0787FDF0-687D-E7EC-F5CA-1DCF2217E972}"/>
-                </a:ext>
-              </a:extLst>
-            </p:cNvPr>
-            <p:cNvSpPr txBox="1"/>
-            <p:nvPr/>
-          </p:nvSpPr>
-          <p:spPr>
-            <a:xfrm>
-              <a:off x="5043947" y="2100590"/>
-              <a:ext cx="764825" cy="523220"/>
-            </a:xfrm>
-            <a:prstGeom prst="rect">
-              <a:avLst/>
-            </a:prstGeom>
-            <a:solidFill>
-              <a:schemeClr val="bg1"/>
-            </a:solidFill>
-          </p:spPr>
-          <p:txBody>
-            <a:bodyPr wrap="none" rtlCol="0">
-              <a:spAutoFit/>
-            </a:bodyPr>
-            <a:lstStyle/>
-            <a:p>
-              <a:r>
-                <a:rPr lang="en-US" sz="2800" dirty="0" err="1"/>
-                <a:t>Vdd</a:t>
-              </a:r>
-              <a:endParaRPr lang="en-US" sz="2800" dirty="0"/>
-            </a:p>
-          </p:txBody>
-        </p:sp>
-        <p:sp>
-          <p:nvSpPr>
-            <p:cNvPr id="12" name="TextBox 11">
-              <a:extLst>
-                <a:ext uri="{FF2B5EF4-FFF2-40B4-BE49-F238E27FC236}">
-                  <a16:creationId xmlns:a16="http://schemas.microsoft.com/office/drawing/2014/main" id="{09C7CDD7-9288-835F-8CF4-0056E648D76F}"/>
-                </a:ext>
-              </a:extLst>
-            </p:cNvPr>
-            <p:cNvSpPr txBox="1"/>
-            <p:nvPr/>
-          </p:nvSpPr>
-          <p:spPr>
-            <a:xfrm>
-              <a:off x="7115008" y="3334460"/>
-              <a:ext cx="694421" cy="523220"/>
-            </a:xfrm>
-            <a:prstGeom prst="rect">
-              <a:avLst/>
-            </a:prstGeom>
-            <a:solidFill>
-              <a:schemeClr val="bg1"/>
-            </a:solidFill>
-          </p:spPr>
-          <p:txBody>
-            <a:bodyPr wrap="none" rtlCol="0">
-              <a:spAutoFit/>
-            </a:bodyPr>
-            <a:lstStyle/>
-            <a:p>
-              <a:r>
-                <a:rPr lang="en-US" sz="2800" dirty="0"/>
-                <a:t>out</a:t>
-              </a:r>
-            </a:p>
-          </p:txBody>
-        </p:sp>
-        <p:sp>
-          <p:nvSpPr>
-            <p:cNvPr id="16" name="TextBox 15">
-              <a:extLst>
-                <a:ext uri="{FF2B5EF4-FFF2-40B4-BE49-F238E27FC236}">
-                  <a16:creationId xmlns:a16="http://schemas.microsoft.com/office/drawing/2014/main" id="{4FCCB9EB-1B02-F242-8BB1-036360975E5D}"/>
-                </a:ext>
-              </a:extLst>
-            </p:cNvPr>
-            <p:cNvSpPr txBox="1"/>
-            <p:nvPr/>
-          </p:nvSpPr>
-          <p:spPr>
-            <a:xfrm>
-              <a:off x="6135214" y="4800599"/>
-              <a:ext cx="499109" cy="584775"/>
-            </a:xfrm>
-            <a:prstGeom prst="rect">
-              <a:avLst/>
-            </a:prstGeom>
-            <a:noFill/>
-            <a:ln>
-              <a:noFill/>
-            </a:ln>
-          </p:spPr>
-          <p:txBody>
-            <a:bodyPr wrap="square" rtlCol="0">
-              <a:spAutoFit/>
-            </a:bodyPr>
-            <a:lstStyle/>
-            <a:p>
-              <a:r>
-                <a:rPr lang="en-US" sz="3200" dirty="0"/>
-                <a:t>⏚</a:t>
-              </a:r>
-            </a:p>
-          </p:txBody>
-        </p:sp>
-      </p:grpSp>
     </p:spTree>
     <p:extLst>
       <p:ext uri="{BB962C8B-B14F-4D97-AF65-F5344CB8AC3E}">
@@ -14904,67 +14947,6 @@
           </a:p>
         </p:txBody>
       </p:sp>
-      <p:sp>
-        <p:nvSpPr>
-          <p:cNvPr id="10" name="Content Placeholder 9">
-            <a:extLst>
-              <a:ext uri="{FF2B5EF4-FFF2-40B4-BE49-F238E27FC236}">
-                <a16:creationId xmlns:a16="http://schemas.microsoft.com/office/drawing/2014/main" id="{0CA5674C-D06D-F2B9-56A9-A2359025E0BB}"/>
-              </a:ext>
-            </a:extLst>
-          </p:cNvPr>
-          <p:cNvSpPr>
-            <a:spLocks noGrp="1"/>
-          </p:cNvSpPr>
-          <p:nvPr>
-            <p:ph idx="1"/>
-          </p:nvPr>
-        </p:nvSpPr>
-        <p:spPr>
-          <a:xfrm>
-            <a:off x="838200" y="1825625"/>
-            <a:ext cx="6874425" cy="4351338"/>
-          </a:xfrm>
-        </p:spPr>
-        <p:txBody>
-          <a:bodyPr/>
-          <a:lstStyle/>
-          <a:p>
-            <a:r>
-              <a:rPr lang="en-US" dirty="0"/>
-              <a:t>Before the 1980's, logic gates built from transistors were slow, had low density, took a lot of heat and took a lot of power.</a:t>
-            </a:r>
-          </a:p>
-          <a:p>
-            <a:r>
-              <a:rPr lang="en-US" dirty="0"/>
-              <a:t>When CMOS was practical in the 1980s, CPUS went from the size of large cabinets to single chips</a:t>
-            </a:r>
-          </a:p>
-          <a:p>
-            <a:r>
-              <a:rPr lang="en-US" dirty="0"/>
-              <a:t>As size reduced things got much faster</a:t>
-            </a:r>
-          </a:p>
-          <a:p>
-            <a:endParaRPr lang="en-US" dirty="0"/>
-          </a:p>
-          <a:p>
-            <a:r>
-              <a:rPr lang="en-US" dirty="0"/>
-              <a:t>From now on we will only speak of CMOS </a:t>
-            </a:r>
-            <a:r>
-              <a:rPr lang="en-US" dirty="0">
-                <a:sym typeface="Wingdings" pitchFamily="2" charset="2"/>
-              </a:rPr>
-              <a:t></a:t>
-            </a:r>
-            <a:endParaRPr lang="en-US" dirty="0"/>
-          </a:p>
-        </p:txBody>
-      </p:sp>
       <p:pic>
         <p:nvPicPr>
           <p:cNvPr id="3" name="Picture 2" descr="A logical Not symbol.">
@@ -15001,6 +14983,67 @@
           </a:prstGeom>
         </p:spPr>
       </p:pic>
+      <p:sp>
+        <p:nvSpPr>
+          <p:cNvPr id="10" name="Content Placeholder 9">
+            <a:extLst>
+              <a:ext uri="{FF2B5EF4-FFF2-40B4-BE49-F238E27FC236}">
+                <a16:creationId xmlns:a16="http://schemas.microsoft.com/office/drawing/2014/main" id="{0CA5674C-D06D-F2B9-56A9-A2359025E0BB}"/>
+              </a:ext>
+            </a:extLst>
+          </p:cNvPr>
+          <p:cNvSpPr>
+            <a:spLocks noGrp="1"/>
+          </p:cNvSpPr>
+          <p:nvPr>
+            <p:ph idx="1"/>
+          </p:nvPr>
+        </p:nvSpPr>
+        <p:spPr>
+          <a:xfrm>
+            <a:off x="838200" y="1825625"/>
+            <a:ext cx="6874425" cy="4351338"/>
+          </a:xfrm>
+        </p:spPr>
+        <p:txBody>
+          <a:bodyPr/>
+          <a:lstStyle/>
+          <a:p>
+            <a:r>
+              <a:rPr lang="en-US" dirty="0"/>
+              <a:t>Before the 1980's, logic gates built from transistors were slow, had low density, took a lot of heat and took a lot of power.</a:t>
+            </a:r>
+          </a:p>
+          <a:p>
+            <a:r>
+              <a:rPr lang="en-US" dirty="0"/>
+              <a:t>When CMOS was practical in the 1980s, CPUS went from the size of large cabinets to single chips</a:t>
+            </a:r>
+          </a:p>
+          <a:p>
+            <a:r>
+              <a:rPr lang="en-US" dirty="0"/>
+              <a:t>As size reduced things got much faster</a:t>
+            </a:r>
+          </a:p>
+          <a:p>
+            <a:endParaRPr lang="en-US" dirty="0"/>
+          </a:p>
+          <a:p>
+            <a:r>
+              <a:rPr lang="en-US" dirty="0"/>
+              <a:t>From now on we will only speak of CMOS </a:t>
+            </a:r>
+            <a:r>
+              <a:rPr lang="en-US" dirty="0">
+                <a:sym typeface="Wingdings" pitchFamily="2" charset="2"/>
+              </a:rPr>
+              <a:t></a:t>
+            </a:r>
+            <a:endParaRPr lang="en-US" dirty="0"/>
+          </a:p>
+        </p:txBody>
+      </p:sp>
       <p:grpSp>
         <p:nvGrpSpPr>
           <p:cNvPr id="4" name="Group 3" descr="A CMOS Not gate - it has a PMOS transistor at the top connected between VDD and the common OUT line.  It has an NMOS transistor at the bottom conneced between the common OUT line and the ground.  The Input (A) is connect to the gate input of both transistors.">
@@ -16040,80 +16083,6 @@
           </a:prstGeom>
         </p:spPr>
       </p:pic>
-      <p:pic>
-        <p:nvPicPr>
-          <p:cNvPr id="7" name="Picture 6" descr="A layout of a CMOS Not gate using an NMOS and PMOS transistor.  The input is 0 volts (ground) and the output is 5 Volts (VCC)  - the layout was done using https://www.ca4e.com/cmos/&#10;">
-            <a:extLst>
-              <a:ext uri="{FF2B5EF4-FFF2-40B4-BE49-F238E27FC236}">
-                <a16:creationId xmlns:a16="http://schemas.microsoft.com/office/drawing/2014/main" id="{09A9CCD5-6BED-F647-534A-3CF796C2034B}"/>
-              </a:ext>
-            </a:extLst>
-          </p:cNvPr>
-          <p:cNvPicPr>
-            <a:picLocks noChangeAspect="1"/>
-          </p:cNvPicPr>
-          <p:nvPr/>
-        </p:nvPicPr>
-        <p:blipFill>
-          <a:blip r:embed="rId4"/>
-          <a:stretch>
-            <a:fillRect/>
-          </a:stretch>
-        </p:blipFill>
-        <p:spPr>
-          <a:xfrm>
-            <a:off x="7315200" y="1824038"/>
-            <a:ext cx="3314700" cy="3327400"/>
-          </a:xfrm>
-          <a:prstGeom prst="rect">
-            <a:avLst/>
-          </a:prstGeom>
-        </p:spPr>
-      </p:pic>
-      <p:sp>
-        <p:nvSpPr>
-          <p:cNvPr id="5" name="TextBox 4">
-            <a:extLst>
-              <a:ext uri="{FF2B5EF4-FFF2-40B4-BE49-F238E27FC236}">
-                <a16:creationId xmlns:a16="http://schemas.microsoft.com/office/drawing/2014/main" id="{1D7E2BE4-CDC0-0AAA-0B52-355B9150414B}"/>
-              </a:ext>
-            </a:extLst>
-          </p:cNvPr>
-          <p:cNvSpPr txBox="1"/>
-          <p:nvPr/>
-        </p:nvSpPr>
-        <p:spPr>
-          <a:xfrm>
-            <a:off x="838200" y="5481410"/>
-            <a:ext cx="3987800" cy="369332"/>
-          </a:xfrm>
-          <a:prstGeom prst="rect">
-            <a:avLst/>
-          </a:prstGeom>
-          <a:noFill/>
-        </p:spPr>
-        <p:txBody>
-          <a:bodyPr wrap="square">
-            <a:spAutoFit/>
-          </a:bodyPr>
-          <a:lstStyle/>
-          <a:p>
-            <a:pPr algn="ctr"/>
-            <a:r>
-              <a:rPr lang="en-US" dirty="0"/>
-              <a:t>https://www.ca4e.com/tools/</a:t>
-            </a:r>
-            <a:r>
-              <a:rPr lang="en-US" dirty="0" err="1"/>
-              <a:t>cmos</a:t>
-            </a:r>
-            <a:r>
-              <a:rPr lang="en-US" dirty="0"/>
-              <a:t>/</a:t>
-            </a:r>
-          </a:p>
-        </p:txBody>
-      </p:sp>
       <p:grpSp>
         <p:nvGrpSpPr>
           <p:cNvPr id="32" name="Group 31" descr="A CMOS Not gate - it has a PMOS transistor at the top connected between VDD and the OUT line.  It has an NMOS transistor at the bottom conneced between the common OUT line and the ground.  The Input (A) is connect to the gate input of both transistors.&#13;&#10;">
@@ -17102,6 +17071,80 @@
           </p:style>
         </p:cxnSp>
       </p:grpSp>
+      <p:pic>
+        <p:nvPicPr>
+          <p:cNvPr id="7" name="Picture 6" descr="A layout of a CMOS Not gate using an NMOS and PMOS transistor.  The input is 0 volts (ground) and the output is 5 Volts (VCC)  - the layout was done using https://www.ca4e.com/cmos/&#10;">
+            <a:extLst>
+              <a:ext uri="{FF2B5EF4-FFF2-40B4-BE49-F238E27FC236}">
+                <a16:creationId xmlns:a16="http://schemas.microsoft.com/office/drawing/2014/main" id="{09A9CCD5-6BED-F647-534A-3CF796C2034B}"/>
+              </a:ext>
+            </a:extLst>
+          </p:cNvPr>
+          <p:cNvPicPr>
+            <a:picLocks noChangeAspect="1"/>
+          </p:cNvPicPr>
+          <p:nvPr/>
+        </p:nvPicPr>
+        <p:blipFill>
+          <a:blip r:embed="rId4"/>
+          <a:stretch>
+            <a:fillRect/>
+          </a:stretch>
+        </p:blipFill>
+        <p:spPr>
+          <a:xfrm>
+            <a:off x="7315200" y="1824038"/>
+            <a:ext cx="3314700" cy="3327400"/>
+          </a:xfrm>
+          <a:prstGeom prst="rect">
+            <a:avLst/>
+          </a:prstGeom>
+        </p:spPr>
+      </p:pic>
+      <p:sp>
+        <p:nvSpPr>
+          <p:cNvPr id="5" name="TextBox 4">
+            <a:extLst>
+              <a:ext uri="{FF2B5EF4-FFF2-40B4-BE49-F238E27FC236}">
+                <a16:creationId xmlns:a16="http://schemas.microsoft.com/office/drawing/2014/main" id="{1D7E2BE4-CDC0-0AAA-0B52-355B9150414B}"/>
+              </a:ext>
+            </a:extLst>
+          </p:cNvPr>
+          <p:cNvSpPr txBox="1"/>
+          <p:nvPr/>
+        </p:nvSpPr>
+        <p:spPr>
+          <a:xfrm>
+            <a:off x="838200" y="5481410"/>
+            <a:ext cx="3987800" cy="369332"/>
+          </a:xfrm>
+          <a:prstGeom prst="rect">
+            <a:avLst/>
+          </a:prstGeom>
+          <a:noFill/>
+        </p:spPr>
+        <p:txBody>
+          <a:bodyPr wrap="square">
+            <a:spAutoFit/>
+          </a:bodyPr>
+          <a:lstStyle/>
+          <a:p>
+            <a:pPr algn="ctr"/>
+            <a:r>
+              <a:rPr lang="en-US" dirty="0"/>
+              <a:t>https://www.ca4e.com/tools/</a:t>
+            </a:r>
+            <a:r>
+              <a:rPr lang="en-US" dirty="0" err="1"/>
+              <a:t>cmos</a:t>
+            </a:r>
+            <a:r>
+              <a:rPr lang="en-US" dirty="0"/>
+              <a:t>/</a:t>
+            </a:r>
+          </a:p>
+        </p:txBody>
+      </p:sp>
     </p:spTree>
     <p:extLst>
       <p:ext uri="{BB962C8B-B14F-4D97-AF65-F5344CB8AC3E}">
@@ -17265,6 +17308,116 @@
           <a:chExt cx="0" cy="0"/>
         </a:xfrm>
       </p:grpSpPr>
+      <p:sp>
+        <p:nvSpPr>
+          <p:cNvPr id="8" name="Title 7">
+            <a:extLst>
+              <a:ext uri="{FF2B5EF4-FFF2-40B4-BE49-F238E27FC236}">
+                <a16:creationId xmlns:a16="http://schemas.microsoft.com/office/drawing/2014/main" id="{79196CD3-5CB7-4748-275F-7AA30867C060}"/>
+              </a:ext>
+            </a:extLst>
+          </p:cNvPr>
+          <p:cNvSpPr>
+            <a:spLocks noGrp="1"/>
+          </p:cNvSpPr>
+          <p:nvPr>
+            <p:ph type="title"/>
+          </p:nvPr>
+        </p:nvSpPr>
+        <p:spPr/>
+        <p:txBody>
+          <a:bodyPr/>
+          <a:lstStyle/>
+          <a:p>
+            <a:r>
+              <a:rPr lang="en-US" dirty="0"/>
+              <a:t>Classic Mathematical Logic Gates</a:t>
+            </a:r>
+          </a:p>
+        </p:txBody>
+      </p:sp>
+      <p:sp>
+        <p:nvSpPr>
+          <p:cNvPr id="10" name="TextBox 9">
+            <a:extLst>
+              <a:ext uri="{FF2B5EF4-FFF2-40B4-BE49-F238E27FC236}">
+                <a16:creationId xmlns:a16="http://schemas.microsoft.com/office/drawing/2014/main" id="{AE4FC6D0-09B0-E511-EB8C-D7D6E2C80AC1}"/>
+              </a:ext>
+            </a:extLst>
+          </p:cNvPr>
+          <p:cNvSpPr txBox="1"/>
+          <p:nvPr/>
+        </p:nvSpPr>
+        <p:spPr>
+          <a:xfrm>
+            <a:off x="1278142" y="1786325"/>
+            <a:ext cx="647934" cy="461665"/>
+          </a:xfrm>
+          <a:prstGeom prst="rect">
+            <a:avLst/>
+          </a:prstGeom>
+          <a:noFill/>
+        </p:spPr>
+        <p:txBody>
+          <a:bodyPr wrap="none" rtlCol="0">
+            <a:spAutoFit/>
+          </a:bodyPr>
+          <a:lstStyle/>
+          <a:p>
+            <a:r>
+              <a:rPr lang="en-US" sz="2400" dirty="0"/>
+              <a:t>Not</a:t>
+            </a:r>
+          </a:p>
+        </p:txBody>
+      </p:sp>
+      <p:pic>
+        <p:nvPicPr>
+          <p:cNvPr id="1032" name="Not" descr="NOT gate symbol with one input (A) and one output (Q)">
+            <a:extLst>
+              <a:ext uri="{FF2B5EF4-FFF2-40B4-BE49-F238E27FC236}">
+                <a16:creationId xmlns:a16="http://schemas.microsoft.com/office/drawing/2014/main" id="{D5C70DAD-341E-C0F2-08F1-2885E26D710D}"/>
+              </a:ext>
+            </a:extLst>
+          </p:cNvPr>
+          <p:cNvPicPr>
+            <a:picLocks noChangeAspect="1" noChangeArrowheads="1"/>
+          </p:cNvPicPr>
+          <p:nvPr/>
+        </p:nvPicPr>
+        <p:blipFill>
+          <a:blip r:embed="rId2">
+            <a:extLst>
+              <a:ext uri="{28A0092B-C50C-407E-A947-70E740481C1C}">
+                <a14:useLocalDpi xmlns:a14="http://schemas.microsoft.com/office/drawing/2010/main"/>
+              </a:ext>
+            </a:extLst>
+          </a:blip>
+          <a:srcRect/>
+          <a:stretch>
+            <a:fillRect/>
+          </a:stretch>
+        </p:blipFill>
+        <p:spPr bwMode="auto">
+          <a:xfrm>
+            <a:off x="840109" y="2343627"/>
+            <a:ext cx="1524000" cy="635000"/>
+          </a:xfrm>
+          <a:prstGeom prst="rect">
+            <a:avLst/>
+          </a:prstGeom>
+          <a:noFill/>
+          <a:extLst>
+            <a:ext uri="{909E8E84-426E-40DD-AFC4-6F175D3DCCD1}">
+              <a14:hiddenFill xmlns:a14="http://schemas.microsoft.com/office/drawing/2010/main">
+                <a:solidFill>
+                  <a:srgbClr val="FFFFFF"/>
+                </a:solidFill>
+              </a14:hiddenFill>
+            </a:ext>
+          </a:extLst>
+        </p:spPr>
+      </p:pic>
       <p:graphicFrame>
         <p:nvGraphicFramePr>
           <p:cNvPr id="7" name="Table 6">
@@ -17420,59 +17573,82 @@
           </a:graphicData>
         </a:graphic>
       </p:graphicFrame>
-      <p:pic>
-        <p:nvPicPr>
-          <p:cNvPr id="1026" name="Picture 2" descr="AND gate symbol with two inputs (A and B) and one output (Q)">
+      <p:sp>
+        <p:nvSpPr>
+          <p:cNvPr id="5" name="TextBox 4">
             <a:extLst>
               <a:ext uri="{FF2B5EF4-FFF2-40B4-BE49-F238E27FC236}">
-                <a16:creationId xmlns:a16="http://schemas.microsoft.com/office/drawing/2014/main" id="{CCCD2300-5138-7D91-B061-530A2A201690}"/>
+                <a16:creationId xmlns:a16="http://schemas.microsoft.com/office/drawing/2014/main" id="{04D1C817-99BE-11AD-32D2-A885584024C1}"/>
               </a:ext>
             </a:extLst>
           </p:cNvPr>
-          <p:cNvPicPr>
-            <a:picLocks noChangeAspect="1" noChangeArrowheads="1"/>
-          </p:cNvPicPr>
+          <p:cNvSpPr txBox="1"/>
           <p:nvPr/>
-        </p:nvPicPr>
-        <p:blipFill>
-          <a:blip r:embed="rId2">
-            <a:extLst>
-              <a:ext uri="{28A0092B-C50C-407E-A947-70E740481C1C}">
-                <a14:useLocalDpi xmlns:a14="http://schemas.microsoft.com/office/drawing/2010/main"/>
-              </a:ext>
-            </a:extLst>
-          </a:blip>
-          <a:srcRect/>
-          <a:stretch>
-            <a:fillRect/>
-          </a:stretch>
-        </p:blipFill>
-        <p:spPr bwMode="auto">
+        </p:nvSpPr>
+        <p:spPr>
           <a:xfrm>
-            <a:off x="3593754" y="2343627"/>
-            <a:ext cx="1524000" cy="635000"/>
+            <a:off x="801667" y="5614084"/>
+            <a:ext cx="1602042" cy="369332"/>
           </a:xfrm>
           <a:prstGeom prst="rect">
             <a:avLst/>
           </a:prstGeom>
           <a:noFill/>
-          <a:extLst>
-            <a:ext uri="{909E8E84-426E-40DD-AFC4-6F175D3DCCD1}">
-              <a14:hiddenFill xmlns:a14="http://schemas.microsoft.com/office/drawing/2010/main">
-                <a:solidFill>
-                  <a:srgbClr val="FFFFFF"/>
-                </a:solidFill>
-              </a14:hiddenFill>
-            </a:ext>
-          </a:extLst>
         </p:spPr>
-      </p:pic>
+        <p:txBody>
+          <a:bodyPr wrap="none" rtlCol="0">
+            <a:spAutoFit/>
+          </a:bodyPr>
+          <a:lstStyle/>
+          <a:p>
+            <a:r>
+              <a:rPr lang="en-US" dirty="0"/>
+              <a:t>Two transistors</a:t>
+            </a:r>
+          </a:p>
+        </p:txBody>
+      </p:sp>
+      <p:sp>
+        <p:nvSpPr>
+          <p:cNvPr id="11" name="TextBox 10">
+            <a:extLst>
+              <a:ext uri="{FF2B5EF4-FFF2-40B4-BE49-F238E27FC236}">
+                <a16:creationId xmlns:a16="http://schemas.microsoft.com/office/drawing/2014/main" id="{60FCAB50-1C8B-F78B-A0B8-CFC7D7E956E9}"/>
+              </a:ext>
+            </a:extLst>
+          </p:cNvPr>
+          <p:cNvSpPr txBox="1"/>
+          <p:nvPr/>
+        </p:nvSpPr>
+        <p:spPr>
+          <a:xfrm>
+            <a:off x="3928637" y="1806198"/>
+            <a:ext cx="686406" cy="461665"/>
+          </a:xfrm>
+          <a:prstGeom prst="rect">
+            <a:avLst/>
+          </a:prstGeom>
+          <a:noFill/>
+        </p:spPr>
+        <p:txBody>
+          <a:bodyPr wrap="none" rtlCol="0">
+            <a:spAutoFit/>
+          </a:bodyPr>
+          <a:lstStyle/>
+          <a:p>
+            <a:r>
+              <a:rPr lang="en-US" sz="2400" dirty="0"/>
+              <a:t>And</a:t>
+            </a:r>
+          </a:p>
+        </p:txBody>
+      </p:sp>
       <p:pic>
         <p:nvPicPr>
-          <p:cNvPr id="1028" name="Picture 4" descr="OR gate symbol with two inputs (A and B) and one output (Q)">
+          <p:cNvPr id="1026" name="And" descr="AND gate symbol with two inputs (A and B) and one output (Q)">
             <a:extLst>
               <a:ext uri="{FF2B5EF4-FFF2-40B4-BE49-F238E27FC236}">
-                <a16:creationId xmlns:a16="http://schemas.microsoft.com/office/drawing/2014/main" id="{2B09A94E-F328-39CC-021E-16DF87DA8662}"/>
+                <a16:creationId xmlns:a16="http://schemas.microsoft.com/office/drawing/2014/main" id="{CCCD2300-5138-7D91-B061-530A2A201690}"/>
               </a:ext>
             </a:extLst>
           </p:cNvPr>
@@ -17496,101 +17672,7 @@
         </p:blipFill>
         <p:spPr bwMode="auto">
           <a:xfrm>
-            <a:off x="6686989" y="2343627"/>
-            <a:ext cx="1524000" cy="635000"/>
-          </a:xfrm>
-          <a:prstGeom prst="rect">
-            <a:avLst/>
-          </a:prstGeom>
-          <a:noFill/>
-          <a:extLst>
-            <a:ext uri="{909E8E84-426E-40DD-AFC4-6F175D3DCCD1}">
-              <a14:hiddenFill xmlns:a14="http://schemas.microsoft.com/office/drawing/2010/main">
-                <a:solidFill>
-                  <a:srgbClr val="FFFFFF"/>
-                </a:solidFill>
-              </a14:hiddenFill>
-            </a:ext>
-          </a:extLst>
-        </p:spPr>
-      </p:pic>
-      <p:pic>
-        <p:nvPicPr>
-          <p:cNvPr id="1030" name="Picture 6" descr="XOR (Exclusive OR) gate symbol with two inputs (A and B) and one output (Q)">
-            <a:extLst>
-              <a:ext uri="{FF2B5EF4-FFF2-40B4-BE49-F238E27FC236}">
-                <a16:creationId xmlns:a16="http://schemas.microsoft.com/office/drawing/2014/main" id="{81345BDA-FD8C-48BD-1954-6AD50549C148}"/>
-              </a:ext>
-            </a:extLst>
-          </p:cNvPr>
-          <p:cNvPicPr>
-            <a:picLocks noChangeAspect="1" noChangeArrowheads="1"/>
-          </p:cNvPicPr>
-          <p:nvPr/>
-        </p:nvPicPr>
-        <p:blipFill>
-          <a:blip r:embed="rId4">
-            <a:extLst>
-              <a:ext uri="{28A0092B-C50C-407E-A947-70E740481C1C}">
-                <a14:useLocalDpi xmlns:a14="http://schemas.microsoft.com/office/drawing/2010/main"/>
-              </a:ext>
-            </a:extLst>
-          </a:blip>
-          <a:srcRect/>
-          <a:stretch>
-            <a:fillRect/>
-          </a:stretch>
-        </p:blipFill>
-        <p:spPr bwMode="auto">
-          <a:xfrm>
-            <a:off x="9658790" y="2343627"/>
-            <a:ext cx="1524000" cy="635000"/>
-          </a:xfrm>
-          <a:prstGeom prst="rect">
-            <a:avLst/>
-          </a:prstGeom>
-          <a:noFill/>
-          <a:extLst>
-            <a:ext uri="{909E8E84-426E-40DD-AFC4-6F175D3DCCD1}">
-              <a14:hiddenFill xmlns:a14="http://schemas.microsoft.com/office/drawing/2010/main">
-                <a:solidFill>
-                  <a:srgbClr val="FFFFFF"/>
-                </a:solidFill>
-              </a14:hiddenFill>
-            </a:ext>
-          </a:extLst>
-        </p:spPr>
-      </p:pic>
-      <p:pic>
-        <p:nvPicPr>
-          <p:cNvPr id="1032" name="Picture 8" descr="NOT gate symbol with one input (A) and one output (Q)">
-            <a:extLst>
-              <a:ext uri="{FF2B5EF4-FFF2-40B4-BE49-F238E27FC236}">
-                <a16:creationId xmlns:a16="http://schemas.microsoft.com/office/drawing/2014/main" id="{D5C70DAD-341E-C0F2-08F1-2885E26D710D}"/>
-              </a:ext>
-            </a:extLst>
-          </p:cNvPr>
-          <p:cNvPicPr>
-            <a:picLocks noChangeAspect="1" noChangeArrowheads="1"/>
-          </p:cNvPicPr>
-          <p:nvPr/>
-        </p:nvPicPr>
-        <p:blipFill>
-          <a:blip r:embed="rId5">
-            <a:extLst>
-              <a:ext uri="{28A0092B-C50C-407E-A947-70E740481C1C}">
-                <a14:useLocalDpi xmlns:a14="http://schemas.microsoft.com/office/drawing/2010/main"/>
-              </a:ext>
-            </a:extLst>
-          </a:blip>
-          <a:srcRect/>
-          <a:stretch>
-            <a:fillRect/>
-          </a:stretch>
-        </p:blipFill>
-        <p:spPr bwMode="auto">
-          <a:xfrm>
-            <a:off x="840109" y="2343627"/>
+            <a:off x="3593754" y="2343627"/>
             <a:ext cx="1524000" cy="635000"/>
           </a:xfrm>
           <a:prstGeom prst="rect">
@@ -17623,7 +17705,7 @@
           <p:nvPr>
             <p:extLst>
               <p:ext uri="{D42A27DB-BD31-4B8C-83A1-F6EECF244321}">
-                <p14:modId xmlns:p14="http://schemas.microsoft.com/office/powerpoint/2010/main" val="2644585105"/>
+                <p14:modId xmlns:p14="http://schemas.microsoft.com/office/powerpoint/2010/main" val="3136362385"/>
               </p:ext>
             </p:extLst>
           </p:nvPr>
@@ -17912,10 +17994,10 @@
       </p:graphicFrame>
       <p:sp>
         <p:nvSpPr>
-          <p:cNvPr id="10" name="TextBox 9">
+          <p:cNvPr id="2" name="TextBox 1">
             <a:extLst>
               <a:ext uri="{FF2B5EF4-FFF2-40B4-BE49-F238E27FC236}">
-                <a16:creationId xmlns:a16="http://schemas.microsoft.com/office/drawing/2014/main" id="{AE4FC6D0-09B0-E511-EB8C-D7D6E2C80AC1}"/>
+                <a16:creationId xmlns:a16="http://schemas.microsoft.com/office/drawing/2014/main" id="{AB9F5816-E9BC-626B-A6C8-A0E630E91340}"/>
               </a:ext>
             </a:extLst>
           </p:cNvPr>
@@ -17924,8 +18006,8 @@
         </p:nvSpPr>
         <p:spPr>
           <a:xfrm>
-            <a:off x="1278142" y="1786325"/>
-            <a:ext cx="647934" cy="461665"/>
+            <a:off x="3593754" y="5614084"/>
+            <a:ext cx="1472775" cy="369332"/>
           </a:xfrm>
           <a:prstGeom prst="rect">
             <a:avLst/>
@@ -17939,43 +18021,8 @@
           <a:lstStyle/>
           <a:p>
             <a:r>
-              <a:rPr lang="en-US" sz="2400" dirty="0"/>
-              <a:t>Not</a:t>
-            </a:r>
-          </a:p>
-        </p:txBody>
-      </p:sp>
-      <p:sp>
-        <p:nvSpPr>
-          <p:cNvPr id="11" name="TextBox 10">
-            <a:extLst>
-              <a:ext uri="{FF2B5EF4-FFF2-40B4-BE49-F238E27FC236}">
-                <a16:creationId xmlns:a16="http://schemas.microsoft.com/office/drawing/2014/main" id="{60FCAB50-1C8B-F78B-A0B8-CFC7D7E956E9}"/>
-              </a:ext>
-            </a:extLst>
-          </p:cNvPr>
-          <p:cNvSpPr txBox="1"/>
-          <p:nvPr/>
-        </p:nvSpPr>
-        <p:spPr>
-          <a:xfrm>
-            <a:off x="3928637" y="1806198"/>
-            <a:ext cx="686406" cy="461665"/>
-          </a:xfrm>
-          <a:prstGeom prst="rect">
-            <a:avLst/>
-          </a:prstGeom>
-          <a:noFill/>
-        </p:spPr>
-        <p:txBody>
-          <a:bodyPr wrap="none" rtlCol="0">
-            <a:spAutoFit/>
-          </a:bodyPr>
-          <a:lstStyle/>
-          <a:p>
-            <a:r>
-              <a:rPr lang="en-US" sz="2400" dirty="0"/>
-              <a:t>And</a:t>
+              <a:rPr lang="en-US" dirty="0"/>
+              <a:t>Six transistors</a:t>
             </a:r>
           </a:p>
         </p:txBody>
@@ -18015,343 +18062,53 @@
           </a:p>
         </p:txBody>
       </p:sp>
-      <p:sp>
-        <p:nvSpPr>
-          <p:cNvPr id="14" name="TextBox 13">
+      <p:pic>
+        <p:nvPicPr>
+          <p:cNvPr id="1028" name="Or" descr="OR gate symbol with two inputs (A and B) and one output (Q)">
             <a:extLst>
               <a:ext uri="{FF2B5EF4-FFF2-40B4-BE49-F238E27FC236}">
-                <a16:creationId xmlns:a16="http://schemas.microsoft.com/office/drawing/2014/main" id="{B234BE7B-85A9-1D77-EC29-B65EDDFF599B}"/>
+                <a16:creationId xmlns:a16="http://schemas.microsoft.com/office/drawing/2014/main" id="{2B09A94E-F328-39CC-021E-16DF87DA8662}"/>
               </a:ext>
             </a:extLst>
           </p:cNvPr>
-          <p:cNvSpPr txBox="1"/>
+          <p:cNvPicPr>
+            <a:picLocks noChangeAspect="1" noChangeArrowheads="1"/>
+          </p:cNvPicPr>
           <p:nvPr/>
-        </p:nvSpPr>
-        <p:spPr>
+        </p:nvPicPr>
+        <p:blipFill>
+          <a:blip r:embed="rId4">
+            <a:extLst>
+              <a:ext uri="{28A0092B-C50C-407E-A947-70E740481C1C}">
+                <a14:useLocalDpi xmlns:a14="http://schemas.microsoft.com/office/drawing/2010/main"/>
+              </a:ext>
+            </a:extLst>
+          </a:blip>
+          <a:srcRect/>
+          <a:stretch>
+            <a:fillRect/>
+          </a:stretch>
+        </p:blipFill>
+        <p:spPr bwMode="auto">
           <a:xfrm>
-            <a:off x="9588531" y="1793240"/>
-            <a:ext cx="1684757" cy="461665"/>
+            <a:off x="6686989" y="2343627"/>
+            <a:ext cx="1524000" cy="635000"/>
           </a:xfrm>
           <a:prstGeom prst="rect">
             <a:avLst/>
           </a:prstGeom>
           <a:noFill/>
+          <a:extLst>
+            <a:ext uri="{909E8E84-426E-40DD-AFC4-6F175D3DCCD1}">
+              <a14:hiddenFill xmlns:a14="http://schemas.microsoft.com/office/drawing/2010/main">
+                <a:solidFill>
+                  <a:srgbClr val="FFFFFF"/>
+                </a:solidFill>
+              </a14:hiddenFill>
+            </a:ext>
+          </a:extLst>
         </p:spPr>
-        <p:txBody>
-          <a:bodyPr wrap="none" rtlCol="0">
-            <a:spAutoFit/>
-          </a:bodyPr>
-          <a:lstStyle/>
-          <a:p>
-            <a:r>
-              <a:rPr lang="en-US" sz="2400" dirty="0"/>
-              <a:t>Exclusive Or</a:t>
-            </a:r>
-          </a:p>
-        </p:txBody>
-      </p:sp>
-      <p:graphicFrame>
-        <p:nvGraphicFramePr>
-          <p:cNvPr id="15" name="Table 14">
-            <a:extLst>
-              <a:ext uri="{FF2B5EF4-FFF2-40B4-BE49-F238E27FC236}">
-                <a16:creationId xmlns:a16="http://schemas.microsoft.com/office/drawing/2014/main" id="{A79109CF-4285-5911-DD87-0D0AD4D9ECF0}"/>
-              </a:ext>
-            </a:extLst>
-          </p:cNvPr>
-          <p:cNvGraphicFramePr>
-            <a:graphicFrameLocks noGrp="1"/>
-          </p:cNvGraphicFramePr>
-          <p:nvPr>
-            <p:extLst>
-              <p:ext uri="{D42A27DB-BD31-4B8C-83A1-F6EECF244321}">
-                <p14:modId xmlns:p14="http://schemas.microsoft.com/office/powerpoint/2010/main" val="1985043812"/>
-              </p:ext>
-            </p:extLst>
-          </p:nvPr>
-        </p:nvGraphicFramePr>
-        <p:xfrm>
-          <a:off x="9429857" y="3062974"/>
-          <a:ext cx="1981866" cy="1960150"/>
-        </p:xfrm>
-        <a:graphic>
-          <a:graphicData uri="http://schemas.openxmlformats.org/drawingml/2006/table">
-            <a:tbl>
-              <a:tblPr firstRow="1" bandRow="1">
-                <a:tableStyleId>{5C22544A-7EE6-4342-B048-85BDC9FD1C3A}</a:tableStyleId>
-              </a:tblPr>
-              <a:tblGrid>
-                <a:gridCol w="660622">
-                  <a:extLst>
-                    <a:ext uri="{9D8B030D-6E8A-4147-A177-3AD203B41FA5}">
-                      <a16:colId xmlns:a16="http://schemas.microsoft.com/office/drawing/2014/main" val="1071248141"/>
-                    </a:ext>
-                  </a:extLst>
-                </a:gridCol>
-                <a:gridCol w="660622">
-                  <a:extLst>
-                    <a:ext uri="{9D8B030D-6E8A-4147-A177-3AD203B41FA5}">
-                      <a16:colId xmlns:a16="http://schemas.microsoft.com/office/drawing/2014/main" val="2618565763"/>
-                    </a:ext>
-                  </a:extLst>
-                </a:gridCol>
-                <a:gridCol w="660622">
-                  <a:extLst>
-                    <a:ext uri="{9D8B030D-6E8A-4147-A177-3AD203B41FA5}">
-                      <a16:colId xmlns:a16="http://schemas.microsoft.com/office/drawing/2014/main" val="2416198014"/>
-                    </a:ext>
-                  </a:extLst>
-                </a:gridCol>
-              </a:tblGrid>
-              <a:tr h="392030">
-                <a:tc>
-                  <a:txBody>
-                    <a:bodyPr/>
-                    <a:lstStyle/>
-                    <a:p>
-                      <a:pPr algn="ctr"/>
-                      <a:r>
-                        <a:rPr lang="en-US" dirty="0"/>
-                        <a:t>A</a:t>
-                      </a:r>
-                    </a:p>
-                  </a:txBody>
-                  <a:tcPr/>
-                </a:tc>
-                <a:tc>
-                  <a:txBody>
-                    <a:bodyPr/>
-                    <a:lstStyle/>
-                    <a:p>
-                      <a:pPr algn="ctr"/>
-                      <a:r>
-                        <a:rPr lang="en-US" dirty="0"/>
-                        <a:t>B</a:t>
-                      </a:r>
-                    </a:p>
-                  </a:txBody>
-                  <a:tcPr/>
-                </a:tc>
-                <a:tc>
-                  <a:txBody>
-                    <a:bodyPr/>
-                    <a:lstStyle/>
-                    <a:p>
-                      <a:pPr algn="ctr"/>
-                      <a:r>
-                        <a:rPr lang="en-US" dirty="0"/>
-                        <a:t>Q</a:t>
-                      </a:r>
-                    </a:p>
-                  </a:txBody>
-                  <a:tcPr/>
-                </a:tc>
-                <a:extLst>
-                  <a:ext uri="{0D108BD9-81ED-4DB2-BD59-A6C34878D82A}">
-                    <a16:rowId xmlns:a16="http://schemas.microsoft.com/office/drawing/2014/main" val="3588159787"/>
-                  </a:ext>
-                </a:extLst>
-              </a:tr>
-              <a:tr h="392030">
-                <a:tc>
-                  <a:txBody>
-                    <a:bodyPr/>
-                    <a:lstStyle/>
-                    <a:p>
-                      <a:pPr algn="ctr"/>
-                      <a:r>
-                        <a:rPr lang="en-US" dirty="0"/>
-                        <a:t>0</a:t>
-                      </a:r>
-                    </a:p>
-                  </a:txBody>
-                  <a:tcPr/>
-                </a:tc>
-                <a:tc>
-                  <a:txBody>
-                    <a:bodyPr/>
-                    <a:lstStyle/>
-                    <a:p>
-                      <a:pPr algn="ctr"/>
-                      <a:r>
-                        <a:rPr lang="en-US" dirty="0"/>
-                        <a:t>0</a:t>
-                      </a:r>
-                    </a:p>
-                  </a:txBody>
-                  <a:tcPr/>
-                </a:tc>
-                <a:tc>
-                  <a:txBody>
-                    <a:bodyPr/>
-                    <a:lstStyle/>
-                    <a:p>
-                      <a:pPr algn="ctr"/>
-                      <a:r>
-                        <a:rPr lang="en-US" dirty="0"/>
-                        <a:t>0</a:t>
-                      </a:r>
-                    </a:p>
-                  </a:txBody>
-                  <a:tcPr/>
-                </a:tc>
-                <a:extLst>
-                  <a:ext uri="{0D108BD9-81ED-4DB2-BD59-A6C34878D82A}">
-                    <a16:rowId xmlns:a16="http://schemas.microsoft.com/office/drawing/2014/main" val="3061539733"/>
-                  </a:ext>
-                </a:extLst>
-              </a:tr>
-              <a:tr h="392030">
-                <a:tc>
-                  <a:txBody>
-                    <a:bodyPr/>
-                    <a:lstStyle/>
-                    <a:p>
-                      <a:pPr algn="ctr"/>
-                      <a:r>
-                        <a:rPr lang="en-US" dirty="0"/>
-                        <a:t>0</a:t>
-                      </a:r>
-                    </a:p>
-                  </a:txBody>
-                  <a:tcPr/>
-                </a:tc>
-                <a:tc>
-                  <a:txBody>
-                    <a:bodyPr/>
-                    <a:lstStyle/>
-                    <a:p>
-                      <a:pPr algn="ctr"/>
-                      <a:r>
-                        <a:rPr lang="en-US" dirty="0"/>
-                        <a:t>1</a:t>
-                      </a:r>
-                    </a:p>
-                  </a:txBody>
-                  <a:tcPr/>
-                </a:tc>
-                <a:tc>
-                  <a:txBody>
-                    <a:bodyPr/>
-                    <a:lstStyle/>
-                    <a:p>
-                      <a:pPr algn="ctr"/>
-                      <a:r>
-                        <a:rPr lang="en-US" dirty="0"/>
-                        <a:t>1</a:t>
-                      </a:r>
-                    </a:p>
-                  </a:txBody>
-                  <a:tcPr/>
-                </a:tc>
-                <a:extLst>
-                  <a:ext uri="{0D108BD9-81ED-4DB2-BD59-A6C34878D82A}">
-                    <a16:rowId xmlns:a16="http://schemas.microsoft.com/office/drawing/2014/main" val="1244367929"/>
-                  </a:ext>
-                </a:extLst>
-              </a:tr>
-              <a:tr h="392030">
-                <a:tc>
-                  <a:txBody>
-                    <a:bodyPr/>
-                    <a:lstStyle/>
-                    <a:p>
-                      <a:pPr algn="ctr"/>
-                      <a:r>
-                        <a:rPr lang="en-US" dirty="0"/>
-                        <a:t>1</a:t>
-                      </a:r>
-                    </a:p>
-                  </a:txBody>
-                  <a:tcPr/>
-                </a:tc>
-                <a:tc>
-                  <a:txBody>
-                    <a:bodyPr/>
-                    <a:lstStyle/>
-                    <a:p>
-                      <a:pPr algn="ctr"/>
-                      <a:r>
-                        <a:rPr lang="en-US" dirty="0"/>
-                        <a:t>0</a:t>
-                      </a:r>
-                    </a:p>
-                  </a:txBody>
-                  <a:tcPr/>
-                </a:tc>
-                <a:tc>
-                  <a:txBody>
-                    <a:bodyPr/>
-                    <a:lstStyle/>
-                    <a:p>
-                      <a:pPr algn="ctr"/>
-                      <a:r>
-                        <a:rPr lang="en-US" dirty="0"/>
-                        <a:t>1</a:t>
-                      </a:r>
-                    </a:p>
-                  </a:txBody>
-                  <a:tcPr/>
-                </a:tc>
-                <a:extLst>
-                  <a:ext uri="{0D108BD9-81ED-4DB2-BD59-A6C34878D82A}">
-                    <a16:rowId xmlns:a16="http://schemas.microsoft.com/office/drawing/2014/main" val="93639549"/>
-                  </a:ext>
-                </a:extLst>
-              </a:tr>
-              <a:tr h="392030">
-                <a:tc>
-                  <a:txBody>
-                    <a:bodyPr/>
-                    <a:lstStyle/>
-                    <a:p>
-                      <a:pPr algn="ctr"/>
-                      <a:r>
-                        <a:rPr lang="en-US" dirty="0"/>
-                        <a:t>1</a:t>
-                      </a:r>
-                    </a:p>
-                  </a:txBody>
-                  <a:tcPr/>
-                </a:tc>
-                <a:tc>
-                  <a:txBody>
-                    <a:bodyPr/>
-                    <a:lstStyle/>
-                    <a:p>
-                      <a:pPr algn="ctr"/>
-                      <a:r>
-                        <a:rPr lang="en-US" dirty="0"/>
-                        <a:t>1</a:t>
-                      </a:r>
-                    </a:p>
-                  </a:txBody>
-                  <a:tcPr/>
-                </a:tc>
-                <a:tc>
-                  <a:txBody>
-                    <a:bodyPr/>
-                    <a:lstStyle/>
-                    <a:p>
-                      <a:pPr algn="ctr"/>
-                      <a:r>
-                        <a:rPr lang="en-US" dirty="0"/>
-                        <a:t>0</a:t>
-                      </a:r>
-                    </a:p>
-                  </a:txBody>
-                  <a:tcPr/>
-                </a:tc>
-                <a:extLst>
-                  <a:ext uri="{0D108BD9-81ED-4DB2-BD59-A6C34878D82A}">
-                    <a16:rowId xmlns:a16="http://schemas.microsoft.com/office/drawing/2014/main" val="1222571218"/>
-                  </a:ext>
-                </a:extLst>
-              </a:tr>
-            </a:tbl>
-          </a:graphicData>
-        </a:graphic>
-      </p:graphicFrame>
+      </p:pic>
       <p:graphicFrame>
         <p:nvGraphicFramePr>
           <p:cNvPr id="16" name="Table 15">
@@ -18656,41 +18413,6 @@
       </p:graphicFrame>
       <p:sp>
         <p:nvSpPr>
-          <p:cNvPr id="2" name="TextBox 1">
-            <a:extLst>
-              <a:ext uri="{FF2B5EF4-FFF2-40B4-BE49-F238E27FC236}">
-                <a16:creationId xmlns:a16="http://schemas.microsoft.com/office/drawing/2014/main" id="{AB9F5816-E9BC-626B-A6C8-A0E630E91340}"/>
-              </a:ext>
-            </a:extLst>
-          </p:cNvPr>
-          <p:cNvSpPr txBox="1"/>
-          <p:nvPr/>
-        </p:nvSpPr>
-        <p:spPr>
-          <a:xfrm>
-            <a:off x="3593754" y="5614084"/>
-            <a:ext cx="1472775" cy="369332"/>
-          </a:xfrm>
-          <a:prstGeom prst="rect">
-            <a:avLst/>
-          </a:prstGeom>
-          <a:noFill/>
-        </p:spPr>
-        <p:txBody>
-          <a:bodyPr wrap="none" rtlCol="0">
-            <a:spAutoFit/>
-          </a:bodyPr>
-          <a:lstStyle/>
-          <a:p>
-            <a:r>
-              <a:rPr lang="en-US" dirty="0"/>
-              <a:t>Six transistors</a:t>
-            </a:r>
-          </a:p>
-        </p:txBody>
-      </p:sp>
-      <p:sp>
-        <p:nvSpPr>
           <p:cNvPr id="3" name="TextBox 2">
             <a:extLst>
               <a:ext uri="{FF2B5EF4-FFF2-40B4-BE49-F238E27FC236}">
@@ -18724,6 +18446,390 @@
           </a:p>
         </p:txBody>
       </p:sp>
+      <p:sp>
+        <p:nvSpPr>
+          <p:cNvPr id="14" name="TextBox 13">
+            <a:extLst>
+              <a:ext uri="{FF2B5EF4-FFF2-40B4-BE49-F238E27FC236}">
+                <a16:creationId xmlns:a16="http://schemas.microsoft.com/office/drawing/2014/main" id="{B234BE7B-85A9-1D77-EC29-B65EDDFF599B}"/>
+              </a:ext>
+            </a:extLst>
+          </p:cNvPr>
+          <p:cNvSpPr txBox="1"/>
+          <p:nvPr/>
+        </p:nvSpPr>
+        <p:spPr>
+          <a:xfrm>
+            <a:off x="9588531" y="1793240"/>
+            <a:ext cx="1684757" cy="461665"/>
+          </a:xfrm>
+          <a:prstGeom prst="rect">
+            <a:avLst/>
+          </a:prstGeom>
+          <a:noFill/>
+        </p:spPr>
+        <p:txBody>
+          <a:bodyPr wrap="none" rtlCol="0">
+            <a:spAutoFit/>
+          </a:bodyPr>
+          <a:lstStyle/>
+          <a:p>
+            <a:r>
+              <a:rPr lang="en-US" sz="2400" dirty="0"/>
+              <a:t>Exclusive Or</a:t>
+            </a:r>
+          </a:p>
+        </p:txBody>
+      </p:sp>
+      <p:pic>
+        <p:nvPicPr>
+          <p:cNvPr id="1030" name="Xor" descr="XOR (Exclusive OR) gate symbol with two inputs (A and B) and one output (Q)">
+            <a:extLst>
+              <a:ext uri="{FF2B5EF4-FFF2-40B4-BE49-F238E27FC236}">
+                <a16:creationId xmlns:a16="http://schemas.microsoft.com/office/drawing/2014/main" id="{81345BDA-FD8C-48BD-1954-6AD50549C148}"/>
+              </a:ext>
+            </a:extLst>
+          </p:cNvPr>
+          <p:cNvPicPr>
+            <a:picLocks noChangeAspect="1" noChangeArrowheads="1"/>
+          </p:cNvPicPr>
+          <p:nvPr/>
+        </p:nvPicPr>
+        <p:blipFill>
+          <a:blip r:embed="rId5">
+            <a:extLst>
+              <a:ext uri="{28A0092B-C50C-407E-A947-70E740481C1C}">
+                <a14:useLocalDpi xmlns:a14="http://schemas.microsoft.com/office/drawing/2010/main"/>
+              </a:ext>
+            </a:extLst>
+          </a:blip>
+          <a:srcRect/>
+          <a:stretch>
+            <a:fillRect/>
+          </a:stretch>
+        </p:blipFill>
+        <p:spPr bwMode="auto">
+          <a:xfrm>
+            <a:off x="9658790" y="2343627"/>
+            <a:ext cx="1524000" cy="635000"/>
+          </a:xfrm>
+          <a:prstGeom prst="rect">
+            <a:avLst/>
+          </a:prstGeom>
+          <a:noFill/>
+          <a:extLst>
+            <a:ext uri="{909E8E84-426E-40DD-AFC4-6F175D3DCCD1}">
+              <a14:hiddenFill xmlns:a14="http://schemas.microsoft.com/office/drawing/2010/main">
+                <a:solidFill>
+                  <a:srgbClr val="FFFFFF"/>
+                </a:solidFill>
+              </a14:hiddenFill>
+            </a:ext>
+          </a:extLst>
+        </p:spPr>
+      </p:pic>
+      <p:graphicFrame>
+        <p:nvGraphicFramePr>
+          <p:cNvPr id="15" name="Table 14">
+            <a:extLst>
+              <a:ext uri="{FF2B5EF4-FFF2-40B4-BE49-F238E27FC236}">
+                <a16:creationId xmlns:a16="http://schemas.microsoft.com/office/drawing/2014/main" id="{A79109CF-4285-5911-DD87-0D0AD4D9ECF0}"/>
+              </a:ext>
+            </a:extLst>
+          </p:cNvPr>
+          <p:cNvGraphicFramePr>
+            <a:graphicFrameLocks noGrp="1"/>
+          </p:cNvGraphicFramePr>
+          <p:nvPr>
+            <p:extLst>
+              <p:ext uri="{D42A27DB-BD31-4B8C-83A1-F6EECF244321}">
+                <p14:modId xmlns:p14="http://schemas.microsoft.com/office/powerpoint/2010/main" val="1985043812"/>
+              </p:ext>
+            </p:extLst>
+          </p:nvPr>
+        </p:nvGraphicFramePr>
+        <p:xfrm>
+          <a:off x="9429857" y="3062974"/>
+          <a:ext cx="1981866" cy="1960150"/>
+        </p:xfrm>
+        <a:graphic>
+          <a:graphicData uri="http://schemas.openxmlformats.org/drawingml/2006/table">
+            <a:tbl>
+              <a:tblPr firstRow="1" bandRow="1">
+                <a:tableStyleId>{5C22544A-7EE6-4342-B048-85BDC9FD1C3A}</a:tableStyleId>
+              </a:tblPr>
+              <a:tblGrid>
+                <a:gridCol w="660622">
+                  <a:extLst>
+                    <a:ext uri="{9D8B030D-6E8A-4147-A177-3AD203B41FA5}">
+                      <a16:colId xmlns:a16="http://schemas.microsoft.com/office/drawing/2014/main" val="1071248141"/>
+                    </a:ext>
+                  </a:extLst>
+                </a:gridCol>
+                <a:gridCol w="660622">
+                  <a:extLst>
+                    <a:ext uri="{9D8B030D-6E8A-4147-A177-3AD203B41FA5}">
+                      <a16:colId xmlns:a16="http://schemas.microsoft.com/office/drawing/2014/main" val="2618565763"/>
+                    </a:ext>
+                  </a:extLst>
+                </a:gridCol>
+                <a:gridCol w="660622">
+                  <a:extLst>
+                    <a:ext uri="{9D8B030D-6E8A-4147-A177-3AD203B41FA5}">
+                      <a16:colId xmlns:a16="http://schemas.microsoft.com/office/drawing/2014/main" val="2416198014"/>
+                    </a:ext>
+                  </a:extLst>
+                </a:gridCol>
+              </a:tblGrid>
+              <a:tr h="392030">
+                <a:tc>
+                  <a:txBody>
+                    <a:bodyPr/>
+                    <a:lstStyle/>
+                    <a:p>
+                      <a:pPr algn="ctr"/>
+                      <a:r>
+                        <a:rPr lang="en-US" dirty="0"/>
+                        <a:t>A</a:t>
+                      </a:r>
+                    </a:p>
+                  </a:txBody>
+                  <a:tcPr/>
+                </a:tc>
+                <a:tc>
+                  <a:txBody>
+                    <a:bodyPr/>
+                    <a:lstStyle/>
+                    <a:p>
+                      <a:pPr algn="ctr"/>
+                      <a:r>
+                        <a:rPr lang="en-US" dirty="0"/>
+                        <a:t>B</a:t>
+                      </a:r>
+                    </a:p>
+                  </a:txBody>
+                  <a:tcPr/>
+                </a:tc>
+                <a:tc>
+                  <a:txBody>
+                    <a:bodyPr/>
+                    <a:lstStyle/>
+                    <a:p>
+                      <a:pPr algn="ctr"/>
+                      <a:r>
+                        <a:rPr lang="en-US" dirty="0"/>
+                        <a:t>Q</a:t>
+                      </a:r>
+                    </a:p>
+                  </a:txBody>
+                  <a:tcPr/>
+                </a:tc>
+                <a:extLst>
+                  <a:ext uri="{0D108BD9-81ED-4DB2-BD59-A6C34878D82A}">
+                    <a16:rowId xmlns:a16="http://schemas.microsoft.com/office/drawing/2014/main" val="3588159787"/>
+                  </a:ext>
+                </a:extLst>
+              </a:tr>
+              <a:tr h="392030">
+                <a:tc>
+                  <a:txBody>
+                    <a:bodyPr/>
+                    <a:lstStyle/>
+                    <a:p>
+                      <a:pPr algn="ctr"/>
+                      <a:r>
+                        <a:rPr lang="en-US" dirty="0"/>
+                        <a:t>0</a:t>
+                      </a:r>
+                    </a:p>
+                  </a:txBody>
+                  <a:tcPr/>
+                </a:tc>
+                <a:tc>
+                  <a:txBody>
+                    <a:bodyPr/>
+                    <a:lstStyle/>
+                    <a:p>
+                      <a:pPr algn="ctr"/>
+                      <a:r>
+                        <a:rPr lang="en-US" dirty="0"/>
+                        <a:t>0</a:t>
+                      </a:r>
+                    </a:p>
+                  </a:txBody>
+                  <a:tcPr/>
+                </a:tc>
+                <a:tc>
+                  <a:txBody>
+                    <a:bodyPr/>
+                    <a:lstStyle/>
+                    <a:p>
+                      <a:pPr algn="ctr"/>
+                      <a:r>
+                        <a:rPr lang="en-US" dirty="0"/>
+                        <a:t>0</a:t>
+                      </a:r>
+                    </a:p>
+                  </a:txBody>
+                  <a:tcPr/>
+                </a:tc>
+                <a:extLst>
+                  <a:ext uri="{0D108BD9-81ED-4DB2-BD59-A6C34878D82A}">
+                    <a16:rowId xmlns:a16="http://schemas.microsoft.com/office/drawing/2014/main" val="3061539733"/>
+                  </a:ext>
+                </a:extLst>
+              </a:tr>
+              <a:tr h="392030">
+                <a:tc>
+                  <a:txBody>
+                    <a:bodyPr/>
+                    <a:lstStyle/>
+                    <a:p>
+                      <a:pPr algn="ctr"/>
+                      <a:r>
+                        <a:rPr lang="en-US" dirty="0"/>
+                        <a:t>0</a:t>
+                      </a:r>
+                    </a:p>
+                  </a:txBody>
+                  <a:tcPr/>
+                </a:tc>
+                <a:tc>
+                  <a:txBody>
+                    <a:bodyPr/>
+                    <a:lstStyle/>
+                    <a:p>
+                      <a:pPr algn="ctr"/>
+                      <a:r>
+                        <a:rPr lang="en-US" dirty="0"/>
+                        <a:t>1</a:t>
+                      </a:r>
+                    </a:p>
+                  </a:txBody>
+                  <a:tcPr/>
+                </a:tc>
+                <a:tc>
+                  <a:txBody>
+                    <a:bodyPr/>
+                    <a:lstStyle/>
+                    <a:p>
+                      <a:pPr algn="ctr"/>
+                      <a:r>
+                        <a:rPr lang="en-US" dirty="0"/>
+                        <a:t>1</a:t>
+                      </a:r>
+                    </a:p>
+                  </a:txBody>
+                  <a:tcPr/>
+                </a:tc>
+                <a:extLst>
+                  <a:ext uri="{0D108BD9-81ED-4DB2-BD59-A6C34878D82A}">
+                    <a16:rowId xmlns:a16="http://schemas.microsoft.com/office/drawing/2014/main" val="1244367929"/>
+                  </a:ext>
+                </a:extLst>
+              </a:tr>
+              <a:tr h="392030">
+                <a:tc>
+                  <a:txBody>
+                    <a:bodyPr/>
+                    <a:lstStyle/>
+                    <a:p>
+                      <a:pPr algn="ctr"/>
+                      <a:r>
+                        <a:rPr lang="en-US" dirty="0"/>
+                        <a:t>1</a:t>
+                      </a:r>
+                    </a:p>
+                  </a:txBody>
+                  <a:tcPr/>
+                </a:tc>
+                <a:tc>
+                  <a:txBody>
+                    <a:bodyPr/>
+                    <a:lstStyle/>
+                    <a:p>
+                      <a:pPr algn="ctr"/>
+                      <a:r>
+                        <a:rPr lang="en-US" dirty="0"/>
+                        <a:t>0</a:t>
+                      </a:r>
+                    </a:p>
+                  </a:txBody>
+                  <a:tcPr/>
+                </a:tc>
+                <a:tc>
+                  <a:txBody>
+                    <a:bodyPr/>
+                    <a:lstStyle/>
+                    <a:p>
+                      <a:pPr algn="ctr"/>
+                      <a:r>
+                        <a:rPr lang="en-US" dirty="0"/>
+                        <a:t>1</a:t>
+                      </a:r>
+                    </a:p>
+                  </a:txBody>
+                  <a:tcPr/>
+                </a:tc>
+                <a:extLst>
+                  <a:ext uri="{0D108BD9-81ED-4DB2-BD59-A6C34878D82A}">
+                    <a16:rowId xmlns:a16="http://schemas.microsoft.com/office/drawing/2014/main" val="93639549"/>
+                  </a:ext>
+                </a:extLst>
+              </a:tr>
+              <a:tr h="392030">
+                <a:tc>
+                  <a:txBody>
+                    <a:bodyPr/>
+                    <a:lstStyle/>
+                    <a:p>
+                      <a:pPr algn="ctr"/>
+                      <a:r>
+                        <a:rPr lang="en-US" dirty="0"/>
+                        <a:t>1</a:t>
+                      </a:r>
+                    </a:p>
+                  </a:txBody>
+                  <a:tcPr/>
+                </a:tc>
+                <a:tc>
+                  <a:txBody>
+                    <a:bodyPr/>
+                    <a:lstStyle/>
+                    <a:p>
+                      <a:pPr algn="ctr"/>
+                      <a:r>
+                        <a:rPr lang="en-US" dirty="0"/>
+                        <a:t>1</a:t>
+                      </a:r>
+                    </a:p>
+                  </a:txBody>
+                  <a:tcPr/>
+                </a:tc>
+                <a:tc>
+                  <a:txBody>
+                    <a:bodyPr/>
+                    <a:lstStyle/>
+                    <a:p>
+                      <a:pPr algn="ctr"/>
+                      <a:r>
+                        <a:rPr lang="en-US" dirty="0"/>
+                        <a:t>0</a:t>
+                      </a:r>
+                    </a:p>
+                  </a:txBody>
+                  <a:tcPr/>
+                </a:tc>
+                <a:extLst>
+                  <a:ext uri="{0D108BD9-81ED-4DB2-BD59-A6C34878D82A}">
+                    <a16:rowId xmlns:a16="http://schemas.microsoft.com/office/drawing/2014/main" val="1222571218"/>
+                  </a:ext>
+                </a:extLst>
+              </a:tr>
+            </a:tbl>
+          </a:graphicData>
+        </a:graphic>
+      </p:graphicFrame>
       <p:sp>
         <p:nvSpPr>
           <p:cNvPr id="4" name="TextBox 3">
@@ -18755,69 +18861,6 @@
             <a:r>
               <a:rPr lang="en-US" dirty="0"/>
               <a:t>Eight transistors</a:t>
-            </a:r>
-          </a:p>
-        </p:txBody>
-      </p:sp>
-      <p:sp>
-        <p:nvSpPr>
-          <p:cNvPr id="5" name="TextBox 4">
-            <a:extLst>
-              <a:ext uri="{FF2B5EF4-FFF2-40B4-BE49-F238E27FC236}">
-                <a16:creationId xmlns:a16="http://schemas.microsoft.com/office/drawing/2014/main" id="{04D1C817-99BE-11AD-32D2-A885584024C1}"/>
-              </a:ext>
-            </a:extLst>
-          </p:cNvPr>
-          <p:cNvSpPr txBox="1"/>
-          <p:nvPr/>
-        </p:nvSpPr>
-        <p:spPr>
-          <a:xfrm>
-            <a:off x="801667" y="5614084"/>
-            <a:ext cx="1602042" cy="369332"/>
-          </a:xfrm>
-          <a:prstGeom prst="rect">
-            <a:avLst/>
-          </a:prstGeom>
-          <a:noFill/>
-        </p:spPr>
-        <p:txBody>
-          <a:bodyPr wrap="none" rtlCol="0">
-            <a:spAutoFit/>
-          </a:bodyPr>
-          <a:lstStyle/>
-          <a:p>
-            <a:r>
-              <a:rPr lang="en-US" dirty="0"/>
-              <a:t>Two transistors</a:t>
-            </a:r>
-          </a:p>
-        </p:txBody>
-      </p:sp>
-      <p:sp>
-        <p:nvSpPr>
-          <p:cNvPr id="8" name="Title 7">
-            <a:extLst>
-              <a:ext uri="{FF2B5EF4-FFF2-40B4-BE49-F238E27FC236}">
-                <a16:creationId xmlns:a16="http://schemas.microsoft.com/office/drawing/2014/main" id="{79196CD3-5CB7-4748-275F-7AA30867C060}"/>
-              </a:ext>
-            </a:extLst>
-          </p:cNvPr>
-          <p:cNvSpPr>
-            <a:spLocks noGrp="1"/>
-          </p:cNvSpPr>
-          <p:nvPr>
-            <p:ph type="title"/>
-          </p:nvPr>
-        </p:nvSpPr>
-        <p:spPr/>
-        <p:txBody>
-          <a:bodyPr/>
-          <a:lstStyle/>
-          <a:p>
-            <a:r>
-              <a:rPr lang="en-US" dirty="0"/>
-              <a:t>Classic Mathematical Logic Gates</a:t>
             </a:r>
           </a:p>
         </p:txBody>
@@ -18858,6 +18901,168 @@
           <a:chExt cx="0" cy="0"/>
         </a:xfrm>
       </p:grpSpPr>
+      <p:sp>
+        <p:nvSpPr>
+          <p:cNvPr id="27" name="Title 26">
+            <a:extLst>
+              <a:ext uri="{FF2B5EF4-FFF2-40B4-BE49-F238E27FC236}">
+                <a16:creationId xmlns:a16="http://schemas.microsoft.com/office/drawing/2014/main" id="{E830B0DD-3571-E301-97F5-F65AC017CAA9}"/>
+              </a:ext>
+            </a:extLst>
+          </p:cNvPr>
+          <p:cNvSpPr>
+            <a:spLocks noGrp="1"/>
+          </p:cNvSpPr>
+          <p:nvPr>
+            <p:ph type="title"/>
+          </p:nvPr>
+        </p:nvSpPr>
+        <p:spPr>
+          <a:xfrm>
+            <a:off x="838200" y="365125"/>
+            <a:ext cx="4457700" cy="1325563"/>
+          </a:xfrm>
+        </p:spPr>
+        <p:txBody>
+          <a:bodyPr/>
+          <a:lstStyle/>
+          <a:p>
+            <a:r>
+              <a:rPr lang="en-US" dirty="0"/>
+              <a:t>NAND and NOR Fewer transistors </a:t>
+            </a:r>
+          </a:p>
+        </p:txBody>
+      </p:sp>
+      <p:pic>
+        <p:nvPicPr>
+          <p:cNvPr id="1034" name="Picture 10" descr="CD4001B in DIP-14 integrated circuit package (quad 2-input NOR gate)">
+            <a:extLst>
+              <a:ext uri="{FF2B5EF4-FFF2-40B4-BE49-F238E27FC236}">
+                <a16:creationId xmlns:a16="http://schemas.microsoft.com/office/drawing/2014/main" id="{7827078E-2079-F654-3978-F6E05206C42E}"/>
+              </a:ext>
+            </a:extLst>
+          </p:cNvPr>
+          <p:cNvPicPr>
+            <a:picLocks noChangeAspect="1" noChangeArrowheads="1"/>
+          </p:cNvPicPr>
+          <p:nvPr/>
+        </p:nvPicPr>
+        <p:blipFill>
+          <a:blip r:embed="rId3">
+            <a:extLst>
+              <a:ext uri="{28A0092B-C50C-407E-A947-70E740481C1C}">
+                <a14:useLocalDpi xmlns:a14="http://schemas.microsoft.com/office/drawing/2010/main"/>
+              </a:ext>
+            </a:extLst>
+          </a:blip>
+          <a:srcRect/>
+          <a:stretch>
+            <a:fillRect/>
+          </a:stretch>
+        </p:blipFill>
+        <p:spPr bwMode="auto">
+          <a:xfrm>
+            <a:off x="7360987" y="508410"/>
+            <a:ext cx="2343173" cy="1321550"/>
+          </a:xfrm>
+          <a:prstGeom prst="rect">
+            <a:avLst/>
+          </a:prstGeom>
+          <a:noFill/>
+          <a:extLst>
+            <a:ext uri="{909E8E84-426E-40DD-AFC4-6F175D3DCCD1}">
+              <a14:hiddenFill xmlns:a14="http://schemas.microsoft.com/office/drawing/2010/main">
+                <a:solidFill>
+                  <a:srgbClr val="FFFFFF"/>
+                </a:solidFill>
+              </a14:hiddenFill>
+            </a:ext>
+          </a:extLst>
+        </p:spPr>
+      </p:pic>
+      <p:sp>
+        <p:nvSpPr>
+          <p:cNvPr id="11" name="TextBox 10">
+            <a:extLst>
+              <a:ext uri="{FF2B5EF4-FFF2-40B4-BE49-F238E27FC236}">
+                <a16:creationId xmlns:a16="http://schemas.microsoft.com/office/drawing/2014/main" id="{C19EA7B6-BEF9-54E3-9B49-3B3091AE9DA8}"/>
+              </a:ext>
+            </a:extLst>
+          </p:cNvPr>
+          <p:cNvSpPr txBox="1"/>
+          <p:nvPr/>
+        </p:nvSpPr>
+        <p:spPr>
+          <a:xfrm>
+            <a:off x="1414482" y="2101365"/>
+            <a:ext cx="758541" cy="369332"/>
+          </a:xfrm>
+          <a:prstGeom prst="rect">
+            <a:avLst/>
+          </a:prstGeom>
+          <a:noFill/>
+        </p:spPr>
+        <p:txBody>
+          <a:bodyPr wrap="none" rtlCol="0">
+            <a:spAutoFit/>
+          </a:bodyPr>
+          <a:lstStyle/>
+          <a:p>
+            <a:r>
+              <a:rPr lang="en-US" dirty="0"/>
+              <a:t>NAND</a:t>
+            </a:r>
+          </a:p>
+        </p:txBody>
+      </p:sp>
+      <p:pic>
+        <p:nvPicPr>
+          <p:cNvPr id="13" name="Picture 2" descr="NAND gate symbol with two inputs (A and B) and one output (Q).  The NAND symbol looks exactly like the AND symbol except it has a small circle on its output connection indicating that the output is inverted.">
+            <a:extLst>
+              <a:ext uri="{FF2B5EF4-FFF2-40B4-BE49-F238E27FC236}">
+                <a16:creationId xmlns:a16="http://schemas.microsoft.com/office/drawing/2014/main" id="{AE7BEEF4-0E88-6C16-61D2-F9708FCAD516}"/>
+              </a:ext>
+            </a:extLst>
+          </p:cNvPr>
+          <p:cNvPicPr>
+            <a:picLocks noChangeAspect="1" noChangeArrowheads="1"/>
+          </p:cNvPicPr>
+          <p:nvPr/>
+        </p:nvPicPr>
+        <p:blipFill>
+          <a:blip r:embed="rId4">
+            <a:extLst>
+              <a:ext uri="{28A0092B-C50C-407E-A947-70E740481C1C}">
+                <a14:useLocalDpi xmlns:a14="http://schemas.microsoft.com/office/drawing/2010/main"/>
+              </a:ext>
+            </a:extLst>
+          </a:blip>
+          <a:srcRect/>
+          <a:stretch>
+            <a:fillRect/>
+          </a:stretch>
+        </p:blipFill>
+        <p:spPr bwMode="auto">
+          <a:xfrm>
+            <a:off x="1098204" y="2472587"/>
+            <a:ext cx="1524000" cy="635000"/>
+          </a:xfrm>
+          <a:prstGeom prst="rect">
+            <a:avLst/>
+          </a:prstGeom>
+          <a:noFill/>
+          <a:extLst>
+            <a:ext uri="{909E8E84-426E-40DD-AFC4-6F175D3DCCD1}">
+              <a14:hiddenFill xmlns:a14="http://schemas.microsoft.com/office/drawing/2010/main">
+                <a:solidFill>
+                  <a:srgbClr val="FFFFFF"/>
+                </a:solidFill>
+              </a14:hiddenFill>
+            </a:ext>
+          </a:extLst>
+        </p:spPr>
+      </p:pic>
       <p:graphicFrame>
         <p:nvGraphicFramePr>
           <p:cNvPr id="9" name="Table 8">
@@ -19156,10 +19361,10 @@
       </p:graphicFrame>
       <p:sp>
         <p:nvSpPr>
-          <p:cNvPr id="11" name="TextBox 10">
+          <p:cNvPr id="28" name="TextBox 27">
             <a:extLst>
               <a:ext uri="{FF2B5EF4-FFF2-40B4-BE49-F238E27FC236}">
-                <a16:creationId xmlns:a16="http://schemas.microsoft.com/office/drawing/2014/main" id="{C19EA7B6-BEF9-54E3-9B49-3B3091AE9DA8}"/>
+                <a16:creationId xmlns:a16="http://schemas.microsoft.com/office/drawing/2014/main" id="{8BBBF345-12E8-B147-48A5-F34B118036FB}"/>
               </a:ext>
             </a:extLst>
           </p:cNvPr>
@@ -19168,8 +19373,8 @@
         </p:nvSpPr>
         <p:spPr>
           <a:xfrm>
-            <a:off x="1414482" y="2101365"/>
-            <a:ext cx="758541" cy="369332"/>
+            <a:off x="1020162" y="5555131"/>
+            <a:ext cx="1641155" cy="369332"/>
           </a:xfrm>
           <a:prstGeom prst="rect">
             <a:avLst/>
@@ -19184,11 +19389,1706 @@
           <a:p>
             <a:r>
               <a:rPr lang="en-US" dirty="0"/>
-              <a:t>NAND</a:t>
+              <a:t>Four transistors</a:t>
             </a:r>
           </a:p>
         </p:txBody>
       </p:sp>
+      <p:grpSp>
+        <p:nvGrpSpPr>
+          <p:cNvPr id="44" name="Group 43" descr="This is a NAND gate with two PMOS transistors in parallel at the top connecting to the OUT wire.  On the bottom there are two series NMOS transistors connected between the OUT wire and the ground.&#13;&#10;">
+            <a:extLst>
+              <a:ext uri="{FF2B5EF4-FFF2-40B4-BE49-F238E27FC236}">
+                <a16:creationId xmlns:a16="http://schemas.microsoft.com/office/drawing/2014/main" id="{CBF67BD2-8FF8-5E47-6E84-35572C84D7F9}"/>
+              </a:ext>
+            </a:extLst>
+          </p:cNvPr>
+          <p:cNvGrpSpPr/>
+          <p:nvPr/>
+        </p:nvGrpSpPr>
+        <p:grpSpPr>
+          <a:xfrm>
+            <a:off x="3598814" y="2485905"/>
+            <a:ext cx="1901714" cy="3193148"/>
+            <a:chOff x="3598814" y="2485905"/>
+            <a:chExt cx="1901714" cy="3193148"/>
+          </a:xfrm>
+        </p:grpSpPr>
+        <p:grpSp>
+          <p:nvGrpSpPr>
+            <p:cNvPr id="1069" name="Group 1068">
+              <a:extLst>
+                <a:ext uri="{FF2B5EF4-FFF2-40B4-BE49-F238E27FC236}">
+                  <a16:creationId xmlns:a16="http://schemas.microsoft.com/office/drawing/2014/main" id="{4B6AEEC2-1236-C933-1DD6-FB6C2938BE99}"/>
+                </a:ext>
+              </a:extLst>
+            </p:cNvPr>
+            <p:cNvGrpSpPr/>
+            <p:nvPr/>
+          </p:nvGrpSpPr>
+          <p:grpSpPr>
+            <a:xfrm>
+              <a:off x="3836989" y="3168740"/>
+              <a:ext cx="370967" cy="261620"/>
+              <a:chOff x="3408218" y="2196942"/>
+              <a:chExt cx="4311227" cy="3040439"/>
+            </a:xfrm>
+          </p:grpSpPr>
+          <p:cxnSp>
+            <p:nvCxnSpPr>
+              <p:cNvPr id="1105" name="Straight Connector 1104">
+                <a:extLst>
+                  <a:ext uri="{FF2B5EF4-FFF2-40B4-BE49-F238E27FC236}">
+                    <a16:creationId xmlns:a16="http://schemas.microsoft.com/office/drawing/2014/main" id="{E1448C92-AEAA-BFF4-2D45-D44305836D23}"/>
+                  </a:ext>
+                </a:extLst>
+              </p:cNvPr>
+              <p:cNvCxnSpPr>
+                <a:cxnSpLocks/>
+              </p:cNvCxnSpPr>
+              <p:nvPr/>
+            </p:nvCxnSpPr>
+            <p:spPr>
+              <a:xfrm flipH="1">
+                <a:off x="5925803" y="2196950"/>
+                <a:ext cx="1793642" cy="0"/>
+              </a:xfrm>
+              <a:prstGeom prst="line">
+                <a:avLst/>
+              </a:prstGeom>
+              <a:ln w="19050">
+                <a:solidFill>
+                  <a:schemeClr val="tx1"/>
+                </a:solidFill>
+              </a:ln>
+            </p:spPr>
+            <p:style>
+              <a:lnRef idx="1">
+                <a:schemeClr val="accent1"/>
+              </a:lnRef>
+              <a:fillRef idx="0">
+                <a:schemeClr val="accent1"/>
+              </a:fillRef>
+              <a:effectRef idx="0">
+                <a:schemeClr val="accent1"/>
+              </a:effectRef>
+              <a:fontRef idx="minor">
+                <a:schemeClr val="tx1"/>
+              </a:fontRef>
+            </p:style>
+          </p:cxnSp>
+          <p:cxnSp>
+            <p:nvCxnSpPr>
+              <p:cNvPr id="1106" name="Straight Connector 1105">
+                <a:extLst>
+                  <a:ext uri="{FF2B5EF4-FFF2-40B4-BE49-F238E27FC236}">
+                    <a16:creationId xmlns:a16="http://schemas.microsoft.com/office/drawing/2014/main" id="{BA0A7C8C-1C91-9575-ABAB-062A5F972766}"/>
+                  </a:ext>
+                </a:extLst>
+              </p:cNvPr>
+              <p:cNvCxnSpPr>
+                <a:cxnSpLocks/>
+              </p:cNvCxnSpPr>
+              <p:nvPr/>
+            </p:nvCxnSpPr>
+            <p:spPr>
+              <a:xfrm flipV="1">
+                <a:off x="5925803" y="2196942"/>
+                <a:ext cx="0" cy="3040439"/>
+              </a:xfrm>
+              <a:prstGeom prst="line">
+                <a:avLst/>
+              </a:prstGeom>
+              <a:ln w="19050">
+                <a:solidFill>
+                  <a:schemeClr val="tx1"/>
+                </a:solidFill>
+              </a:ln>
+            </p:spPr>
+            <p:style>
+              <a:lnRef idx="1">
+                <a:schemeClr val="accent1"/>
+              </a:lnRef>
+              <a:fillRef idx="0">
+                <a:schemeClr val="accent1"/>
+              </a:fillRef>
+              <a:effectRef idx="0">
+                <a:schemeClr val="accent1"/>
+              </a:effectRef>
+              <a:fontRef idx="minor">
+                <a:schemeClr val="tx1"/>
+              </a:fontRef>
+            </p:style>
+          </p:cxnSp>
+          <p:cxnSp>
+            <p:nvCxnSpPr>
+              <p:cNvPr id="1107" name="Straight Connector 1106">
+                <a:extLst>
+                  <a:ext uri="{FF2B5EF4-FFF2-40B4-BE49-F238E27FC236}">
+                    <a16:creationId xmlns:a16="http://schemas.microsoft.com/office/drawing/2014/main" id="{AE138314-AB09-4311-CB85-902F8A0D17C8}"/>
+                  </a:ext>
+                </a:extLst>
+              </p:cNvPr>
+              <p:cNvCxnSpPr>
+                <a:cxnSpLocks/>
+              </p:cNvCxnSpPr>
+              <p:nvPr/>
+            </p:nvCxnSpPr>
+            <p:spPr>
+              <a:xfrm>
+                <a:off x="5390677" y="2449992"/>
+                <a:ext cx="0" cy="2589497"/>
+              </a:xfrm>
+              <a:prstGeom prst="line">
+                <a:avLst/>
+              </a:prstGeom>
+              <a:ln w="19050">
+                <a:solidFill>
+                  <a:schemeClr val="tx1"/>
+                </a:solidFill>
+              </a:ln>
+            </p:spPr>
+            <p:style>
+              <a:lnRef idx="1">
+                <a:schemeClr val="accent1"/>
+              </a:lnRef>
+              <a:fillRef idx="0">
+                <a:schemeClr val="accent1"/>
+              </a:fillRef>
+              <a:effectRef idx="0">
+                <a:schemeClr val="accent1"/>
+              </a:effectRef>
+              <a:fontRef idx="minor">
+                <a:schemeClr val="tx1"/>
+              </a:fontRef>
+            </p:style>
+          </p:cxnSp>
+          <p:cxnSp>
+            <p:nvCxnSpPr>
+              <p:cNvPr id="1108" name="Straight Connector 1107">
+                <a:extLst>
+                  <a:ext uri="{FF2B5EF4-FFF2-40B4-BE49-F238E27FC236}">
+                    <a16:creationId xmlns:a16="http://schemas.microsoft.com/office/drawing/2014/main" id="{F5776D58-724B-FA5C-EA39-63A6719CF39B}"/>
+                  </a:ext>
+                </a:extLst>
+              </p:cNvPr>
+              <p:cNvCxnSpPr>
+                <a:cxnSpLocks/>
+              </p:cNvCxnSpPr>
+              <p:nvPr/>
+            </p:nvCxnSpPr>
+            <p:spPr>
+              <a:xfrm>
+                <a:off x="3408218" y="3717171"/>
+                <a:ext cx="1982470" cy="0"/>
+              </a:xfrm>
+              <a:prstGeom prst="line">
+                <a:avLst/>
+              </a:prstGeom>
+              <a:ln w="19050">
+                <a:solidFill>
+                  <a:schemeClr val="tx1"/>
+                </a:solidFill>
+              </a:ln>
+            </p:spPr>
+            <p:style>
+              <a:lnRef idx="1">
+                <a:schemeClr val="accent1"/>
+              </a:lnRef>
+              <a:fillRef idx="0">
+                <a:schemeClr val="accent1"/>
+              </a:fillRef>
+              <a:effectRef idx="0">
+                <a:schemeClr val="accent1"/>
+              </a:effectRef>
+              <a:fontRef idx="minor">
+                <a:schemeClr val="tx1"/>
+              </a:fontRef>
+            </p:style>
+          </p:cxnSp>
+          <p:sp>
+            <p:nvSpPr>
+              <p:cNvPr id="1109" name="Oval 1108">
+                <a:extLst>
+                  <a:ext uri="{FF2B5EF4-FFF2-40B4-BE49-F238E27FC236}">
+                    <a16:creationId xmlns:a16="http://schemas.microsoft.com/office/drawing/2014/main" id="{08D01DC1-AAE5-58E7-0486-5CBD45E6DF6E}"/>
+                  </a:ext>
+                </a:extLst>
+              </p:cNvPr>
+              <p:cNvSpPr/>
+              <p:nvPr/>
+            </p:nvSpPr>
+            <p:spPr>
+              <a:xfrm>
+                <a:off x="4767388" y="3425040"/>
+                <a:ext cx="622114" cy="576944"/>
+              </a:xfrm>
+              <a:prstGeom prst="ellipse">
+                <a:avLst/>
+              </a:prstGeom>
+              <a:solidFill>
+                <a:schemeClr val="bg1"/>
+              </a:solidFill>
+              <a:ln w="19050">
+                <a:solidFill>
+                  <a:schemeClr val="tx1"/>
+                </a:solidFill>
+              </a:ln>
+            </p:spPr>
+            <p:style>
+              <a:lnRef idx="2">
+                <a:schemeClr val="accent1">
+                  <a:shade val="15000"/>
+                </a:schemeClr>
+              </a:lnRef>
+              <a:fillRef idx="1">
+                <a:schemeClr val="accent1"/>
+              </a:fillRef>
+              <a:effectRef idx="0">
+                <a:schemeClr val="accent1"/>
+              </a:effectRef>
+              <a:fontRef idx="minor">
+                <a:schemeClr val="lt1"/>
+              </a:fontRef>
+            </p:style>
+            <p:txBody>
+              <a:bodyPr rtlCol="0" anchor="ctr"/>
+              <a:lstStyle/>
+              <a:p>
+                <a:pPr algn="ctr"/>
+                <a:endParaRPr lang="en-US"/>
+              </a:p>
+            </p:txBody>
+          </p:sp>
+          <p:cxnSp>
+            <p:nvCxnSpPr>
+              <p:cNvPr id="1110" name="Straight Connector 1109">
+                <a:extLst>
+                  <a:ext uri="{FF2B5EF4-FFF2-40B4-BE49-F238E27FC236}">
+                    <a16:creationId xmlns:a16="http://schemas.microsoft.com/office/drawing/2014/main" id="{8F18F6D4-B76D-B7D2-D285-E4CEA99253BD}"/>
+                  </a:ext>
+                </a:extLst>
+              </p:cNvPr>
+              <p:cNvCxnSpPr>
+                <a:cxnSpLocks/>
+              </p:cNvCxnSpPr>
+              <p:nvPr/>
+            </p:nvCxnSpPr>
+            <p:spPr>
+              <a:xfrm flipH="1">
+                <a:off x="5925803" y="5237381"/>
+                <a:ext cx="1793642" cy="0"/>
+              </a:xfrm>
+              <a:prstGeom prst="line">
+                <a:avLst/>
+              </a:prstGeom>
+              <a:ln w="19050">
+                <a:solidFill>
+                  <a:schemeClr val="tx1"/>
+                </a:solidFill>
+              </a:ln>
+            </p:spPr>
+            <p:style>
+              <a:lnRef idx="1">
+                <a:schemeClr val="accent1"/>
+              </a:lnRef>
+              <a:fillRef idx="0">
+                <a:schemeClr val="accent1"/>
+              </a:fillRef>
+              <a:effectRef idx="0">
+                <a:schemeClr val="accent1"/>
+              </a:effectRef>
+              <a:fontRef idx="minor">
+                <a:schemeClr val="tx1"/>
+              </a:fontRef>
+            </p:style>
+          </p:cxnSp>
+        </p:grpSp>
+        <p:grpSp>
+          <p:nvGrpSpPr>
+            <p:cNvPr id="1070" name="Group 1069">
+              <a:extLst>
+                <a:ext uri="{FF2B5EF4-FFF2-40B4-BE49-F238E27FC236}">
+                  <a16:creationId xmlns:a16="http://schemas.microsoft.com/office/drawing/2014/main" id="{0EFDF269-5C96-A1B0-5212-FFD5A6ACBF20}"/>
+                </a:ext>
+              </a:extLst>
+            </p:cNvPr>
+            <p:cNvGrpSpPr/>
+            <p:nvPr/>
+          </p:nvGrpSpPr>
+          <p:grpSpPr>
+            <a:xfrm>
+              <a:off x="4204455" y="4061646"/>
+              <a:ext cx="370967" cy="261620"/>
+              <a:chOff x="10753571" y="4787961"/>
+              <a:chExt cx="370967" cy="261620"/>
+            </a:xfrm>
+          </p:grpSpPr>
+          <p:cxnSp>
+            <p:nvCxnSpPr>
+              <p:cNvPr id="1100" name="Straight Connector 1099">
+                <a:extLst>
+                  <a:ext uri="{FF2B5EF4-FFF2-40B4-BE49-F238E27FC236}">
+                    <a16:creationId xmlns:a16="http://schemas.microsoft.com/office/drawing/2014/main" id="{DD86053F-91F2-49C4-10DD-063F2DDBDB8B}"/>
+                  </a:ext>
+                </a:extLst>
+              </p:cNvPr>
+              <p:cNvCxnSpPr>
+                <a:cxnSpLocks/>
+              </p:cNvCxnSpPr>
+              <p:nvPr/>
+            </p:nvCxnSpPr>
+            <p:spPr>
+              <a:xfrm flipH="1">
+                <a:off x="10970201" y="4787962"/>
+                <a:ext cx="154337" cy="0"/>
+              </a:xfrm>
+              <a:prstGeom prst="line">
+                <a:avLst/>
+              </a:prstGeom>
+              <a:ln w="19050">
+                <a:solidFill>
+                  <a:schemeClr val="tx1"/>
+                </a:solidFill>
+              </a:ln>
+            </p:spPr>
+            <p:style>
+              <a:lnRef idx="1">
+                <a:schemeClr val="accent1"/>
+              </a:lnRef>
+              <a:fillRef idx="0">
+                <a:schemeClr val="accent1"/>
+              </a:fillRef>
+              <a:effectRef idx="0">
+                <a:schemeClr val="accent1"/>
+              </a:effectRef>
+              <a:fontRef idx="minor">
+                <a:schemeClr val="tx1"/>
+              </a:fontRef>
+            </p:style>
+          </p:cxnSp>
+          <p:cxnSp>
+            <p:nvCxnSpPr>
+              <p:cNvPr id="1101" name="Straight Connector 1100">
+                <a:extLst>
+                  <a:ext uri="{FF2B5EF4-FFF2-40B4-BE49-F238E27FC236}">
+                    <a16:creationId xmlns:a16="http://schemas.microsoft.com/office/drawing/2014/main" id="{B7C5EE0C-8B4E-AE73-58AE-44D98780B99A}"/>
+                  </a:ext>
+                </a:extLst>
+              </p:cNvPr>
+              <p:cNvCxnSpPr>
+                <a:cxnSpLocks/>
+              </p:cNvCxnSpPr>
+              <p:nvPr/>
+            </p:nvCxnSpPr>
+            <p:spPr>
+              <a:xfrm flipV="1">
+                <a:off x="10970201" y="4787961"/>
+                <a:ext cx="0" cy="261620"/>
+              </a:xfrm>
+              <a:prstGeom prst="line">
+                <a:avLst/>
+              </a:prstGeom>
+              <a:ln w="19050">
+                <a:solidFill>
+                  <a:schemeClr val="tx1"/>
+                </a:solidFill>
+              </a:ln>
+            </p:spPr>
+            <p:style>
+              <a:lnRef idx="1">
+                <a:schemeClr val="accent1"/>
+              </a:lnRef>
+              <a:fillRef idx="0">
+                <a:schemeClr val="accent1"/>
+              </a:fillRef>
+              <a:effectRef idx="0">
+                <a:schemeClr val="accent1"/>
+              </a:effectRef>
+              <a:fontRef idx="minor">
+                <a:schemeClr val="tx1"/>
+              </a:fontRef>
+            </p:style>
+          </p:cxnSp>
+          <p:cxnSp>
+            <p:nvCxnSpPr>
+              <p:cNvPr id="1102" name="Straight Connector 1101">
+                <a:extLst>
+                  <a:ext uri="{FF2B5EF4-FFF2-40B4-BE49-F238E27FC236}">
+                    <a16:creationId xmlns:a16="http://schemas.microsoft.com/office/drawing/2014/main" id="{8714277D-6F1B-E94A-4979-6E7B68436A74}"/>
+                  </a:ext>
+                </a:extLst>
+              </p:cNvPr>
+              <p:cNvCxnSpPr>
+                <a:cxnSpLocks/>
+              </p:cNvCxnSpPr>
+              <p:nvPr/>
+            </p:nvCxnSpPr>
+            <p:spPr>
+              <a:xfrm>
+                <a:off x="10924155" y="4809735"/>
+                <a:ext cx="0" cy="222818"/>
+              </a:xfrm>
+              <a:prstGeom prst="line">
+                <a:avLst/>
+              </a:prstGeom>
+              <a:ln w="19050">
+                <a:solidFill>
+                  <a:schemeClr val="tx1"/>
+                </a:solidFill>
+              </a:ln>
+            </p:spPr>
+            <p:style>
+              <a:lnRef idx="1">
+                <a:schemeClr val="accent1"/>
+              </a:lnRef>
+              <a:fillRef idx="0">
+                <a:schemeClr val="accent1"/>
+              </a:fillRef>
+              <a:effectRef idx="0">
+                <a:schemeClr val="accent1"/>
+              </a:effectRef>
+              <a:fontRef idx="minor">
+                <a:schemeClr val="tx1"/>
+              </a:fontRef>
+            </p:style>
+          </p:cxnSp>
+          <p:cxnSp>
+            <p:nvCxnSpPr>
+              <p:cNvPr id="1103" name="Straight Connector 1102">
+                <a:extLst>
+                  <a:ext uri="{FF2B5EF4-FFF2-40B4-BE49-F238E27FC236}">
+                    <a16:creationId xmlns:a16="http://schemas.microsoft.com/office/drawing/2014/main" id="{E9B58BD3-6B5B-A56F-DD41-87CD43EAB3F8}"/>
+                  </a:ext>
+                </a:extLst>
+              </p:cNvPr>
+              <p:cNvCxnSpPr>
+                <a:cxnSpLocks/>
+              </p:cNvCxnSpPr>
+              <p:nvPr/>
+            </p:nvCxnSpPr>
+            <p:spPr>
+              <a:xfrm>
+                <a:off x="10753571" y="4918772"/>
+                <a:ext cx="170585" cy="0"/>
+              </a:xfrm>
+              <a:prstGeom prst="line">
+                <a:avLst/>
+              </a:prstGeom>
+              <a:ln w="19050">
+                <a:solidFill>
+                  <a:schemeClr val="tx1"/>
+                </a:solidFill>
+              </a:ln>
+            </p:spPr>
+            <p:style>
+              <a:lnRef idx="1">
+                <a:schemeClr val="accent1"/>
+              </a:lnRef>
+              <a:fillRef idx="0">
+                <a:schemeClr val="accent1"/>
+              </a:fillRef>
+              <a:effectRef idx="0">
+                <a:schemeClr val="accent1"/>
+              </a:effectRef>
+              <a:fontRef idx="minor">
+                <a:schemeClr val="tx1"/>
+              </a:fontRef>
+            </p:style>
+          </p:cxnSp>
+          <p:cxnSp>
+            <p:nvCxnSpPr>
+              <p:cNvPr id="1104" name="Straight Connector 1103">
+                <a:extLst>
+                  <a:ext uri="{FF2B5EF4-FFF2-40B4-BE49-F238E27FC236}">
+                    <a16:creationId xmlns:a16="http://schemas.microsoft.com/office/drawing/2014/main" id="{B9ED6A66-0E6C-0980-55DF-DAB7FC313B1A}"/>
+                  </a:ext>
+                </a:extLst>
+              </p:cNvPr>
+              <p:cNvCxnSpPr>
+                <a:cxnSpLocks/>
+              </p:cNvCxnSpPr>
+              <p:nvPr/>
+            </p:nvCxnSpPr>
+            <p:spPr>
+              <a:xfrm flipH="1">
+                <a:off x="10970201" y="5049581"/>
+                <a:ext cx="154337" cy="0"/>
+              </a:xfrm>
+              <a:prstGeom prst="line">
+                <a:avLst/>
+              </a:prstGeom>
+              <a:ln w="19050">
+                <a:solidFill>
+                  <a:schemeClr val="tx1"/>
+                </a:solidFill>
+              </a:ln>
+            </p:spPr>
+            <p:style>
+              <a:lnRef idx="1">
+                <a:schemeClr val="accent1"/>
+              </a:lnRef>
+              <a:fillRef idx="0">
+                <a:schemeClr val="accent1"/>
+              </a:fillRef>
+              <a:effectRef idx="0">
+                <a:schemeClr val="accent1"/>
+              </a:effectRef>
+              <a:fontRef idx="minor">
+                <a:schemeClr val="tx1"/>
+              </a:fontRef>
+            </p:style>
+          </p:cxnSp>
+        </p:grpSp>
+        <p:grpSp>
+          <p:nvGrpSpPr>
+            <p:cNvPr id="1071" name="Group 1070">
+              <a:extLst>
+                <a:ext uri="{FF2B5EF4-FFF2-40B4-BE49-F238E27FC236}">
+                  <a16:creationId xmlns:a16="http://schemas.microsoft.com/office/drawing/2014/main" id="{30752C4C-3969-1AF8-90A1-D3CB93FD6402}"/>
+                </a:ext>
+              </a:extLst>
+            </p:cNvPr>
+            <p:cNvGrpSpPr/>
+            <p:nvPr/>
+          </p:nvGrpSpPr>
+          <p:grpSpPr>
+            <a:xfrm>
+              <a:off x="4537637" y="3177179"/>
+              <a:ext cx="370967" cy="261620"/>
+              <a:chOff x="3408218" y="2196942"/>
+              <a:chExt cx="4311227" cy="3040439"/>
+            </a:xfrm>
+          </p:grpSpPr>
+          <p:cxnSp>
+            <p:nvCxnSpPr>
+              <p:cNvPr id="1094" name="Straight Connector 1093">
+                <a:extLst>
+                  <a:ext uri="{FF2B5EF4-FFF2-40B4-BE49-F238E27FC236}">
+                    <a16:creationId xmlns:a16="http://schemas.microsoft.com/office/drawing/2014/main" id="{059BD7A3-5CE7-428E-F316-FFF8C5EE631A}"/>
+                  </a:ext>
+                </a:extLst>
+              </p:cNvPr>
+              <p:cNvCxnSpPr>
+                <a:cxnSpLocks/>
+              </p:cNvCxnSpPr>
+              <p:nvPr/>
+            </p:nvCxnSpPr>
+            <p:spPr>
+              <a:xfrm flipH="1">
+                <a:off x="5925803" y="2196950"/>
+                <a:ext cx="1793642" cy="0"/>
+              </a:xfrm>
+              <a:prstGeom prst="line">
+                <a:avLst/>
+              </a:prstGeom>
+              <a:ln w="19050">
+                <a:solidFill>
+                  <a:schemeClr val="tx1"/>
+                </a:solidFill>
+              </a:ln>
+            </p:spPr>
+            <p:style>
+              <a:lnRef idx="1">
+                <a:schemeClr val="accent1"/>
+              </a:lnRef>
+              <a:fillRef idx="0">
+                <a:schemeClr val="accent1"/>
+              </a:fillRef>
+              <a:effectRef idx="0">
+                <a:schemeClr val="accent1"/>
+              </a:effectRef>
+              <a:fontRef idx="minor">
+                <a:schemeClr val="tx1"/>
+              </a:fontRef>
+            </p:style>
+          </p:cxnSp>
+          <p:cxnSp>
+            <p:nvCxnSpPr>
+              <p:cNvPr id="1095" name="Straight Connector 1094">
+                <a:extLst>
+                  <a:ext uri="{FF2B5EF4-FFF2-40B4-BE49-F238E27FC236}">
+                    <a16:creationId xmlns:a16="http://schemas.microsoft.com/office/drawing/2014/main" id="{8D6BD206-3130-AE7A-2522-B6DC0C1A8A32}"/>
+                  </a:ext>
+                </a:extLst>
+              </p:cNvPr>
+              <p:cNvCxnSpPr>
+                <a:cxnSpLocks/>
+              </p:cNvCxnSpPr>
+              <p:nvPr/>
+            </p:nvCxnSpPr>
+            <p:spPr>
+              <a:xfrm flipV="1">
+                <a:off x="5925803" y="2196942"/>
+                <a:ext cx="0" cy="3040439"/>
+              </a:xfrm>
+              <a:prstGeom prst="line">
+                <a:avLst/>
+              </a:prstGeom>
+              <a:ln w="19050">
+                <a:solidFill>
+                  <a:schemeClr val="tx1"/>
+                </a:solidFill>
+              </a:ln>
+            </p:spPr>
+            <p:style>
+              <a:lnRef idx="1">
+                <a:schemeClr val="accent1"/>
+              </a:lnRef>
+              <a:fillRef idx="0">
+                <a:schemeClr val="accent1"/>
+              </a:fillRef>
+              <a:effectRef idx="0">
+                <a:schemeClr val="accent1"/>
+              </a:effectRef>
+              <a:fontRef idx="minor">
+                <a:schemeClr val="tx1"/>
+              </a:fontRef>
+            </p:style>
+          </p:cxnSp>
+          <p:cxnSp>
+            <p:nvCxnSpPr>
+              <p:cNvPr id="1096" name="Straight Connector 1095">
+                <a:extLst>
+                  <a:ext uri="{FF2B5EF4-FFF2-40B4-BE49-F238E27FC236}">
+                    <a16:creationId xmlns:a16="http://schemas.microsoft.com/office/drawing/2014/main" id="{EB530513-92CA-B63C-A51A-F8A7071AB48B}"/>
+                  </a:ext>
+                </a:extLst>
+              </p:cNvPr>
+              <p:cNvCxnSpPr>
+                <a:cxnSpLocks/>
+              </p:cNvCxnSpPr>
+              <p:nvPr/>
+            </p:nvCxnSpPr>
+            <p:spPr>
+              <a:xfrm>
+                <a:off x="5390677" y="2449992"/>
+                <a:ext cx="0" cy="2589497"/>
+              </a:xfrm>
+              <a:prstGeom prst="line">
+                <a:avLst/>
+              </a:prstGeom>
+              <a:ln w="19050">
+                <a:solidFill>
+                  <a:schemeClr val="tx1"/>
+                </a:solidFill>
+              </a:ln>
+            </p:spPr>
+            <p:style>
+              <a:lnRef idx="1">
+                <a:schemeClr val="accent1"/>
+              </a:lnRef>
+              <a:fillRef idx="0">
+                <a:schemeClr val="accent1"/>
+              </a:fillRef>
+              <a:effectRef idx="0">
+                <a:schemeClr val="accent1"/>
+              </a:effectRef>
+              <a:fontRef idx="minor">
+                <a:schemeClr val="tx1"/>
+              </a:fontRef>
+            </p:style>
+          </p:cxnSp>
+          <p:cxnSp>
+            <p:nvCxnSpPr>
+              <p:cNvPr id="1097" name="Straight Connector 1096">
+                <a:extLst>
+                  <a:ext uri="{FF2B5EF4-FFF2-40B4-BE49-F238E27FC236}">
+                    <a16:creationId xmlns:a16="http://schemas.microsoft.com/office/drawing/2014/main" id="{AD59E074-230A-202B-CC00-637BCEF46282}"/>
+                  </a:ext>
+                </a:extLst>
+              </p:cNvPr>
+              <p:cNvCxnSpPr>
+                <a:cxnSpLocks/>
+              </p:cNvCxnSpPr>
+              <p:nvPr/>
+            </p:nvCxnSpPr>
+            <p:spPr>
+              <a:xfrm>
+                <a:off x="3408218" y="3717171"/>
+                <a:ext cx="1982470" cy="0"/>
+              </a:xfrm>
+              <a:prstGeom prst="line">
+                <a:avLst/>
+              </a:prstGeom>
+              <a:ln w="19050">
+                <a:solidFill>
+                  <a:schemeClr val="tx1"/>
+                </a:solidFill>
+              </a:ln>
+            </p:spPr>
+            <p:style>
+              <a:lnRef idx="1">
+                <a:schemeClr val="accent1"/>
+              </a:lnRef>
+              <a:fillRef idx="0">
+                <a:schemeClr val="accent1"/>
+              </a:fillRef>
+              <a:effectRef idx="0">
+                <a:schemeClr val="accent1"/>
+              </a:effectRef>
+              <a:fontRef idx="minor">
+                <a:schemeClr val="tx1"/>
+              </a:fontRef>
+            </p:style>
+          </p:cxnSp>
+          <p:sp>
+            <p:nvSpPr>
+              <p:cNvPr id="1098" name="Oval 1097">
+                <a:extLst>
+                  <a:ext uri="{FF2B5EF4-FFF2-40B4-BE49-F238E27FC236}">
+                    <a16:creationId xmlns:a16="http://schemas.microsoft.com/office/drawing/2014/main" id="{07F516AF-9774-F08B-C081-219CD53A52B4}"/>
+                  </a:ext>
+                </a:extLst>
+              </p:cNvPr>
+              <p:cNvSpPr/>
+              <p:nvPr/>
+            </p:nvSpPr>
+            <p:spPr>
+              <a:xfrm>
+                <a:off x="4767388" y="3425040"/>
+                <a:ext cx="622114" cy="576944"/>
+              </a:xfrm>
+              <a:prstGeom prst="ellipse">
+                <a:avLst/>
+              </a:prstGeom>
+              <a:solidFill>
+                <a:schemeClr val="bg1"/>
+              </a:solidFill>
+              <a:ln w="19050">
+                <a:solidFill>
+                  <a:schemeClr val="tx1"/>
+                </a:solidFill>
+              </a:ln>
+            </p:spPr>
+            <p:style>
+              <a:lnRef idx="2">
+                <a:schemeClr val="accent1">
+                  <a:shade val="15000"/>
+                </a:schemeClr>
+              </a:lnRef>
+              <a:fillRef idx="1">
+                <a:schemeClr val="accent1"/>
+              </a:fillRef>
+              <a:effectRef idx="0">
+                <a:schemeClr val="accent1"/>
+              </a:effectRef>
+              <a:fontRef idx="minor">
+                <a:schemeClr val="lt1"/>
+              </a:fontRef>
+            </p:style>
+            <p:txBody>
+              <a:bodyPr rtlCol="0" anchor="ctr"/>
+              <a:lstStyle/>
+              <a:p>
+                <a:pPr algn="ctr"/>
+                <a:endParaRPr lang="en-US"/>
+              </a:p>
+            </p:txBody>
+          </p:sp>
+          <p:cxnSp>
+            <p:nvCxnSpPr>
+              <p:cNvPr id="1099" name="Straight Connector 1098">
+                <a:extLst>
+                  <a:ext uri="{FF2B5EF4-FFF2-40B4-BE49-F238E27FC236}">
+                    <a16:creationId xmlns:a16="http://schemas.microsoft.com/office/drawing/2014/main" id="{2351B134-DFC9-90FC-C8FA-0F63741A4693}"/>
+                  </a:ext>
+                </a:extLst>
+              </p:cNvPr>
+              <p:cNvCxnSpPr>
+                <a:cxnSpLocks/>
+              </p:cNvCxnSpPr>
+              <p:nvPr/>
+            </p:nvCxnSpPr>
+            <p:spPr>
+              <a:xfrm flipH="1">
+                <a:off x="5925803" y="5237381"/>
+                <a:ext cx="1793642" cy="0"/>
+              </a:xfrm>
+              <a:prstGeom prst="line">
+                <a:avLst/>
+              </a:prstGeom>
+              <a:ln w="19050">
+                <a:solidFill>
+                  <a:schemeClr val="tx1"/>
+                </a:solidFill>
+              </a:ln>
+            </p:spPr>
+            <p:style>
+              <a:lnRef idx="1">
+                <a:schemeClr val="accent1"/>
+              </a:lnRef>
+              <a:fillRef idx="0">
+                <a:schemeClr val="accent1"/>
+              </a:fillRef>
+              <a:effectRef idx="0">
+                <a:schemeClr val="accent1"/>
+              </a:effectRef>
+              <a:fontRef idx="minor">
+                <a:schemeClr val="tx1"/>
+              </a:fontRef>
+            </p:style>
+          </p:cxnSp>
+        </p:grpSp>
+        <p:grpSp>
+          <p:nvGrpSpPr>
+            <p:cNvPr id="1072" name="Group 1071">
+              <a:extLst>
+                <a:ext uri="{FF2B5EF4-FFF2-40B4-BE49-F238E27FC236}">
+                  <a16:creationId xmlns:a16="http://schemas.microsoft.com/office/drawing/2014/main" id="{7FA1A5C0-A603-0F46-711F-8E75B415AD84}"/>
+                </a:ext>
+              </a:extLst>
+            </p:cNvPr>
+            <p:cNvGrpSpPr/>
+            <p:nvPr/>
+          </p:nvGrpSpPr>
+          <p:grpSpPr>
+            <a:xfrm>
+              <a:off x="4199362" y="4679160"/>
+              <a:ext cx="370967" cy="261620"/>
+              <a:chOff x="10753571" y="4787961"/>
+              <a:chExt cx="370967" cy="261620"/>
+            </a:xfrm>
+          </p:grpSpPr>
+          <p:cxnSp>
+            <p:nvCxnSpPr>
+              <p:cNvPr id="1089" name="Straight Connector 1088">
+                <a:extLst>
+                  <a:ext uri="{FF2B5EF4-FFF2-40B4-BE49-F238E27FC236}">
+                    <a16:creationId xmlns:a16="http://schemas.microsoft.com/office/drawing/2014/main" id="{1AF01156-12D0-F00B-867B-D6C59CBE98FF}"/>
+                  </a:ext>
+                </a:extLst>
+              </p:cNvPr>
+              <p:cNvCxnSpPr>
+                <a:cxnSpLocks/>
+              </p:cNvCxnSpPr>
+              <p:nvPr/>
+            </p:nvCxnSpPr>
+            <p:spPr>
+              <a:xfrm flipH="1">
+                <a:off x="10970201" y="4787962"/>
+                <a:ext cx="154337" cy="0"/>
+              </a:xfrm>
+              <a:prstGeom prst="line">
+                <a:avLst/>
+              </a:prstGeom>
+              <a:ln w="19050">
+                <a:solidFill>
+                  <a:schemeClr val="tx1"/>
+                </a:solidFill>
+              </a:ln>
+            </p:spPr>
+            <p:style>
+              <a:lnRef idx="1">
+                <a:schemeClr val="accent1"/>
+              </a:lnRef>
+              <a:fillRef idx="0">
+                <a:schemeClr val="accent1"/>
+              </a:fillRef>
+              <a:effectRef idx="0">
+                <a:schemeClr val="accent1"/>
+              </a:effectRef>
+              <a:fontRef idx="minor">
+                <a:schemeClr val="tx1"/>
+              </a:fontRef>
+            </p:style>
+          </p:cxnSp>
+          <p:cxnSp>
+            <p:nvCxnSpPr>
+              <p:cNvPr id="1090" name="Straight Connector 1089">
+                <a:extLst>
+                  <a:ext uri="{FF2B5EF4-FFF2-40B4-BE49-F238E27FC236}">
+                    <a16:creationId xmlns:a16="http://schemas.microsoft.com/office/drawing/2014/main" id="{D9B08062-C086-DB6A-E474-C9AA43F40D96}"/>
+                  </a:ext>
+                </a:extLst>
+              </p:cNvPr>
+              <p:cNvCxnSpPr>
+                <a:cxnSpLocks/>
+              </p:cNvCxnSpPr>
+              <p:nvPr/>
+            </p:nvCxnSpPr>
+            <p:spPr>
+              <a:xfrm flipV="1">
+                <a:off x="10970201" y="4787961"/>
+                <a:ext cx="0" cy="261620"/>
+              </a:xfrm>
+              <a:prstGeom prst="line">
+                <a:avLst/>
+              </a:prstGeom>
+              <a:ln w="19050">
+                <a:solidFill>
+                  <a:schemeClr val="tx1"/>
+                </a:solidFill>
+              </a:ln>
+            </p:spPr>
+            <p:style>
+              <a:lnRef idx="1">
+                <a:schemeClr val="accent1"/>
+              </a:lnRef>
+              <a:fillRef idx="0">
+                <a:schemeClr val="accent1"/>
+              </a:fillRef>
+              <a:effectRef idx="0">
+                <a:schemeClr val="accent1"/>
+              </a:effectRef>
+              <a:fontRef idx="minor">
+                <a:schemeClr val="tx1"/>
+              </a:fontRef>
+            </p:style>
+          </p:cxnSp>
+          <p:cxnSp>
+            <p:nvCxnSpPr>
+              <p:cNvPr id="1091" name="Straight Connector 1090">
+                <a:extLst>
+                  <a:ext uri="{FF2B5EF4-FFF2-40B4-BE49-F238E27FC236}">
+                    <a16:creationId xmlns:a16="http://schemas.microsoft.com/office/drawing/2014/main" id="{B0B6AB5E-0DE4-4E98-9F8A-33DAD7DE4039}"/>
+                  </a:ext>
+                </a:extLst>
+              </p:cNvPr>
+              <p:cNvCxnSpPr>
+                <a:cxnSpLocks/>
+              </p:cNvCxnSpPr>
+              <p:nvPr/>
+            </p:nvCxnSpPr>
+            <p:spPr>
+              <a:xfrm>
+                <a:off x="10924155" y="4809735"/>
+                <a:ext cx="0" cy="222818"/>
+              </a:xfrm>
+              <a:prstGeom prst="line">
+                <a:avLst/>
+              </a:prstGeom>
+              <a:ln w="19050">
+                <a:solidFill>
+                  <a:schemeClr val="tx1"/>
+                </a:solidFill>
+              </a:ln>
+            </p:spPr>
+            <p:style>
+              <a:lnRef idx="1">
+                <a:schemeClr val="accent1"/>
+              </a:lnRef>
+              <a:fillRef idx="0">
+                <a:schemeClr val="accent1"/>
+              </a:fillRef>
+              <a:effectRef idx="0">
+                <a:schemeClr val="accent1"/>
+              </a:effectRef>
+              <a:fontRef idx="minor">
+                <a:schemeClr val="tx1"/>
+              </a:fontRef>
+            </p:style>
+          </p:cxnSp>
+          <p:cxnSp>
+            <p:nvCxnSpPr>
+              <p:cNvPr id="1092" name="Straight Connector 1091">
+                <a:extLst>
+                  <a:ext uri="{FF2B5EF4-FFF2-40B4-BE49-F238E27FC236}">
+                    <a16:creationId xmlns:a16="http://schemas.microsoft.com/office/drawing/2014/main" id="{5002E2B1-6F20-FD26-C9FD-6F0A90CF17A6}"/>
+                  </a:ext>
+                </a:extLst>
+              </p:cNvPr>
+              <p:cNvCxnSpPr>
+                <a:cxnSpLocks/>
+              </p:cNvCxnSpPr>
+              <p:nvPr/>
+            </p:nvCxnSpPr>
+            <p:spPr>
+              <a:xfrm>
+                <a:off x="10753571" y="4918772"/>
+                <a:ext cx="170585" cy="0"/>
+              </a:xfrm>
+              <a:prstGeom prst="line">
+                <a:avLst/>
+              </a:prstGeom>
+              <a:ln w="19050">
+                <a:solidFill>
+                  <a:schemeClr val="tx1"/>
+                </a:solidFill>
+              </a:ln>
+            </p:spPr>
+            <p:style>
+              <a:lnRef idx="1">
+                <a:schemeClr val="accent1"/>
+              </a:lnRef>
+              <a:fillRef idx="0">
+                <a:schemeClr val="accent1"/>
+              </a:fillRef>
+              <a:effectRef idx="0">
+                <a:schemeClr val="accent1"/>
+              </a:effectRef>
+              <a:fontRef idx="minor">
+                <a:schemeClr val="tx1"/>
+              </a:fontRef>
+            </p:style>
+          </p:cxnSp>
+          <p:cxnSp>
+            <p:nvCxnSpPr>
+              <p:cNvPr id="1093" name="Straight Connector 1092">
+                <a:extLst>
+                  <a:ext uri="{FF2B5EF4-FFF2-40B4-BE49-F238E27FC236}">
+                    <a16:creationId xmlns:a16="http://schemas.microsoft.com/office/drawing/2014/main" id="{0844936C-B1B1-BA3A-3F4B-EA638F4B19D9}"/>
+                  </a:ext>
+                </a:extLst>
+              </p:cNvPr>
+              <p:cNvCxnSpPr>
+                <a:cxnSpLocks/>
+              </p:cNvCxnSpPr>
+              <p:nvPr/>
+            </p:nvCxnSpPr>
+            <p:spPr>
+              <a:xfrm flipH="1">
+                <a:off x="10970201" y="5049581"/>
+                <a:ext cx="154337" cy="0"/>
+              </a:xfrm>
+              <a:prstGeom prst="line">
+                <a:avLst/>
+              </a:prstGeom>
+              <a:ln w="19050">
+                <a:solidFill>
+                  <a:schemeClr val="tx1"/>
+                </a:solidFill>
+              </a:ln>
+            </p:spPr>
+            <p:style>
+              <a:lnRef idx="1">
+                <a:schemeClr val="accent1"/>
+              </a:lnRef>
+              <a:fillRef idx="0">
+                <a:schemeClr val="accent1"/>
+              </a:fillRef>
+              <a:effectRef idx="0">
+                <a:schemeClr val="accent1"/>
+              </a:effectRef>
+              <a:fontRef idx="minor">
+                <a:schemeClr val="tx1"/>
+              </a:fontRef>
+            </p:style>
+          </p:cxnSp>
+        </p:grpSp>
+        <p:cxnSp>
+          <p:nvCxnSpPr>
+            <p:cNvPr id="1073" name="Straight Connector 1072">
+              <a:extLst>
+                <a:ext uri="{FF2B5EF4-FFF2-40B4-BE49-F238E27FC236}">
+                  <a16:creationId xmlns:a16="http://schemas.microsoft.com/office/drawing/2014/main" id="{55529910-F45E-AC3D-E2D3-120AC8B60E99}"/>
+                </a:ext>
+              </a:extLst>
+            </p:cNvPr>
+            <p:cNvCxnSpPr/>
+            <p:nvPr/>
+          </p:nvCxnSpPr>
+          <p:spPr>
+            <a:xfrm>
+              <a:off x="4220925" y="3774093"/>
+              <a:ext cx="1074920" cy="0"/>
+            </a:xfrm>
+            <a:prstGeom prst="line">
+              <a:avLst/>
+            </a:prstGeom>
+            <a:ln w="19050">
+              <a:solidFill>
+                <a:schemeClr val="tx1"/>
+              </a:solidFill>
+            </a:ln>
+          </p:spPr>
+          <p:style>
+            <a:lnRef idx="1">
+              <a:schemeClr val="accent1"/>
+            </a:lnRef>
+            <a:fillRef idx="0">
+              <a:schemeClr val="accent1"/>
+            </a:fillRef>
+            <a:effectRef idx="0">
+              <a:schemeClr val="accent1"/>
+            </a:effectRef>
+            <a:fontRef idx="minor">
+              <a:schemeClr val="tx1"/>
+            </a:fontRef>
+          </p:style>
+        </p:cxnSp>
+        <p:cxnSp>
+          <p:nvCxnSpPr>
+            <p:cNvPr id="1074" name="Straight Connector 1073">
+              <a:extLst>
+                <a:ext uri="{FF2B5EF4-FFF2-40B4-BE49-F238E27FC236}">
+                  <a16:creationId xmlns:a16="http://schemas.microsoft.com/office/drawing/2014/main" id="{C63AAE95-D2EE-FF72-6F06-E71DBE82B3C4}"/>
+                </a:ext>
+              </a:extLst>
+            </p:cNvPr>
+            <p:cNvCxnSpPr>
+              <a:cxnSpLocks/>
+            </p:cNvCxnSpPr>
+            <p:nvPr/>
+          </p:nvCxnSpPr>
+          <p:spPr>
+            <a:xfrm>
+              <a:off x="4908603" y="3442169"/>
+              <a:ext cx="1" cy="331924"/>
+            </a:xfrm>
+            <a:prstGeom prst="line">
+              <a:avLst/>
+            </a:prstGeom>
+            <a:ln w="19050">
+              <a:solidFill>
+                <a:schemeClr val="tx1"/>
+              </a:solidFill>
+            </a:ln>
+          </p:spPr>
+          <p:style>
+            <a:lnRef idx="1">
+              <a:schemeClr val="accent1"/>
+            </a:lnRef>
+            <a:fillRef idx="0">
+              <a:schemeClr val="accent1"/>
+            </a:fillRef>
+            <a:effectRef idx="0">
+              <a:schemeClr val="accent1"/>
+            </a:effectRef>
+            <a:fontRef idx="minor">
+              <a:schemeClr val="tx1"/>
+            </a:fontRef>
+          </p:style>
+        </p:cxnSp>
+        <p:cxnSp>
+          <p:nvCxnSpPr>
+            <p:cNvPr id="1075" name="Straight Connector 1074">
+              <a:extLst>
+                <a:ext uri="{FF2B5EF4-FFF2-40B4-BE49-F238E27FC236}">
+                  <a16:creationId xmlns:a16="http://schemas.microsoft.com/office/drawing/2014/main" id="{BB29317A-694D-872E-BED1-AE046F658624}"/>
+                </a:ext>
+              </a:extLst>
+            </p:cNvPr>
+            <p:cNvCxnSpPr>
+              <a:cxnSpLocks/>
+            </p:cNvCxnSpPr>
+            <p:nvPr/>
+          </p:nvCxnSpPr>
+          <p:spPr>
+            <a:xfrm>
+              <a:off x="4207956" y="3430360"/>
+              <a:ext cx="0" cy="352457"/>
+            </a:xfrm>
+            <a:prstGeom prst="line">
+              <a:avLst/>
+            </a:prstGeom>
+            <a:ln w="19050">
+              <a:solidFill>
+                <a:schemeClr val="tx1"/>
+              </a:solidFill>
+            </a:ln>
+          </p:spPr>
+          <p:style>
+            <a:lnRef idx="1">
+              <a:schemeClr val="accent1"/>
+            </a:lnRef>
+            <a:fillRef idx="0">
+              <a:schemeClr val="accent1"/>
+            </a:fillRef>
+            <a:effectRef idx="0">
+              <a:schemeClr val="accent1"/>
+            </a:effectRef>
+            <a:fontRef idx="minor">
+              <a:schemeClr val="tx1"/>
+            </a:fontRef>
+          </p:style>
+        </p:cxnSp>
+        <p:cxnSp>
+          <p:nvCxnSpPr>
+            <p:cNvPr id="1076" name="Straight Connector 1075">
+              <a:extLst>
+                <a:ext uri="{FF2B5EF4-FFF2-40B4-BE49-F238E27FC236}">
+                  <a16:creationId xmlns:a16="http://schemas.microsoft.com/office/drawing/2014/main" id="{E2B932F1-CC91-3325-AD97-06CD40D66004}"/>
+                </a:ext>
+              </a:extLst>
+            </p:cNvPr>
+            <p:cNvCxnSpPr>
+              <a:cxnSpLocks/>
+            </p:cNvCxnSpPr>
+            <p:nvPr/>
+          </p:nvCxnSpPr>
+          <p:spPr>
+            <a:xfrm>
+              <a:off x="4575422" y="3780437"/>
+              <a:ext cx="0" cy="286110"/>
+            </a:xfrm>
+            <a:prstGeom prst="line">
+              <a:avLst/>
+            </a:prstGeom>
+            <a:ln w="19050">
+              <a:solidFill>
+                <a:schemeClr val="tx1"/>
+              </a:solidFill>
+            </a:ln>
+          </p:spPr>
+          <p:style>
+            <a:lnRef idx="1">
+              <a:schemeClr val="accent1"/>
+            </a:lnRef>
+            <a:fillRef idx="0">
+              <a:schemeClr val="accent1"/>
+            </a:fillRef>
+            <a:effectRef idx="0">
+              <a:schemeClr val="accent1"/>
+            </a:effectRef>
+            <a:fontRef idx="minor">
+              <a:schemeClr val="tx1"/>
+            </a:fontRef>
+          </p:style>
+        </p:cxnSp>
+        <p:cxnSp>
+          <p:nvCxnSpPr>
+            <p:cNvPr id="1077" name="Straight Connector 1076">
+              <a:extLst>
+                <a:ext uri="{FF2B5EF4-FFF2-40B4-BE49-F238E27FC236}">
+                  <a16:creationId xmlns:a16="http://schemas.microsoft.com/office/drawing/2014/main" id="{355AB32A-6E68-F953-AD03-00E3F55CC2CB}"/>
+                </a:ext>
+              </a:extLst>
+            </p:cNvPr>
+            <p:cNvCxnSpPr>
+              <a:cxnSpLocks/>
+            </p:cNvCxnSpPr>
+            <p:nvPr/>
+          </p:nvCxnSpPr>
+          <p:spPr>
+            <a:xfrm>
+              <a:off x="4569343" y="4323266"/>
+              <a:ext cx="0" cy="352457"/>
+            </a:xfrm>
+            <a:prstGeom prst="line">
+              <a:avLst/>
+            </a:prstGeom>
+            <a:ln w="19050">
+              <a:solidFill>
+                <a:schemeClr val="tx1"/>
+              </a:solidFill>
+            </a:ln>
+          </p:spPr>
+          <p:style>
+            <a:lnRef idx="1">
+              <a:schemeClr val="accent1"/>
+            </a:lnRef>
+            <a:fillRef idx="0">
+              <a:schemeClr val="accent1"/>
+            </a:fillRef>
+            <a:effectRef idx="0">
+              <a:schemeClr val="accent1"/>
+            </a:effectRef>
+            <a:fontRef idx="minor">
+              <a:schemeClr val="tx1"/>
+            </a:fontRef>
+          </p:style>
+        </p:cxnSp>
+        <p:cxnSp>
+          <p:nvCxnSpPr>
+            <p:cNvPr id="1078" name="Straight Connector 1077">
+              <a:extLst>
+                <a:ext uri="{FF2B5EF4-FFF2-40B4-BE49-F238E27FC236}">
+                  <a16:creationId xmlns:a16="http://schemas.microsoft.com/office/drawing/2014/main" id="{20F0D3F8-0E55-BC3B-643B-8611635B5A51}"/>
+                </a:ext>
+              </a:extLst>
+            </p:cNvPr>
+            <p:cNvCxnSpPr>
+              <a:cxnSpLocks/>
+            </p:cNvCxnSpPr>
+            <p:nvPr/>
+          </p:nvCxnSpPr>
+          <p:spPr>
+            <a:xfrm>
+              <a:off x="4211955" y="2822741"/>
+              <a:ext cx="0" cy="352457"/>
+            </a:xfrm>
+            <a:prstGeom prst="line">
+              <a:avLst/>
+            </a:prstGeom>
+            <a:ln w="19050">
+              <a:solidFill>
+                <a:schemeClr val="tx1"/>
+              </a:solidFill>
+            </a:ln>
+          </p:spPr>
+          <p:style>
+            <a:lnRef idx="1">
+              <a:schemeClr val="accent1"/>
+            </a:lnRef>
+            <a:fillRef idx="0">
+              <a:schemeClr val="accent1"/>
+            </a:fillRef>
+            <a:effectRef idx="0">
+              <a:schemeClr val="accent1"/>
+            </a:effectRef>
+            <a:fontRef idx="minor">
+              <a:schemeClr val="tx1"/>
+            </a:fontRef>
+          </p:style>
+        </p:cxnSp>
+        <p:cxnSp>
+          <p:nvCxnSpPr>
+            <p:cNvPr id="1080" name="Straight Connector 1079">
+              <a:extLst>
+                <a:ext uri="{FF2B5EF4-FFF2-40B4-BE49-F238E27FC236}">
+                  <a16:creationId xmlns:a16="http://schemas.microsoft.com/office/drawing/2014/main" id="{6CF01A32-A781-D12C-6F87-B581C4CC226C}"/>
+                </a:ext>
+              </a:extLst>
+            </p:cNvPr>
+            <p:cNvCxnSpPr>
+              <a:cxnSpLocks/>
+            </p:cNvCxnSpPr>
+            <p:nvPr/>
+          </p:nvCxnSpPr>
+          <p:spPr>
+            <a:xfrm>
+              <a:off x="4565849" y="4942605"/>
+              <a:ext cx="0" cy="352457"/>
+            </a:xfrm>
+            <a:prstGeom prst="line">
+              <a:avLst/>
+            </a:prstGeom>
+            <a:ln w="19050">
+              <a:solidFill>
+                <a:schemeClr val="tx1"/>
+              </a:solidFill>
+            </a:ln>
+          </p:spPr>
+          <p:style>
+            <a:lnRef idx="1">
+              <a:schemeClr val="accent1"/>
+            </a:lnRef>
+            <a:fillRef idx="0">
+              <a:schemeClr val="accent1"/>
+            </a:fillRef>
+            <a:effectRef idx="0">
+              <a:schemeClr val="accent1"/>
+            </a:effectRef>
+            <a:fontRef idx="minor">
+              <a:schemeClr val="tx1"/>
+            </a:fontRef>
+          </p:style>
+        </p:cxnSp>
+        <p:sp>
+          <p:nvSpPr>
+            <p:cNvPr id="1081" name="TextBox 1080">
+              <a:extLst>
+                <a:ext uri="{FF2B5EF4-FFF2-40B4-BE49-F238E27FC236}">
+                  <a16:creationId xmlns:a16="http://schemas.microsoft.com/office/drawing/2014/main" id="{2E236224-99D9-8415-F296-72FEDE7FD6D9}"/>
+                </a:ext>
+              </a:extLst>
+            </p:cNvPr>
+            <p:cNvSpPr txBox="1"/>
+            <p:nvPr/>
+          </p:nvSpPr>
+          <p:spPr>
+            <a:xfrm>
+              <a:off x="3598814" y="3157805"/>
+              <a:ext cx="288862" cy="307777"/>
+            </a:xfrm>
+            <a:prstGeom prst="rect">
+              <a:avLst/>
+            </a:prstGeom>
+            <a:noFill/>
+          </p:spPr>
+          <p:txBody>
+            <a:bodyPr wrap="none" rtlCol="0">
+              <a:spAutoFit/>
+            </a:bodyPr>
+            <a:lstStyle/>
+            <a:p>
+              <a:r>
+                <a:rPr lang="en-US" sz="1400" dirty="0"/>
+                <a:t>A</a:t>
+              </a:r>
+            </a:p>
+          </p:txBody>
+        </p:sp>
+        <p:sp>
+          <p:nvSpPr>
+            <p:cNvPr id="1082" name="TextBox 1081">
+              <a:extLst>
+                <a:ext uri="{FF2B5EF4-FFF2-40B4-BE49-F238E27FC236}">
+                  <a16:creationId xmlns:a16="http://schemas.microsoft.com/office/drawing/2014/main" id="{D0544CE5-237F-3C35-540F-8C6EB462C017}"/>
+                </a:ext>
+              </a:extLst>
+            </p:cNvPr>
+            <p:cNvSpPr txBox="1"/>
+            <p:nvPr/>
+          </p:nvSpPr>
+          <p:spPr>
+            <a:xfrm>
+              <a:off x="4309361" y="3143951"/>
+              <a:ext cx="282450" cy="307777"/>
+            </a:xfrm>
+            <a:prstGeom prst="rect">
+              <a:avLst/>
+            </a:prstGeom>
+            <a:noFill/>
+          </p:spPr>
+          <p:txBody>
+            <a:bodyPr wrap="none" rtlCol="0">
+              <a:spAutoFit/>
+            </a:bodyPr>
+            <a:lstStyle/>
+            <a:p>
+              <a:r>
+                <a:rPr lang="en-US" sz="1400" dirty="0"/>
+                <a:t>B</a:t>
+              </a:r>
+            </a:p>
+          </p:txBody>
+        </p:sp>
+        <p:sp>
+          <p:nvSpPr>
+            <p:cNvPr id="1083" name="TextBox 1082">
+              <a:extLst>
+                <a:ext uri="{FF2B5EF4-FFF2-40B4-BE49-F238E27FC236}">
+                  <a16:creationId xmlns:a16="http://schemas.microsoft.com/office/drawing/2014/main" id="{15A63316-C2D6-6901-32C8-AB8C7B436A45}"/>
+                </a:ext>
+              </a:extLst>
+            </p:cNvPr>
+            <p:cNvSpPr txBox="1"/>
+            <p:nvPr/>
+          </p:nvSpPr>
+          <p:spPr>
+            <a:xfrm>
+              <a:off x="3976840" y="4022803"/>
+              <a:ext cx="288862" cy="307777"/>
+            </a:xfrm>
+            <a:prstGeom prst="rect">
+              <a:avLst/>
+            </a:prstGeom>
+            <a:noFill/>
+          </p:spPr>
+          <p:txBody>
+            <a:bodyPr wrap="none" rtlCol="0">
+              <a:spAutoFit/>
+            </a:bodyPr>
+            <a:lstStyle/>
+            <a:p>
+              <a:r>
+                <a:rPr lang="en-US" sz="1400" dirty="0"/>
+                <a:t>A</a:t>
+              </a:r>
+            </a:p>
+          </p:txBody>
+        </p:sp>
+        <p:sp>
+          <p:nvSpPr>
+            <p:cNvPr id="1084" name="TextBox 1083">
+              <a:extLst>
+                <a:ext uri="{FF2B5EF4-FFF2-40B4-BE49-F238E27FC236}">
+                  <a16:creationId xmlns:a16="http://schemas.microsoft.com/office/drawing/2014/main" id="{D46C3DFC-F6B7-DA26-6252-6B5E6FDAE033}"/>
+                </a:ext>
+              </a:extLst>
+            </p:cNvPr>
+            <p:cNvSpPr txBox="1"/>
+            <p:nvPr/>
+          </p:nvSpPr>
+          <p:spPr>
+            <a:xfrm>
+              <a:off x="3998621" y="4662090"/>
+              <a:ext cx="282450" cy="307777"/>
+            </a:xfrm>
+            <a:prstGeom prst="rect">
+              <a:avLst/>
+            </a:prstGeom>
+            <a:noFill/>
+          </p:spPr>
+          <p:txBody>
+            <a:bodyPr wrap="none" rtlCol="0">
+              <a:spAutoFit/>
+            </a:bodyPr>
+            <a:lstStyle/>
+            <a:p>
+              <a:r>
+                <a:rPr lang="en-US" sz="1400" dirty="0"/>
+                <a:t>B</a:t>
+              </a:r>
+            </a:p>
+          </p:txBody>
+        </p:sp>
+        <p:sp>
+          <p:nvSpPr>
+            <p:cNvPr id="1085" name="TextBox 1084">
+              <a:extLst>
+                <a:ext uri="{FF2B5EF4-FFF2-40B4-BE49-F238E27FC236}">
+                  <a16:creationId xmlns:a16="http://schemas.microsoft.com/office/drawing/2014/main" id="{63CF8D27-6211-14B7-00E7-F70A163683DD}"/>
+                </a:ext>
+              </a:extLst>
+            </p:cNvPr>
+            <p:cNvSpPr txBox="1"/>
+            <p:nvPr/>
+          </p:nvSpPr>
+          <p:spPr>
+            <a:xfrm>
+              <a:off x="3990439" y="2487265"/>
+              <a:ext cx="508473" cy="307777"/>
+            </a:xfrm>
+            <a:prstGeom prst="rect">
+              <a:avLst/>
+            </a:prstGeom>
+            <a:noFill/>
+          </p:spPr>
+          <p:txBody>
+            <a:bodyPr wrap="none" rtlCol="0">
+              <a:spAutoFit/>
+            </a:bodyPr>
+            <a:lstStyle/>
+            <a:p>
+              <a:r>
+                <a:rPr lang="en-US" sz="1400" dirty="0"/>
+                <a:t>VDD</a:t>
+              </a:r>
+            </a:p>
+          </p:txBody>
+        </p:sp>
+        <p:sp>
+          <p:nvSpPr>
+            <p:cNvPr id="1086" name="TextBox 1085">
+              <a:extLst>
+                <a:ext uri="{FF2B5EF4-FFF2-40B4-BE49-F238E27FC236}">
+                  <a16:creationId xmlns:a16="http://schemas.microsoft.com/office/drawing/2014/main" id="{8694E110-1CF7-E362-6EB6-4096406CFC5B}"/>
+                </a:ext>
+              </a:extLst>
+            </p:cNvPr>
+            <p:cNvSpPr txBox="1"/>
+            <p:nvPr/>
+          </p:nvSpPr>
+          <p:spPr>
+            <a:xfrm>
+              <a:off x="4297698" y="5371276"/>
+              <a:ext cx="524503" cy="307777"/>
+            </a:xfrm>
+            <a:prstGeom prst="rect">
+              <a:avLst/>
+            </a:prstGeom>
+            <a:noFill/>
+          </p:spPr>
+          <p:txBody>
+            <a:bodyPr wrap="none" rtlCol="0">
+              <a:spAutoFit/>
+            </a:bodyPr>
+            <a:lstStyle/>
+            <a:p>
+              <a:r>
+                <a:rPr lang="en-US" sz="1400" dirty="0"/>
+                <a:t>GND</a:t>
+              </a:r>
+            </a:p>
+          </p:txBody>
+        </p:sp>
+        <p:sp>
+          <p:nvSpPr>
+            <p:cNvPr id="1088" name="TextBox 1087">
+              <a:extLst>
+                <a:ext uri="{FF2B5EF4-FFF2-40B4-BE49-F238E27FC236}">
+                  <a16:creationId xmlns:a16="http://schemas.microsoft.com/office/drawing/2014/main" id="{1612D799-E3B2-ECDE-071F-64D4BF165126}"/>
+                </a:ext>
+              </a:extLst>
+            </p:cNvPr>
+            <p:cNvSpPr txBox="1"/>
+            <p:nvPr/>
+          </p:nvSpPr>
+          <p:spPr>
+            <a:xfrm>
+              <a:off x="4993658" y="3436958"/>
+              <a:ext cx="506870" cy="307777"/>
+            </a:xfrm>
+            <a:prstGeom prst="rect">
+              <a:avLst/>
+            </a:prstGeom>
+            <a:noFill/>
+          </p:spPr>
+          <p:txBody>
+            <a:bodyPr wrap="none" rtlCol="0">
+              <a:spAutoFit/>
+            </a:bodyPr>
+            <a:lstStyle/>
+            <a:p>
+              <a:r>
+                <a:rPr lang="en-US" sz="1400" dirty="0"/>
+                <a:t>OUT</a:t>
+              </a:r>
+            </a:p>
+          </p:txBody>
+        </p:sp>
+        <p:cxnSp>
+          <p:nvCxnSpPr>
+            <p:cNvPr id="1111" name="Straight Connector 1110">
+              <a:extLst>
+                <a:ext uri="{FF2B5EF4-FFF2-40B4-BE49-F238E27FC236}">
+                  <a16:creationId xmlns:a16="http://schemas.microsoft.com/office/drawing/2014/main" id="{4C4833C3-D635-648A-BF9D-76D357FD0B8B}"/>
+                </a:ext>
+              </a:extLst>
+            </p:cNvPr>
+            <p:cNvCxnSpPr>
+              <a:cxnSpLocks/>
+            </p:cNvCxnSpPr>
+            <p:nvPr/>
+          </p:nvCxnSpPr>
+          <p:spPr>
+            <a:xfrm>
+              <a:off x="4899556" y="2821381"/>
+              <a:ext cx="0" cy="352457"/>
+            </a:xfrm>
+            <a:prstGeom prst="line">
+              <a:avLst/>
+            </a:prstGeom>
+            <a:ln w="19050">
+              <a:solidFill>
+                <a:schemeClr val="tx1"/>
+              </a:solidFill>
+            </a:ln>
+          </p:spPr>
+          <p:style>
+            <a:lnRef idx="1">
+              <a:schemeClr val="accent1"/>
+            </a:lnRef>
+            <a:fillRef idx="0">
+              <a:schemeClr val="accent1"/>
+            </a:fillRef>
+            <a:effectRef idx="0">
+              <a:schemeClr val="accent1"/>
+            </a:effectRef>
+            <a:fontRef idx="minor">
+              <a:schemeClr val="tx1"/>
+            </a:fontRef>
+          </p:style>
+        </p:cxnSp>
+        <p:sp>
+          <p:nvSpPr>
+            <p:cNvPr id="1112" name="TextBox 1111">
+              <a:extLst>
+                <a:ext uri="{FF2B5EF4-FFF2-40B4-BE49-F238E27FC236}">
+                  <a16:creationId xmlns:a16="http://schemas.microsoft.com/office/drawing/2014/main" id="{747522F8-2B26-88FA-B80F-CAEAA7AD04F9}"/>
+                </a:ext>
+              </a:extLst>
+            </p:cNvPr>
+            <p:cNvSpPr txBox="1"/>
+            <p:nvPr/>
+          </p:nvSpPr>
+          <p:spPr>
+            <a:xfrm>
+              <a:off x="4654367" y="2485905"/>
+              <a:ext cx="508473" cy="307777"/>
+            </a:xfrm>
+            <a:prstGeom prst="rect">
+              <a:avLst/>
+            </a:prstGeom>
+            <a:noFill/>
+          </p:spPr>
+          <p:txBody>
+            <a:bodyPr wrap="none" rtlCol="0">
+              <a:spAutoFit/>
+            </a:bodyPr>
+            <a:lstStyle/>
+            <a:p>
+              <a:r>
+                <a:rPr lang="en-US" sz="1400" dirty="0"/>
+                <a:t>VDD</a:t>
+              </a:r>
+            </a:p>
+          </p:txBody>
+        </p:sp>
+      </p:grpSp>
       <p:sp>
         <p:nvSpPr>
           <p:cNvPr id="12" name="TextBox 11">
@@ -19224,6 +21124,53 @@
           </a:p>
         </p:txBody>
       </p:sp>
+      <p:pic>
+        <p:nvPicPr>
+          <p:cNvPr id="1026" name="Picture 2" descr="NOR gate symbol with two inputs (A and B) and one output (Q).  The NOR symbol looks exactly like the OR symbol except it has a small circle on its output connection indicating that the output is inverted.">
+            <a:extLst>
+              <a:ext uri="{FF2B5EF4-FFF2-40B4-BE49-F238E27FC236}">
+                <a16:creationId xmlns:a16="http://schemas.microsoft.com/office/drawing/2014/main" id="{F31CED6C-AC26-3CEE-E27A-C8726021F705}"/>
+              </a:ext>
+            </a:extLst>
+          </p:cNvPr>
+          <p:cNvPicPr>
+            <a:picLocks noChangeAspect="1" noChangeArrowheads="1"/>
+          </p:cNvPicPr>
+          <p:nvPr/>
+        </p:nvPicPr>
+        <p:blipFill>
+          <a:blip r:embed="rId5">
+            <a:extLst>
+              <a:ext uri="{28A0092B-C50C-407E-A947-70E740481C1C}">
+                <a14:useLocalDpi xmlns:a14="http://schemas.microsoft.com/office/drawing/2010/main"/>
+              </a:ext>
+            </a:extLst>
+          </a:blip>
+          <a:srcRect/>
+          <a:stretch>
+            <a:fillRect/>
+          </a:stretch>
+        </p:blipFill>
+        <p:spPr bwMode="auto">
+          <a:xfrm>
+            <a:off x="6558714" y="2457647"/>
+            <a:ext cx="1524000" cy="635000"/>
+          </a:xfrm>
+          <a:prstGeom prst="rect">
+            <a:avLst/>
+          </a:prstGeom>
+          <a:noFill/>
+          <a:extLst>
+            <a:ext uri="{909E8E84-426E-40DD-AFC4-6F175D3DCCD1}">
+              <a14:hiddenFill xmlns:a14="http://schemas.microsoft.com/office/drawing/2010/main">
+                <a:solidFill>
+                  <a:srgbClr val="FFFFFF"/>
+                </a:solidFill>
+              </a14:hiddenFill>
+            </a:ext>
+          </a:extLst>
+        </p:spPr>
+      </p:pic>
       <p:graphicFrame>
         <p:nvGraphicFramePr>
           <p:cNvPr id="16" name="Table 15">
@@ -19236,7 +21183,13 @@
           <p:cNvGraphicFramePr>
             <a:graphicFrameLocks noGrp="1"/>
           </p:cNvGraphicFramePr>
-          <p:nvPr/>
+          <p:nvPr>
+            <p:extLst>
+              <p:ext uri="{D42A27DB-BD31-4B8C-83A1-F6EECF244321}">
+                <p14:modId xmlns:p14="http://schemas.microsoft.com/office/powerpoint/2010/main" val="692434775"/>
+              </p:ext>
+            </p:extLst>
+          </p:nvPr>
         </p:nvGraphicFramePr>
         <p:xfrm>
           <a:off x="6353839" y="3255636"/>
@@ -19520,121 +21473,6 @@
           </a:graphicData>
         </a:graphic>
       </p:graphicFrame>
-      <p:pic>
-        <p:nvPicPr>
-          <p:cNvPr id="13" name="Picture 2" descr="NAND gate symbol with two inputs (A and B) and one output (Q).  The NAND symbol looks exactly like the AND symbol except it has a small circle on its output connection indicating that the output is inverted.">
-            <a:extLst>
-              <a:ext uri="{FF2B5EF4-FFF2-40B4-BE49-F238E27FC236}">
-                <a16:creationId xmlns:a16="http://schemas.microsoft.com/office/drawing/2014/main" id="{AE7BEEF4-0E88-6C16-61D2-F9708FCAD516}"/>
-              </a:ext>
-            </a:extLst>
-          </p:cNvPr>
-          <p:cNvPicPr>
-            <a:picLocks noChangeAspect="1" noChangeArrowheads="1"/>
-          </p:cNvPicPr>
-          <p:nvPr/>
-        </p:nvPicPr>
-        <p:blipFill>
-          <a:blip r:embed="rId3">
-            <a:extLst>
-              <a:ext uri="{28A0092B-C50C-407E-A947-70E740481C1C}">
-                <a14:useLocalDpi xmlns:a14="http://schemas.microsoft.com/office/drawing/2010/main"/>
-              </a:ext>
-            </a:extLst>
-          </a:blip>
-          <a:srcRect/>
-          <a:stretch>
-            <a:fillRect/>
-          </a:stretch>
-        </p:blipFill>
-        <p:spPr bwMode="auto">
-          <a:xfrm>
-            <a:off x="1098204" y="2472587"/>
-            <a:ext cx="1524000" cy="635000"/>
-          </a:xfrm>
-          <a:prstGeom prst="rect">
-            <a:avLst/>
-          </a:prstGeom>
-          <a:noFill/>
-          <a:extLst>
-            <a:ext uri="{909E8E84-426E-40DD-AFC4-6F175D3DCCD1}">
-              <a14:hiddenFill xmlns:a14="http://schemas.microsoft.com/office/drawing/2010/main">
-                <a:solidFill>
-                  <a:srgbClr val="FFFFFF"/>
-                </a:solidFill>
-              </a14:hiddenFill>
-            </a:ext>
-          </a:extLst>
-        </p:spPr>
-      </p:pic>
-      <p:sp>
-        <p:nvSpPr>
-          <p:cNvPr id="27" name="Title 26">
-            <a:extLst>
-              <a:ext uri="{FF2B5EF4-FFF2-40B4-BE49-F238E27FC236}">
-                <a16:creationId xmlns:a16="http://schemas.microsoft.com/office/drawing/2014/main" id="{E830B0DD-3571-E301-97F5-F65AC017CAA9}"/>
-              </a:ext>
-            </a:extLst>
-          </p:cNvPr>
-          <p:cNvSpPr>
-            <a:spLocks noGrp="1"/>
-          </p:cNvSpPr>
-          <p:nvPr>
-            <p:ph type="title"/>
-          </p:nvPr>
-        </p:nvSpPr>
-        <p:spPr>
-          <a:xfrm>
-            <a:off x="838200" y="365125"/>
-            <a:ext cx="4457700" cy="1325563"/>
-          </a:xfrm>
-        </p:spPr>
-        <p:txBody>
-          <a:bodyPr/>
-          <a:lstStyle/>
-          <a:p>
-            <a:r>
-              <a:rPr lang="en-US" dirty="0"/>
-              <a:t>NAND and NOR Fewer transistors </a:t>
-            </a:r>
-          </a:p>
-        </p:txBody>
-      </p:sp>
-      <p:sp>
-        <p:nvSpPr>
-          <p:cNvPr id="28" name="TextBox 27">
-            <a:extLst>
-              <a:ext uri="{FF2B5EF4-FFF2-40B4-BE49-F238E27FC236}">
-                <a16:creationId xmlns:a16="http://schemas.microsoft.com/office/drawing/2014/main" id="{8BBBF345-12E8-B147-48A5-F34B118036FB}"/>
-              </a:ext>
-            </a:extLst>
-          </p:cNvPr>
-          <p:cNvSpPr txBox="1"/>
-          <p:nvPr/>
-        </p:nvSpPr>
-        <p:spPr>
-          <a:xfrm>
-            <a:off x="1020162" y="5555131"/>
-            <a:ext cx="1641155" cy="369332"/>
-          </a:xfrm>
-          <a:prstGeom prst="rect">
-            <a:avLst/>
-          </a:prstGeom>
-          <a:noFill/>
-        </p:spPr>
-        <p:txBody>
-          <a:bodyPr wrap="none" rtlCol="0">
-            <a:spAutoFit/>
-          </a:bodyPr>
-          <a:lstStyle/>
-          <a:p>
-            <a:r>
-              <a:rPr lang="en-US" dirty="0"/>
-              <a:t>Four transistors</a:t>
-            </a:r>
-          </a:p>
-        </p:txBody>
-      </p:sp>
       <p:sp>
         <p:nvSpPr>
           <p:cNvPr id="29" name="TextBox 28">
@@ -19670,100 +21508,6 @@
           </a:p>
         </p:txBody>
       </p:sp>
-      <p:pic>
-        <p:nvPicPr>
-          <p:cNvPr id="1034" name="Picture 10" descr="CD4001B in DIP-14 integrated circuit package (quad 2-input NOR gate)">
-            <a:extLst>
-              <a:ext uri="{FF2B5EF4-FFF2-40B4-BE49-F238E27FC236}">
-                <a16:creationId xmlns:a16="http://schemas.microsoft.com/office/drawing/2014/main" id="{7827078E-2079-F654-3978-F6E05206C42E}"/>
-              </a:ext>
-            </a:extLst>
-          </p:cNvPr>
-          <p:cNvPicPr>
-            <a:picLocks noChangeAspect="1" noChangeArrowheads="1"/>
-          </p:cNvPicPr>
-          <p:nvPr/>
-        </p:nvPicPr>
-        <p:blipFill>
-          <a:blip r:embed="rId4">
-            <a:extLst>
-              <a:ext uri="{28A0092B-C50C-407E-A947-70E740481C1C}">
-                <a14:useLocalDpi xmlns:a14="http://schemas.microsoft.com/office/drawing/2010/main"/>
-              </a:ext>
-            </a:extLst>
-          </a:blip>
-          <a:srcRect/>
-          <a:stretch>
-            <a:fillRect/>
-          </a:stretch>
-        </p:blipFill>
-        <p:spPr bwMode="auto">
-          <a:xfrm>
-            <a:off x="7360987" y="508410"/>
-            <a:ext cx="2343173" cy="1321550"/>
-          </a:xfrm>
-          <a:prstGeom prst="rect">
-            <a:avLst/>
-          </a:prstGeom>
-          <a:noFill/>
-          <a:extLst>
-            <a:ext uri="{909E8E84-426E-40DD-AFC4-6F175D3DCCD1}">
-              <a14:hiddenFill xmlns:a14="http://schemas.microsoft.com/office/drawing/2010/main">
-                <a:solidFill>
-                  <a:srgbClr val="FFFFFF"/>
-                </a:solidFill>
-              </a14:hiddenFill>
-            </a:ext>
-          </a:extLst>
-        </p:spPr>
-      </p:pic>
-      <p:pic>
-        <p:nvPicPr>
-          <p:cNvPr id="1026" name="Picture 2" descr="NOR gate symbol with two inputs (A and B) and one output (Q).  The NOR symbol looks exactly like the OR symbol except it has a small circle on its output connection indicating that the output is inverted.">
-            <a:extLst>
-              <a:ext uri="{FF2B5EF4-FFF2-40B4-BE49-F238E27FC236}">
-                <a16:creationId xmlns:a16="http://schemas.microsoft.com/office/drawing/2014/main" id="{F31CED6C-AC26-3CEE-E27A-C8726021F705}"/>
-              </a:ext>
-            </a:extLst>
-          </p:cNvPr>
-          <p:cNvPicPr>
-            <a:picLocks noChangeAspect="1" noChangeArrowheads="1"/>
-          </p:cNvPicPr>
-          <p:nvPr/>
-        </p:nvPicPr>
-        <p:blipFill>
-          <a:blip r:embed="rId5">
-            <a:extLst>
-              <a:ext uri="{28A0092B-C50C-407E-A947-70E740481C1C}">
-                <a14:useLocalDpi xmlns:a14="http://schemas.microsoft.com/office/drawing/2010/main"/>
-              </a:ext>
-            </a:extLst>
-          </a:blip>
-          <a:srcRect/>
-          <a:stretch>
-            <a:fillRect/>
-          </a:stretch>
-        </p:blipFill>
-        <p:spPr bwMode="auto">
-          <a:xfrm>
-            <a:off x="6558714" y="2457647"/>
-            <a:ext cx="1524000" cy="635000"/>
-          </a:xfrm>
-          <a:prstGeom prst="rect">
-            <a:avLst/>
-          </a:prstGeom>
-          <a:noFill/>
-          <a:extLst>
-            <a:ext uri="{909E8E84-426E-40DD-AFC4-6F175D3DCCD1}">
-              <a14:hiddenFill xmlns:a14="http://schemas.microsoft.com/office/drawing/2010/main">
-                <a:solidFill>
-                  <a:srgbClr val="FFFFFF"/>
-                </a:solidFill>
-              </a14:hiddenFill>
-            </a:ext>
-          </a:extLst>
-        </p:spPr>
-      </p:pic>
       <p:grpSp>
         <p:nvGrpSpPr>
           <p:cNvPr id="19" name="Group 18" descr="&#13;&#10;This is a NOR gate with two PMOS transistors in series at the top connecting to the OUT wire.  On the bottom there are two parallel NMOS transistors connected between the OUT wire and the ground.&#13;&#10;">
@@ -21459,1701 +23203,6 @@
           </p:txBody>
         </p:sp>
       </p:grpSp>
-      <p:grpSp>
-        <p:nvGrpSpPr>
-          <p:cNvPr id="44" name="Group 43" descr="This is a NAND gate with two PMOS transistors in parallel at the top connecting to the OUT wire.  On the bottom there are two series NMOS transistors connected between the OUT wire and the ground.&#13;&#10;">
-            <a:extLst>
-              <a:ext uri="{FF2B5EF4-FFF2-40B4-BE49-F238E27FC236}">
-                <a16:creationId xmlns:a16="http://schemas.microsoft.com/office/drawing/2014/main" id="{CBF67BD2-8FF8-5E47-6E84-35572C84D7F9}"/>
-              </a:ext>
-            </a:extLst>
-          </p:cNvPr>
-          <p:cNvGrpSpPr/>
-          <p:nvPr/>
-        </p:nvGrpSpPr>
-        <p:grpSpPr>
-          <a:xfrm>
-            <a:off x="3598814" y="2485905"/>
-            <a:ext cx="1901714" cy="3193148"/>
-            <a:chOff x="3598814" y="2485905"/>
-            <a:chExt cx="1901714" cy="3193148"/>
-          </a:xfrm>
-        </p:grpSpPr>
-        <p:grpSp>
-          <p:nvGrpSpPr>
-            <p:cNvPr id="1069" name="Group 1068">
-              <a:extLst>
-                <a:ext uri="{FF2B5EF4-FFF2-40B4-BE49-F238E27FC236}">
-                  <a16:creationId xmlns:a16="http://schemas.microsoft.com/office/drawing/2014/main" id="{4B6AEEC2-1236-C933-1DD6-FB6C2938BE99}"/>
-                </a:ext>
-              </a:extLst>
-            </p:cNvPr>
-            <p:cNvGrpSpPr/>
-            <p:nvPr/>
-          </p:nvGrpSpPr>
-          <p:grpSpPr>
-            <a:xfrm>
-              <a:off x="3836989" y="3168740"/>
-              <a:ext cx="370967" cy="261620"/>
-              <a:chOff x="3408218" y="2196942"/>
-              <a:chExt cx="4311227" cy="3040439"/>
-            </a:xfrm>
-          </p:grpSpPr>
-          <p:cxnSp>
-            <p:nvCxnSpPr>
-              <p:cNvPr id="1105" name="Straight Connector 1104">
-                <a:extLst>
-                  <a:ext uri="{FF2B5EF4-FFF2-40B4-BE49-F238E27FC236}">
-                    <a16:creationId xmlns:a16="http://schemas.microsoft.com/office/drawing/2014/main" id="{E1448C92-AEAA-BFF4-2D45-D44305836D23}"/>
-                  </a:ext>
-                </a:extLst>
-              </p:cNvPr>
-              <p:cNvCxnSpPr>
-                <a:cxnSpLocks/>
-              </p:cNvCxnSpPr>
-              <p:nvPr/>
-            </p:nvCxnSpPr>
-            <p:spPr>
-              <a:xfrm flipH="1">
-                <a:off x="5925803" y="2196950"/>
-                <a:ext cx="1793642" cy="0"/>
-              </a:xfrm>
-              <a:prstGeom prst="line">
-                <a:avLst/>
-              </a:prstGeom>
-              <a:ln w="19050">
-                <a:solidFill>
-                  <a:schemeClr val="tx1"/>
-                </a:solidFill>
-              </a:ln>
-            </p:spPr>
-            <p:style>
-              <a:lnRef idx="1">
-                <a:schemeClr val="accent1"/>
-              </a:lnRef>
-              <a:fillRef idx="0">
-                <a:schemeClr val="accent1"/>
-              </a:fillRef>
-              <a:effectRef idx="0">
-                <a:schemeClr val="accent1"/>
-              </a:effectRef>
-              <a:fontRef idx="minor">
-                <a:schemeClr val="tx1"/>
-              </a:fontRef>
-            </p:style>
-          </p:cxnSp>
-          <p:cxnSp>
-            <p:nvCxnSpPr>
-              <p:cNvPr id="1106" name="Straight Connector 1105">
-                <a:extLst>
-                  <a:ext uri="{FF2B5EF4-FFF2-40B4-BE49-F238E27FC236}">
-                    <a16:creationId xmlns:a16="http://schemas.microsoft.com/office/drawing/2014/main" id="{BA0A7C8C-1C91-9575-ABAB-062A5F972766}"/>
-                  </a:ext>
-                </a:extLst>
-              </p:cNvPr>
-              <p:cNvCxnSpPr>
-                <a:cxnSpLocks/>
-              </p:cNvCxnSpPr>
-              <p:nvPr/>
-            </p:nvCxnSpPr>
-            <p:spPr>
-              <a:xfrm flipV="1">
-                <a:off x="5925803" y="2196942"/>
-                <a:ext cx="0" cy="3040439"/>
-              </a:xfrm>
-              <a:prstGeom prst="line">
-                <a:avLst/>
-              </a:prstGeom>
-              <a:ln w="19050">
-                <a:solidFill>
-                  <a:schemeClr val="tx1"/>
-                </a:solidFill>
-              </a:ln>
-            </p:spPr>
-            <p:style>
-              <a:lnRef idx="1">
-                <a:schemeClr val="accent1"/>
-              </a:lnRef>
-              <a:fillRef idx="0">
-                <a:schemeClr val="accent1"/>
-              </a:fillRef>
-              <a:effectRef idx="0">
-                <a:schemeClr val="accent1"/>
-              </a:effectRef>
-              <a:fontRef idx="minor">
-                <a:schemeClr val="tx1"/>
-              </a:fontRef>
-            </p:style>
-          </p:cxnSp>
-          <p:cxnSp>
-            <p:nvCxnSpPr>
-              <p:cNvPr id="1107" name="Straight Connector 1106">
-                <a:extLst>
-                  <a:ext uri="{FF2B5EF4-FFF2-40B4-BE49-F238E27FC236}">
-                    <a16:creationId xmlns:a16="http://schemas.microsoft.com/office/drawing/2014/main" id="{AE138314-AB09-4311-CB85-902F8A0D17C8}"/>
-                  </a:ext>
-                </a:extLst>
-              </p:cNvPr>
-              <p:cNvCxnSpPr>
-                <a:cxnSpLocks/>
-              </p:cNvCxnSpPr>
-              <p:nvPr/>
-            </p:nvCxnSpPr>
-            <p:spPr>
-              <a:xfrm>
-                <a:off x="5390677" y="2449992"/>
-                <a:ext cx="0" cy="2589497"/>
-              </a:xfrm>
-              <a:prstGeom prst="line">
-                <a:avLst/>
-              </a:prstGeom>
-              <a:ln w="19050">
-                <a:solidFill>
-                  <a:schemeClr val="tx1"/>
-                </a:solidFill>
-              </a:ln>
-            </p:spPr>
-            <p:style>
-              <a:lnRef idx="1">
-                <a:schemeClr val="accent1"/>
-              </a:lnRef>
-              <a:fillRef idx="0">
-                <a:schemeClr val="accent1"/>
-              </a:fillRef>
-              <a:effectRef idx="0">
-                <a:schemeClr val="accent1"/>
-              </a:effectRef>
-              <a:fontRef idx="minor">
-                <a:schemeClr val="tx1"/>
-              </a:fontRef>
-            </p:style>
-          </p:cxnSp>
-          <p:cxnSp>
-            <p:nvCxnSpPr>
-              <p:cNvPr id="1108" name="Straight Connector 1107">
-                <a:extLst>
-                  <a:ext uri="{FF2B5EF4-FFF2-40B4-BE49-F238E27FC236}">
-                    <a16:creationId xmlns:a16="http://schemas.microsoft.com/office/drawing/2014/main" id="{F5776D58-724B-FA5C-EA39-63A6719CF39B}"/>
-                  </a:ext>
-                </a:extLst>
-              </p:cNvPr>
-              <p:cNvCxnSpPr>
-                <a:cxnSpLocks/>
-              </p:cNvCxnSpPr>
-              <p:nvPr/>
-            </p:nvCxnSpPr>
-            <p:spPr>
-              <a:xfrm>
-                <a:off x="3408218" y="3717171"/>
-                <a:ext cx="1982470" cy="0"/>
-              </a:xfrm>
-              <a:prstGeom prst="line">
-                <a:avLst/>
-              </a:prstGeom>
-              <a:ln w="19050">
-                <a:solidFill>
-                  <a:schemeClr val="tx1"/>
-                </a:solidFill>
-              </a:ln>
-            </p:spPr>
-            <p:style>
-              <a:lnRef idx="1">
-                <a:schemeClr val="accent1"/>
-              </a:lnRef>
-              <a:fillRef idx="0">
-                <a:schemeClr val="accent1"/>
-              </a:fillRef>
-              <a:effectRef idx="0">
-                <a:schemeClr val="accent1"/>
-              </a:effectRef>
-              <a:fontRef idx="minor">
-                <a:schemeClr val="tx1"/>
-              </a:fontRef>
-            </p:style>
-          </p:cxnSp>
-          <p:sp>
-            <p:nvSpPr>
-              <p:cNvPr id="1109" name="Oval 1108">
-                <a:extLst>
-                  <a:ext uri="{FF2B5EF4-FFF2-40B4-BE49-F238E27FC236}">
-                    <a16:creationId xmlns:a16="http://schemas.microsoft.com/office/drawing/2014/main" id="{08D01DC1-AAE5-58E7-0486-5CBD45E6DF6E}"/>
-                  </a:ext>
-                </a:extLst>
-              </p:cNvPr>
-              <p:cNvSpPr/>
-              <p:nvPr/>
-            </p:nvSpPr>
-            <p:spPr>
-              <a:xfrm>
-                <a:off x="4767388" y="3425040"/>
-                <a:ext cx="622114" cy="576944"/>
-              </a:xfrm>
-              <a:prstGeom prst="ellipse">
-                <a:avLst/>
-              </a:prstGeom>
-              <a:solidFill>
-                <a:schemeClr val="bg1"/>
-              </a:solidFill>
-              <a:ln w="19050">
-                <a:solidFill>
-                  <a:schemeClr val="tx1"/>
-                </a:solidFill>
-              </a:ln>
-            </p:spPr>
-            <p:style>
-              <a:lnRef idx="2">
-                <a:schemeClr val="accent1">
-                  <a:shade val="15000"/>
-                </a:schemeClr>
-              </a:lnRef>
-              <a:fillRef idx="1">
-                <a:schemeClr val="accent1"/>
-              </a:fillRef>
-              <a:effectRef idx="0">
-                <a:schemeClr val="accent1"/>
-              </a:effectRef>
-              <a:fontRef idx="minor">
-                <a:schemeClr val="lt1"/>
-              </a:fontRef>
-            </p:style>
-            <p:txBody>
-              <a:bodyPr rtlCol="0" anchor="ctr"/>
-              <a:lstStyle/>
-              <a:p>
-                <a:pPr algn="ctr"/>
-                <a:endParaRPr lang="en-US"/>
-              </a:p>
-            </p:txBody>
-          </p:sp>
-          <p:cxnSp>
-            <p:nvCxnSpPr>
-              <p:cNvPr id="1110" name="Straight Connector 1109">
-                <a:extLst>
-                  <a:ext uri="{FF2B5EF4-FFF2-40B4-BE49-F238E27FC236}">
-                    <a16:creationId xmlns:a16="http://schemas.microsoft.com/office/drawing/2014/main" id="{8F18F6D4-B76D-B7D2-D285-E4CEA99253BD}"/>
-                  </a:ext>
-                </a:extLst>
-              </p:cNvPr>
-              <p:cNvCxnSpPr>
-                <a:cxnSpLocks/>
-              </p:cNvCxnSpPr>
-              <p:nvPr/>
-            </p:nvCxnSpPr>
-            <p:spPr>
-              <a:xfrm flipH="1">
-                <a:off x="5925803" y="5237381"/>
-                <a:ext cx="1793642" cy="0"/>
-              </a:xfrm>
-              <a:prstGeom prst="line">
-                <a:avLst/>
-              </a:prstGeom>
-              <a:ln w="19050">
-                <a:solidFill>
-                  <a:schemeClr val="tx1"/>
-                </a:solidFill>
-              </a:ln>
-            </p:spPr>
-            <p:style>
-              <a:lnRef idx="1">
-                <a:schemeClr val="accent1"/>
-              </a:lnRef>
-              <a:fillRef idx="0">
-                <a:schemeClr val="accent1"/>
-              </a:fillRef>
-              <a:effectRef idx="0">
-                <a:schemeClr val="accent1"/>
-              </a:effectRef>
-              <a:fontRef idx="minor">
-                <a:schemeClr val="tx1"/>
-              </a:fontRef>
-            </p:style>
-          </p:cxnSp>
-        </p:grpSp>
-        <p:grpSp>
-          <p:nvGrpSpPr>
-            <p:cNvPr id="1070" name="Group 1069">
-              <a:extLst>
-                <a:ext uri="{FF2B5EF4-FFF2-40B4-BE49-F238E27FC236}">
-                  <a16:creationId xmlns:a16="http://schemas.microsoft.com/office/drawing/2014/main" id="{0EFDF269-5C96-A1B0-5212-FFD5A6ACBF20}"/>
-                </a:ext>
-              </a:extLst>
-            </p:cNvPr>
-            <p:cNvGrpSpPr/>
-            <p:nvPr/>
-          </p:nvGrpSpPr>
-          <p:grpSpPr>
-            <a:xfrm>
-              <a:off x="4204455" y="4061646"/>
-              <a:ext cx="370967" cy="261620"/>
-              <a:chOff x="10753571" y="4787961"/>
-              <a:chExt cx="370967" cy="261620"/>
-            </a:xfrm>
-          </p:grpSpPr>
-          <p:cxnSp>
-            <p:nvCxnSpPr>
-              <p:cNvPr id="1100" name="Straight Connector 1099">
-                <a:extLst>
-                  <a:ext uri="{FF2B5EF4-FFF2-40B4-BE49-F238E27FC236}">
-                    <a16:creationId xmlns:a16="http://schemas.microsoft.com/office/drawing/2014/main" id="{DD86053F-91F2-49C4-10DD-063F2DDBDB8B}"/>
-                  </a:ext>
-                </a:extLst>
-              </p:cNvPr>
-              <p:cNvCxnSpPr>
-                <a:cxnSpLocks/>
-              </p:cNvCxnSpPr>
-              <p:nvPr/>
-            </p:nvCxnSpPr>
-            <p:spPr>
-              <a:xfrm flipH="1">
-                <a:off x="10970201" y="4787962"/>
-                <a:ext cx="154337" cy="0"/>
-              </a:xfrm>
-              <a:prstGeom prst="line">
-                <a:avLst/>
-              </a:prstGeom>
-              <a:ln w="19050">
-                <a:solidFill>
-                  <a:schemeClr val="tx1"/>
-                </a:solidFill>
-              </a:ln>
-            </p:spPr>
-            <p:style>
-              <a:lnRef idx="1">
-                <a:schemeClr val="accent1"/>
-              </a:lnRef>
-              <a:fillRef idx="0">
-                <a:schemeClr val="accent1"/>
-              </a:fillRef>
-              <a:effectRef idx="0">
-                <a:schemeClr val="accent1"/>
-              </a:effectRef>
-              <a:fontRef idx="minor">
-                <a:schemeClr val="tx1"/>
-              </a:fontRef>
-            </p:style>
-          </p:cxnSp>
-          <p:cxnSp>
-            <p:nvCxnSpPr>
-              <p:cNvPr id="1101" name="Straight Connector 1100">
-                <a:extLst>
-                  <a:ext uri="{FF2B5EF4-FFF2-40B4-BE49-F238E27FC236}">
-                    <a16:creationId xmlns:a16="http://schemas.microsoft.com/office/drawing/2014/main" id="{B7C5EE0C-8B4E-AE73-58AE-44D98780B99A}"/>
-                  </a:ext>
-                </a:extLst>
-              </p:cNvPr>
-              <p:cNvCxnSpPr>
-                <a:cxnSpLocks/>
-              </p:cNvCxnSpPr>
-              <p:nvPr/>
-            </p:nvCxnSpPr>
-            <p:spPr>
-              <a:xfrm flipV="1">
-                <a:off x="10970201" y="4787961"/>
-                <a:ext cx="0" cy="261620"/>
-              </a:xfrm>
-              <a:prstGeom prst="line">
-                <a:avLst/>
-              </a:prstGeom>
-              <a:ln w="19050">
-                <a:solidFill>
-                  <a:schemeClr val="tx1"/>
-                </a:solidFill>
-              </a:ln>
-            </p:spPr>
-            <p:style>
-              <a:lnRef idx="1">
-                <a:schemeClr val="accent1"/>
-              </a:lnRef>
-              <a:fillRef idx="0">
-                <a:schemeClr val="accent1"/>
-              </a:fillRef>
-              <a:effectRef idx="0">
-                <a:schemeClr val="accent1"/>
-              </a:effectRef>
-              <a:fontRef idx="minor">
-                <a:schemeClr val="tx1"/>
-              </a:fontRef>
-            </p:style>
-          </p:cxnSp>
-          <p:cxnSp>
-            <p:nvCxnSpPr>
-              <p:cNvPr id="1102" name="Straight Connector 1101">
-                <a:extLst>
-                  <a:ext uri="{FF2B5EF4-FFF2-40B4-BE49-F238E27FC236}">
-                    <a16:creationId xmlns:a16="http://schemas.microsoft.com/office/drawing/2014/main" id="{8714277D-6F1B-E94A-4979-6E7B68436A74}"/>
-                  </a:ext>
-                </a:extLst>
-              </p:cNvPr>
-              <p:cNvCxnSpPr>
-                <a:cxnSpLocks/>
-              </p:cNvCxnSpPr>
-              <p:nvPr/>
-            </p:nvCxnSpPr>
-            <p:spPr>
-              <a:xfrm>
-                <a:off x="10924155" y="4809735"/>
-                <a:ext cx="0" cy="222818"/>
-              </a:xfrm>
-              <a:prstGeom prst="line">
-                <a:avLst/>
-              </a:prstGeom>
-              <a:ln w="19050">
-                <a:solidFill>
-                  <a:schemeClr val="tx1"/>
-                </a:solidFill>
-              </a:ln>
-            </p:spPr>
-            <p:style>
-              <a:lnRef idx="1">
-                <a:schemeClr val="accent1"/>
-              </a:lnRef>
-              <a:fillRef idx="0">
-                <a:schemeClr val="accent1"/>
-              </a:fillRef>
-              <a:effectRef idx="0">
-                <a:schemeClr val="accent1"/>
-              </a:effectRef>
-              <a:fontRef idx="minor">
-                <a:schemeClr val="tx1"/>
-              </a:fontRef>
-            </p:style>
-          </p:cxnSp>
-          <p:cxnSp>
-            <p:nvCxnSpPr>
-              <p:cNvPr id="1103" name="Straight Connector 1102">
-                <a:extLst>
-                  <a:ext uri="{FF2B5EF4-FFF2-40B4-BE49-F238E27FC236}">
-                    <a16:creationId xmlns:a16="http://schemas.microsoft.com/office/drawing/2014/main" id="{E9B58BD3-6B5B-A56F-DD41-87CD43EAB3F8}"/>
-                  </a:ext>
-                </a:extLst>
-              </p:cNvPr>
-              <p:cNvCxnSpPr>
-                <a:cxnSpLocks/>
-              </p:cNvCxnSpPr>
-              <p:nvPr/>
-            </p:nvCxnSpPr>
-            <p:spPr>
-              <a:xfrm>
-                <a:off x="10753571" y="4918772"/>
-                <a:ext cx="170585" cy="0"/>
-              </a:xfrm>
-              <a:prstGeom prst="line">
-                <a:avLst/>
-              </a:prstGeom>
-              <a:ln w="19050">
-                <a:solidFill>
-                  <a:schemeClr val="tx1"/>
-                </a:solidFill>
-              </a:ln>
-            </p:spPr>
-            <p:style>
-              <a:lnRef idx="1">
-                <a:schemeClr val="accent1"/>
-              </a:lnRef>
-              <a:fillRef idx="0">
-                <a:schemeClr val="accent1"/>
-              </a:fillRef>
-              <a:effectRef idx="0">
-                <a:schemeClr val="accent1"/>
-              </a:effectRef>
-              <a:fontRef idx="minor">
-                <a:schemeClr val="tx1"/>
-              </a:fontRef>
-            </p:style>
-          </p:cxnSp>
-          <p:cxnSp>
-            <p:nvCxnSpPr>
-              <p:cNvPr id="1104" name="Straight Connector 1103">
-                <a:extLst>
-                  <a:ext uri="{FF2B5EF4-FFF2-40B4-BE49-F238E27FC236}">
-                    <a16:creationId xmlns:a16="http://schemas.microsoft.com/office/drawing/2014/main" id="{B9ED6A66-0E6C-0980-55DF-DAB7FC313B1A}"/>
-                  </a:ext>
-                </a:extLst>
-              </p:cNvPr>
-              <p:cNvCxnSpPr>
-                <a:cxnSpLocks/>
-              </p:cNvCxnSpPr>
-              <p:nvPr/>
-            </p:nvCxnSpPr>
-            <p:spPr>
-              <a:xfrm flipH="1">
-                <a:off x="10970201" y="5049581"/>
-                <a:ext cx="154337" cy="0"/>
-              </a:xfrm>
-              <a:prstGeom prst="line">
-                <a:avLst/>
-              </a:prstGeom>
-              <a:ln w="19050">
-                <a:solidFill>
-                  <a:schemeClr val="tx1"/>
-                </a:solidFill>
-              </a:ln>
-            </p:spPr>
-            <p:style>
-              <a:lnRef idx="1">
-                <a:schemeClr val="accent1"/>
-              </a:lnRef>
-              <a:fillRef idx="0">
-                <a:schemeClr val="accent1"/>
-              </a:fillRef>
-              <a:effectRef idx="0">
-                <a:schemeClr val="accent1"/>
-              </a:effectRef>
-              <a:fontRef idx="minor">
-                <a:schemeClr val="tx1"/>
-              </a:fontRef>
-            </p:style>
-          </p:cxnSp>
-        </p:grpSp>
-        <p:grpSp>
-          <p:nvGrpSpPr>
-            <p:cNvPr id="1071" name="Group 1070">
-              <a:extLst>
-                <a:ext uri="{FF2B5EF4-FFF2-40B4-BE49-F238E27FC236}">
-                  <a16:creationId xmlns:a16="http://schemas.microsoft.com/office/drawing/2014/main" id="{30752C4C-3969-1AF8-90A1-D3CB93FD6402}"/>
-                </a:ext>
-              </a:extLst>
-            </p:cNvPr>
-            <p:cNvGrpSpPr/>
-            <p:nvPr/>
-          </p:nvGrpSpPr>
-          <p:grpSpPr>
-            <a:xfrm>
-              <a:off x="4537637" y="3177179"/>
-              <a:ext cx="370967" cy="261620"/>
-              <a:chOff x="3408218" y="2196942"/>
-              <a:chExt cx="4311227" cy="3040439"/>
-            </a:xfrm>
-          </p:grpSpPr>
-          <p:cxnSp>
-            <p:nvCxnSpPr>
-              <p:cNvPr id="1094" name="Straight Connector 1093">
-                <a:extLst>
-                  <a:ext uri="{FF2B5EF4-FFF2-40B4-BE49-F238E27FC236}">
-                    <a16:creationId xmlns:a16="http://schemas.microsoft.com/office/drawing/2014/main" id="{059BD7A3-5CE7-428E-F316-FFF8C5EE631A}"/>
-                  </a:ext>
-                </a:extLst>
-              </p:cNvPr>
-              <p:cNvCxnSpPr>
-                <a:cxnSpLocks/>
-              </p:cNvCxnSpPr>
-              <p:nvPr/>
-            </p:nvCxnSpPr>
-            <p:spPr>
-              <a:xfrm flipH="1">
-                <a:off x="5925803" y="2196950"/>
-                <a:ext cx="1793642" cy="0"/>
-              </a:xfrm>
-              <a:prstGeom prst="line">
-                <a:avLst/>
-              </a:prstGeom>
-              <a:ln w="19050">
-                <a:solidFill>
-                  <a:schemeClr val="tx1"/>
-                </a:solidFill>
-              </a:ln>
-            </p:spPr>
-            <p:style>
-              <a:lnRef idx="1">
-                <a:schemeClr val="accent1"/>
-              </a:lnRef>
-              <a:fillRef idx="0">
-                <a:schemeClr val="accent1"/>
-              </a:fillRef>
-              <a:effectRef idx="0">
-                <a:schemeClr val="accent1"/>
-              </a:effectRef>
-              <a:fontRef idx="minor">
-                <a:schemeClr val="tx1"/>
-              </a:fontRef>
-            </p:style>
-          </p:cxnSp>
-          <p:cxnSp>
-            <p:nvCxnSpPr>
-              <p:cNvPr id="1095" name="Straight Connector 1094">
-                <a:extLst>
-                  <a:ext uri="{FF2B5EF4-FFF2-40B4-BE49-F238E27FC236}">
-                    <a16:creationId xmlns:a16="http://schemas.microsoft.com/office/drawing/2014/main" id="{8D6BD206-3130-AE7A-2522-B6DC0C1A8A32}"/>
-                  </a:ext>
-                </a:extLst>
-              </p:cNvPr>
-              <p:cNvCxnSpPr>
-                <a:cxnSpLocks/>
-              </p:cNvCxnSpPr>
-              <p:nvPr/>
-            </p:nvCxnSpPr>
-            <p:spPr>
-              <a:xfrm flipV="1">
-                <a:off x="5925803" y="2196942"/>
-                <a:ext cx="0" cy="3040439"/>
-              </a:xfrm>
-              <a:prstGeom prst="line">
-                <a:avLst/>
-              </a:prstGeom>
-              <a:ln w="19050">
-                <a:solidFill>
-                  <a:schemeClr val="tx1"/>
-                </a:solidFill>
-              </a:ln>
-            </p:spPr>
-            <p:style>
-              <a:lnRef idx="1">
-                <a:schemeClr val="accent1"/>
-              </a:lnRef>
-              <a:fillRef idx="0">
-                <a:schemeClr val="accent1"/>
-              </a:fillRef>
-              <a:effectRef idx="0">
-                <a:schemeClr val="accent1"/>
-              </a:effectRef>
-              <a:fontRef idx="minor">
-                <a:schemeClr val="tx1"/>
-              </a:fontRef>
-            </p:style>
-          </p:cxnSp>
-          <p:cxnSp>
-            <p:nvCxnSpPr>
-              <p:cNvPr id="1096" name="Straight Connector 1095">
-                <a:extLst>
-                  <a:ext uri="{FF2B5EF4-FFF2-40B4-BE49-F238E27FC236}">
-                    <a16:creationId xmlns:a16="http://schemas.microsoft.com/office/drawing/2014/main" id="{EB530513-92CA-B63C-A51A-F8A7071AB48B}"/>
-                  </a:ext>
-                </a:extLst>
-              </p:cNvPr>
-              <p:cNvCxnSpPr>
-                <a:cxnSpLocks/>
-              </p:cNvCxnSpPr>
-              <p:nvPr/>
-            </p:nvCxnSpPr>
-            <p:spPr>
-              <a:xfrm>
-                <a:off x="5390677" y="2449992"/>
-                <a:ext cx="0" cy="2589497"/>
-              </a:xfrm>
-              <a:prstGeom prst="line">
-                <a:avLst/>
-              </a:prstGeom>
-              <a:ln w="19050">
-                <a:solidFill>
-                  <a:schemeClr val="tx1"/>
-                </a:solidFill>
-              </a:ln>
-            </p:spPr>
-            <p:style>
-              <a:lnRef idx="1">
-                <a:schemeClr val="accent1"/>
-              </a:lnRef>
-              <a:fillRef idx="0">
-                <a:schemeClr val="accent1"/>
-              </a:fillRef>
-              <a:effectRef idx="0">
-                <a:schemeClr val="accent1"/>
-              </a:effectRef>
-              <a:fontRef idx="minor">
-                <a:schemeClr val="tx1"/>
-              </a:fontRef>
-            </p:style>
-          </p:cxnSp>
-          <p:cxnSp>
-            <p:nvCxnSpPr>
-              <p:cNvPr id="1097" name="Straight Connector 1096">
-                <a:extLst>
-                  <a:ext uri="{FF2B5EF4-FFF2-40B4-BE49-F238E27FC236}">
-                    <a16:creationId xmlns:a16="http://schemas.microsoft.com/office/drawing/2014/main" id="{AD59E074-230A-202B-CC00-637BCEF46282}"/>
-                  </a:ext>
-                </a:extLst>
-              </p:cNvPr>
-              <p:cNvCxnSpPr>
-                <a:cxnSpLocks/>
-              </p:cNvCxnSpPr>
-              <p:nvPr/>
-            </p:nvCxnSpPr>
-            <p:spPr>
-              <a:xfrm>
-                <a:off x="3408218" y="3717171"/>
-                <a:ext cx="1982470" cy="0"/>
-              </a:xfrm>
-              <a:prstGeom prst="line">
-                <a:avLst/>
-              </a:prstGeom>
-              <a:ln w="19050">
-                <a:solidFill>
-                  <a:schemeClr val="tx1"/>
-                </a:solidFill>
-              </a:ln>
-            </p:spPr>
-            <p:style>
-              <a:lnRef idx="1">
-                <a:schemeClr val="accent1"/>
-              </a:lnRef>
-              <a:fillRef idx="0">
-                <a:schemeClr val="accent1"/>
-              </a:fillRef>
-              <a:effectRef idx="0">
-                <a:schemeClr val="accent1"/>
-              </a:effectRef>
-              <a:fontRef idx="minor">
-                <a:schemeClr val="tx1"/>
-              </a:fontRef>
-            </p:style>
-          </p:cxnSp>
-          <p:sp>
-            <p:nvSpPr>
-              <p:cNvPr id="1098" name="Oval 1097">
-                <a:extLst>
-                  <a:ext uri="{FF2B5EF4-FFF2-40B4-BE49-F238E27FC236}">
-                    <a16:creationId xmlns:a16="http://schemas.microsoft.com/office/drawing/2014/main" id="{07F516AF-9774-F08B-C081-219CD53A52B4}"/>
-                  </a:ext>
-                </a:extLst>
-              </p:cNvPr>
-              <p:cNvSpPr/>
-              <p:nvPr/>
-            </p:nvSpPr>
-            <p:spPr>
-              <a:xfrm>
-                <a:off x="4767388" y="3425040"/>
-                <a:ext cx="622114" cy="576944"/>
-              </a:xfrm>
-              <a:prstGeom prst="ellipse">
-                <a:avLst/>
-              </a:prstGeom>
-              <a:solidFill>
-                <a:schemeClr val="bg1"/>
-              </a:solidFill>
-              <a:ln w="19050">
-                <a:solidFill>
-                  <a:schemeClr val="tx1"/>
-                </a:solidFill>
-              </a:ln>
-            </p:spPr>
-            <p:style>
-              <a:lnRef idx="2">
-                <a:schemeClr val="accent1">
-                  <a:shade val="15000"/>
-                </a:schemeClr>
-              </a:lnRef>
-              <a:fillRef idx="1">
-                <a:schemeClr val="accent1"/>
-              </a:fillRef>
-              <a:effectRef idx="0">
-                <a:schemeClr val="accent1"/>
-              </a:effectRef>
-              <a:fontRef idx="minor">
-                <a:schemeClr val="lt1"/>
-              </a:fontRef>
-            </p:style>
-            <p:txBody>
-              <a:bodyPr rtlCol="0" anchor="ctr"/>
-              <a:lstStyle/>
-              <a:p>
-                <a:pPr algn="ctr"/>
-                <a:endParaRPr lang="en-US"/>
-              </a:p>
-            </p:txBody>
-          </p:sp>
-          <p:cxnSp>
-            <p:nvCxnSpPr>
-              <p:cNvPr id="1099" name="Straight Connector 1098">
-                <a:extLst>
-                  <a:ext uri="{FF2B5EF4-FFF2-40B4-BE49-F238E27FC236}">
-                    <a16:creationId xmlns:a16="http://schemas.microsoft.com/office/drawing/2014/main" id="{2351B134-DFC9-90FC-C8FA-0F63741A4693}"/>
-                  </a:ext>
-                </a:extLst>
-              </p:cNvPr>
-              <p:cNvCxnSpPr>
-                <a:cxnSpLocks/>
-              </p:cNvCxnSpPr>
-              <p:nvPr/>
-            </p:nvCxnSpPr>
-            <p:spPr>
-              <a:xfrm flipH="1">
-                <a:off x="5925803" y="5237381"/>
-                <a:ext cx="1793642" cy="0"/>
-              </a:xfrm>
-              <a:prstGeom prst="line">
-                <a:avLst/>
-              </a:prstGeom>
-              <a:ln w="19050">
-                <a:solidFill>
-                  <a:schemeClr val="tx1"/>
-                </a:solidFill>
-              </a:ln>
-            </p:spPr>
-            <p:style>
-              <a:lnRef idx="1">
-                <a:schemeClr val="accent1"/>
-              </a:lnRef>
-              <a:fillRef idx="0">
-                <a:schemeClr val="accent1"/>
-              </a:fillRef>
-              <a:effectRef idx="0">
-                <a:schemeClr val="accent1"/>
-              </a:effectRef>
-              <a:fontRef idx="minor">
-                <a:schemeClr val="tx1"/>
-              </a:fontRef>
-            </p:style>
-          </p:cxnSp>
-        </p:grpSp>
-        <p:grpSp>
-          <p:nvGrpSpPr>
-            <p:cNvPr id="1072" name="Group 1071">
-              <a:extLst>
-                <a:ext uri="{FF2B5EF4-FFF2-40B4-BE49-F238E27FC236}">
-                  <a16:creationId xmlns:a16="http://schemas.microsoft.com/office/drawing/2014/main" id="{7FA1A5C0-A603-0F46-711F-8E75B415AD84}"/>
-                </a:ext>
-              </a:extLst>
-            </p:cNvPr>
-            <p:cNvGrpSpPr/>
-            <p:nvPr/>
-          </p:nvGrpSpPr>
-          <p:grpSpPr>
-            <a:xfrm>
-              <a:off x="4199362" y="4679160"/>
-              <a:ext cx="370967" cy="261620"/>
-              <a:chOff x="10753571" y="4787961"/>
-              <a:chExt cx="370967" cy="261620"/>
-            </a:xfrm>
-          </p:grpSpPr>
-          <p:cxnSp>
-            <p:nvCxnSpPr>
-              <p:cNvPr id="1089" name="Straight Connector 1088">
-                <a:extLst>
-                  <a:ext uri="{FF2B5EF4-FFF2-40B4-BE49-F238E27FC236}">
-                    <a16:creationId xmlns:a16="http://schemas.microsoft.com/office/drawing/2014/main" id="{1AF01156-12D0-F00B-867B-D6C59CBE98FF}"/>
-                  </a:ext>
-                </a:extLst>
-              </p:cNvPr>
-              <p:cNvCxnSpPr>
-                <a:cxnSpLocks/>
-              </p:cNvCxnSpPr>
-              <p:nvPr/>
-            </p:nvCxnSpPr>
-            <p:spPr>
-              <a:xfrm flipH="1">
-                <a:off x="10970201" y="4787962"/>
-                <a:ext cx="154337" cy="0"/>
-              </a:xfrm>
-              <a:prstGeom prst="line">
-                <a:avLst/>
-              </a:prstGeom>
-              <a:ln w="19050">
-                <a:solidFill>
-                  <a:schemeClr val="tx1"/>
-                </a:solidFill>
-              </a:ln>
-            </p:spPr>
-            <p:style>
-              <a:lnRef idx="1">
-                <a:schemeClr val="accent1"/>
-              </a:lnRef>
-              <a:fillRef idx="0">
-                <a:schemeClr val="accent1"/>
-              </a:fillRef>
-              <a:effectRef idx="0">
-                <a:schemeClr val="accent1"/>
-              </a:effectRef>
-              <a:fontRef idx="minor">
-                <a:schemeClr val="tx1"/>
-              </a:fontRef>
-            </p:style>
-          </p:cxnSp>
-          <p:cxnSp>
-            <p:nvCxnSpPr>
-              <p:cNvPr id="1090" name="Straight Connector 1089">
-                <a:extLst>
-                  <a:ext uri="{FF2B5EF4-FFF2-40B4-BE49-F238E27FC236}">
-                    <a16:creationId xmlns:a16="http://schemas.microsoft.com/office/drawing/2014/main" id="{D9B08062-C086-DB6A-E474-C9AA43F40D96}"/>
-                  </a:ext>
-                </a:extLst>
-              </p:cNvPr>
-              <p:cNvCxnSpPr>
-                <a:cxnSpLocks/>
-              </p:cNvCxnSpPr>
-              <p:nvPr/>
-            </p:nvCxnSpPr>
-            <p:spPr>
-              <a:xfrm flipV="1">
-                <a:off x="10970201" y="4787961"/>
-                <a:ext cx="0" cy="261620"/>
-              </a:xfrm>
-              <a:prstGeom prst="line">
-                <a:avLst/>
-              </a:prstGeom>
-              <a:ln w="19050">
-                <a:solidFill>
-                  <a:schemeClr val="tx1"/>
-                </a:solidFill>
-              </a:ln>
-            </p:spPr>
-            <p:style>
-              <a:lnRef idx="1">
-                <a:schemeClr val="accent1"/>
-              </a:lnRef>
-              <a:fillRef idx="0">
-                <a:schemeClr val="accent1"/>
-              </a:fillRef>
-              <a:effectRef idx="0">
-                <a:schemeClr val="accent1"/>
-              </a:effectRef>
-              <a:fontRef idx="minor">
-                <a:schemeClr val="tx1"/>
-              </a:fontRef>
-            </p:style>
-          </p:cxnSp>
-          <p:cxnSp>
-            <p:nvCxnSpPr>
-              <p:cNvPr id="1091" name="Straight Connector 1090">
-                <a:extLst>
-                  <a:ext uri="{FF2B5EF4-FFF2-40B4-BE49-F238E27FC236}">
-                    <a16:creationId xmlns:a16="http://schemas.microsoft.com/office/drawing/2014/main" id="{B0B6AB5E-0DE4-4E98-9F8A-33DAD7DE4039}"/>
-                  </a:ext>
-                </a:extLst>
-              </p:cNvPr>
-              <p:cNvCxnSpPr>
-                <a:cxnSpLocks/>
-              </p:cNvCxnSpPr>
-              <p:nvPr/>
-            </p:nvCxnSpPr>
-            <p:spPr>
-              <a:xfrm>
-                <a:off x="10924155" y="4809735"/>
-                <a:ext cx="0" cy="222818"/>
-              </a:xfrm>
-              <a:prstGeom prst="line">
-                <a:avLst/>
-              </a:prstGeom>
-              <a:ln w="19050">
-                <a:solidFill>
-                  <a:schemeClr val="tx1"/>
-                </a:solidFill>
-              </a:ln>
-            </p:spPr>
-            <p:style>
-              <a:lnRef idx="1">
-                <a:schemeClr val="accent1"/>
-              </a:lnRef>
-              <a:fillRef idx="0">
-                <a:schemeClr val="accent1"/>
-              </a:fillRef>
-              <a:effectRef idx="0">
-                <a:schemeClr val="accent1"/>
-              </a:effectRef>
-              <a:fontRef idx="minor">
-                <a:schemeClr val="tx1"/>
-              </a:fontRef>
-            </p:style>
-          </p:cxnSp>
-          <p:cxnSp>
-            <p:nvCxnSpPr>
-              <p:cNvPr id="1092" name="Straight Connector 1091">
-                <a:extLst>
-                  <a:ext uri="{FF2B5EF4-FFF2-40B4-BE49-F238E27FC236}">
-                    <a16:creationId xmlns:a16="http://schemas.microsoft.com/office/drawing/2014/main" id="{5002E2B1-6F20-FD26-C9FD-6F0A90CF17A6}"/>
-                  </a:ext>
-                </a:extLst>
-              </p:cNvPr>
-              <p:cNvCxnSpPr>
-                <a:cxnSpLocks/>
-              </p:cNvCxnSpPr>
-              <p:nvPr/>
-            </p:nvCxnSpPr>
-            <p:spPr>
-              <a:xfrm>
-                <a:off x="10753571" y="4918772"/>
-                <a:ext cx="170585" cy="0"/>
-              </a:xfrm>
-              <a:prstGeom prst="line">
-                <a:avLst/>
-              </a:prstGeom>
-              <a:ln w="19050">
-                <a:solidFill>
-                  <a:schemeClr val="tx1"/>
-                </a:solidFill>
-              </a:ln>
-            </p:spPr>
-            <p:style>
-              <a:lnRef idx="1">
-                <a:schemeClr val="accent1"/>
-              </a:lnRef>
-              <a:fillRef idx="0">
-                <a:schemeClr val="accent1"/>
-              </a:fillRef>
-              <a:effectRef idx="0">
-                <a:schemeClr val="accent1"/>
-              </a:effectRef>
-              <a:fontRef idx="minor">
-                <a:schemeClr val="tx1"/>
-              </a:fontRef>
-            </p:style>
-          </p:cxnSp>
-          <p:cxnSp>
-            <p:nvCxnSpPr>
-              <p:cNvPr id="1093" name="Straight Connector 1092">
-                <a:extLst>
-                  <a:ext uri="{FF2B5EF4-FFF2-40B4-BE49-F238E27FC236}">
-                    <a16:creationId xmlns:a16="http://schemas.microsoft.com/office/drawing/2014/main" id="{0844936C-B1B1-BA3A-3F4B-EA638F4B19D9}"/>
-                  </a:ext>
-                </a:extLst>
-              </p:cNvPr>
-              <p:cNvCxnSpPr>
-                <a:cxnSpLocks/>
-              </p:cNvCxnSpPr>
-              <p:nvPr/>
-            </p:nvCxnSpPr>
-            <p:spPr>
-              <a:xfrm flipH="1">
-                <a:off x="10970201" y="5049581"/>
-                <a:ext cx="154337" cy="0"/>
-              </a:xfrm>
-              <a:prstGeom prst="line">
-                <a:avLst/>
-              </a:prstGeom>
-              <a:ln w="19050">
-                <a:solidFill>
-                  <a:schemeClr val="tx1"/>
-                </a:solidFill>
-              </a:ln>
-            </p:spPr>
-            <p:style>
-              <a:lnRef idx="1">
-                <a:schemeClr val="accent1"/>
-              </a:lnRef>
-              <a:fillRef idx="0">
-                <a:schemeClr val="accent1"/>
-              </a:fillRef>
-              <a:effectRef idx="0">
-                <a:schemeClr val="accent1"/>
-              </a:effectRef>
-              <a:fontRef idx="minor">
-                <a:schemeClr val="tx1"/>
-              </a:fontRef>
-            </p:style>
-          </p:cxnSp>
-        </p:grpSp>
-        <p:cxnSp>
-          <p:nvCxnSpPr>
-            <p:cNvPr id="1073" name="Straight Connector 1072">
-              <a:extLst>
-                <a:ext uri="{FF2B5EF4-FFF2-40B4-BE49-F238E27FC236}">
-                  <a16:creationId xmlns:a16="http://schemas.microsoft.com/office/drawing/2014/main" id="{55529910-F45E-AC3D-E2D3-120AC8B60E99}"/>
-                </a:ext>
-              </a:extLst>
-            </p:cNvPr>
-            <p:cNvCxnSpPr/>
-            <p:nvPr/>
-          </p:nvCxnSpPr>
-          <p:spPr>
-            <a:xfrm>
-              <a:off x="4220925" y="3774093"/>
-              <a:ext cx="1074920" cy="0"/>
-            </a:xfrm>
-            <a:prstGeom prst="line">
-              <a:avLst/>
-            </a:prstGeom>
-            <a:ln w="19050">
-              <a:solidFill>
-                <a:schemeClr val="tx1"/>
-              </a:solidFill>
-            </a:ln>
-          </p:spPr>
-          <p:style>
-            <a:lnRef idx="1">
-              <a:schemeClr val="accent1"/>
-            </a:lnRef>
-            <a:fillRef idx="0">
-              <a:schemeClr val="accent1"/>
-            </a:fillRef>
-            <a:effectRef idx="0">
-              <a:schemeClr val="accent1"/>
-            </a:effectRef>
-            <a:fontRef idx="minor">
-              <a:schemeClr val="tx1"/>
-            </a:fontRef>
-          </p:style>
-        </p:cxnSp>
-        <p:cxnSp>
-          <p:nvCxnSpPr>
-            <p:cNvPr id="1074" name="Straight Connector 1073">
-              <a:extLst>
-                <a:ext uri="{FF2B5EF4-FFF2-40B4-BE49-F238E27FC236}">
-                  <a16:creationId xmlns:a16="http://schemas.microsoft.com/office/drawing/2014/main" id="{C63AAE95-D2EE-FF72-6F06-E71DBE82B3C4}"/>
-                </a:ext>
-              </a:extLst>
-            </p:cNvPr>
-            <p:cNvCxnSpPr>
-              <a:cxnSpLocks/>
-            </p:cNvCxnSpPr>
-            <p:nvPr/>
-          </p:nvCxnSpPr>
-          <p:spPr>
-            <a:xfrm>
-              <a:off x="4908603" y="3442169"/>
-              <a:ext cx="1" cy="331924"/>
-            </a:xfrm>
-            <a:prstGeom prst="line">
-              <a:avLst/>
-            </a:prstGeom>
-            <a:ln w="19050">
-              <a:solidFill>
-                <a:schemeClr val="tx1"/>
-              </a:solidFill>
-            </a:ln>
-          </p:spPr>
-          <p:style>
-            <a:lnRef idx="1">
-              <a:schemeClr val="accent1"/>
-            </a:lnRef>
-            <a:fillRef idx="0">
-              <a:schemeClr val="accent1"/>
-            </a:fillRef>
-            <a:effectRef idx="0">
-              <a:schemeClr val="accent1"/>
-            </a:effectRef>
-            <a:fontRef idx="minor">
-              <a:schemeClr val="tx1"/>
-            </a:fontRef>
-          </p:style>
-        </p:cxnSp>
-        <p:cxnSp>
-          <p:nvCxnSpPr>
-            <p:cNvPr id="1075" name="Straight Connector 1074">
-              <a:extLst>
-                <a:ext uri="{FF2B5EF4-FFF2-40B4-BE49-F238E27FC236}">
-                  <a16:creationId xmlns:a16="http://schemas.microsoft.com/office/drawing/2014/main" id="{BB29317A-694D-872E-BED1-AE046F658624}"/>
-                </a:ext>
-              </a:extLst>
-            </p:cNvPr>
-            <p:cNvCxnSpPr>
-              <a:cxnSpLocks/>
-            </p:cNvCxnSpPr>
-            <p:nvPr/>
-          </p:nvCxnSpPr>
-          <p:spPr>
-            <a:xfrm>
-              <a:off x="4207956" y="3430360"/>
-              <a:ext cx="0" cy="352457"/>
-            </a:xfrm>
-            <a:prstGeom prst="line">
-              <a:avLst/>
-            </a:prstGeom>
-            <a:ln w="19050">
-              <a:solidFill>
-                <a:schemeClr val="tx1"/>
-              </a:solidFill>
-            </a:ln>
-          </p:spPr>
-          <p:style>
-            <a:lnRef idx="1">
-              <a:schemeClr val="accent1"/>
-            </a:lnRef>
-            <a:fillRef idx="0">
-              <a:schemeClr val="accent1"/>
-            </a:fillRef>
-            <a:effectRef idx="0">
-              <a:schemeClr val="accent1"/>
-            </a:effectRef>
-            <a:fontRef idx="minor">
-              <a:schemeClr val="tx1"/>
-            </a:fontRef>
-          </p:style>
-        </p:cxnSp>
-        <p:cxnSp>
-          <p:nvCxnSpPr>
-            <p:cNvPr id="1076" name="Straight Connector 1075">
-              <a:extLst>
-                <a:ext uri="{FF2B5EF4-FFF2-40B4-BE49-F238E27FC236}">
-                  <a16:creationId xmlns:a16="http://schemas.microsoft.com/office/drawing/2014/main" id="{E2B932F1-CC91-3325-AD97-06CD40D66004}"/>
-                </a:ext>
-              </a:extLst>
-            </p:cNvPr>
-            <p:cNvCxnSpPr>
-              <a:cxnSpLocks/>
-            </p:cNvCxnSpPr>
-            <p:nvPr/>
-          </p:nvCxnSpPr>
-          <p:spPr>
-            <a:xfrm>
-              <a:off x="4575422" y="3780437"/>
-              <a:ext cx="0" cy="286110"/>
-            </a:xfrm>
-            <a:prstGeom prst="line">
-              <a:avLst/>
-            </a:prstGeom>
-            <a:ln w="19050">
-              <a:solidFill>
-                <a:schemeClr val="tx1"/>
-              </a:solidFill>
-            </a:ln>
-          </p:spPr>
-          <p:style>
-            <a:lnRef idx="1">
-              <a:schemeClr val="accent1"/>
-            </a:lnRef>
-            <a:fillRef idx="0">
-              <a:schemeClr val="accent1"/>
-            </a:fillRef>
-            <a:effectRef idx="0">
-              <a:schemeClr val="accent1"/>
-            </a:effectRef>
-            <a:fontRef idx="minor">
-              <a:schemeClr val="tx1"/>
-            </a:fontRef>
-          </p:style>
-        </p:cxnSp>
-        <p:cxnSp>
-          <p:nvCxnSpPr>
-            <p:cNvPr id="1077" name="Straight Connector 1076">
-              <a:extLst>
-                <a:ext uri="{FF2B5EF4-FFF2-40B4-BE49-F238E27FC236}">
-                  <a16:creationId xmlns:a16="http://schemas.microsoft.com/office/drawing/2014/main" id="{355AB32A-6E68-F953-AD03-00E3F55CC2CB}"/>
-                </a:ext>
-              </a:extLst>
-            </p:cNvPr>
-            <p:cNvCxnSpPr>
-              <a:cxnSpLocks/>
-            </p:cNvCxnSpPr>
-            <p:nvPr/>
-          </p:nvCxnSpPr>
-          <p:spPr>
-            <a:xfrm>
-              <a:off x="4569343" y="4323266"/>
-              <a:ext cx="0" cy="352457"/>
-            </a:xfrm>
-            <a:prstGeom prst="line">
-              <a:avLst/>
-            </a:prstGeom>
-            <a:ln w="19050">
-              <a:solidFill>
-                <a:schemeClr val="tx1"/>
-              </a:solidFill>
-            </a:ln>
-          </p:spPr>
-          <p:style>
-            <a:lnRef idx="1">
-              <a:schemeClr val="accent1"/>
-            </a:lnRef>
-            <a:fillRef idx="0">
-              <a:schemeClr val="accent1"/>
-            </a:fillRef>
-            <a:effectRef idx="0">
-              <a:schemeClr val="accent1"/>
-            </a:effectRef>
-            <a:fontRef idx="minor">
-              <a:schemeClr val="tx1"/>
-            </a:fontRef>
-          </p:style>
-        </p:cxnSp>
-        <p:cxnSp>
-          <p:nvCxnSpPr>
-            <p:cNvPr id="1078" name="Straight Connector 1077">
-              <a:extLst>
-                <a:ext uri="{FF2B5EF4-FFF2-40B4-BE49-F238E27FC236}">
-                  <a16:creationId xmlns:a16="http://schemas.microsoft.com/office/drawing/2014/main" id="{20F0D3F8-0E55-BC3B-643B-8611635B5A51}"/>
-                </a:ext>
-              </a:extLst>
-            </p:cNvPr>
-            <p:cNvCxnSpPr>
-              <a:cxnSpLocks/>
-            </p:cNvCxnSpPr>
-            <p:nvPr/>
-          </p:nvCxnSpPr>
-          <p:spPr>
-            <a:xfrm>
-              <a:off x="4211955" y="2822741"/>
-              <a:ext cx="0" cy="352457"/>
-            </a:xfrm>
-            <a:prstGeom prst="line">
-              <a:avLst/>
-            </a:prstGeom>
-            <a:ln w="19050">
-              <a:solidFill>
-                <a:schemeClr val="tx1"/>
-              </a:solidFill>
-            </a:ln>
-          </p:spPr>
-          <p:style>
-            <a:lnRef idx="1">
-              <a:schemeClr val="accent1"/>
-            </a:lnRef>
-            <a:fillRef idx="0">
-              <a:schemeClr val="accent1"/>
-            </a:fillRef>
-            <a:effectRef idx="0">
-              <a:schemeClr val="accent1"/>
-            </a:effectRef>
-            <a:fontRef idx="minor">
-              <a:schemeClr val="tx1"/>
-            </a:fontRef>
-          </p:style>
-        </p:cxnSp>
-        <p:cxnSp>
-          <p:nvCxnSpPr>
-            <p:cNvPr id="1080" name="Straight Connector 1079">
-              <a:extLst>
-                <a:ext uri="{FF2B5EF4-FFF2-40B4-BE49-F238E27FC236}">
-                  <a16:creationId xmlns:a16="http://schemas.microsoft.com/office/drawing/2014/main" id="{6CF01A32-A781-D12C-6F87-B581C4CC226C}"/>
-                </a:ext>
-              </a:extLst>
-            </p:cNvPr>
-            <p:cNvCxnSpPr>
-              <a:cxnSpLocks/>
-            </p:cNvCxnSpPr>
-            <p:nvPr/>
-          </p:nvCxnSpPr>
-          <p:spPr>
-            <a:xfrm>
-              <a:off x="4565849" y="4942605"/>
-              <a:ext cx="0" cy="352457"/>
-            </a:xfrm>
-            <a:prstGeom prst="line">
-              <a:avLst/>
-            </a:prstGeom>
-            <a:ln w="19050">
-              <a:solidFill>
-                <a:schemeClr val="tx1"/>
-              </a:solidFill>
-            </a:ln>
-          </p:spPr>
-          <p:style>
-            <a:lnRef idx="1">
-              <a:schemeClr val="accent1"/>
-            </a:lnRef>
-            <a:fillRef idx="0">
-              <a:schemeClr val="accent1"/>
-            </a:fillRef>
-            <a:effectRef idx="0">
-              <a:schemeClr val="accent1"/>
-            </a:effectRef>
-            <a:fontRef idx="minor">
-              <a:schemeClr val="tx1"/>
-            </a:fontRef>
-          </p:style>
-        </p:cxnSp>
-        <p:sp>
-          <p:nvSpPr>
-            <p:cNvPr id="1081" name="TextBox 1080">
-              <a:extLst>
-                <a:ext uri="{FF2B5EF4-FFF2-40B4-BE49-F238E27FC236}">
-                  <a16:creationId xmlns:a16="http://schemas.microsoft.com/office/drawing/2014/main" id="{2E236224-99D9-8415-F296-72FEDE7FD6D9}"/>
-                </a:ext>
-              </a:extLst>
-            </p:cNvPr>
-            <p:cNvSpPr txBox="1"/>
-            <p:nvPr/>
-          </p:nvSpPr>
-          <p:spPr>
-            <a:xfrm>
-              <a:off x="3598814" y="3157805"/>
-              <a:ext cx="288862" cy="307777"/>
-            </a:xfrm>
-            <a:prstGeom prst="rect">
-              <a:avLst/>
-            </a:prstGeom>
-            <a:noFill/>
-          </p:spPr>
-          <p:txBody>
-            <a:bodyPr wrap="none" rtlCol="0">
-              <a:spAutoFit/>
-            </a:bodyPr>
-            <a:lstStyle/>
-            <a:p>
-              <a:r>
-                <a:rPr lang="en-US" sz="1400" dirty="0"/>
-                <a:t>A</a:t>
-              </a:r>
-            </a:p>
-          </p:txBody>
-        </p:sp>
-        <p:sp>
-          <p:nvSpPr>
-            <p:cNvPr id="1082" name="TextBox 1081">
-              <a:extLst>
-                <a:ext uri="{FF2B5EF4-FFF2-40B4-BE49-F238E27FC236}">
-                  <a16:creationId xmlns:a16="http://schemas.microsoft.com/office/drawing/2014/main" id="{D0544CE5-237F-3C35-540F-8C6EB462C017}"/>
-                </a:ext>
-              </a:extLst>
-            </p:cNvPr>
-            <p:cNvSpPr txBox="1"/>
-            <p:nvPr/>
-          </p:nvSpPr>
-          <p:spPr>
-            <a:xfrm>
-              <a:off x="4309361" y="3143951"/>
-              <a:ext cx="282450" cy="307777"/>
-            </a:xfrm>
-            <a:prstGeom prst="rect">
-              <a:avLst/>
-            </a:prstGeom>
-            <a:noFill/>
-          </p:spPr>
-          <p:txBody>
-            <a:bodyPr wrap="none" rtlCol="0">
-              <a:spAutoFit/>
-            </a:bodyPr>
-            <a:lstStyle/>
-            <a:p>
-              <a:r>
-                <a:rPr lang="en-US" sz="1400" dirty="0"/>
-                <a:t>B</a:t>
-              </a:r>
-            </a:p>
-          </p:txBody>
-        </p:sp>
-        <p:sp>
-          <p:nvSpPr>
-            <p:cNvPr id="1083" name="TextBox 1082">
-              <a:extLst>
-                <a:ext uri="{FF2B5EF4-FFF2-40B4-BE49-F238E27FC236}">
-                  <a16:creationId xmlns:a16="http://schemas.microsoft.com/office/drawing/2014/main" id="{15A63316-C2D6-6901-32C8-AB8C7B436A45}"/>
-                </a:ext>
-              </a:extLst>
-            </p:cNvPr>
-            <p:cNvSpPr txBox="1"/>
-            <p:nvPr/>
-          </p:nvSpPr>
-          <p:spPr>
-            <a:xfrm>
-              <a:off x="3976840" y="4022803"/>
-              <a:ext cx="288862" cy="307777"/>
-            </a:xfrm>
-            <a:prstGeom prst="rect">
-              <a:avLst/>
-            </a:prstGeom>
-            <a:noFill/>
-          </p:spPr>
-          <p:txBody>
-            <a:bodyPr wrap="none" rtlCol="0">
-              <a:spAutoFit/>
-            </a:bodyPr>
-            <a:lstStyle/>
-            <a:p>
-              <a:r>
-                <a:rPr lang="en-US" sz="1400" dirty="0"/>
-                <a:t>A</a:t>
-              </a:r>
-            </a:p>
-          </p:txBody>
-        </p:sp>
-        <p:sp>
-          <p:nvSpPr>
-            <p:cNvPr id="1084" name="TextBox 1083">
-              <a:extLst>
-                <a:ext uri="{FF2B5EF4-FFF2-40B4-BE49-F238E27FC236}">
-                  <a16:creationId xmlns:a16="http://schemas.microsoft.com/office/drawing/2014/main" id="{D46C3DFC-F6B7-DA26-6252-6B5E6FDAE033}"/>
-                </a:ext>
-              </a:extLst>
-            </p:cNvPr>
-            <p:cNvSpPr txBox="1"/>
-            <p:nvPr/>
-          </p:nvSpPr>
-          <p:spPr>
-            <a:xfrm>
-              <a:off x="3998621" y="4662090"/>
-              <a:ext cx="282450" cy="307777"/>
-            </a:xfrm>
-            <a:prstGeom prst="rect">
-              <a:avLst/>
-            </a:prstGeom>
-            <a:noFill/>
-          </p:spPr>
-          <p:txBody>
-            <a:bodyPr wrap="none" rtlCol="0">
-              <a:spAutoFit/>
-            </a:bodyPr>
-            <a:lstStyle/>
-            <a:p>
-              <a:r>
-                <a:rPr lang="en-US" sz="1400" dirty="0"/>
-                <a:t>B</a:t>
-              </a:r>
-            </a:p>
-          </p:txBody>
-        </p:sp>
-        <p:sp>
-          <p:nvSpPr>
-            <p:cNvPr id="1085" name="TextBox 1084">
-              <a:extLst>
-                <a:ext uri="{FF2B5EF4-FFF2-40B4-BE49-F238E27FC236}">
-                  <a16:creationId xmlns:a16="http://schemas.microsoft.com/office/drawing/2014/main" id="{63CF8D27-6211-14B7-00E7-F70A163683DD}"/>
-                </a:ext>
-              </a:extLst>
-            </p:cNvPr>
-            <p:cNvSpPr txBox="1"/>
-            <p:nvPr/>
-          </p:nvSpPr>
-          <p:spPr>
-            <a:xfrm>
-              <a:off x="3990439" y="2487265"/>
-              <a:ext cx="508473" cy="307777"/>
-            </a:xfrm>
-            <a:prstGeom prst="rect">
-              <a:avLst/>
-            </a:prstGeom>
-            <a:noFill/>
-          </p:spPr>
-          <p:txBody>
-            <a:bodyPr wrap="none" rtlCol="0">
-              <a:spAutoFit/>
-            </a:bodyPr>
-            <a:lstStyle/>
-            <a:p>
-              <a:r>
-                <a:rPr lang="en-US" sz="1400" dirty="0"/>
-                <a:t>VDD</a:t>
-              </a:r>
-            </a:p>
-          </p:txBody>
-        </p:sp>
-        <p:sp>
-          <p:nvSpPr>
-            <p:cNvPr id="1086" name="TextBox 1085">
-              <a:extLst>
-                <a:ext uri="{FF2B5EF4-FFF2-40B4-BE49-F238E27FC236}">
-                  <a16:creationId xmlns:a16="http://schemas.microsoft.com/office/drawing/2014/main" id="{8694E110-1CF7-E362-6EB6-4096406CFC5B}"/>
-                </a:ext>
-              </a:extLst>
-            </p:cNvPr>
-            <p:cNvSpPr txBox="1"/>
-            <p:nvPr/>
-          </p:nvSpPr>
-          <p:spPr>
-            <a:xfrm>
-              <a:off x="4297698" y="5371276"/>
-              <a:ext cx="524503" cy="307777"/>
-            </a:xfrm>
-            <a:prstGeom prst="rect">
-              <a:avLst/>
-            </a:prstGeom>
-            <a:noFill/>
-          </p:spPr>
-          <p:txBody>
-            <a:bodyPr wrap="none" rtlCol="0">
-              <a:spAutoFit/>
-            </a:bodyPr>
-            <a:lstStyle/>
-            <a:p>
-              <a:r>
-                <a:rPr lang="en-US" sz="1400" dirty="0"/>
-                <a:t>GND</a:t>
-              </a:r>
-            </a:p>
-          </p:txBody>
-        </p:sp>
-        <p:sp>
-          <p:nvSpPr>
-            <p:cNvPr id="1088" name="TextBox 1087">
-              <a:extLst>
-                <a:ext uri="{FF2B5EF4-FFF2-40B4-BE49-F238E27FC236}">
-                  <a16:creationId xmlns:a16="http://schemas.microsoft.com/office/drawing/2014/main" id="{1612D799-E3B2-ECDE-071F-64D4BF165126}"/>
-                </a:ext>
-              </a:extLst>
-            </p:cNvPr>
-            <p:cNvSpPr txBox="1"/>
-            <p:nvPr/>
-          </p:nvSpPr>
-          <p:spPr>
-            <a:xfrm>
-              <a:off x="4993658" y="3436958"/>
-              <a:ext cx="506870" cy="307777"/>
-            </a:xfrm>
-            <a:prstGeom prst="rect">
-              <a:avLst/>
-            </a:prstGeom>
-            <a:noFill/>
-          </p:spPr>
-          <p:txBody>
-            <a:bodyPr wrap="none" rtlCol="0">
-              <a:spAutoFit/>
-            </a:bodyPr>
-            <a:lstStyle/>
-            <a:p>
-              <a:r>
-                <a:rPr lang="en-US" sz="1400" dirty="0"/>
-                <a:t>OUT</a:t>
-              </a:r>
-            </a:p>
-          </p:txBody>
-        </p:sp>
-        <p:cxnSp>
-          <p:nvCxnSpPr>
-            <p:cNvPr id="1111" name="Straight Connector 1110">
-              <a:extLst>
-                <a:ext uri="{FF2B5EF4-FFF2-40B4-BE49-F238E27FC236}">
-                  <a16:creationId xmlns:a16="http://schemas.microsoft.com/office/drawing/2014/main" id="{4C4833C3-D635-648A-BF9D-76D357FD0B8B}"/>
-                </a:ext>
-              </a:extLst>
-            </p:cNvPr>
-            <p:cNvCxnSpPr>
-              <a:cxnSpLocks/>
-            </p:cNvCxnSpPr>
-            <p:nvPr/>
-          </p:nvCxnSpPr>
-          <p:spPr>
-            <a:xfrm>
-              <a:off x="4899556" y="2821381"/>
-              <a:ext cx="0" cy="352457"/>
-            </a:xfrm>
-            <a:prstGeom prst="line">
-              <a:avLst/>
-            </a:prstGeom>
-            <a:ln w="19050">
-              <a:solidFill>
-                <a:schemeClr val="tx1"/>
-              </a:solidFill>
-            </a:ln>
-          </p:spPr>
-          <p:style>
-            <a:lnRef idx="1">
-              <a:schemeClr val="accent1"/>
-            </a:lnRef>
-            <a:fillRef idx="0">
-              <a:schemeClr val="accent1"/>
-            </a:fillRef>
-            <a:effectRef idx="0">
-              <a:schemeClr val="accent1"/>
-            </a:effectRef>
-            <a:fontRef idx="minor">
-              <a:schemeClr val="tx1"/>
-            </a:fontRef>
-          </p:style>
-        </p:cxnSp>
-        <p:sp>
-          <p:nvSpPr>
-            <p:cNvPr id="1112" name="TextBox 1111">
-              <a:extLst>
-                <a:ext uri="{FF2B5EF4-FFF2-40B4-BE49-F238E27FC236}">
-                  <a16:creationId xmlns:a16="http://schemas.microsoft.com/office/drawing/2014/main" id="{747522F8-2B26-88FA-B80F-CAEAA7AD04F9}"/>
-                </a:ext>
-              </a:extLst>
-            </p:cNvPr>
-            <p:cNvSpPr txBox="1"/>
-            <p:nvPr/>
-          </p:nvSpPr>
-          <p:spPr>
-            <a:xfrm>
-              <a:off x="4654367" y="2485905"/>
-              <a:ext cx="508473" cy="307777"/>
-            </a:xfrm>
-            <a:prstGeom prst="rect">
-              <a:avLst/>
-            </a:prstGeom>
-            <a:noFill/>
-          </p:spPr>
-          <p:txBody>
-            <a:bodyPr wrap="none" rtlCol="0">
-              <a:spAutoFit/>
-            </a:bodyPr>
-            <a:lstStyle/>
-            <a:p>
-              <a:r>
-                <a:rPr lang="en-US" sz="1400" dirty="0"/>
-                <a:t>VDD</a:t>
-              </a:r>
-            </a:p>
-          </p:txBody>
-        </p:sp>
-      </p:grpSp>
     </p:spTree>
     <p:extLst>
       <p:ext uri="{BB962C8B-B14F-4D97-AF65-F5344CB8AC3E}">
@@ -23223,6 +23272,53 @@
           </a:p>
         </p:txBody>
       </p:sp>
+      <p:pic>
+        <p:nvPicPr>
+          <p:cNvPr id="9" name="Picture 2" descr="NAND gate symbol with two inputs (A and B) and one output (Q).  The NAND symbol looks exactly like the AND symbol except it has a small circle on its output connection indicating that the output is inverted.">
+            <a:extLst>
+              <a:ext uri="{FF2B5EF4-FFF2-40B4-BE49-F238E27FC236}">
+                <a16:creationId xmlns:a16="http://schemas.microsoft.com/office/drawing/2014/main" id="{180ADDE7-1E74-C54C-617C-F8BDB2D5C898}"/>
+              </a:ext>
+            </a:extLst>
+          </p:cNvPr>
+          <p:cNvPicPr>
+            <a:picLocks noChangeAspect="1" noChangeArrowheads="1"/>
+          </p:cNvPicPr>
+          <p:nvPr/>
+        </p:nvPicPr>
+        <p:blipFill>
+          <a:blip r:embed="rId3">
+            <a:extLst>
+              <a:ext uri="{28A0092B-C50C-407E-A947-70E740481C1C}">
+                <a14:useLocalDpi xmlns:a14="http://schemas.microsoft.com/office/drawing/2010/main"/>
+              </a:ext>
+            </a:extLst>
+          </a:blip>
+          <a:srcRect/>
+          <a:stretch>
+            <a:fillRect/>
+          </a:stretch>
+        </p:blipFill>
+        <p:spPr bwMode="auto">
+          <a:xfrm>
+            <a:off x="1574454" y="2472587"/>
+            <a:ext cx="1524000" cy="635000"/>
+          </a:xfrm>
+          <a:prstGeom prst="rect">
+            <a:avLst/>
+          </a:prstGeom>
+          <a:noFill/>
+          <a:extLst>
+            <a:ext uri="{909E8E84-426E-40DD-AFC4-6F175D3DCCD1}">
+              <a14:hiddenFill xmlns:a14="http://schemas.microsoft.com/office/drawing/2010/main">
+                <a:solidFill>
+                  <a:srgbClr val="FFFFFF"/>
+                </a:solidFill>
+              </a14:hiddenFill>
+            </a:ext>
+          </a:extLst>
+        </p:spPr>
+      </p:pic>
       <p:graphicFrame>
         <p:nvGraphicFramePr>
           <p:cNvPr id="6" name="Table 5">
@@ -23525,83 +23621,6 @@
           </a:graphicData>
         </a:graphic>
       </p:graphicFrame>
-      <p:pic>
-        <p:nvPicPr>
-          <p:cNvPr id="9" name="Picture 2" descr="NAND gate symbol with two inputs (A and B) and one output (Q).  The NAND symbol looks exactly like the AND symbol except it has a small circle on its output connection indicating that the output is inverted.">
-            <a:extLst>
-              <a:ext uri="{FF2B5EF4-FFF2-40B4-BE49-F238E27FC236}">
-                <a16:creationId xmlns:a16="http://schemas.microsoft.com/office/drawing/2014/main" id="{180ADDE7-1E74-C54C-617C-F8BDB2D5C898}"/>
-              </a:ext>
-            </a:extLst>
-          </p:cNvPr>
-          <p:cNvPicPr>
-            <a:picLocks noChangeAspect="1" noChangeArrowheads="1"/>
-          </p:cNvPicPr>
-          <p:nvPr/>
-        </p:nvPicPr>
-        <p:blipFill>
-          <a:blip r:embed="rId3">
-            <a:extLst>
-              <a:ext uri="{28A0092B-C50C-407E-A947-70E740481C1C}">
-                <a14:useLocalDpi xmlns:a14="http://schemas.microsoft.com/office/drawing/2010/main"/>
-              </a:ext>
-            </a:extLst>
-          </a:blip>
-          <a:srcRect/>
-          <a:stretch>
-            <a:fillRect/>
-          </a:stretch>
-        </p:blipFill>
-        <p:spPr bwMode="auto">
-          <a:xfrm>
-            <a:off x="1574454" y="2472587"/>
-            <a:ext cx="1524000" cy="635000"/>
-          </a:xfrm>
-          <a:prstGeom prst="rect">
-            <a:avLst/>
-          </a:prstGeom>
-          <a:noFill/>
-          <a:extLst>
-            <a:ext uri="{909E8E84-426E-40DD-AFC4-6F175D3DCCD1}">
-              <a14:hiddenFill xmlns:a14="http://schemas.microsoft.com/office/drawing/2010/main">
-                <a:solidFill>
-                  <a:srgbClr val="FFFFFF"/>
-                </a:solidFill>
-              </a14:hiddenFill>
-            </a:ext>
-          </a:extLst>
-        </p:spPr>
-      </p:pic>
-      <p:pic>
-        <p:nvPicPr>
-          <p:cNvPr id="15" name="Picture 14" descr="A layout of a CMOS Nand gate using four transistors, two inputs (A, B)and output (Q) .  Input A is 5 volts and input B is 0 volts and the output (Q) is 0 volts per the truth table of the NAND gate.The layout was done using https://www.ca4e.com/tools/cmos/">
-            <a:extLst>
-              <a:ext uri="{FF2B5EF4-FFF2-40B4-BE49-F238E27FC236}">
-                <a16:creationId xmlns:a16="http://schemas.microsoft.com/office/drawing/2014/main" id="{EE777BA4-F7E9-DBC3-B222-64599ED9473D}"/>
-              </a:ext>
-            </a:extLst>
-          </p:cNvPr>
-          <p:cNvPicPr>
-            <a:picLocks noChangeAspect="1"/>
-          </p:cNvPicPr>
-          <p:nvPr/>
-        </p:nvPicPr>
-        <p:blipFill>
-          <a:blip r:embed="rId4"/>
-          <a:stretch>
-            <a:fillRect/>
-          </a:stretch>
-        </p:blipFill>
-        <p:spPr>
-          <a:xfrm>
-            <a:off x="6702425" y="444038"/>
-            <a:ext cx="4651375" cy="5116513"/>
-          </a:xfrm>
-          <a:prstGeom prst="rect">
-            <a:avLst/>
-          </a:prstGeom>
-        </p:spPr>
-      </p:pic>
       <p:cxnSp>
         <p:nvCxnSpPr>
           <p:cNvPr id="17" name="Straight Arrow Connector 16">
@@ -25339,6 +25358,36 @@
           </p:txBody>
         </p:sp>
       </p:grpSp>
+      <p:pic>
+        <p:nvPicPr>
+          <p:cNvPr id="15" name="Picture 14" descr="A layout of a CMOS Nand gate using four transistors, two inputs (A, B)and output (Q) .  Input A is 5 volts and input B is 0 volts and the output (Q) is 0 volts per the truth table of the NAND gate.The layout was done using https://www.ca4e.com/tools/cmos/">
+            <a:extLst>
+              <a:ext uri="{FF2B5EF4-FFF2-40B4-BE49-F238E27FC236}">
+                <a16:creationId xmlns:a16="http://schemas.microsoft.com/office/drawing/2014/main" id="{EE777BA4-F7E9-DBC3-B222-64599ED9473D}"/>
+              </a:ext>
+            </a:extLst>
+          </p:cNvPr>
+          <p:cNvPicPr>
+            <a:picLocks noChangeAspect="1"/>
+          </p:cNvPicPr>
+          <p:nvPr/>
+        </p:nvPicPr>
+        <p:blipFill>
+          <a:blip r:embed="rId4"/>
+          <a:stretch>
+            <a:fillRect/>
+          </a:stretch>
+        </p:blipFill>
+        <p:spPr>
+          <a:xfrm>
+            <a:off x="6702425" y="444038"/>
+            <a:ext cx="4651375" cy="5116513"/>
+          </a:xfrm>
+          <a:prstGeom prst="rect">
+            <a:avLst/>
+          </a:prstGeom>
+        </p:spPr>
+      </p:pic>
     </p:spTree>
     <p:extLst>
       <p:ext uri="{BB962C8B-B14F-4D97-AF65-F5344CB8AC3E}">
@@ -25546,10 +25595,10 @@
       </p:grpSpPr>
       <p:sp>
         <p:nvSpPr>
-          <p:cNvPr id="5" name="Title 4">
+          <p:cNvPr id="2" name="Title 1">
             <a:extLst>
               <a:ext uri="{FF2B5EF4-FFF2-40B4-BE49-F238E27FC236}">
-                <a16:creationId xmlns:a16="http://schemas.microsoft.com/office/drawing/2014/main" id="{AD2EFD07-F694-345C-4B2F-4614FA7D9DCC}"/>
+                <a16:creationId xmlns:a16="http://schemas.microsoft.com/office/drawing/2014/main" id="{625930C7-EFB6-2B86-9933-BE664D315965}"/>
               </a:ext>
             </a:extLst>
           </p:cNvPr>
@@ -25560,35 +25609,12 @@
             <p:ph type="title"/>
           </p:nvPr>
         </p:nvSpPr>
-        <p:spPr/>
-        <p:txBody>
-          <a:bodyPr/>
-          <a:lstStyle/>
-          <a:p>
-            <a:r>
-              <a:rPr lang="en-US" dirty="0"/>
-              <a:t>Summary</a:t>
-            </a:r>
-          </a:p>
-        </p:txBody>
-      </p:sp>
-      <p:sp>
-        <p:nvSpPr>
-          <p:cNvPr id="6" name="Content Placeholder 5">
-            <a:extLst>
-              <a:ext uri="{FF2B5EF4-FFF2-40B4-BE49-F238E27FC236}">
-                <a16:creationId xmlns:a16="http://schemas.microsoft.com/office/drawing/2014/main" id="{9904836A-9389-B0FF-C342-D7DD46B32F59}"/>
-              </a:ext>
-            </a:extLst>
-          </p:cNvPr>
-          <p:cNvSpPr>
-            <a:spLocks noGrp="1"/>
-          </p:cNvSpPr>
-          <p:nvPr>
-            <p:ph idx="1"/>
-          </p:nvPr>
-        </p:nvSpPr>
-        <p:spPr/>
+        <p:spPr>
+          <a:xfrm>
+            <a:off x="578822" y="2143593"/>
+            <a:ext cx="3933218" cy="1947023"/>
+          </a:xfrm>
+        </p:spPr>
         <p:txBody>
           <a:bodyPr>
             <a:normAutofit/>
@@ -25597,38 +25623,45 @@
           <a:p>
             <a:r>
               <a:rPr lang="en-US" dirty="0"/>
-              <a:t>Semiconductors</a:t>
-            </a:r>
-          </a:p>
-          <a:p>
-            <a:r>
-              <a:rPr lang="en-US" dirty="0"/>
-              <a:t>Tuning tubes and transistor for digital applications (as compared to amplifier applications)</a:t>
-            </a:r>
-          </a:p>
-          <a:p>
-            <a:r>
-              <a:rPr lang="en-US" dirty="0"/>
-              <a:t>Building gates from transistors</a:t>
-            </a:r>
-          </a:p>
-          <a:p>
-            <a:r>
-              <a:rPr lang="en-US" dirty="0"/>
-              <a:t>Transistor technology evolution PMOS, NMOS and CMOS </a:t>
-            </a:r>
-            <a:r>
-              <a:rPr lang="en-US"/>
-              <a:t>logic </a:t>
-            </a:r>
-            <a:endParaRPr lang="en-US" dirty="0"/>
+              <a:t>Sneak Peek: Digital Logic Design</a:t>
+            </a:r>
           </a:p>
         </p:txBody>
       </p:sp>
+      <p:pic>
+        <p:nvPicPr>
+          <p:cNvPr id="3" name="Picture 2" descr="A screen shot of a NAND gate, two inputs and one output from the digital logic builder for this course https://www.ca4e.com/tools/gates/">
+            <a:extLst>
+              <a:ext uri="{FF2B5EF4-FFF2-40B4-BE49-F238E27FC236}">
+                <a16:creationId xmlns:a16="http://schemas.microsoft.com/office/drawing/2014/main" id="{58944A39-A2E0-B76F-11AD-BDDE47B5610A}"/>
+              </a:ext>
+            </a:extLst>
+          </p:cNvPr>
+          <p:cNvPicPr>
+            <a:picLocks noChangeAspect="1"/>
+          </p:cNvPicPr>
+          <p:nvPr/>
+        </p:nvPicPr>
+        <p:blipFill>
+          <a:blip r:embed="rId2"/>
+          <a:stretch>
+            <a:fillRect/>
+          </a:stretch>
+        </p:blipFill>
+        <p:spPr>
+          <a:xfrm>
+            <a:off x="5227021" y="1215631"/>
+            <a:ext cx="6780700" cy="4424405"/>
+          </a:xfrm>
+          <a:prstGeom prst="rect">
+            <a:avLst/>
+          </a:prstGeom>
+        </p:spPr>
+      </p:pic>
     </p:spTree>
     <p:extLst>
       <p:ext uri="{BB962C8B-B14F-4D97-AF65-F5344CB8AC3E}">
-        <p14:creationId xmlns:p14="http://schemas.microsoft.com/office/powerpoint/2010/main" val="2697238516"/>
+        <p14:creationId xmlns:p14="http://schemas.microsoft.com/office/powerpoint/2010/main" val="1236641848"/>
       </p:ext>
     </p:extLst>
   </p:cSld>
@@ -25657,10 +25690,10 @@
       </p:grpSpPr>
       <p:sp>
         <p:nvSpPr>
-          <p:cNvPr id="2" name="Title 1">
+          <p:cNvPr id="5" name="Title 4">
             <a:extLst>
               <a:ext uri="{FF2B5EF4-FFF2-40B4-BE49-F238E27FC236}">
-                <a16:creationId xmlns:a16="http://schemas.microsoft.com/office/drawing/2014/main" id="{38E4AE3D-C70D-220E-82A8-C1D64A900A0F}"/>
+                <a16:creationId xmlns:a16="http://schemas.microsoft.com/office/drawing/2014/main" id="{AD2EFD07-F694-345C-4B2F-4614FA7D9DCC}"/>
               </a:ext>
             </a:extLst>
           </p:cNvPr>
@@ -25678,120 +25711,68 @@
           <a:p>
             <a:r>
               <a:rPr lang="en-US" dirty="0"/>
-              <a:t>Acknowledgements / Contributions</a:t>
+              <a:t>Summary</a:t>
             </a:r>
           </a:p>
         </p:txBody>
       </p:sp>
       <p:sp>
         <p:nvSpPr>
-          <p:cNvPr id="7" name="TextBox 6">
+          <p:cNvPr id="6" name="Content Placeholder 5">
             <a:extLst>
               <a:ext uri="{FF2B5EF4-FFF2-40B4-BE49-F238E27FC236}">
-                <a16:creationId xmlns:a16="http://schemas.microsoft.com/office/drawing/2014/main" id="{D1725F2C-A6DC-4096-AD36-A6A5AF1FFD40}"/>
+                <a16:creationId xmlns:a16="http://schemas.microsoft.com/office/drawing/2014/main" id="{9904836A-9389-B0FF-C342-D7DD46B32F59}"/>
               </a:ext>
             </a:extLst>
           </p:cNvPr>
-          <p:cNvSpPr txBox="1"/>
-          <p:nvPr/>
+          <p:cNvSpPr>
+            <a:spLocks noGrp="1"/>
+          </p:cNvSpPr>
+          <p:nvPr>
+            <p:ph idx="1"/>
+          </p:nvPr>
         </p:nvSpPr>
-        <p:spPr>
-          <a:xfrm>
-            <a:off x="838201" y="1502688"/>
-            <a:ext cx="5055704" cy="2492990"/>
-          </a:xfrm>
-          <a:prstGeom prst="rect">
-            <a:avLst/>
-          </a:prstGeom>
-          <a:noFill/>
-        </p:spPr>
+        <p:spPr/>
         <p:txBody>
-          <a:bodyPr wrap="square" rtlCol="0">
-            <a:spAutoFit/>
+          <a:bodyPr>
+            <a:normAutofit/>
           </a:bodyPr>
           <a:lstStyle/>
           <a:p>
             <a:r>
-              <a:rPr lang="en-US" sz="1200" dirty="0"/>
-              <a:t>These slides are Copyright 2025-  Charles R. Severance (</a:t>
-            </a:r>
-            <a:r>
-              <a:rPr lang="en-US" sz="1200" dirty="0" err="1"/>
-              <a:t>online.dr-chuck.com</a:t>
-            </a:r>
-            <a:r>
-              <a:rPr lang="en-US" sz="1200" dirty="0"/>
-              <a:t>) as part of www.ca4e.com and made available under a Creative Commons Attribution 4.0 License.  Please maintain this last slide in all copies of the document to comply with the attribution requirements of the license.  If you make a change, feel free to add your name and organization to the list of contributors on this page as you republish the materials.</a:t>
-            </a:r>
-          </a:p>
-          <a:p>
-            <a:endParaRPr lang="en-US" sz="1200" dirty="0"/>
-          </a:p>
-          <a:p>
-            <a:r>
-              <a:rPr lang="en-US" sz="1200" dirty="0"/>
-              <a:t>Initial Development: Charles Severance, University of Michigan School of Information</a:t>
-            </a:r>
-          </a:p>
-          <a:p>
-            <a:endParaRPr lang="en-US" sz="1200" dirty="0"/>
-          </a:p>
-          <a:p>
-            <a:r>
-              <a:rPr lang="en-US" sz="1200" b="1" dirty="0"/>
-              <a:t>Insert new Contributors and Translators here including names and dates</a:t>
-            </a:r>
-          </a:p>
-          <a:p>
-            <a:endParaRPr lang="en-US" sz="1200" dirty="0"/>
-          </a:p>
-          <a:p>
-            <a:endParaRPr lang="en-US" sz="1200" dirty="0"/>
-          </a:p>
-        </p:txBody>
-      </p:sp>
-      <p:sp>
-        <p:nvSpPr>
-          <p:cNvPr id="8" name="TextBox 7">
-            <a:extLst>
-              <a:ext uri="{FF2B5EF4-FFF2-40B4-BE49-F238E27FC236}">
-                <a16:creationId xmlns:a16="http://schemas.microsoft.com/office/drawing/2014/main" id="{A5B0D5A1-502A-F6A1-76FD-6D954B37EE94}"/>
-              </a:ext>
-            </a:extLst>
-          </p:cNvPr>
-          <p:cNvSpPr txBox="1"/>
-          <p:nvPr/>
-        </p:nvSpPr>
-        <p:spPr>
-          <a:xfrm>
-            <a:off x="6298097" y="1502688"/>
-            <a:ext cx="5055704" cy="461665"/>
-          </a:xfrm>
-          <a:prstGeom prst="rect">
-            <a:avLst/>
-          </a:prstGeom>
-          <a:noFill/>
-        </p:spPr>
-        <p:txBody>
-          <a:bodyPr wrap="square" rtlCol="0">
-            <a:spAutoFit/>
-          </a:bodyPr>
-          <a:lstStyle/>
-          <a:p>
-            <a:r>
-              <a:rPr lang="en-US" sz="1200" b="1" dirty="0"/>
-              <a:t>Continue new Contributors and Translators here</a:t>
-            </a:r>
-          </a:p>
-          <a:p>
-            <a:endParaRPr lang="en-US" sz="1200" dirty="0"/>
+              <a:rPr lang="en-US" dirty="0"/>
+              <a:t>Semiconductors</a:t>
+            </a:r>
+          </a:p>
+          <a:p>
+            <a:r>
+              <a:rPr lang="en-US" dirty="0"/>
+              <a:t>Tuning tubes and transistor for digital applications (as compared to amplifier applications)</a:t>
+            </a:r>
+          </a:p>
+          <a:p>
+            <a:r>
+              <a:rPr lang="en-US" dirty="0"/>
+              <a:t>Building gates from transistors</a:t>
+            </a:r>
+          </a:p>
+          <a:p>
+            <a:r>
+              <a:rPr lang="en-US" dirty="0"/>
+              <a:t>Transistor technology evolution PMOS, NMOS and CMOS </a:t>
+            </a:r>
+            <a:r>
+              <a:rPr lang="en-US"/>
+              <a:t>logic </a:t>
+            </a:r>
+            <a:endParaRPr lang="en-US" dirty="0"/>
           </a:p>
         </p:txBody>
       </p:sp>
     </p:spTree>
     <p:extLst>
       <p:ext uri="{BB962C8B-B14F-4D97-AF65-F5344CB8AC3E}">
-        <p14:creationId xmlns:p14="http://schemas.microsoft.com/office/powerpoint/2010/main" val="2963881526"/>
+        <p14:creationId xmlns:p14="http://schemas.microsoft.com/office/powerpoint/2010/main" val="2697238516"/>
       </p:ext>
     </p:extLst>
   </p:cSld>
@@ -25906,7 +25887,7 @@
       </p:sp>
       <p:pic>
         <p:nvPicPr>
-          <p:cNvPr id="50" name="Picture 49" descr="A telephone pole with 30 glass insulators for 3 wires.  Photo by Dr. Chuck.  ">
+          <p:cNvPr id="50" name="Picture 49" descr="A telephone pole with 30 glass insulators for 30 wires.  Photo by Dr. Chuck.  ">
             <a:extLst>
               <a:ext uri="{FF2B5EF4-FFF2-40B4-BE49-F238E27FC236}">
                 <a16:creationId xmlns:a16="http://schemas.microsoft.com/office/drawing/2014/main" id="{1A5C0E9C-A83E-AEFF-6081-03C9A561899F}"/>
@@ -26027,7 +26008,7 @@
       </p:sp>
       <p:grpSp>
         <p:nvGrpSpPr>
-          <p:cNvPr id="5" name="Group 4" descr="A schematic of a vacuum tube amplifer showing the  cathode, anode, and grid.  It is showing a flow of electorns from the cathid to the and through and affected by the grid.  A small input wave form is shown on the grid and an amplified waveform is shown on the output anode.">
+          <p:cNvPr id="5" name="Group 4" descr="This is a simple diagram of a vacuum tube with an Anode, Cathode, and Grid with some simple wave forms showing a small input signal and larger amplified signal.">
             <a:extLst>
               <a:ext uri="{FF2B5EF4-FFF2-40B4-BE49-F238E27FC236}">
                 <a16:creationId xmlns:a16="http://schemas.microsoft.com/office/drawing/2014/main" id="{CEB7E79C-2316-63CE-2540-CF2436FB9A87}"/>
@@ -26761,7 +26742,7 @@
         </p:sp>
         <p:sp>
           <p:nvSpPr>
-            <p:cNvPr id="63" name="TextBox 62">
+            <p:cNvPr id="63" name="TextBox 62" descr="This is a simple diagram of a vacuum tube with an Anode, Cathode, and Grig with some simple wave forms showing a small input signal and larger amplified signal.">
               <a:extLst>
                 <a:ext uri="{FF2B5EF4-FFF2-40B4-BE49-F238E27FC236}">
                   <a16:creationId xmlns:a16="http://schemas.microsoft.com/office/drawing/2014/main" id="{D95C0F8E-26B6-C964-A9F1-043D1BC45648}"/>
@@ -26913,6 +26894,169 @@
 </p:sld>
 </file>
 
+<file path=ppt/slides/slide30.xml><?xml version="1.0" encoding="utf-8"?>
+<p:sld xmlns:a="http://schemas.openxmlformats.org/drawingml/2006/main" xmlns:r="http://schemas.openxmlformats.org/officeDocument/2006/relationships" xmlns:p="http://schemas.openxmlformats.org/presentationml/2006/main">
+  <p:cSld>
+    <p:spTree>
+      <p:nvGrpSpPr>
+        <p:cNvPr id="1" name=""/>
+        <p:cNvGrpSpPr/>
+        <p:nvPr/>
+      </p:nvGrpSpPr>
+      <p:grpSpPr>
+        <a:xfrm>
+          <a:off x="0" y="0"/>
+          <a:ext cx="0" cy="0"/>
+          <a:chOff x="0" y="0"/>
+          <a:chExt cx="0" cy="0"/>
+        </a:xfrm>
+      </p:grpSpPr>
+      <p:sp>
+        <p:nvSpPr>
+          <p:cNvPr id="2" name="Title 1">
+            <a:extLst>
+              <a:ext uri="{FF2B5EF4-FFF2-40B4-BE49-F238E27FC236}">
+                <a16:creationId xmlns:a16="http://schemas.microsoft.com/office/drawing/2014/main" id="{38E4AE3D-C70D-220E-82A8-C1D64A900A0F}"/>
+              </a:ext>
+            </a:extLst>
+          </p:cNvPr>
+          <p:cNvSpPr>
+            <a:spLocks noGrp="1"/>
+          </p:cNvSpPr>
+          <p:nvPr>
+            <p:ph type="title"/>
+          </p:nvPr>
+        </p:nvSpPr>
+        <p:spPr/>
+        <p:txBody>
+          <a:bodyPr/>
+          <a:lstStyle/>
+          <a:p>
+            <a:r>
+              <a:rPr lang="en-US" dirty="0"/>
+              <a:t>Acknowledgements / Contributions</a:t>
+            </a:r>
+          </a:p>
+        </p:txBody>
+      </p:sp>
+      <p:sp>
+        <p:nvSpPr>
+          <p:cNvPr id="7" name="TextBox 6">
+            <a:extLst>
+              <a:ext uri="{FF2B5EF4-FFF2-40B4-BE49-F238E27FC236}">
+                <a16:creationId xmlns:a16="http://schemas.microsoft.com/office/drawing/2014/main" id="{D1725F2C-A6DC-4096-AD36-A6A5AF1FFD40}"/>
+              </a:ext>
+            </a:extLst>
+          </p:cNvPr>
+          <p:cNvSpPr txBox="1"/>
+          <p:nvPr/>
+        </p:nvSpPr>
+        <p:spPr>
+          <a:xfrm>
+            <a:off x="838201" y="1502688"/>
+            <a:ext cx="5055704" cy="2492990"/>
+          </a:xfrm>
+          <a:prstGeom prst="rect">
+            <a:avLst/>
+          </a:prstGeom>
+          <a:noFill/>
+        </p:spPr>
+        <p:txBody>
+          <a:bodyPr wrap="square" rtlCol="0">
+            <a:spAutoFit/>
+          </a:bodyPr>
+          <a:lstStyle/>
+          <a:p>
+            <a:r>
+              <a:rPr lang="en-US" sz="1200" dirty="0"/>
+              <a:t>These slides are Copyright 2025-  Charles R. Severance (</a:t>
+            </a:r>
+            <a:r>
+              <a:rPr lang="en-US" sz="1200" dirty="0" err="1"/>
+              <a:t>online.dr-chuck.com</a:t>
+            </a:r>
+            <a:r>
+              <a:rPr lang="en-US" sz="1200" dirty="0"/>
+              <a:t>) as part of www.ca4e.com and made available under a Creative Commons Attribution 4.0 License.  Please maintain this last slide in all copies of the document to comply with the attribution requirements of the license.  If you make a change, feel free to add your name and organization to the list of contributors on this page as you republish the materials.</a:t>
+            </a:r>
+          </a:p>
+          <a:p>
+            <a:endParaRPr lang="en-US" sz="1200" dirty="0"/>
+          </a:p>
+          <a:p>
+            <a:r>
+              <a:rPr lang="en-US" sz="1200" dirty="0"/>
+              <a:t>Initial Development: Charles Severance, University of Michigan School of Information</a:t>
+            </a:r>
+          </a:p>
+          <a:p>
+            <a:endParaRPr lang="en-US" sz="1200" dirty="0"/>
+          </a:p>
+          <a:p>
+            <a:r>
+              <a:rPr lang="en-US" sz="1200" b="1" dirty="0"/>
+              <a:t>Insert new Contributors and Translators here including names and dates</a:t>
+            </a:r>
+          </a:p>
+          <a:p>
+            <a:endParaRPr lang="en-US" sz="1200" dirty="0"/>
+          </a:p>
+          <a:p>
+            <a:endParaRPr lang="en-US" sz="1200" dirty="0"/>
+          </a:p>
+        </p:txBody>
+      </p:sp>
+      <p:sp>
+        <p:nvSpPr>
+          <p:cNvPr id="8" name="TextBox 7">
+            <a:extLst>
+              <a:ext uri="{FF2B5EF4-FFF2-40B4-BE49-F238E27FC236}">
+                <a16:creationId xmlns:a16="http://schemas.microsoft.com/office/drawing/2014/main" id="{A5B0D5A1-502A-F6A1-76FD-6D954B37EE94}"/>
+              </a:ext>
+            </a:extLst>
+          </p:cNvPr>
+          <p:cNvSpPr txBox="1"/>
+          <p:nvPr/>
+        </p:nvSpPr>
+        <p:spPr>
+          <a:xfrm>
+            <a:off x="6298097" y="1502688"/>
+            <a:ext cx="5055704" cy="461665"/>
+          </a:xfrm>
+          <a:prstGeom prst="rect">
+            <a:avLst/>
+          </a:prstGeom>
+          <a:noFill/>
+        </p:spPr>
+        <p:txBody>
+          <a:bodyPr wrap="square" rtlCol="0">
+            <a:spAutoFit/>
+          </a:bodyPr>
+          <a:lstStyle/>
+          <a:p>
+            <a:r>
+              <a:rPr lang="en-US" sz="1200" b="1" dirty="0"/>
+              <a:t>Continue new Contributors and Translators here</a:t>
+            </a:r>
+          </a:p>
+          <a:p>
+            <a:endParaRPr lang="en-US" sz="1200" dirty="0"/>
+          </a:p>
+        </p:txBody>
+      </p:sp>
+    </p:spTree>
+    <p:extLst>
+      <p:ext uri="{BB962C8B-B14F-4D97-AF65-F5344CB8AC3E}">
+        <p14:creationId xmlns:p14="http://schemas.microsoft.com/office/powerpoint/2010/main" val="2963881526"/>
+      </p:ext>
+    </p:extLst>
+  </p:cSld>
+  <p:clrMapOvr>
+    <a:masterClrMapping/>
+  </p:clrMapOvr>
+</p:sld>
+</file>
+
 <file path=ppt/slides/slide4.xml><?xml version="1.0" encoding="utf-8"?>
 <p:sld xmlns:a="http://schemas.openxmlformats.org/drawingml/2006/main" xmlns:r="http://schemas.openxmlformats.org/officeDocument/2006/relationships" xmlns:p="http://schemas.openxmlformats.org/presentationml/2006/main">
   <p:cSld>
@@ -26930,6 +27074,39 @@
           <a:chExt cx="0" cy="0"/>
         </a:xfrm>
       </p:grpSpPr>
+      <p:sp>
+        <p:nvSpPr>
+          <p:cNvPr id="2" name="Title 1">
+            <a:extLst>
+              <a:ext uri="{FF2B5EF4-FFF2-40B4-BE49-F238E27FC236}">
+                <a16:creationId xmlns:a16="http://schemas.microsoft.com/office/drawing/2014/main" id="{F1FC07C6-3CDD-A59A-52F1-0805AF526397}"/>
+              </a:ext>
+            </a:extLst>
+          </p:cNvPr>
+          <p:cNvSpPr>
+            <a:spLocks noGrp="1"/>
+          </p:cNvSpPr>
+          <p:nvPr>
+            <p:ph type="title"/>
+          </p:nvPr>
+        </p:nvSpPr>
+        <p:spPr>
+          <a:xfrm>
+            <a:off x="8155690" y="1263749"/>
+            <a:ext cx="3094220" cy="1325563"/>
+          </a:xfrm>
+        </p:spPr>
+        <p:txBody>
+          <a:bodyPr/>
+          <a:lstStyle/>
+          <a:p>
+            <a:r>
+              <a:rPr lang="en-US" dirty="0"/>
+              <a:t>Triode Specification</a:t>
+            </a:r>
+          </a:p>
+        </p:txBody>
+      </p:sp>
       <p:pic>
         <p:nvPicPr>
           <p:cNvPr id="7" name="Picture 6" descr="This is an image of the specification sheet of the Raytheon 6CG8A Vacuum Tube from https://frank.pocnet.net/sheets/127/6/6CG8A.pdf&#10;It shows the first [page of the specification with the dimensions of the tube (2.188 inches tall) and the number of pins (8).  The content of the text is not particularly relevant - it is more fun as a historical document.">
@@ -28295,14 +28472,6 @@
 <file path=ppt/slides/slide6.xml><?xml version="1.0" encoding="utf-8"?>
 <p:sld xmlns:a="http://schemas.openxmlformats.org/drawingml/2006/main" xmlns:r="http://schemas.openxmlformats.org/officeDocument/2006/relationships" xmlns:p="http://schemas.openxmlformats.org/presentationml/2006/main">
   <p:cSld>
-    <p:bg>
-      <p:bgPr>
-        <a:solidFill>
-          <a:schemeClr val="bg1"/>
-        </a:solidFill>
-        <a:effectLst/>
-      </p:bgPr>
-    </p:bg>
     <p:spTree>
       <p:nvGrpSpPr>
         <p:cNvPr id="1" name=""/>
@@ -28317,72 +28486,12 @@
           <a:chExt cx="0" cy="0"/>
         </a:xfrm>
       </p:grpSpPr>
-      <p:sp useBgFill="1">
-        <p:nvSpPr>
-          <p:cNvPr id="12" name="Rectangle 11">
-            <a:extLst>
-              <a:ext uri="{FF2B5EF4-FFF2-40B4-BE49-F238E27FC236}">
-                <a16:creationId xmlns:a16="http://schemas.microsoft.com/office/drawing/2014/main" id="{F13C74B1-5B17-4795-BED0-7140497B445A}"/>
-              </a:ext>
-              <a:ext uri="{C183D7F6-B498-43B3-948B-1728B52AA6E4}">
-                <adec:decorative xmlns:adec="http://schemas.microsoft.com/office/drawing/2017/decorative" val="1"/>
-              </a:ext>
-            </a:extLst>
-          </p:cNvPr>
-          <p:cNvSpPr>
-            <a:spLocks noGrp="1" noRot="1" noChangeAspect="1" noMove="1" noResize="1" noEditPoints="1" noAdjustHandles="1" noChangeArrowheads="1" noChangeShapeType="1" noTextEdit="1"/>
-          </p:cNvSpPr>
-          <p:nvPr>
-            <p:extLst>
-              <p:ext uri="{386F3935-93C4-4BCD-93E2-E3B085C9AB24}">
-                <p16:designElem xmlns:p16="http://schemas.microsoft.com/office/powerpoint/2015/main" val="1"/>
-              </p:ext>
-            </p:extLst>
-          </p:nvPr>
-        </p:nvSpPr>
-        <p:spPr>
-          <a:xfrm>
-            <a:off x="0" y="0"/>
-            <a:ext cx="12188952" cy="6858000"/>
-          </a:xfrm>
-          <a:prstGeom prst="rect">
-            <a:avLst/>
-          </a:prstGeom>
-          <a:ln>
-            <a:noFill/>
-          </a:ln>
-        </p:spPr>
-        <p:style>
-          <a:lnRef idx="2">
-            <a:schemeClr val="accent1">
-              <a:shade val="50000"/>
-            </a:schemeClr>
-          </a:lnRef>
-          <a:fillRef idx="1">
-            <a:schemeClr val="accent1"/>
-          </a:fillRef>
-          <a:effectRef idx="0">
-            <a:schemeClr val="accent1"/>
-          </a:effectRef>
-          <a:fontRef idx="minor">
-            <a:schemeClr val="lt1"/>
-          </a:fontRef>
-        </p:style>
-        <p:txBody>
-          <a:bodyPr rtlCol="0" anchor="ctr"/>
-          <a:lstStyle/>
-          <a:p>
-            <a:pPr algn="ctr"/>
-            <a:endParaRPr lang="en-US"/>
-          </a:p>
-        </p:txBody>
-      </p:sp>
       <p:sp>
         <p:nvSpPr>
           <p:cNvPr id="2" name="Title 1">
             <a:extLst>
               <a:ext uri="{FF2B5EF4-FFF2-40B4-BE49-F238E27FC236}">
-                <a16:creationId xmlns:a16="http://schemas.microsoft.com/office/drawing/2014/main" id="{4EDF1E44-A73E-2C39-F2F1-4A30238B1EAF}"/>
+                <a16:creationId xmlns:a16="http://schemas.microsoft.com/office/drawing/2014/main" id="{25F4F7AC-7923-56FC-2F2A-A4C6FC0D1EC0}"/>
               </a:ext>
             </a:extLst>
           </p:cNvPr>
@@ -28393,305 +28502,15 @@
             <p:ph type="title"/>
           </p:nvPr>
         </p:nvSpPr>
-        <p:spPr>
-          <a:xfrm>
-            <a:off x="640080" y="325369"/>
-            <a:ext cx="4368602" cy="1956841"/>
-          </a:xfrm>
-        </p:spPr>
+        <p:spPr/>
         <p:txBody>
-          <a:bodyPr anchor="b">
-            <a:normAutofit/>
-          </a:bodyPr>
+          <a:bodyPr/>
           <a:lstStyle/>
           <a:p>
             <a:r>
-              <a:rPr lang="en-US" sz="5400" dirty="0"/>
+              <a:rPr lang="en-US" dirty="0"/>
               <a:t>Flaws of Valves</a:t>
             </a:r>
-          </a:p>
-        </p:txBody>
-      </p:sp>
-      <p:sp>
-        <p:nvSpPr>
-          <p:cNvPr id="14" name="sketchy line">
-            <a:extLst>
-              <a:ext uri="{FF2B5EF4-FFF2-40B4-BE49-F238E27FC236}">
-                <a16:creationId xmlns:a16="http://schemas.microsoft.com/office/drawing/2014/main" id="{D4974D33-8DC5-464E-8C6D-BE58F0669C17}"/>
-              </a:ext>
-              <a:ext uri="{C183D7F6-B498-43B3-948B-1728B52AA6E4}">
-                <adec:decorative xmlns:adec="http://schemas.microsoft.com/office/drawing/2017/decorative" val="1"/>
-              </a:ext>
-            </a:extLst>
-          </p:cNvPr>
-          <p:cNvSpPr>
-            <a:spLocks noGrp="1" noRot="1" noChangeAspect="1" noMove="1" noResize="1" noEditPoints="1" noAdjustHandles="1" noChangeArrowheads="1" noChangeShapeType="1" noTextEdit="1"/>
-          </p:cNvSpPr>
-          <p:nvPr>
-            <p:extLst>
-              <p:ext uri="{386F3935-93C4-4BCD-93E2-E3B085C9AB24}">
-                <p16:designElem xmlns:p16="http://schemas.microsoft.com/office/powerpoint/2015/main" val="1"/>
-              </p:ext>
-            </p:extLst>
-          </p:nvPr>
-        </p:nvSpPr>
-        <p:spPr>
-          <a:xfrm>
-            <a:off x="640080" y="2586994"/>
-            <a:ext cx="3474720" cy="18288"/>
-          </a:xfrm>
-          <a:custGeom>
-            <a:avLst/>
-            <a:gdLst>
-              <a:gd name="connsiteX0" fmla="*/ 0 w 3474720"/>
-              <a:gd name="connsiteY0" fmla="*/ 0 h 18288"/>
-              <a:gd name="connsiteX1" fmla="*/ 694944 w 3474720"/>
-              <a:gd name="connsiteY1" fmla="*/ 0 h 18288"/>
-              <a:gd name="connsiteX2" fmla="*/ 1355141 w 3474720"/>
-              <a:gd name="connsiteY2" fmla="*/ 0 h 18288"/>
-              <a:gd name="connsiteX3" fmla="*/ 2015338 w 3474720"/>
-              <a:gd name="connsiteY3" fmla="*/ 0 h 18288"/>
-              <a:gd name="connsiteX4" fmla="*/ 2779776 w 3474720"/>
-              <a:gd name="connsiteY4" fmla="*/ 0 h 18288"/>
-              <a:gd name="connsiteX5" fmla="*/ 3474720 w 3474720"/>
-              <a:gd name="connsiteY5" fmla="*/ 0 h 18288"/>
-              <a:gd name="connsiteX6" fmla="*/ 3474720 w 3474720"/>
-              <a:gd name="connsiteY6" fmla="*/ 18288 h 18288"/>
-              <a:gd name="connsiteX7" fmla="*/ 2779776 w 3474720"/>
-              <a:gd name="connsiteY7" fmla="*/ 18288 h 18288"/>
-              <a:gd name="connsiteX8" fmla="*/ 2189074 w 3474720"/>
-              <a:gd name="connsiteY8" fmla="*/ 18288 h 18288"/>
-              <a:gd name="connsiteX9" fmla="*/ 1528877 w 3474720"/>
-              <a:gd name="connsiteY9" fmla="*/ 18288 h 18288"/>
-              <a:gd name="connsiteX10" fmla="*/ 868680 w 3474720"/>
-              <a:gd name="connsiteY10" fmla="*/ 18288 h 18288"/>
-              <a:gd name="connsiteX11" fmla="*/ 0 w 3474720"/>
-              <a:gd name="connsiteY11" fmla="*/ 18288 h 18288"/>
-              <a:gd name="connsiteX12" fmla="*/ 0 w 3474720"/>
-              <a:gd name="connsiteY12" fmla="*/ 0 h 18288"/>
-            </a:gdLst>
-            <a:ahLst/>
-            <a:cxnLst>
-              <a:cxn ang="0">
-                <a:pos x="connsiteX0" y="connsiteY0"/>
-              </a:cxn>
-              <a:cxn ang="0">
-                <a:pos x="connsiteX1" y="connsiteY1"/>
-              </a:cxn>
-              <a:cxn ang="0">
-                <a:pos x="connsiteX2" y="connsiteY2"/>
-              </a:cxn>
-              <a:cxn ang="0">
-                <a:pos x="connsiteX3" y="connsiteY3"/>
-              </a:cxn>
-              <a:cxn ang="0">
-                <a:pos x="connsiteX4" y="connsiteY4"/>
-              </a:cxn>
-              <a:cxn ang="0">
-                <a:pos x="connsiteX5" y="connsiteY5"/>
-              </a:cxn>
-              <a:cxn ang="0">
-                <a:pos x="connsiteX6" y="connsiteY6"/>
-              </a:cxn>
-              <a:cxn ang="0">
-                <a:pos x="connsiteX7" y="connsiteY7"/>
-              </a:cxn>
-              <a:cxn ang="0">
-                <a:pos x="connsiteX8" y="connsiteY8"/>
-              </a:cxn>
-              <a:cxn ang="0">
-                <a:pos x="connsiteX9" y="connsiteY9"/>
-              </a:cxn>
-              <a:cxn ang="0">
-                <a:pos x="connsiteX10" y="connsiteY10"/>
-              </a:cxn>
-              <a:cxn ang="0">
-                <a:pos x="connsiteX11" y="connsiteY11"/>
-              </a:cxn>
-              <a:cxn ang="0">
-                <a:pos x="connsiteX12" y="connsiteY12"/>
-              </a:cxn>
-            </a:cxnLst>
-            <a:rect l="l" t="t" r="r" b="b"/>
-            <a:pathLst>
-              <a:path w="3474720" h="18288" fill="none" extrusionOk="0">
-                <a:moveTo>
-                  <a:pt x="0" y="0"/>
-                </a:moveTo>
-                <a:cubicBezTo>
-                  <a:pt x="224454" y="-14544"/>
-                  <a:pt x="495407" y="26540"/>
-                  <a:pt x="694944" y="0"/>
-                </a:cubicBezTo>
-                <a:cubicBezTo>
-                  <a:pt x="894481" y="-26540"/>
-                  <a:pt x="1130063" y="24713"/>
-                  <a:pt x="1355141" y="0"/>
-                </a:cubicBezTo>
-                <a:cubicBezTo>
-                  <a:pt x="1580219" y="-24713"/>
-                  <a:pt x="1820099" y="26695"/>
-                  <a:pt x="2015338" y="0"/>
-                </a:cubicBezTo>
-                <a:cubicBezTo>
-                  <a:pt x="2210577" y="-26695"/>
-                  <a:pt x="2402045" y="165"/>
-                  <a:pt x="2779776" y="0"/>
-                </a:cubicBezTo>
-                <a:cubicBezTo>
-                  <a:pt x="3157507" y="-165"/>
-                  <a:pt x="3286859" y="-15571"/>
-                  <a:pt x="3474720" y="0"/>
-                </a:cubicBezTo>
-                <a:cubicBezTo>
-                  <a:pt x="3474286" y="7551"/>
-                  <a:pt x="3474253" y="9822"/>
-                  <a:pt x="3474720" y="18288"/>
-                </a:cubicBezTo>
-                <a:cubicBezTo>
-                  <a:pt x="3233904" y="29845"/>
-                  <a:pt x="2945134" y="-5256"/>
-                  <a:pt x="2779776" y="18288"/>
-                </a:cubicBezTo>
-                <a:cubicBezTo>
-                  <a:pt x="2614418" y="41832"/>
-                  <a:pt x="2339768" y="22709"/>
-                  <a:pt x="2189074" y="18288"/>
-                </a:cubicBezTo>
-                <a:cubicBezTo>
-                  <a:pt x="2038380" y="13867"/>
-                  <a:pt x="1817434" y="-4947"/>
-                  <a:pt x="1528877" y="18288"/>
-                </a:cubicBezTo>
-                <a:cubicBezTo>
-                  <a:pt x="1240320" y="41523"/>
-                  <a:pt x="1042447" y="37198"/>
-                  <a:pt x="868680" y="18288"/>
-                </a:cubicBezTo>
-                <a:cubicBezTo>
-                  <a:pt x="694913" y="-622"/>
-                  <a:pt x="233232" y="44909"/>
-                  <a:pt x="0" y="18288"/>
-                </a:cubicBezTo>
-                <a:cubicBezTo>
-                  <a:pt x="60" y="11696"/>
-                  <a:pt x="66" y="3758"/>
-                  <a:pt x="0" y="0"/>
-                </a:cubicBezTo>
-                <a:close/>
-              </a:path>
-              <a:path w="3474720" h="18288" stroke="0" extrusionOk="0">
-                <a:moveTo>
-                  <a:pt x="0" y="0"/>
-                </a:moveTo>
-                <a:cubicBezTo>
-                  <a:pt x="202328" y="-14716"/>
-                  <a:pt x="332722" y="-11499"/>
-                  <a:pt x="625450" y="0"/>
-                </a:cubicBezTo>
-                <a:cubicBezTo>
-                  <a:pt x="918178" y="11499"/>
-                  <a:pt x="1096688" y="5123"/>
-                  <a:pt x="1389888" y="0"/>
-                </a:cubicBezTo>
-                <a:cubicBezTo>
-                  <a:pt x="1683088" y="-5123"/>
-                  <a:pt x="1835981" y="-14038"/>
-                  <a:pt x="1980590" y="0"/>
-                </a:cubicBezTo>
-                <a:cubicBezTo>
-                  <a:pt x="2125199" y="14038"/>
-                  <a:pt x="2396099" y="-7203"/>
-                  <a:pt x="2571293" y="0"/>
-                </a:cubicBezTo>
-                <a:cubicBezTo>
-                  <a:pt x="2746487" y="7203"/>
-                  <a:pt x="3041609" y="-12036"/>
-                  <a:pt x="3474720" y="0"/>
-                </a:cubicBezTo>
-                <a:cubicBezTo>
-                  <a:pt x="3474638" y="4406"/>
-                  <a:pt x="3474631" y="9982"/>
-                  <a:pt x="3474720" y="18288"/>
-                </a:cubicBezTo>
-                <a:cubicBezTo>
-                  <a:pt x="3324873" y="21876"/>
-                  <a:pt x="3136771" y="12587"/>
-                  <a:pt x="2814523" y="18288"/>
-                </a:cubicBezTo>
-                <a:cubicBezTo>
-                  <a:pt x="2492275" y="23989"/>
-                  <a:pt x="2294402" y="47111"/>
-                  <a:pt x="2154326" y="18288"/>
-                </a:cubicBezTo>
-                <a:cubicBezTo>
-                  <a:pt x="2014250" y="-10535"/>
-                  <a:pt x="1820317" y="33903"/>
-                  <a:pt x="1494130" y="18288"/>
-                </a:cubicBezTo>
-                <a:cubicBezTo>
-                  <a:pt x="1167943" y="2673"/>
-                  <a:pt x="948432" y="14868"/>
-                  <a:pt x="729691" y="18288"/>
-                </a:cubicBezTo>
-                <a:cubicBezTo>
-                  <a:pt x="510950" y="21708"/>
-                  <a:pt x="264032" y="24354"/>
-                  <a:pt x="0" y="18288"/>
-                </a:cubicBezTo>
-                <a:cubicBezTo>
-                  <a:pt x="189" y="14288"/>
-                  <a:pt x="-703" y="3747"/>
-                  <a:pt x="0" y="0"/>
-                </a:cubicBezTo>
-                <a:close/>
-              </a:path>
-            </a:pathLst>
-          </a:custGeom>
-          <a:solidFill>
-            <a:schemeClr val="accent2"/>
-          </a:solidFill>
-          <a:ln w="44450" cap="rnd">
-            <a:solidFill>
-              <a:schemeClr val="accent2"/>
-            </a:solidFill>
-            <a:round/>
-            <a:extLst>
-              <a:ext uri="{C807C97D-BFC1-408E-A445-0C87EB9F89A2}">
-                <ask:lineSketchStyleProps xmlns:ask="http://schemas.microsoft.com/office/drawing/2018/sketchyshapes" sd="2863741219">
-                  <a:prstGeom prst="rect">
-                    <a:avLst/>
-                  </a:prstGeom>
-                  <ask:type>
-                    <ask:lineSketchFreehand/>
-                  </ask:type>
-                </ask:lineSketchStyleProps>
-              </a:ext>
-            </a:extLst>
-          </a:ln>
-        </p:spPr>
-        <p:style>
-          <a:lnRef idx="2">
-            <a:schemeClr val="accent1">
-              <a:shade val="50000"/>
-            </a:schemeClr>
-          </a:lnRef>
-          <a:fillRef idx="1">
-            <a:schemeClr val="accent1"/>
-          </a:fillRef>
-          <a:effectRef idx="0">
-            <a:schemeClr val="accent1"/>
-          </a:effectRef>
-          <a:fontRef idx="minor">
-            <a:schemeClr val="lt1"/>
-          </a:fontRef>
-        </p:style>
-        <p:txBody>
-          <a:bodyPr rtlCol="0" anchor="ctr"/>
-          <a:lstStyle/>
-          <a:p>
-            <a:pPr algn="ctr"/>
-            <a:endParaRPr lang="en-US"/>
           </a:p>
         </p:txBody>
       </p:sp>
@@ -28700,7 +28519,7 @@
           <p:cNvPr id="3" name="Content Placeholder 2">
             <a:extLst>
               <a:ext uri="{FF2B5EF4-FFF2-40B4-BE49-F238E27FC236}">
-                <a16:creationId xmlns:a16="http://schemas.microsoft.com/office/drawing/2014/main" id="{34EAB591-DA80-BCEB-8C90-F9F3D3351555}"/>
+                <a16:creationId xmlns:a16="http://schemas.microsoft.com/office/drawing/2014/main" id="{94098027-C3D2-69D4-B0B2-C7F7C16333A3}"/>
               </a:ext>
             </a:extLst>
           </p:cNvPr>
@@ -28713,42 +28532,40 @@
         </p:nvSpPr>
         <p:spPr>
           <a:xfrm>
-            <a:off x="640080" y="2872899"/>
-            <a:ext cx="4243589" cy="3320668"/>
+            <a:off x="838200" y="1825625"/>
+            <a:ext cx="6192187" cy="4351338"/>
           </a:xfrm>
         </p:spPr>
         <p:txBody>
-          <a:bodyPr>
-            <a:normAutofit/>
-          </a:bodyPr>
+          <a:bodyPr/>
           <a:lstStyle/>
           <a:p>
             <a:r>
-              <a:rPr lang="en-US" sz="2000" dirty="0"/>
+              <a:rPr lang="en-US" dirty="0"/>
               <a:t>Take lots of power </a:t>
             </a:r>
           </a:p>
           <a:p>
             <a:r>
-              <a:rPr lang="en-US" sz="2000" dirty="0"/>
+              <a:rPr lang="en-US" dirty="0"/>
               <a:t>Lots of heat because tubes had an internal heater that helped release electrons from the cathode.</a:t>
             </a:r>
           </a:p>
           <a:p>
             <a:r>
-              <a:rPr lang="en-US" sz="2000" dirty="0"/>
+              <a:rPr lang="en-US" dirty="0"/>
               <a:t>Physically large</a:t>
             </a:r>
           </a:p>
           <a:p>
             <a:r>
-              <a:rPr lang="en-US" sz="2000" dirty="0"/>
+              <a:rPr lang="en-US" dirty="0"/>
               <a:t>Expensive to manufacture</a:t>
             </a:r>
           </a:p>
           <a:p>
             <a:r>
-              <a:rPr lang="en-US" sz="2000" dirty="0"/>
+              <a:rPr lang="en-US" dirty="0"/>
               <a:t>Soft electronic glow in the dark</a:t>
             </a:r>
           </a:p>
@@ -28756,10 +28573,10 @@
       </p:sp>
       <p:pic>
         <p:nvPicPr>
-          <p:cNvPr id="5" name="Picture 4" descr="A close-up of a vacum tube amplifier.  It has a beautiful bue and orange glow as it is in operation.">
+          <p:cNvPr id="4" name="Picture 3" descr="A close-up of a vacum tube amplifier.  It has a beautiful bue and orange glow as it is in operation.">
             <a:extLst>
               <a:ext uri="{FF2B5EF4-FFF2-40B4-BE49-F238E27FC236}">
-                <a16:creationId xmlns:a16="http://schemas.microsoft.com/office/drawing/2014/main" id="{C76B073A-4751-D6E1-E61B-01D3ED3EC0DF}"/>
+                <a16:creationId xmlns:a16="http://schemas.microsoft.com/office/drawing/2014/main" id="{B3C84D36-7A1D-0098-40B2-6125137F4B6B}"/>
               </a:ext>
             </a:extLst>
           </p:cNvPr>
@@ -28769,7 +28586,7 @@
           <p:nvPr/>
         </p:nvPicPr>
         <p:blipFill>
-          <a:blip r:embed="rId3"/>
+          <a:blip r:embed="rId2"/>
           <a:srcRect r="1" b="39185"/>
           <a:stretch>
             <a:fillRect/>
@@ -28777,8 +28594,8 @@
         </p:blipFill>
         <p:spPr>
           <a:xfrm>
-            <a:off x="5311702" y="10"/>
-            <a:ext cx="6878775" cy="6857990"/>
+            <a:off x="6430780" y="10"/>
+            <a:ext cx="5759697" cy="6857990"/>
           </a:xfrm>
           <a:custGeom>
             <a:avLst/>
@@ -28899,10 +28716,10 @@
       </p:pic>
       <p:sp>
         <p:nvSpPr>
-          <p:cNvPr id="7" name="TextBox 6">
+          <p:cNvPr id="5" name="TextBox 4">
             <a:extLst>
               <a:ext uri="{FF2B5EF4-FFF2-40B4-BE49-F238E27FC236}">
-                <a16:creationId xmlns:a16="http://schemas.microsoft.com/office/drawing/2014/main" id="{4BA2867E-D1C2-EC0F-8A28-FDC1FBEC1706}"/>
+                <a16:creationId xmlns:a16="http://schemas.microsoft.com/office/drawing/2014/main" id="{95236936-7945-CEAF-24A6-D48E5FBA64E9}"/>
               </a:ext>
             </a:extLst>
           </p:cNvPr>
@@ -28911,7 +28728,7 @@
         </p:nvSpPr>
         <p:spPr>
           <a:xfrm>
-            <a:off x="7738110" y="6008901"/>
+            <a:off x="7334719" y="5807631"/>
             <a:ext cx="4551426" cy="369332"/>
           </a:xfrm>
           <a:prstGeom prst="rect">
@@ -28973,7 +28790,7 @@
     </p:spTree>
     <p:extLst>
       <p:ext uri="{BB962C8B-B14F-4D97-AF65-F5344CB8AC3E}">
-        <p14:creationId xmlns:p14="http://schemas.microsoft.com/office/powerpoint/2010/main" val="1533246819"/>
+        <p14:creationId xmlns:p14="http://schemas.microsoft.com/office/powerpoint/2010/main" val="4171010778"/>
       </p:ext>
     </p:extLst>
   </p:cSld>
@@ -29197,6 +29014,42 @@
       </p:sp>
       <p:pic>
         <p:nvPicPr>
+          <p:cNvPr id="8" name="Picture 7" descr="The first transistor ever made, built by John Bardeen, William Shockley and Walter H. Brattain of Bell Labs in 1947. Original exhibited in Bell Laboratories.">
+            <a:extLst>
+              <a:ext uri="{FF2B5EF4-FFF2-40B4-BE49-F238E27FC236}">
+                <a16:creationId xmlns:a16="http://schemas.microsoft.com/office/drawing/2014/main" id="{BAF39423-326D-1485-A125-B2DF69AFE84B}"/>
+              </a:ext>
+            </a:extLst>
+          </p:cNvPr>
+          <p:cNvPicPr>
+            <a:picLocks noChangeAspect="1"/>
+          </p:cNvPicPr>
+          <p:nvPr/>
+        </p:nvPicPr>
+        <p:blipFill>
+          <a:blip r:embed="rId3" cstate="print">
+            <a:extLst>
+              <a:ext uri="{28A0092B-C50C-407E-A947-70E740481C1C}">
+                <a14:useLocalDpi xmlns:a14="http://schemas.microsoft.com/office/drawing/2010/main"/>
+              </a:ext>
+            </a:extLst>
+          </a:blip>
+          <a:stretch>
+            <a:fillRect/>
+          </a:stretch>
+        </p:blipFill>
+        <p:spPr>
+          <a:xfrm>
+            <a:off x="7946948" y="451540"/>
+            <a:ext cx="3200400" cy="2400300"/>
+          </a:xfrm>
+          <a:prstGeom prst="rect">
+            <a:avLst/>
+          </a:prstGeom>
+        </p:spPr>
+      </p:pic>
+      <p:pic>
+        <p:nvPicPr>
           <p:cNvPr id="5" name="Picture 4" descr="A few early manufactured transistors.  Each transistor has three inputs.">
             <a:extLst>
               <a:ext uri="{FF2B5EF4-FFF2-40B4-BE49-F238E27FC236}">
@@ -29210,7 +29063,7 @@
           <p:nvPr/>
         </p:nvPicPr>
         <p:blipFill>
-          <a:blip r:embed="rId2" cstate="print">
+          <a:blip r:embed="rId4" cstate="print">
             <a:extLst>
               <a:ext uri="{28A0092B-C50C-407E-A947-70E740481C1C}">
                 <a14:useLocalDpi xmlns:a14="http://schemas.microsoft.com/office/drawing/2010/main"/>
@@ -29290,42 +29143,6 @@
           </a:p>
         </p:txBody>
       </p:sp>
-      <p:pic>
-        <p:nvPicPr>
-          <p:cNvPr id="8" name="Picture 7" descr="The first transistor ever made, built by John Bardeen, William Shockley and Walter H. Brattain of Bell Labs in 1947. Original exhibited in Bell Laboratories.">
-            <a:extLst>
-              <a:ext uri="{FF2B5EF4-FFF2-40B4-BE49-F238E27FC236}">
-                <a16:creationId xmlns:a16="http://schemas.microsoft.com/office/drawing/2014/main" id="{BAF39423-326D-1485-A125-B2DF69AFE84B}"/>
-              </a:ext>
-            </a:extLst>
-          </p:cNvPr>
-          <p:cNvPicPr>
-            <a:picLocks noChangeAspect="1"/>
-          </p:cNvPicPr>
-          <p:nvPr/>
-        </p:nvPicPr>
-        <p:blipFill>
-          <a:blip r:embed="rId3" cstate="print">
-            <a:extLst>
-              <a:ext uri="{28A0092B-C50C-407E-A947-70E740481C1C}">
-                <a14:useLocalDpi xmlns:a14="http://schemas.microsoft.com/office/drawing/2010/main"/>
-              </a:ext>
-            </a:extLst>
-          </a:blip>
-          <a:stretch>
-            <a:fillRect/>
-          </a:stretch>
-        </p:blipFill>
-        <p:spPr>
-          <a:xfrm>
-            <a:off x="7946948" y="451540"/>
-            <a:ext cx="3200400" cy="2400300"/>
-          </a:xfrm>
-          <a:prstGeom prst="rect">
-            <a:avLst/>
-          </a:prstGeom>
-        </p:spPr>
-      </p:pic>
     </p:spTree>
     <p:extLst>
       <p:ext uri="{BB962C8B-B14F-4D97-AF65-F5344CB8AC3E}">

--- a/lectures/02-SolidState.pptx
+++ b/lectures/02-SolidState.pptx
@@ -228,7 +228,7 @@
           <a:p>
             <a:fld id="{1C74C8C0-0C1E-D447-A6DA-5BF9E732D1EF}" type="datetimeFigureOut">
               <a:rPr lang="en-US" smtClean="0"/>
-              <a:t>3/21/26</a:t>
+              <a:t>3/22/26</a:t>
             </a:fld>
             <a:endParaRPr lang="en-US"/>
           </a:p>
@@ -3375,7 +3375,7 @@
           <a:p>
             <a:fld id="{D5D8E255-8371-B349-B2F5-F8C6C9FF431B}" type="datetimeFigureOut">
               <a:rPr lang="en-US" smtClean="0"/>
-              <a:t>3/21/26</a:t>
+              <a:t>3/22/26</a:t>
             </a:fld>
             <a:endParaRPr lang="en-US"/>
           </a:p>
@@ -3573,7 +3573,7 @@
           <a:p>
             <a:fld id="{D5D8E255-8371-B349-B2F5-F8C6C9FF431B}" type="datetimeFigureOut">
               <a:rPr lang="en-US" smtClean="0"/>
-              <a:t>3/21/26</a:t>
+              <a:t>3/22/26</a:t>
             </a:fld>
             <a:endParaRPr lang="en-US"/>
           </a:p>
@@ -3781,7 +3781,7 @@
           <a:p>
             <a:fld id="{D5D8E255-8371-B349-B2F5-F8C6C9FF431B}" type="datetimeFigureOut">
               <a:rPr lang="en-US" smtClean="0"/>
-              <a:t>3/21/26</a:t>
+              <a:t>3/22/26</a:t>
             </a:fld>
             <a:endParaRPr lang="en-US"/>
           </a:p>
@@ -3979,7 +3979,7 @@
           <a:p>
             <a:fld id="{D5D8E255-8371-B349-B2F5-F8C6C9FF431B}" type="datetimeFigureOut">
               <a:rPr lang="en-US" smtClean="0"/>
-              <a:t>3/21/26</a:t>
+              <a:t>3/22/26</a:t>
             </a:fld>
             <a:endParaRPr lang="en-US"/>
           </a:p>
@@ -4254,7 +4254,7 @@
           <a:p>
             <a:fld id="{D5D8E255-8371-B349-B2F5-F8C6C9FF431B}" type="datetimeFigureOut">
               <a:rPr lang="en-US" smtClean="0"/>
-              <a:t>3/21/26</a:t>
+              <a:t>3/22/26</a:t>
             </a:fld>
             <a:endParaRPr lang="en-US"/>
           </a:p>
@@ -4519,7 +4519,7 @@
           <a:p>
             <a:fld id="{D5D8E255-8371-B349-B2F5-F8C6C9FF431B}" type="datetimeFigureOut">
               <a:rPr lang="en-US" smtClean="0"/>
-              <a:t>3/21/26</a:t>
+              <a:t>3/22/26</a:t>
             </a:fld>
             <a:endParaRPr lang="en-US"/>
           </a:p>
@@ -4931,7 +4931,7 @@
           <a:p>
             <a:fld id="{D5D8E255-8371-B349-B2F5-F8C6C9FF431B}" type="datetimeFigureOut">
               <a:rPr lang="en-US" smtClean="0"/>
-              <a:t>3/21/26</a:t>
+              <a:t>3/22/26</a:t>
             </a:fld>
             <a:endParaRPr lang="en-US"/>
           </a:p>
@@ -5072,7 +5072,7 @@
           <a:p>
             <a:fld id="{D5D8E255-8371-B349-B2F5-F8C6C9FF431B}" type="datetimeFigureOut">
               <a:rPr lang="en-US" smtClean="0"/>
-              <a:t>3/21/26</a:t>
+              <a:t>3/22/26</a:t>
             </a:fld>
             <a:endParaRPr lang="en-US"/>
           </a:p>
@@ -5185,7 +5185,7 @@
           <a:p>
             <a:fld id="{D5D8E255-8371-B349-B2F5-F8C6C9FF431B}" type="datetimeFigureOut">
               <a:rPr lang="en-US" smtClean="0"/>
-              <a:t>3/21/26</a:t>
+              <a:t>3/22/26</a:t>
             </a:fld>
             <a:endParaRPr lang="en-US"/>
           </a:p>
@@ -5496,7 +5496,7 @@
           <a:p>
             <a:fld id="{D5D8E255-8371-B349-B2F5-F8C6C9FF431B}" type="datetimeFigureOut">
               <a:rPr lang="en-US" smtClean="0"/>
-              <a:t>3/21/26</a:t>
+              <a:t>3/22/26</a:t>
             </a:fld>
             <a:endParaRPr lang="en-US"/>
           </a:p>
@@ -5784,7 +5784,7 @@
           <a:p>
             <a:fld id="{D5D8E255-8371-B349-B2F5-F8C6C9FF431B}" type="datetimeFigureOut">
               <a:rPr lang="en-US" smtClean="0"/>
-              <a:t>3/21/26</a:t>
+              <a:t>3/22/26</a:t>
             </a:fld>
             <a:endParaRPr lang="en-US"/>
           </a:p>
@@ -6025,7 +6025,7 @@
           <a:p>
             <a:fld id="{D5D8E255-8371-B349-B2F5-F8C6C9FF431B}" type="datetimeFigureOut">
               <a:rPr lang="en-US" smtClean="0"/>
-              <a:t>3/21/26</a:t>
+              <a:t>3/22/26</a:t>
             </a:fld>
             <a:endParaRPr lang="en-US"/>
           </a:p>
@@ -11801,57 +11801,6 @@
           </a:graphicData>
         </a:graphic>
       </p:graphicFrame>
-      <p:sp>
-        <p:nvSpPr>
-          <p:cNvPr id="4" name="TextBox 3">
-            <a:extLst>
-              <a:ext uri="{FF2B5EF4-FFF2-40B4-BE49-F238E27FC236}">
-                <a16:creationId xmlns:a16="http://schemas.microsoft.com/office/drawing/2014/main" id="{FC79DBCD-9B0A-5DAA-FF6C-944E0BC840A3}"/>
-              </a:ext>
-            </a:extLst>
-          </p:cNvPr>
-          <p:cNvSpPr txBox="1"/>
-          <p:nvPr/>
-        </p:nvSpPr>
-        <p:spPr>
-          <a:xfrm>
-            <a:off x="7483751" y="5496296"/>
-            <a:ext cx="4708250" cy="338554"/>
-          </a:xfrm>
-          <a:prstGeom prst="rect">
-            <a:avLst/>
-          </a:prstGeom>
-          <a:noFill/>
-        </p:spPr>
-        <p:txBody>
-          <a:bodyPr wrap="square">
-            <a:spAutoFit/>
-          </a:bodyPr>
-          <a:lstStyle/>
-          <a:p>
-            <a:r>
-              <a:rPr lang="en-US" sz="1600" dirty="0"/>
-              <a:t>https://</a:t>
-            </a:r>
-            <a:r>
-              <a:rPr lang="en-US" sz="1600" dirty="0" err="1"/>
-              <a:t>en.wikipedia.org</a:t>
-            </a:r>
-            <a:r>
-              <a:rPr lang="en-US" sz="1600" dirty="0"/>
-              <a:t>/wiki/Inverter_(</a:t>
-            </a:r>
-            <a:r>
-              <a:rPr lang="en-US" sz="1600" dirty="0" err="1"/>
-              <a:t>logic_gate</a:t>
-            </a:r>
-            <a:r>
-              <a:rPr lang="en-US" sz="1600" dirty="0"/>
-              <a:t>)</a:t>
-            </a:r>
-          </a:p>
-        </p:txBody>
-      </p:sp>
     </p:spTree>
     <p:extLst>
       <p:ext uri="{BB962C8B-B14F-4D97-AF65-F5344CB8AC3E}">
